--- a/teaching/CS472/Timetable/ClassOverview-V2.pptx
+++ b/teaching/CS472/Timetable/ClassOverview-V2.pptx
@@ -5,30 +5,29 @@
     <p:sldMasterId id="2147483648" r:id="rId1"/>
   </p:sldMasterIdLst>
   <p:notesMasterIdLst>
-    <p:notesMasterId r:id="rId23"/>
+    <p:notesMasterId r:id="rId22"/>
   </p:notesMasterIdLst>
   <p:sldIdLst>
     <p:sldId id="267" r:id="rId2"/>
     <p:sldId id="268" r:id="rId3"/>
     <p:sldId id="269" r:id="rId4"/>
     <p:sldId id="271" r:id="rId5"/>
-    <p:sldId id="313" r:id="rId6"/>
-    <p:sldId id="319" r:id="rId7"/>
-    <p:sldId id="256" r:id="rId8"/>
-    <p:sldId id="320" r:id="rId9"/>
-    <p:sldId id="321" r:id="rId10"/>
-    <p:sldId id="329" r:id="rId11"/>
-    <p:sldId id="330" r:id="rId12"/>
-    <p:sldId id="323" r:id="rId13"/>
-    <p:sldId id="324" r:id="rId14"/>
-    <p:sldId id="325" r:id="rId15"/>
-    <p:sldId id="326" r:id="rId16"/>
-    <p:sldId id="327" r:id="rId17"/>
-    <p:sldId id="328" r:id="rId18"/>
-    <p:sldId id="258" r:id="rId19"/>
-    <p:sldId id="305" r:id="rId20"/>
-    <p:sldId id="314" r:id="rId21"/>
-    <p:sldId id="309" r:id="rId22"/>
+    <p:sldId id="319" r:id="rId6"/>
+    <p:sldId id="256" r:id="rId7"/>
+    <p:sldId id="320" r:id="rId8"/>
+    <p:sldId id="321" r:id="rId9"/>
+    <p:sldId id="329" r:id="rId10"/>
+    <p:sldId id="330" r:id="rId11"/>
+    <p:sldId id="323" r:id="rId12"/>
+    <p:sldId id="324" r:id="rId13"/>
+    <p:sldId id="325" r:id="rId14"/>
+    <p:sldId id="326" r:id="rId15"/>
+    <p:sldId id="327" r:id="rId16"/>
+    <p:sldId id="328" r:id="rId17"/>
+    <p:sldId id="258" r:id="rId18"/>
+    <p:sldId id="305" r:id="rId19"/>
+    <p:sldId id="314" r:id="rId20"/>
+    <p:sldId id="309" r:id="rId21"/>
   </p:sldIdLst>
   <p:sldSz cx="12192000" cy="6858000"/>
   <p:notesSz cx="6858000" cy="9144000"/>
@@ -1587,7 +1586,7 @@
           <a:p>
             <a:fld id="{D5181410-5F61-C247-9B70-F663CDE0B230}" type="slidenum">
               <a:rPr lang="en-BE" smtClean="0"/>
-              <a:t>19</a:t>
+              <a:t>18</a:t>
             </a:fld>
             <a:endParaRPr lang="en-BE"/>
           </a:p>
@@ -5750,1255 +5749,6 @@
 </file>
 
 <file path=ppt/slides/slide10.xml><?xml version="1.0" encoding="utf-8"?>
-<p:sld xmlns:a="http://schemas.openxmlformats.org/drawingml/2006/main" xmlns:r="http://schemas.openxmlformats.org/officeDocument/2006/relationships" xmlns:p="http://schemas.openxmlformats.org/presentationml/2006/main">
-  <p:cSld>
-    <p:spTree>
-      <p:nvGrpSpPr>
-        <p:cNvPr id="1" name=""/>
-        <p:cNvGrpSpPr/>
-        <p:nvPr/>
-      </p:nvGrpSpPr>
-      <p:grpSpPr>
-        <a:xfrm>
-          <a:off x="0" y="0"/>
-          <a:ext cx="0" cy="0"/>
-          <a:chOff x="0" y="0"/>
-          <a:chExt cx="0" cy="0"/>
-        </a:xfrm>
-      </p:grpSpPr>
-      <p:sp>
-        <p:nvSpPr>
-          <p:cNvPr id="18" name="title">
-            <a:extLst>
-              <a:ext uri="{FF2B5EF4-FFF2-40B4-BE49-F238E27FC236}">
-                <a16:creationId xmlns:a16="http://schemas.microsoft.com/office/drawing/2014/main" id="{9BC9DEC9-9478-460C-ACDE-C32BDEF1EE5C}"/>
-              </a:ext>
-            </a:extLst>
-          </p:cNvPr>
-          <p:cNvSpPr>
-            <a:spLocks noGrp="1"/>
-          </p:cNvSpPr>
-          <p:nvPr/>
-        </p:nvSpPr>
-        <p:spPr>
-          <a:xfrm>
-            <a:off x="685800" y="361950"/>
-            <a:ext cx="10820400" cy="590550"/>
-          </a:xfrm>
-          <a:prstGeom prst="rect">
-            <a:avLst/>
-          </a:prstGeom>
-          <a:noFill/>
-          <a:ln w="0">
-            <a:noFill/>
-            <a:prstDash val="solid"/>
-          </a:ln>
-        </p:spPr>
-        <p:txBody>
-          <a:bodyPr/>
-          <a:lstStyle/>
-          <a:p>
-            <a:pPr algn="l">
-              <a:defRPr sz="2400" b="1">
-                <a:solidFill>
-                  <a:srgbClr val="1F4E79"/>
-                </a:solidFill>
-              </a:defRPr>
-            </a:pPr>
-            <a:r>
-              <a:rPr sz="3200" b="1" dirty="0">
-                <a:solidFill>
-                  <a:srgbClr val="1F4E79"/>
-                </a:solidFill>
-              </a:rPr>
-              <a:t>What Is a Minimum Viable Product?</a:t>
-            </a:r>
-          </a:p>
-        </p:txBody>
-      </p:sp>
-      <p:sp>
-        <p:nvSpPr>
-          <p:cNvPr id="2" name="definition-band">
-            <a:extLst>
-              <a:ext uri="{FF2B5EF4-FFF2-40B4-BE49-F238E27FC236}">
-                <a16:creationId xmlns:a16="http://schemas.microsoft.com/office/drawing/2014/main" id="{53EA5FB2-4583-4A85-92F7-976E8E9B311D}"/>
-              </a:ext>
-            </a:extLst>
-          </p:cNvPr>
-          <p:cNvSpPr>
-            <a:spLocks noGrp="1"/>
-          </p:cNvSpPr>
-          <p:nvPr/>
-        </p:nvSpPr>
-        <p:spPr>
-          <a:xfrm>
-            <a:off x="685800" y="1143000"/>
-            <a:ext cx="10820400" cy="1000125"/>
-          </a:xfrm>
-          <a:prstGeom prst="roundRect">
-            <a:avLst>
-              <a:gd name="adj" fmla="val 7619"/>
-            </a:avLst>
-          </a:prstGeom>
-          <a:solidFill>
-            <a:srgbClr val="EAF2F8"/>
-          </a:solidFill>
-          <a:ln w="9525">
-            <a:solidFill>
-              <a:srgbClr val="C9DDEA"/>
-            </a:solidFill>
-            <a:prstDash val="solid"/>
-          </a:ln>
-        </p:spPr>
-        <p:txBody>
-          <a:bodyPr/>
-          <a:lstStyle/>
-          <a:p>
-            <a:endParaRPr lang="en-US"/>
-          </a:p>
-        </p:txBody>
-      </p:sp>
-      <p:sp>
-        <p:nvSpPr>
-          <p:cNvPr id="3" name="definition">
-            <a:extLst>
-              <a:ext uri="{FF2B5EF4-FFF2-40B4-BE49-F238E27FC236}">
-                <a16:creationId xmlns:a16="http://schemas.microsoft.com/office/drawing/2014/main" id="{824DE913-16CA-4534-AF07-663E4CCEBB7A}"/>
-              </a:ext>
-            </a:extLst>
-          </p:cNvPr>
-          <p:cNvSpPr>
-            <a:spLocks noGrp="1"/>
-          </p:cNvSpPr>
-          <p:nvPr/>
-        </p:nvSpPr>
-        <p:spPr>
-          <a:xfrm>
-            <a:off x="865414" y="1400175"/>
-            <a:ext cx="10319657" cy="533400"/>
-          </a:xfrm>
-          <a:prstGeom prst="rect">
-            <a:avLst/>
-          </a:prstGeom>
-          <a:noFill/>
-          <a:ln w="0">
-            <a:noFill/>
-            <a:prstDash val="solid"/>
-          </a:ln>
-        </p:spPr>
-        <p:txBody>
-          <a:bodyPr/>
-          <a:lstStyle/>
-          <a:p>
-            <a:pPr algn="ctr">
-              <a:defRPr sz="1800" b="1">
-                <a:solidFill>
-                  <a:srgbClr val="1F4E79"/>
-                </a:solidFill>
-              </a:defRPr>
-            </a:pPr>
-            <a:r>
-              <a:rPr sz="2000" b="1" dirty="0">
-                <a:solidFill>
-                  <a:srgbClr val="1F4E79"/>
-                </a:solidFill>
-              </a:rPr>
-              <a:t>The smallest usable version that addresses a core user need and can be meaningfully evaluated.</a:t>
-            </a:r>
-          </a:p>
-        </p:txBody>
-      </p:sp>
-      <p:sp>
-        <p:nvSpPr>
-          <p:cNvPr id="4" name="criterion-value-tile">
-            <a:extLst>
-              <a:ext uri="{FF2B5EF4-FFF2-40B4-BE49-F238E27FC236}">
-                <a16:creationId xmlns:a16="http://schemas.microsoft.com/office/drawing/2014/main" id="{C7441B7A-E196-4AC6-B069-16F2E229ACFF}"/>
-              </a:ext>
-            </a:extLst>
-          </p:cNvPr>
-          <p:cNvSpPr>
-            <a:spLocks noGrp="1"/>
-          </p:cNvSpPr>
-          <p:nvPr/>
-        </p:nvSpPr>
-        <p:spPr>
-          <a:xfrm>
-            <a:off x="1695450" y="2714625"/>
-            <a:ext cx="990600" cy="876300"/>
-          </a:xfrm>
-          <a:prstGeom prst="roundRect">
-            <a:avLst>
-              <a:gd name="adj" fmla="val 8696"/>
-            </a:avLst>
-          </a:prstGeom>
-          <a:solidFill>
-            <a:srgbClr val="FFFFFF"/>
-          </a:solidFill>
-          <a:ln w="19050">
-            <a:solidFill>
-              <a:srgbClr val="1F4E79"/>
-            </a:solidFill>
-            <a:prstDash val="solid"/>
-          </a:ln>
-        </p:spPr>
-        <p:txBody>
-          <a:bodyPr/>
-          <a:lstStyle/>
-          <a:p>
-            <a:endParaRPr lang="en-US"/>
-          </a:p>
-        </p:txBody>
-      </p:sp>
-      <p:pic>
-        <p:nvPicPr>
-          <p:cNvPr id="22" name="Picture 21"/>
-          <p:cNvPicPr>
-            <a:picLocks noChangeAspect="1"/>
-          </p:cNvPicPr>
-          <p:nvPr/>
-        </p:nvPicPr>
-        <p:blipFill>
-          <a:blip r:embed="rId3"/>
-          <a:stretch/>
-        </p:blipFill>
-        <p:spPr>
-          <a:xfrm>
-            <a:off x="1800225" y="2865859"/>
-            <a:ext cx="781050" cy="573833"/>
-          </a:xfrm>
-          <a:prstGeom prst="rect">
-            <a:avLst/>
-          </a:prstGeom>
-        </p:spPr>
-      </p:pic>
-      <p:sp>
-        <p:nvSpPr>
-          <p:cNvPr id="6" name="criterion-heading-value">
-            <a:extLst>
-              <a:ext uri="{FF2B5EF4-FFF2-40B4-BE49-F238E27FC236}">
-                <a16:creationId xmlns:a16="http://schemas.microsoft.com/office/drawing/2014/main" id="{F7921666-DDC3-46D6-8C52-969234E18E3C}"/>
-              </a:ext>
-            </a:extLst>
-          </p:cNvPr>
-          <p:cNvSpPr>
-            <a:spLocks noGrp="1"/>
-          </p:cNvSpPr>
-          <p:nvPr/>
-        </p:nvSpPr>
-        <p:spPr>
-          <a:xfrm>
-            <a:off x="619125" y="3857625"/>
-            <a:ext cx="3143250" cy="342900"/>
-          </a:xfrm>
-          <a:prstGeom prst="rect">
-            <a:avLst/>
-          </a:prstGeom>
-          <a:noFill/>
-          <a:ln w="0">
-            <a:noFill/>
-            <a:prstDash val="solid"/>
-          </a:ln>
-        </p:spPr>
-        <p:txBody>
-          <a:bodyPr/>
-          <a:lstStyle/>
-          <a:p>
-            <a:pPr algn="ctr">
-              <a:defRPr sz="1800" b="1">
-                <a:solidFill>
-                  <a:srgbClr val="1F4E79"/>
-                </a:solidFill>
-              </a:defRPr>
-            </a:pPr>
-            <a:r>
-              <a:rPr sz="1800" b="1">
-                <a:solidFill>
-                  <a:srgbClr val="1F4E79"/>
-                </a:solidFill>
-              </a:rPr>
-              <a:t>VALUABLE</a:t>
-            </a:r>
-          </a:p>
-        </p:txBody>
-      </p:sp>
-      <p:sp>
-        <p:nvSpPr>
-          <p:cNvPr id="7" name="criterion-body-value">
-            <a:extLst>
-              <a:ext uri="{FF2B5EF4-FFF2-40B4-BE49-F238E27FC236}">
-                <a16:creationId xmlns:a16="http://schemas.microsoft.com/office/drawing/2014/main" id="{E36CCE72-B0B9-4B2C-8BBC-5F66F03580B1}"/>
-              </a:ext>
-            </a:extLst>
-          </p:cNvPr>
-          <p:cNvSpPr>
-            <a:spLocks noGrp="1"/>
-          </p:cNvSpPr>
-          <p:nvPr/>
-        </p:nvSpPr>
-        <p:spPr>
-          <a:xfrm>
-            <a:off x="523875" y="4295775"/>
-            <a:ext cx="3333750" cy="628650"/>
-          </a:xfrm>
-          <a:prstGeom prst="rect">
-            <a:avLst/>
-          </a:prstGeom>
-          <a:noFill/>
-          <a:ln w="0">
-            <a:noFill/>
-            <a:prstDash val="solid"/>
-          </a:ln>
-        </p:spPr>
-        <p:txBody>
-          <a:bodyPr/>
-          <a:lstStyle/>
-          <a:p>
-            <a:pPr algn="ctr">
-              <a:defRPr sz="1500">
-                <a:solidFill>
-                  <a:srgbClr val="000000"/>
-                </a:solidFill>
-              </a:defRPr>
-            </a:pPr>
-            <a:r>
-              <a:rPr sz="2000" dirty="0">
-                <a:solidFill>
-                  <a:srgbClr val="000000"/>
-                </a:solidFill>
-              </a:rPr>
-              <a:t>Addresses an important user need.</a:t>
-            </a:r>
-          </a:p>
-        </p:txBody>
-      </p:sp>
-      <p:sp>
-        <p:nvSpPr>
-          <p:cNvPr id="8" name="criterion-usable-tile">
-            <a:extLst>
-              <a:ext uri="{FF2B5EF4-FFF2-40B4-BE49-F238E27FC236}">
-                <a16:creationId xmlns:a16="http://schemas.microsoft.com/office/drawing/2014/main" id="{7C3A3B15-2E83-4507-85F1-337288311D4F}"/>
-              </a:ext>
-            </a:extLst>
-          </p:cNvPr>
-          <p:cNvSpPr>
-            <a:spLocks noGrp="1"/>
-          </p:cNvSpPr>
-          <p:nvPr/>
-        </p:nvSpPr>
-        <p:spPr>
-          <a:xfrm>
-            <a:off x="5600700" y="2714625"/>
-            <a:ext cx="990600" cy="876300"/>
-          </a:xfrm>
-          <a:prstGeom prst="roundRect">
-            <a:avLst>
-              <a:gd name="adj" fmla="val 8696"/>
-            </a:avLst>
-          </a:prstGeom>
-          <a:solidFill>
-            <a:srgbClr val="FFFFFF"/>
-          </a:solidFill>
-          <a:ln w="19050">
-            <a:solidFill>
-              <a:srgbClr val="008C95"/>
-            </a:solidFill>
-            <a:prstDash val="solid"/>
-          </a:ln>
-        </p:spPr>
-        <p:txBody>
-          <a:bodyPr/>
-          <a:lstStyle/>
-          <a:p>
-            <a:endParaRPr lang="en-US"/>
-          </a:p>
-        </p:txBody>
-      </p:sp>
-      <p:pic>
-        <p:nvPicPr>
-          <p:cNvPr id="26" name="Picture 25"/>
-          <p:cNvPicPr>
-            <a:picLocks noChangeAspect="1"/>
-          </p:cNvPicPr>
-          <p:nvPr/>
-        </p:nvPicPr>
-        <p:blipFill>
-          <a:blip r:embed="rId4"/>
-          <a:stretch/>
-        </p:blipFill>
-        <p:spPr>
-          <a:xfrm>
-            <a:off x="5753100" y="2809875"/>
-            <a:ext cx="685800" cy="685800"/>
-          </a:xfrm>
-          <a:prstGeom prst="rect">
-            <a:avLst/>
-          </a:prstGeom>
-        </p:spPr>
-      </p:pic>
-      <p:sp>
-        <p:nvSpPr>
-          <p:cNvPr id="10" name="criterion-heading-usable">
-            <a:extLst>
-              <a:ext uri="{FF2B5EF4-FFF2-40B4-BE49-F238E27FC236}">
-                <a16:creationId xmlns:a16="http://schemas.microsoft.com/office/drawing/2014/main" id="{EEE221E1-59B0-4EDE-936A-E39A4651A1E2}"/>
-              </a:ext>
-            </a:extLst>
-          </p:cNvPr>
-          <p:cNvSpPr>
-            <a:spLocks noGrp="1"/>
-          </p:cNvSpPr>
-          <p:nvPr/>
-        </p:nvSpPr>
-        <p:spPr>
-          <a:xfrm>
-            <a:off x="4524375" y="3857625"/>
-            <a:ext cx="3143250" cy="342900"/>
-          </a:xfrm>
-          <a:prstGeom prst="rect">
-            <a:avLst/>
-          </a:prstGeom>
-          <a:noFill/>
-          <a:ln w="0">
-            <a:noFill/>
-            <a:prstDash val="solid"/>
-          </a:ln>
-        </p:spPr>
-        <p:txBody>
-          <a:bodyPr/>
-          <a:lstStyle/>
-          <a:p>
-            <a:pPr algn="ctr">
-              <a:defRPr sz="1800" b="1">
-                <a:solidFill>
-                  <a:srgbClr val="008C95"/>
-                </a:solidFill>
-              </a:defRPr>
-            </a:pPr>
-            <a:r>
-              <a:rPr sz="1800" b="1">
-                <a:solidFill>
-                  <a:srgbClr val="008C95"/>
-                </a:solidFill>
-              </a:rPr>
-              <a:t>USABLE</a:t>
-            </a:r>
-          </a:p>
-        </p:txBody>
-      </p:sp>
-      <p:sp>
-        <p:nvSpPr>
-          <p:cNvPr id="11" name="criterion-body-usable">
-            <a:extLst>
-              <a:ext uri="{FF2B5EF4-FFF2-40B4-BE49-F238E27FC236}">
-                <a16:creationId xmlns:a16="http://schemas.microsoft.com/office/drawing/2014/main" id="{2F264A01-CE10-4FDE-BE60-AFED3A68DD61}"/>
-              </a:ext>
-            </a:extLst>
-          </p:cNvPr>
-          <p:cNvSpPr>
-            <a:spLocks noGrp="1"/>
-          </p:cNvSpPr>
-          <p:nvPr/>
-        </p:nvSpPr>
-        <p:spPr>
-          <a:xfrm>
-            <a:off x="4429125" y="4295775"/>
-            <a:ext cx="3333750" cy="628650"/>
-          </a:xfrm>
-          <a:prstGeom prst="rect">
-            <a:avLst/>
-          </a:prstGeom>
-          <a:noFill/>
-          <a:ln w="0">
-            <a:noFill/>
-            <a:prstDash val="solid"/>
-          </a:ln>
-        </p:spPr>
-        <p:txBody>
-          <a:bodyPr/>
-          <a:lstStyle/>
-          <a:p>
-            <a:pPr algn="ctr">
-              <a:defRPr sz="1500">
-                <a:solidFill>
-                  <a:srgbClr val="000000"/>
-                </a:solidFill>
-              </a:defRPr>
-            </a:pPr>
-            <a:r>
-              <a:rPr sz="2000" dirty="0">
-                <a:solidFill>
-                  <a:srgbClr val="000000"/>
-                </a:solidFill>
-              </a:rPr>
-              <a:t>Works as an integrated, end-to-end solution.</a:t>
-            </a:r>
-          </a:p>
-        </p:txBody>
-      </p:sp>
-      <p:sp>
-        <p:nvSpPr>
-          <p:cNvPr id="12" name="criterion-testable-tile">
-            <a:extLst>
-              <a:ext uri="{FF2B5EF4-FFF2-40B4-BE49-F238E27FC236}">
-                <a16:creationId xmlns:a16="http://schemas.microsoft.com/office/drawing/2014/main" id="{00255A37-4990-4734-93A1-BD1A4694A573}"/>
-              </a:ext>
-            </a:extLst>
-          </p:cNvPr>
-          <p:cNvSpPr>
-            <a:spLocks noGrp="1"/>
-          </p:cNvSpPr>
-          <p:nvPr/>
-        </p:nvSpPr>
-        <p:spPr>
-          <a:xfrm>
-            <a:off x="9505950" y="2714625"/>
-            <a:ext cx="990600" cy="876300"/>
-          </a:xfrm>
-          <a:prstGeom prst="roundRect">
-            <a:avLst>
-              <a:gd name="adj" fmla="val 8696"/>
-            </a:avLst>
-          </a:prstGeom>
-          <a:solidFill>
-            <a:srgbClr val="FFFFFF"/>
-          </a:solidFill>
-          <a:ln w="19050">
-            <a:solidFill>
-              <a:srgbClr val="6B5B95"/>
-            </a:solidFill>
-            <a:prstDash val="solid"/>
-          </a:ln>
-        </p:spPr>
-        <p:txBody>
-          <a:bodyPr/>
-          <a:lstStyle/>
-          <a:p>
-            <a:endParaRPr lang="en-US"/>
-          </a:p>
-        </p:txBody>
-      </p:sp>
-      <p:pic>
-        <p:nvPicPr>
-          <p:cNvPr id="30" name="Picture 29"/>
-          <p:cNvPicPr>
-            <a:picLocks noChangeAspect="1"/>
-          </p:cNvPicPr>
-          <p:nvPr/>
-        </p:nvPicPr>
-        <p:blipFill>
-          <a:blip r:embed="rId5"/>
-          <a:stretch/>
-        </p:blipFill>
-        <p:spPr>
-          <a:xfrm>
-            <a:off x="9658350" y="2809875"/>
-            <a:ext cx="685800" cy="685800"/>
-          </a:xfrm>
-          <a:prstGeom prst="rect">
-            <a:avLst/>
-          </a:prstGeom>
-        </p:spPr>
-      </p:pic>
-      <p:sp>
-        <p:nvSpPr>
-          <p:cNvPr id="14" name="criterion-heading-testable">
-            <a:extLst>
-              <a:ext uri="{FF2B5EF4-FFF2-40B4-BE49-F238E27FC236}">
-                <a16:creationId xmlns:a16="http://schemas.microsoft.com/office/drawing/2014/main" id="{21CFE0C1-60EF-455B-B6F2-202C477199EF}"/>
-              </a:ext>
-            </a:extLst>
-          </p:cNvPr>
-          <p:cNvSpPr>
-            <a:spLocks noGrp="1"/>
-          </p:cNvSpPr>
-          <p:nvPr/>
-        </p:nvSpPr>
-        <p:spPr>
-          <a:xfrm>
-            <a:off x="8429625" y="3857625"/>
-            <a:ext cx="3143250" cy="342900"/>
-          </a:xfrm>
-          <a:prstGeom prst="rect">
-            <a:avLst/>
-          </a:prstGeom>
-          <a:noFill/>
-          <a:ln w="0">
-            <a:noFill/>
-            <a:prstDash val="solid"/>
-          </a:ln>
-        </p:spPr>
-        <p:txBody>
-          <a:bodyPr/>
-          <a:lstStyle/>
-          <a:p>
-            <a:pPr algn="ctr">
-              <a:defRPr sz="1800" b="1">
-                <a:solidFill>
-                  <a:srgbClr val="6B5B95"/>
-                </a:solidFill>
-              </a:defRPr>
-            </a:pPr>
-            <a:r>
-              <a:rPr sz="1800" b="1">
-                <a:solidFill>
-                  <a:srgbClr val="6B5B95"/>
-                </a:solidFill>
-              </a:rPr>
-              <a:t>TESTABLE</a:t>
-            </a:r>
-          </a:p>
-        </p:txBody>
-      </p:sp>
-      <p:sp>
-        <p:nvSpPr>
-          <p:cNvPr id="15" name="criterion-body-testable">
-            <a:extLst>
-              <a:ext uri="{FF2B5EF4-FFF2-40B4-BE49-F238E27FC236}">
-                <a16:creationId xmlns:a16="http://schemas.microsoft.com/office/drawing/2014/main" id="{465FFBF5-85A3-470F-946B-B90F00BBE6AE}"/>
-              </a:ext>
-            </a:extLst>
-          </p:cNvPr>
-          <p:cNvSpPr>
-            <a:spLocks noGrp="1"/>
-          </p:cNvSpPr>
-          <p:nvPr/>
-        </p:nvSpPr>
-        <p:spPr>
-          <a:xfrm>
-            <a:off x="8334375" y="4295775"/>
-            <a:ext cx="3333750" cy="628650"/>
-          </a:xfrm>
-          <a:prstGeom prst="rect">
-            <a:avLst/>
-          </a:prstGeom>
-          <a:noFill/>
-          <a:ln w="0">
-            <a:noFill/>
-            <a:prstDash val="solid"/>
-          </a:ln>
-        </p:spPr>
-        <p:txBody>
-          <a:bodyPr/>
-          <a:lstStyle/>
-          <a:p>
-            <a:pPr algn="ctr">
-              <a:defRPr sz="1500">
-                <a:solidFill>
-                  <a:srgbClr val="000000"/>
-                </a:solidFill>
-              </a:defRPr>
-            </a:pPr>
-            <a:r>
-              <a:rPr sz="2000" dirty="0">
-                <a:solidFill>
-                  <a:srgbClr val="000000"/>
-                </a:solidFill>
-              </a:rPr>
-              <a:t>Produces evidence and feedback for improvement.</a:t>
-            </a:r>
-          </a:p>
-        </p:txBody>
-      </p:sp>
-      <p:sp>
-        <p:nvSpPr>
-          <p:cNvPr id="16" name="quality-band">
-            <a:extLst>
-              <a:ext uri="{FF2B5EF4-FFF2-40B4-BE49-F238E27FC236}">
-                <a16:creationId xmlns:a16="http://schemas.microsoft.com/office/drawing/2014/main" id="{6900996A-C2B9-40E1-A915-6160EC79890F}"/>
-              </a:ext>
-            </a:extLst>
-          </p:cNvPr>
-          <p:cNvSpPr>
-            <a:spLocks noGrp="1"/>
-          </p:cNvSpPr>
-          <p:nvPr/>
-        </p:nvSpPr>
-        <p:spPr>
-          <a:xfrm>
-            <a:off x="2667000" y="5391150"/>
-            <a:ext cx="6858000" cy="666750"/>
-          </a:xfrm>
-          <a:prstGeom prst="roundRect">
-            <a:avLst>
-              <a:gd name="adj" fmla="val 11429"/>
-            </a:avLst>
-          </a:prstGeom>
-          <a:solidFill>
-            <a:srgbClr val="FFF2E8"/>
-          </a:solidFill>
-          <a:ln w="9525">
-            <a:solidFill>
-              <a:srgbClr val="F0C7A7"/>
-            </a:solidFill>
-            <a:prstDash val="solid"/>
-          </a:ln>
-        </p:spPr>
-        <p:txBody>
-          <a:bodyPr/>
-          <a:lstStyle/>
-          <a:p>
-            <a:endParaRPr lang="en-US"/>
-          </a:p>
-        </p:txBody>
-      </p:sp>
-      <p:sp>
-        <p:nvSpPr>
-          <p:cNvPr id="17" name="quality-takeaway">
-            <a:extLst>
-              <a:ext uri="{FF2B5EF4-FFF2-40B4-BE49-F238E27FC236}">
-                <a16:creationId xmlns:a16="http://schemas.microsoft.com/office/drawing/2014/main" id="{BFE2EC88-2F9C-4F52-A027-C7F3CE9DF7AC}"/>
-              </a:ext>
-            </a:extLst>
-          </p:cNvPr>
-          <p:cNvSpPr>
-            <a:spLocks noGrp="1"/>
-          </p:cNvSpPr>
-          <p:nvPr/>
-        </p:nvSpPr>
-        <p:spPr>
-          <a:xfrm>
-            <a:off x="3000375" y="5581650"/>
-            <a:ext cx="6191250" cy="342900"/>
-          </a:xfrm>
-          <a:prstGeom prst="rect">
-            <a:avLst/>
-          </a:prstGeom>
-          <a:noFill/>
-          <a:ln w="0">
-            <a:noFill/>
-            <a:prstDash val="solid"/>
-          </a:ln>
-        </p:spPr>
-        <p:txBody>
-          <a:bodyPr/>
-          <a:lstStyle/>
-          <a:p>
-            <a:pPr algn="ctr">
-              <a:defRPr sz="1800" b="1">
-                <a:solidFill>
-                  <a:srgbClr val="C55A11"/>
-                </a:solidFill>
-              </a:defRPr>
-            </a:pPr>
-            <a:r>
-              <a:rPr sz="2000" b="1" dirty="0">
-                <a:solidFill>
-                  <a:srgbClr val="C55A11"/>
-                </a:solidFill>
-              </a:rPr>
-              <a:t>Minimum scope—not minimum quality.</a:t>
-            </a:r>
-          </a:p>
-        </p:txBody>
-      </p:sp>
-    </p:spTree>
-    <p:extLst>
-      <p:ext uri="{BB962C8B-B14F-4D97-AF65-F5344CB8AC3E}">
-        <p14:creationId xmlns:p14="http://schemas.microsoft.com/office/powerpoint/2010/main" val="1650864483"/>
-      </p:ext>
-    </p:extLst>
-  </p:cSld>
-  <p:clrMapOvr>
-    <a:masterClrMapping/>
-  </p:clrMapOvr>
-  <p:timing>
-    <p:tnLst>
-      <p:par>
-        <p:cTn id="1" dur="indefinite" restart="never" nodeType="tmRoot">
-          <p:childTnLst>
-            <p:seq concurrent="1" nextAc="seek">
-              <p:cTn id="2" dur="indefinite" nodeType="mainSeq">
-                <p:childTnLst>
-                  <p:par>
-                    <p:cTn id="3" fill="hold">
-                      <p:stCondLst>
-                        <p:cond delay="indefinite"/>
-                      </p:stCondLst>
-                      <p:childTnLst>
-                        <p:par>
-                          <p:cTn id="4" fill="hold">
-                            <p:stCondLst>
-                              <p:cond delay="0"/>
-                            </p:stCondLst>
-                            <p:childTnLst>
-                              <p:par>
-                                <p:cTn id="5" presetID="1" presetClass="entr" presetSubtype="0" fill="hold" grpId="0" nodeType="clickEffect">
-                                  <p:stCondLst>
-                                    <p:cond delay="0"/>
-                                  </p:stCondLst>
-                                  <p:childTnLst>
-                                    <p:set>
-                                      <p:cBhvr>
-                                        <p:cTn id="6" dur="1" fill="hold">
-                                          <p:stCondLst>
-                                            <p:cond delay="0"/>
-                                          </p:stCondLst>
-                                        </p:cTn>
-                                        <p:tgtEl>
-                                          <p:spTgt spid="4"/>
-                                        </p:tgtEl>
-                                        <p:attrNameLst>
-                                          <p:attrName>style.visibility</p:attrName>
-                                        </p:attrNameLst>
-                                      </p:cBhvr>
-                                      <p:to>
-                                        <p:strVal val="visible"/>
-                                      </p:to>
-                                    </p:set>
-                                  </p:childTnLst>
-                                </p:cTn>
-                              </p:par>
-                              <p:par>
-                                <p:cTn id="7" presetID="1" presetClass="entr" presetSubtype="0" fill="hold" nodeType="withEffect">
-                                  <p:stCondLst>
-                                    <p:cond delay="0"/>
-                                  </p:stCondLst>
-                                  <p:childTnLst>
-                                    <p:set>
-                                      <p:cBhvr>
-                                        <p:cTn id="8" dur="1" fill="hold">
-                                          <p:stCondLst>
-                                            <p:cond delay="0"/>
-                                          </p:stCondLst>
-                                        </p:cTn>
-                                        <p:tgtEl>
-                                          <p:spTgt spid="22"/>
-                                        </p:tgtEl>
-                                        <p:attrNameLst>
-                                          <p:attrName>style.visibility</p:attrName>
-                                        </p:attrNameLst>
-                                      </p:cBhvr>
-                                      <p:to>
-                                        <p:strVal val="visible"/>
-                                      </p:to>
-                                    </p:set>
-                                  </p:childTnLst>
-                                </p:cTn>
-                              </p:par>
-                              <p:par>
-                                <p:cTn id="9" presetID="1" presetClass="entr" presetSubtype="0" fill="hold" grpId="0" nodeType="withEffect">
-                                  <p:stCondLst>
-                                    <p:cond delay="0"/>
-                                  </p:stCondLst>
-                                  <p:childTnLst>
-                                    <p:set>
-                                      <p:cBhvr>
-                                        <p:cTn id="10" dur="1" fill="hold">
-                                          <p:stCondLst>
-                                            <p:cond delay="0"/>
-                                          </p:stCondLst>
-                                        </p:cTn>
-                                        <p:tgtEl>
-                                          <p:spTgt spid="6"/>
-                                        </p:tgtEl>
-                                        <p:attrNameLst>
-                                          <p:attrName>style.visibility</p:attrName>
-                                        </p:attrNameLst>
-                                      </p:cBhvr>
-                                      <p:to>
-                                        <p:strVal val="visible"/>
-                                      </p:to>
-                                    </p:set>
-                                  </p:childTnLst>
-                                </p:cTn>
-                              </p:par>
-                              <p:par>
-                                <p:cTn id="11" presetID="1" presetClass="entr" presetSubtype="0" fill="hold" grpId="0" nodeType="withEffect">
-                                  <p:stCondLst>
-                                    <p:cond delay="0"/>
-                                  </p:stCondLst>
-                                  <p:childTnLst>
-                                    <p:set>
-                                      <p:cBhvr>
-                                        <p:cTn id="12" dur="1" fill="hold">
-                                          <p:stCondLst>
-                                            <p:cond delay="0"/>
-                                          </p:stCondLst>
-                                        </p:cTn>
-                                        <p:tgtEl>
-                                          <p:spTgt spid="7"/>
-                                        </p:tgtEl>
-                                        <p:attrNameLst>
-                                          <p:attrName>style.visibility</p:attrName>
-                                        </p:attrNameLst>
-                                      </p:cBhvr>
-                                      <p:to>
-                                        <p:strVal val="visible"/>
-                                      </p:to>
-                                    </p:set>
-                                  </p:childTnLst>
-                                </p:cTn>
-                              </p:par>
-                            </p:childTnLst>
-                          </p:cTn>
-                        </p:par>
-                      </p:childTnLst>
-                    </p:cTn>
-                  </p:par>
-                  <p:par>
-                    <p:cTn id="13" fill="hold">
-                      <p:stCondLst>
-                        <p:cond delay="indefinite"/>
-                      </p:stCondLst>
-                      <p:childTnLst>
-                        <p:par>
-                          <p:cTn id="14" fill="hold">
-                            <p:stCondLst>
-                              <p:cond delay="0"/>
-                            </p:stCondLst>
-                            <p:childTnLst>
-                              <p:par>
-                                <p:cTn id="15" presetID="1" presetClass="entr" presetSubtype="0" fill="hold" grpId="0" nodeType="clickEffect">
-                                  <p:stCondLst>
-                                    <p:cond delay="0"/>
-                                  </p:stCondLst>
-                                  <p:childTnLst>
-                                    <p:set>
-                                      <p:cBhvr>
-                                        <p:cTn id="16" dur="1" fill="hold">
-                                          <p:stCondLst>
-                                            <p:cond delay="0"/>
-                                          </p:stCondLst>
-                                        </p:cTn>
-                                        <p:tgtEl>
-                                          <p:spTgt spid="8"/>
-                                        </p:tgtEl>
-                                        <p:attrNameLst>
-                                          <p:attrName>style.visibility</p:attrName>
-                                        </p:attrNameLst>
-                                      </p:cBhvr>
-                                      <p:to>
-                                        <p:strVal val="visible"/>
-                                      </p:to>
-                                    </p:set>
-                                  </p:childTnLst>
-                                </p:cTn>
-                              </p:par>
-                              <p:par>
-                                <p:cTn id="17" presetID="1" presetClass="entr" presetSubtype="0" fill="hold" nodeType="withEffect">
-                                  <p:stCondLst>
-                                    <p:cond delay="0"/>
-                                  </p:stCondLst>
-                                  <p:childTnLst>
-                                    <p:set>
-                                      <p:cBhvr>
-                                        <p:cTn id="18" dur="1" fill="hold">
-                                          <p:stCondLst>
-                                            <p:cond delay="0"/>
-                                          </p:stCondLst>
-                                        </p:cTn>
-                                        <p:tgtEl>
-                                          <p:spTgt spid="26"/>
-                                        </p:tgtEl>
-                                        <p:attrNameLst>
-                                          <p:attrName>style.visibility</p:attrName>
-                                        </p:attrNameLst>
-                                      </p:cBhvr>
-                                      <p:to>
-                                        <p:strVal val="visible"/>
-                                      </p:to>
-                                    </p:set>
-                                  </p:childTnLst>
-                                </p:cTn>
-                              </p:par>
-                              <p:par>
-                                <p:cTn id="19" presetID="1" presetClass="entr" presetSubtype="0" fill="hold" grpId="0" nodeType="withEffect">
-                                  <p:stCondLst>
-                                    <p:cond delay="0"/>
-                                  </p:stCondLst>
-                                  <p:childTnLst>
-                                    <p:set>
-                                      <p:cBhvr>
-                                        <p:cTn id="20" dur="1" fill="hold">
-                                          <p:stCondLst>
-                                            <p:cond delay="0"/>
-                                          </p:stCondLst>
-                                        </p:cTn>
-                                        <p:tgtEl>
-                                          <p:spTgt spid="10"/>
-                                        </p:tgtEl>
-                                        <p:attrNameLst>
-                                          <p:attrName>style.visibility</p:attrName>
-                                        </p:attrNameLst>
-                                      </p:cBhvr>
-                                      <p:to>
-                                        <p:strVal val="visible"/>
-                                      </p:to>
-                                    </p:set>
-                                  </p:childTnLst>
-                                </p:cTn>
-                              </p:par>
-                              <p:par>
-                                <p:cTn id="21" presetID="1" presetClass="entr" presetSubtype="0" fill="hold" grpId="0" nodeType="withEffect">
-                                  <p:stCondLst>
-                                    <p:cond delay="0"/>
-                                  </p:stCondLst>
-                                  <p:childTnLst>
-                                    <p:set>
-                                      <p:cBhvr>
-                                        <p:cTn id="22" dur="1" fill="hold">
-                                          <p:stCondLst>
-                                            <p:cond delay="0"/>
-                                          </p:stCondLst>
-                                        </p:cTn>
-                                        <p:tgtEl>
-                                          <p:spTgt spid="11"/>
-                                        </p:tgtEl>
-                                        <p:attrNameLst>
-                                          <p:attrName>style.visibility</p:attrName>
-                                        </p:attrNameLst>
-                                      </p:cBhvr>
-                                      <p:to>
-                                        <p:strVal val="visible"/>
-                                      </p:to>
-                                    </p:set>
-                                  </p:childTnLst>
-                                </p:cTn>
-                              </p:par>
-                            </p:childTnLst>
-                          </p:cTn>
-                        </p:par>
-                      </p:childTnLst>
-                    </p:cTn>
-                  </p:par>
-                  <p:par>
-                    <p:cTn id="23" fill="hold">
-                      <p:stCondLst>
-                        <p:cond delay="indefinite"/>
-                      </p:stCondLst>
-                      <p:childTnLst>
-                        <p:par>
-                          <p:cTn id="24" fill="hold">
-                            <p:stCondLst>
-                              <p:cond delay="0"/>
-                            </p:stCondLst>
-                            <p:childTnLst>
-                              <p:par>
-                                <p:cTn id="25" presetID="1" presetClass="entr" presetSubtype="0" fill="hold" grpId="0" nodeType="clickEffect">
-                                  <p:stCondLst>
-                                    <p:cond delay="0"/>
-                                  </p:stCondLst>
-                                  <p:childTnLst>
-                                    <p:set>
-                                      <p:cBhvr>
-                                        <p:cTn id="26" dur="1" fill="hold">
-                                          <p:stCondLst>
-                                            <p:cond delay="0"/>
-                                          </p:stCondLst>
-                                        </p:cTn>
-                                        <p:tgtEl>
-                                          <p:spTgt spid="12"/>
-                                        </p:tgtEl>
-                                        <p:attrNameLst>
-                                          <p:attrName>style.visibility</p:attrName>
-                                        </p:attrNameLst>
-                                      </p:cBhvr>
-                                      <p:to>
-                                        <p:strVal val="visible"/>
-                                      </p:to>
-                                    </p:set>
-                                  </p:childTnLst>
-                                </p:cTn>
-                              </p:par>
-                              <p:par>
-                                <p:cTn id="27" presetID="1" presetClass="entr" presetSubtype="0" fill="hold" nodeType="withEffect">
-                                  <p:stCondLst>
-                                    <p:cond delay="0"/>
-                                  </p:stCondLst>
-                                  <p:childTnLst>
-                                    <p:set>
-                                      <p:cBhvr>
-                                        <p:cTn id="28" dur="1" fill="hold">
-                                          <p:stCondLst>
-                                            <p:cond delay="0"/>
-                                          </p:stCondLst>
-                                        </p:cTn>
-                                        <p:tgtEl>
-                                          <p:spTgt spid="30"/>
-                                        </p:tgtEl>
-                                        <p:attrNameLst>
-                                          <p:attrName>style.visibility</p:attrName>
-                                        </p:attrNameLst>
-                                      </p:cBhvr>
-                                      <p:to>
-                                        <p:strVal val="visible"/>
-                                      </p:to>
-                                    </p:set>
-                                  </p:childTnLst>
-                                </p:cTn>
-                              </p:par>
-                              <p:par>
-                                <p:cTn id="29" presetID="1" presetClass="entr" presetSubtype="0" fill="hold" grpId="0" nodeType="withEffect">
-                                  <p:stCondLst>
-                                    <p:cond delay="0"/>
-                                  </p:stCondLst>
-                                  <p:childTnLst>
-                                    <p:set>
-                                      <p:cBhvr>
-                                        <p:cTn id="30" dur="1" fill="hold">
-                                          <p:stCondLst>
-                                            <p:cond delay="0"/>
-                                          </p:stCondLst>
-                                        </p:cTn>
-                                        <p:tgtEl>
-                                          <p:spTgt spid="14"/>
-                                        </p:tgtEl>
-                                        <p:attrNameLst>
-                                          <p:attrName>style.visibility</p:attrName>
-                                        </p:attrNameLst>
-                                      </p:cBhvr>
-                                      <p:to>
-                                        <p:strVal val="visible"/>
-                                      </p:to>
-                                    </p:set>
-                                  </p:childTnLst>
-                                </p:cTn>
-                              </p:par>
-                              <p:par>
-                                <p:cTn id="31" presetID="1" presetClass="entr" presetSubtype="0" fill="hold" grpId="0" nodeType="withEffect">
-                                  <p:stCondLst>
-                                    <p:cond delay="0"/>
-                                  </p:stCondLst>
-                                  <p:childTnLst>
-                                    <p:set>
-                                      <p:cBhvr>
-                                        <p:cTn id="32" dur="1" fill="hold">
-                                          <p:stCondLst>
-                                            <p:cond delay="0"/>
-                                          </p:stCondLst>
-                                        </p:cTn>
-                                        <p:tgtEl>
-                                          <p:spTgt spid="15"/>
-                                        </p:tgtEl>
-                                        <p:attrNameLst>
-                                          <p:attrName>style.visibility</p:attrName>
-                                        </p:attrNameLst>
-                                      </p:cBhvr>
-                                      <p:to>
-                                        <p:strVal val="visible"/>
-                                      </p:to>
-                                    </p:set>
-                                  </p:childTnLst>
-                                </p:cTn>
-                              </p:par>
-                            </p:childTnLst>
-                          </p:cTn>
-                        </p:par>
-                      </p:childTnLst>
-                    </p:cTn>
-                  </p:par>
-                  <p:par>
-                    <p:cTn id="33" fill="hold">
-                      <p:stCondLst>
-                        <p:cond delay="indefinite"/>
-                      </p:stCondLst>
-                      <p:childTnLst>
-                        <p:par>
-                          <p:cTn id="34" fill="hold">
-                            <p:stCondLst>
-                              <p:cond delay="0"/>
-                            </p:stCondLst>
-                            <p:childTnLst>
-                              <p:par>
-                                <p:cTn id="35" presetID="1" presetClass="entr" presetSubtype="0" fill="hold" grpId="0" nodeType="clickEffect">
-                                  <p:stCondLst>
-                                    <p:cond delay="0"/>
-                                  </p:stCondLst>
-                                  <p:childTnLst>
-                                    <p:set>
-                                      <p:cBhvr>
-                                        <p:cTn id="36" dur="1" fill="hold">
-                                          <p:stCondLst>
-                                            <p:cond delay="0"/>
-                                          </p:stCondLst>
-                                        </p:cTn>
-                                        <p:tgtEl>
-                                          <p:spTgt spid="16"/>
-                                        </p:tgtEl>
-                                        <p:attrNameLst>
-                                          <p:attrName>style.visibility</p:attrName>
-                                        </p:attrNameLst>
-                                      </p:cBhvr>
-                                      <p:to>
-                                        <p:strVal val="visible"/>
-                                      </p:to>
-                                    </p:set>
-                                  </p:childTnLst>
-                                </p:cTn>
-                              </p:par>
-                              <p:par>
-                                <p:cTn id="37" presetID="1" presetClass="entr" presetSubtype="0" fill="hold" grpId="0" nodeType="withEffect">
-                                  <p:stCondLst>
-                                    <p:cond delay="0"/>
-                                  </p:stCondLst>
-                                  <p:childTnLst>
-                                    <p:set>
-                                      <p:cBhvr>
-                                        <p:cTn id="38" dur="1" fill="hold">
-                                          <p:stCondLst>
-                                            <p:cond delay="0"/>
-                                          </p:stCondLst>
-                                        </p:cTn>
-                                        <p:tgtEl>
-                                          <p:spTgt spid="17"/>
-                                        </p:tgtEl>
-                                        <p:attrNameLst>
-                                          <p:attrName>style.visibility</p:attrName>
-                                        </p:attrNameLst>
-                                      </p:cBhvr>
-                                      <p:to>
-                                        <p:strVal val="visible"/>
-                                      </p:to>
-                                    </p:set>
-                                  </p:childTnLst>
-                                </p:cTn>
-                              </p:par>
-                            </p:childTnLst>
-                          </p:cTn>
-                        </p:par>
-                      </p:childTnLst>
-                    </p:cTn>
-                  </p:par>
-                </p:childTnLst>
-              </p:cTn>
-              <p:prevCondLst>
-                <p:cond evt="onPrev" delay="0">
-                  <p:tgtEl>
-                    <p:sldTgt/>
-                  </p:tgtEl>
-                </p:cond>
-              </p:prevCondLst>
-              <p:nextCondLst>
-                <p:cond evt="onNext" delay="0">
-                  <p:tgtEl>
-                    <p:sldTgt/>
-                  </p:tgtEl>
-                </p:cond>
-              </p:nextCondLst>
-            </p:seq>
-          </p:childTnLst>
-        </p:cTn>
-      </p:par>
-    </p:tnLst>
-    <p:bldLst>
-      <p:bldP spid="4" grpId="0" animBg="1"/>
-      <p:bldP spid="6" grpId="0"/>
-      <p:bldP spid="7" grpId="0"/>
-      <p:bldP spid="8" grpId="0" animBg="1"/>
-      <p:bldP spid="10" grpId="0"/>
-      <p:bldP spid="11" grpId="0"/>
-      <p:bldP spid="12" grpId="0" animBg="1"/>
-      <p:bldP spid="14" grpId="0"/>
-      <p:bldP spid="15" grpId="0"/>
-      <p:bldP spid="16" grpId="0" animBg="1"/>
-      <p:bldP spid="17" grpId="0"/>
-    </p:bldLst>
-  </p:timing>
-</p:sld>
-</file>
-
-<file path=ppt/slides/slide11.xml><?xml version="1.0" encoding="utf-8"?>
 <p:sld xmlns:a="http://schemas.openxmlformats.org/drawingml/2006/main" xmlns:r="http://schemas.openxmlformats.org/officeDocument/2006/relationships" xmlns:p="http://schemas.openxmlformats.org/presentationml/2006/main">
   <p:cSld>
     <p:spTree>
@@ -8943,7 +7693,7 @@
 </p:sld>
 </file>
 
-<file path=ppt/slides/slide12.xml><?xml version="1.0" encoding="utf-8"?>
+<file path=ppt/slides/slide11.xml><?xml version="1.0" encoding="utf-8"?>
 <p:sld xmlns:a="http://schemas.openxmlformats.org/drawingml/2006/main" xmlns:r="http://schemas.openxmlformats.org/officeDocument/2006/relationships" xmlns:p="http://schemas.openxmlformats.org/presentationml/2006/main">
   <p:cSld>
     <p:spTree>
@@ -10697,7 +9447,7 @@
 </p:sld>
 </file>
 
-<file path=ppt/slides/slide13.xml><?xml version="1.0" encoding="utf-8"?>
+<file path=ppt/slides/slide12.xml><?xml version="1.0" encoding="utf-8"?>
 <p:sld xmlns:a="http://schemas.openxmlformats.org/drawingml/2006/main" xmlns:r="http://schemas.openxmlformats.org/officeDocument/2006/relationships" xmlns:p="http://schemas.openxmlformats.org/presentationml/2006/main">
   <p:cSld>
     <p:spTree>
@@ -11489,7 +10239,7 @@
 </p:sld>
 </file>
 
-<file path=ppt/slides/slide14.xml><?xml version="1.0" encoding="utf-8"?>
+<file path=ppt/slides/slide13.xml><?xml version="1.0" encoding="utf-8"?>
 <p:sld xmlns:a="http://schemas.openxmlformats.org/drawingml/2006/main" xmlns:r="http://schemas.openxmlformats.org/officeDocument/2006/relationships" xmlns:p="http://schemas.openxmlformats.org/presentationml/2006/main">
   <p:cSld>
     <p:spTree>
@@ -13097,7 +11847,7 @@
 </p:sld>
 </file>
 
-<file path=ppt/slides/slide15.xml><?xml version="1.0" encoding="utf-8"?>
+<file path=ppt/slides/slide14.xml><?xml version="1.0" encoding="utf-8"?>
 <p:sld xmlns:a="http://schemas.openxmlformats.org/drawingml/2006/main" xmlns:r="http://schemas.openxmlformats.org/officeDocument/2006/relationships" xmlns:p="http://schemas.openxmlformats.org/presentationml/2006/main">
   <p:cSld>
     <p:spTree>
@@ -14707,6 +13457,1164 @@
 </p:sld>
 </file>
 
+<file path=ppt/slides/slide15.xml><?xml version="1.0" encoding="utf-8"?>
+<p:sld xmlns:a="http://schemas.openxmlformats.org/drawingml/2006/main" xmlns:r="http://schemas.openxmlformats.org/officeDocument/2006/relationships" xmlns:p="http://schemas.openxmlformats.org/presentationml/2006/main">
+  <p:cSld>
+    <p:spTree>
+      <p:nvGrpSpPr>
+        <p:cNvPr id="1" name=""/>
+        <p:cNvGrpSpPr/>
+        <p:nvPr/>
+      </p:nvGrpSpPr>
+      <p:grpSpPr>
+        <a:xfrm>
+          <a:off x="0" y="0"/>
+          <a:ext cx="0" cy="0"/>
+          <a:chOff x="0" y="0"/>
+          <a:chExt cx="0" cy="0"/>
+        </a:xfrm>
+      </p:grpSpPr>
+      <p:sp>
+        <p:nvSpPr>
+          <p:cNvPr id="26" name="title">
+            <a:extLst>
+              <a:ext uri="{FF2B5EF4-FFF2-40B4-BE49-F238E27FC236}">
+                <a16:creationId xmlns:a16="http://schemas.microsoft.com/office/drawing/2014/main" id="{CAC8877D-8692-4B39-AF09-82B4AD9D3650}"/>
+              </a:ext>
+            </a:extLst>
+          </p:cNvPr>
+          <p:cNvSpPr>
+            <a:spLocks noGrp="1"/>
+          </p:cNvSpPr>
+          <p:nvPr/>
+        </p:nvSpPr>
+        <p:spPr>
+          <a:xfrm>
+            <a:off x="685800" y="361950"/>
+            <a:ext cx="10820400" cy="571500"/>
+          </a:xfrm>
+          <a:prstGeom prst="rect">
+            <a:avLst/>
+          </a:prstGeom>
+          <a:noFill/>
+          <a:ln w="0">
+            <a:noFill/>
+            <a:prstDash val="solid"/>
+          </a:ln>
+        </p:spPr>
+        <p:txBody>
+          <a:bodyPr/>
+          <a:lstStyle/>
+          <a:p>
+            <a:pPr>
+              <a:defRPr sz="2400" b="1">
+                <a:solidFill>
+                  <a:srgbClr val="1F4E79"/>
+                </a:solidFill>
+              </a:defRPr>
+            </a:pPr>
+            <a:r>
+              <a:rPr sz="3200" b="1" dirty="0">
+                <a:solidFill>
+                  <a:srgbClr val="1F4E79"/>
+                </a:solidFill>
+              </a:rPr>
+              <a:t>Git and GitHub: A Shared Path from Task to Merge</a:t>
+            </a:r>
+          </a:p>
+        </p:txBody>
+      </p:sp>
+      <p:sp>
+        <p:nvSpPr>
+          <p:cNvPr id="2" name="subtitle">
+            <a:extLst>
+              <a:ext uri="{FF2B5EF4-FFF2-40B4-BE49-F238E27FC236}">
+                <a16:creationId xmlns:a16="http://schemas.microsoft.com/office/drawing/2014/main" id="{5A00E2FB-A5AC-445C-AC53-7E56D3C8F46E}"/>
+              </a:ext>
+            </a:extLst>
+          </p:cNvPr>
+          <p:cNvSpPr>
+            <a:spLocks noGrp="1"/>
+          </p:cNvSpPr>
+          <p:nvPr/>
+        </p:nvSpPr>
+        <p:spPr>
+          <a:xfrm>
+            <a:off x="685800" y="981075"/>
+            <a:ext cx="10668000" cy="323850"/>
+          </a:xfrm>
+          <a:prstGeom prst="rect">
+            <a:avLst/>
+          </a:prstGeom>
+          <a:noFill/>
+          <a:ln w="0">
+            <a:noFill/>
+            <a:prstDash val="solid"/>
+          </a:ln>
+        </p:spPr>
+        <p:txBody>
+          <a:bodyPr/>
+          <a:lstStyle/>
+          <a:p>
+            <a:pPr>
+              <a:defRPr sz="1500" b="1">
+                <a:solidFill>
+                  <a:srgbClr val="000000"/>
+                </a:solidFill>
+              </a:defRPr>
+            </a:pPr>
+            <a:r>
+              <a:rPr sz="2000" b="1" dirty="0">
+                <a:solidFill>
+                  <a:srgbClr val="000000"/>
+                </a:solidFill>
+              </a:rPr>
+              <a:t>The workflow makes ownership, progress, and review visible.</a:t>
+            </a:r>
+          </a:p>
+        </p:txBody>
+      </p:sp>
+      <p:sp>
+        <p:nvSpPr>
+          <p:cNvPr id="3" name="gh0">
+            <a:extLst>
+              <a:ext uri="{FF2B5EF4-FFF2-40B4-BE49-F238E27FC236}">
+                <a16:creationId xmlns:a16="http://schemas.microsoft.com/office/drawing/2014/main" id="{6D1A8C43-639F-420C-98B3-51C18CF87D39}"/>
+              </a:ext>
+            </a:extLst>
+          </p:cNvPr>
+          <p:cNvSpPr>
+            <a:spLocks noGrp="1"/>
+          </p:cNvSpPr>
+          <p:nvPr/>
+        </p:nvSpPr>
+        <p:spPr>
+          <a:xfrm>
+            <a:off x="666750" y="1666875"/>
+            <a:ext cx="2667000" cy="400050"/>
+          </a:xfrm>
+          <a:prstGeom prst="rect">
+            <a:avLst/>
+          </a:prstGeom>
+          <a:noFill/>
+          <a:ln w="0">
+            <a:noFill/>
+            <a:prstDash val="solid"/>
+          </a:ln>
+        </p:spPr>
+        <p:txBody>
+          <a:bodyPr/>
+          <a:lstStyle/>
+          <a:p>
+            <a:pPr algn="ctr">
+              <a:defRPr sz="1800" b="1">
+                <a:solidFill>
+                  <a:srgbClr val="1F4E79"/>
+                </a:solidFill>
+              </a:defRPr>
+            </a:pPr>
+            <a:r>
+              <a:rPr sz="2000" b="1" dirty="0">
+                <a:solidFill>
+                  <a:srgbClr val="1F4E79"/>
+                </a:solidFill>
+              </a:rPr>
+              <a:t>ISSUE</a:t>
+            </a:r>
+          </a:p>
+        </p:txBody>
+      </p:sp>
+      <p:sp>
+        <p:nvSpPr>
+          <p:cNvPr id="4" name="gb0">
+            <a:extLst>
+              <a:ext uri="{FF2B5EF4-FFF2-40B4-BE49-F238E27FC236}">
+                <a16:creationId xmlns:a16="http://schemas.microsoft.com/office/drawing/2014/main" id="{08D06220-FD81-4197-86CE-63040B656171}"/>
+              </a:ext>
+            </a:extLst>
+          </p:cNvPr>
+          <p:cNvSpPr>
+            <a:spLocks noGrp="1"/>
+          </p:cNvSpPr>
+          <p:nvPr/>
+        </p:nvSpPr>
+        <p:spPr>
+          <a:xfrm>
+            <a:off x="809625" y="3743325"/>
+            <a:ext cx="2381250" cy="647700"/>
+          </a:xfrm>
+          <a:prstGeom prst="rect">
+            <a:avLst/>
+          </a:prstGeom>
+          <a:noFill/>
+          <a:ln w="0">
+            <a:noFill/>
+            <a:prstDash val="solid"/>
+          </a:ln>
+        </p:spPr>
+        <p:txBody>
+          <a:bodyPr/>
+          <a:lstStyle/>
+          <a:p>
+            <a:pPr algn="ctr">
+              <a:defRPr sz="1500">
+                <a:solidFill>
+                  <a:srgbClr val="000000"/>
+                </a:solidFill>
+              </a:defRPr>
+            </a:pPr>
+            <a:r>
+              <a:rPr sz="2000" dirty="0">
+                <a:solidFill>
+                  <a:srgbClr val="000000"/>
+                </a:solidFill>
+              </a:rPr>
+              <a:t>Agree on the task</a:t>
+            </a:r>
+          </a:p>
+          <a:p>
+            <a:pPr algn="ctr">
+              <a:defRPr sz="1500">
+                <a:solidFill>
+                  <a:srgbClr val="000000"/>
+                </a:solidFill>
+              </a:defRPr>
+            </a:pPr>
+            <a:r>
+              <a:rPr sz="2000" dirty="0">
+                <a:solidFill>
+                  <a:srgbClr val="000000"/>
+                </a:solidFill>
+              </a:rPr>
+              <a:t>and ownership</a:t>
+            </a:r>
+          </a:p>
+        </p:txBody>
+      </p:sp>
+      <p:sp>
+        <p:nvSpPr>
+          <p:cNvPr id="5" name="arrow0">
+            <a:extLst>
+              <a:ext uri="{FF2B5EF4-FFF2-40B4-BE49-F238E27FC236}">
+                <a16:creationId xmlns:a16="http://schemas.microsoft.com/office/drawing/2014/main" id="{968E19D2-CB37-4E32-ADBA-23EBDF635F6A}"/>
+              </a:ext>
+            </a:extLst>
+          </p:cNvPr>
+          <p:cNvSpPr>
+            <a:spLocks noGrp="1"/>
+          </p:cNvSpPr>
+          <p:nvPr/>
+        </p:nvSpPr>
+        <p:spPr>
+          <a:xfrm>
+            <a:off x="3238500" y="2714625"/>
+            <a:ext cx="381000" cy="419100"/>
+          </a:xfrm>
+          <a:prstGeom prst="rect">
+            <a:avLst/>
+          </a:prstGeom>
+          <a:noFill/>
+          <a:ln w="0">
+            <a:noFill/>
+            <a:prstDash val="solid"/>
+          </a:ln>
+        </p:spPr>
+        <p:txBody>
+          <a:bodyPr/>
+          <a:lstStyle/>
+          <a:p>
+            <a:pPr algn="ctr">
+              <a:defRPr sz="2100" b="1">
+                <a:solidFill>
+                  <a:srgbClr val="D9E2E8"/>
+                </a:solidFill>
+              </a:defRPr>
+            </a:pPr>
+            <a:r>
+              <a:rPr sz="2100" b="1">
+                <a:solidFill>
+                  <a:srgbClr val="D9E2E8"/>
+                </a:solidFill>
+              </a:rPr>
+              <a:t>→</a:t>
+            </a:r>
+          </a:p>
+        </p:txBody>
+      </p:sp>
+      <p:sp>
+        <p:nvSpPr>
+          <p:cNvPr id="6" name="gh1">
+            <a:extLst>
+              <a:ext uri="{FF2B5EF4-FFF2-40B4-BE49-F238E27FC236}">
+                <a16:creationId xmlns:a16="http://schemas.microsoft.com/office/drawing/2014/main" id="{AC024BB6-9893-4A38-AC6F-D403CC79963F}"/>
+              </a:ext>
+            </a:extLst>
+          </p:cNvPr>
+          <p:cNvSpPr>
+            <a:spLocks noGrp="1"/>
+          </p:cNvSpPr>
+          <p:nvPr/>
+        </p:nvSpPr>
+        <p:spPr>
+          <a:xfrm>
+            <a:off x="3333750" y="1666875"/>
+            <a:ext cx="2667000" cy="400050"/>
+          </a:xfrm>
+          <a:prstGeom prst="rect">
+            <a:avLst/>
+          </a:prstGeom>
+          <a:noFill/>
+          <a:ln w="0">
+            <a:noFill/>
+            <a:prstDash val="solid"/>
+          </a:ln>
+        </p:spPr>
+        <p:txBody>
+          <a:bodyPr/>
+          <a:lstStyle/>
+          <a:p>
+            <a:pPr algn="ctr">
+              <a:defRPr sz="1800" b="1">
+                <a:solidFill>
+                  <a:srgbClr val="008C95"/>
+                </a:solidFill>
+              </a:defRPr>
+            </a:pPr>
+            <a:r>
+              <a:rPr sz="2000" b="1" dirty="0">
+                <a:solidFill>
+                  <a:srgbClr val="008C95"/>
+                </a:solidFill>
+              </a:rPr>
+              <a:t>BRANCH + COMMITS</a:t>
+            </a:r>
+          </a:p>
+        </p:txBody>
+      </p:sp>
+      <p:sp>
+        <p:nvSpPr>
+          <p:cNvPr id="7" name="gb1">
+            <a:extLst>
+              <a:ext uri="{FF2B5EF4-FFF2-40B4-BE49-F238E27FC236}">
+                <a16:creationId xmlns:a16="http://schemas.microsoft.com/office/drawing/2014/main" id="{F385DECF-1B0F-4206-B9E0-AE1FBADAA088}"/>
+              </a:ext>
+            </a:extLst>
+          </p:cNvPr>
+          <p:cNvSpPr>
+            <a:spLocks noGrp="1"/>
+          </p:cNvSpPr>
+          <p:nvPr/>
+        </p:nvSpPr>
+        <p:spPr>
+          <a:xfrm>
+            <a:off x="3476625" y="3743325"/>
+            <a:ext cx="2381250" cy="647700"/>
+          </a:xfrm>
+          <a:prstGeom prst="rect">
+            <a:avLst/>
+          </a:prstGeom>
+          <a:noFill/>
+          <a:ln w="0">
+            <a:noFill/>
+            <a:prstDash val="solid"/>
+          </a:ln>
+        </p:spPr>
+        <p:txBody>
+          <a:bodyPr/>
+          <a:lstStyle/>
+          <a:p>
+            <a:pPr algn="ctr">
+              <a:defRPr sz="1500">
+                <a:solidFill>
+                  <a:srgbClr val="000000"/>
+                </a:solidFill>
+              </a:defRPr>
+            </a:pPr>
+            <a:r>
+              <a:rPr sz="2000" dirty="0">
+                <a:solidFill>
+                  <a:srgbClr val="000000"/>
+                </a:solidFill>
+              </a:rPr>
+              <a:t>Develop a focused</a:t>
+            </a:r>
+          </a:p>
+          <a:p>
+            <a:pPr algn="ctr">
+              <a:defRPr sz="1500">
+                <a:solidFill>
+                  <a:srgbClr val="000000"/>
+                </a:solidFill>
+              </a:defRPr>
+            </a:pPr>
+            <a:r>
+              <a:rPr sz="2000" dirty="0">
+                <a:solidFill>
+                  <a:srgbClr val="000000"/>
+                </a:solidFill>
+              </a:rPr>
+              <a:t>change</a:t>
+            </a:r>
+          </a:p>
+        </p:txBody>
+      </p:sp>
+      <p:sp>
+        <p:nvSpPr>
+          <p:cNvPr id="8" name="arrow1">
+            <a:extLst>
+              <a:ext uri="{FF2B5EF4-FFF2-40B4-BE49-F238E27FC236}">
+                <a16:creationId xmlns:a16="http://schemas.microsoft.com/office/drawing/2014/main" id="{48B0A54F-D6A8-4A90-9B99-19ABCBBEF5B7}"/>
+              </a:ext>
+            </a:extLst>
+          </p:cNvPr>
+          <p:cNvSpPr>
+            <a:spLocks noGrp="1"/>
+          </p:cNvSpPr>
+          <p:nvPr/>
+        </p:nvSpPr>
+        <p:spPr>
+          <a:xfrm>
+            <a:off x="5905500" y="2714625"/>
+            <a:ext cx="381000" cy="419100"/>
+          </a:xfrm>
+          <a:prstGeom prst="rect">
+            <a:avLst/>
+          </a:prstGeom>
+          <a:noFill/>
+          <a:ln w="0">
+            <a:noFill/>
+            <a:prstDash val="solid"/>
+          </a:ln>
+        </p:spPr>
+        <p:txBody>
+          <a:bodyPr/>
+          <a:lstStyle/>
+          <a:p>
+            <a:pPr algn="ctr">
+              <a:defRPr sz="2100" b="1">
+                <a:solidFill>
+                  <a:srgbClr val="D9E2E8"/>
+                </a:solidFill>
+              </a:defRPr>
+            </a:pPr>
+            <a:r>
+              <a:rPr sz="2100" b="1">
+                <a:solidFill>
+                  <a:srgbClr val="D9E2E8"/>
+                </a:solidFill>
+              </a:rPr>
+              <a:t>→</a:t>
+            </a:r>
+          </a:p>
+        </p:txBody>
+      </p:sp>
+      <p:sp>
+        <p:nvSpPr>
+          <p:cNvPr id="9" name="gh2">
+            <a:extLst>
+              <a:ext uri="{FF2B5EF4-FFF2-40B4-BE49-F238E27FC236}">
+                <a16:creationId xmlns:a16="http://schemas.microsoft.com/office/drawing/2014/main" id="{C8B1C6A3-59AB-4378-A85C-DA70AC887DE4}"/>
+              </a:ext>
+            </a:extLst>
+          </p:cNvPr>
+          <p:cNvSpPr>
+            <a:spLocks noGrp="1"/>
+          </p:cNvSpPr>
+          <p:nvPr/>
+        </p:nvSpPr>
+        <p:spPr>
+          <a:xfrm>
+            <a:off x="6191250" y="1666875"/>
+            <a:ext cx="2667000" cy="400050"/>
+          </a:xfrm>
+          <a:prstGeom prst="rect">
+            <a:avLst/>
+          </a:prstGeom>
+          <a:noFill/>
+          <a:ln w="0">
+            <a:noFill/>
+            <a:prstDash val="solid"/>
+          </a:ln>
+        </p:spPr>
+        <p:txBody>
+          <a:bodyPr/>
+          <a:lstStyle/>
+          <a:p>
+            <a:pPr algn="ctr">
+              <a:defRPr sz="1800" b="1">
+                <a:solidFill>
+                  <a:srgbClr val="1F4E79"/>
+                </a:solidFill>
+              </a:defRPr>
+            </a:pPr>
+            <a:r>
+              <a:rPr sz="2000" b="1" dirty="0">
+                <a:solidFill>
+                  <a:srgbClr val="1F4E79"/>
+                </a:solidFill>
+              </a:rPr>
+              <a:t>PULL REQUEST</a:t>
+            </a:r>
+          </a:p>
+        </p:txBody>
+      </p:sp>
+      <p:sp>
+        <p:nvSpPr>
+          <p:cNvPr id="10" name="gb2">
+            <a:extLst>
+              <a:ext uri="{FF2B5EF4-FFF2-40B4-BE49-F238E27FC236}">
+                <a16:creationId xmlns:a16="http://schemas.microsoft.com/office/drawing/2014/main" id="{978A1F63-0861-4A63-985E-154D95A56819}"/>
+              </a:ext>
+            </a:extLst>
+          </p:cNvPr>
+          <p:cNvSpPr>
+            <a:spLocks noGrp="1"/>
+          </p:cNvSpPr>
+          <p:nvPr/>
+        </p:nvSpPr>
+        <p:spPr>
+          <a:xfrm>
+            <a:off x="6334125" y="3743325"/>
+            <a:ext cx="2381250" cy="647700"/>
+          </a:xfrm>
+          <a:prstGeom prst="rect">
+            <a:avLst/>
+          </a:prstGeom>
+          <a:noFill/>
+          <a:ln w="0">
+            <a:noFill/>
+            <a:prstDash val="solid"/>
+          </a:ln>
+        </p:spPr>
+        <p:txBody>
+          <a:bodyPr/>
+          <a:lstStyle/>
+          <a:p>
+            <a:pPr algn="ctr">
+              <a:defRPr sz="1500">
+                <a:solidFill>
+                  <a:srgbClr val="000000"/>
+                </a:solidFill>
+              </a:defRPr>
+            </a:pPr>
+            <a:r>
+              <a:rPr sz="2000" dirty="0">
+                <a:solidFill>
+                  <a:srgbClr val="000000"/>
+                </a:solidFill>
+              </a:rPr>
+              <a:t>Explain the change</a:t>
+            </a:r>
+          </a:p>
+          <a:p>
+            <a:pPr algn="ctr">
+              <a:defRPr sz="1500">
+                <a:solidFill>
+                  <a:srgbClr val="000000"/>
+                </a:solidFill>
+              </a:defRPr>
+            </a:pPr>
+            <a:r>
+              <a:rPr sz="2000" dirty="0">
+                <a:solidFill>
+                  <a:srgbClr val="000000"/>
+                </a:solidFill>
+              </a:rPr>
+              <a:t>and request review</a:t>
+            </a:r>
+          </a:p>
+        </p:txBody>
+      </p:sp>
+      <p:sp>
+        <p:nvSpPr>
+          <p:cNvPr id="11" name="arrow2">
+            <a:extLst>
+              <a:ext uri="{FF2B5EF4-FFF2-40B4-BE49-F238E27FC236}">
+                <a16:creationId xmlns:a16="http://schemas.microsoft.com/office/drawing/2014/main" id="{9BB9FA6A-C079-47E5-BBB1-3160CE1AAC76}"/>
+              </a:ext>
+            </a:extLst>
+          </p:cNvPr>
+          <p:cNvSpPr>
+            <a:spLocks noGrp="1"/>
+          </p:cNvSpPr>
+          <p:nvPr/>
+        </p:nvSpPr>
+        <p:spPr>
+          <a:xfrm>
+            <a:off x="8763000" y="2714625"/>
+            <a:ext cx="381000" cy="419100"/>
+          </a:xfrm>
+          <a:prstGeom prst="rect">
+            <a:avLst/>
+          </a:prstGeom>
+          <a:noFill/>
+          <a:ln w="0">
+            <a:noFill/>
+            <a:prstDash val="solid"/>
+          </a:ln>
+        </p:spPr>
+        <p:txBody>
+          <a:bodyPr/>
+          <a:lstStyle/>
+          <a:p>
+            <a:pPr algn="ctr">
+              <a:defRPr sz="2100" b="1">
+                <a:solidFill>
+                  <a:srgbClr val="D9E2E8"/>
+                </a:solidFill>
+              </a:defRPr>
+            </a:pPr>
+            <a:r>
+              <a:rPr sz="2100" b="1">
+                <a:solidFill>
+                  <a:srgbClr val="D9E2E8"/>
+                </a:solidFill>
+              </a:rPr>
+              <a:t>→</a:t>
+            </a:r>
+          </a:p>
+        </p:txBody>
+      </p:sp>
+      <p:sp>
+        <p:nvSpPr>
+          <p:cNvPr id="12" name="gh3">
+            <a:extLst>
+              <a:ext uri="{FF2B5EF4-FFF2-40B4-BE49-F238E27FC236}">
+                <a16:creationId xmlns:a16="http://schemas.microsoft.com/office/drawing/2014/main" id="{64272012-AABD-46D0-9B42-2D9599BA1CD6}"/>
+              </a:ext>
+            </a:extLst>
+          </p:cNvPr>
+          <p:cNvSpPr>
+            <a:spLocks noGrp="1"/>
+          </p:cNvSpPr>
+          <p:nvPr/>
+        </p:nvSpPr>
+        <p:spPr>
+          <a:xfrm>
+            <a:off x="8953500" y="1666875"/>
+            <a:ext cx="2667000" cy="400050"/>
+          </a:xfrm>
+          <a:prstGeom prst="rect">
+            <a:avLst/>
+          </a:prstGeom>
+          <a:noFill/>
+          <a:ln w="0">
+            <a:noFill/>
+            <a:prstDash val="solid"/>
+          </a:ln>
+        </p:spPr>
+        <p:txBody>
+          <a:bodyPr/>
+          <a:lstStyle/>
+          <a:p>
+            <a:pPr algn="ctr">
+              <a:defRPr sz="1800" b="1">
+                <a:solidFill>
+                  <a:srgbClr val="008C95"/>
+                </a:solidFill>
+              </a:defRPr>
+            </a:pPr>
+            <a:r>
+              <a:rPr sz="2000" b="1" dirty="0">
+                <a:solidFill>
+                  <a:srgbClr val="008C95"/>
+                </a:solidFill>
+              </a:rPr>
+              <a:t>REVIEW + MERGE</a:t>
+            </a:r>
+          </a:p>
+        </p:txBody>
+      </p:sp>
+      <p:sp>
+        <p:nvSpPr>
+          <p:cNvPr id="13" name="gb3">
+            <a:extLst>
+              <a:ext uri="{FF2B5EF4-FFF2-40B4-BE49-F238E27FC236}">
+                <a16:creationId xmlns:a16="http://schemas.microsoft.com/office/drawing/2014/main" id="{5ED1EE1C-295E-448E-A714-841772606EB3}"/>
+              </a:ext>
+            </a:extLst>
+          </p:cNvPr>
+          <p:cNvSpPr>
+            <a:spLocks noGrp="1"/>
+          </p:cNvSpPr>
+          <p:nvPr/>
+        </p:nvSpPr>
+        <p:spPr>
+          <a:xfrm>
+            <a:off x="9096375" y="3743325"/>
+            <a:ext cx="2381250" cy="647700"/>
+          </a:xfrm>
+          <a:prstGeom prst="rect">
+            <a:avLst/>
+          </a:prstGeom>
+          <a:noFill/>
+          <a:ln w="0">
+            <a:noFill/>
+            <a:prstDash val="solid"/>
+          </a:ln>
+        </p:spPr>
+        <p:txBody>
+          <a:bodyPr/>
+          <a:lstStyle/>
+          <a:p>
+            <a:pPr algn="ctr">
+              <a:defRPr sz="1500">
+                <a:solidFill>
+                  <a:srgbClr val="000000"/>
+                </a:solidFill>
+              </a:defRPr>
+            </a:pPr>
+            <a:r>
+              <a:rPr sz="2000" dirty="0">
+                <a:solidFill>
+                  <a:srgbClr val="000000"/>
+                </a:solidFill>
+              </a:rPr>
+              <a:t>Improve it before</a:t>
+            </a:r>
+          </a:p>
+          <a:p>
+            <a:pPr algn="ctr">
+              <a:defRPr sz="1500">
+                <a:solidFill>
+                  <a:srgbClr val="000000"/>
+                </a:solidFill>
+              </a:defRPr>
+            </a:pPr>
+            <a:r>
+              <a:rPr sz="2000" dirty="0">
+                <a:solidFill>
+                  <a:srgbClr val="000000"/>
+                </a:solidFill>
+              </a:rPr>
+              <a:t>it reaches main</a:t>
+            </a:r>
+          </a:p>
+        </p:txBody>
+      </p:sp>
+      <p:pic>
+        <p:nvPicPr>
+          <p:cNvPr id="39" name="Picture 38"/>
+          <p:cNvPicPr>
+            <a:picLocks noChangeAspect="1"/>
+          </p:cNvPicPr>
+          <p:nvPr/>
+        </p:nvPicPr>
+        <p:blipFill>
+          <a:blip r:embed="rId3"/>
+          <a:stretch/>
+        </p:blipFill>
+        <p:spPr>
+          <a:xfrm>
+            <a:off x="1381125" y="2385810"/>
+            <a:ext cx="1143000" cy="705255"/>
+          </a:xfrm>
+          <a:prstGeom prst="rect">
+            <a:avLst/>
+          </a:prstGeom>
+        </p:spPr>
+      </p:pic>
+      <p:pic>
+        <p:nvPicPr>
+          <p:cNvPr id="40" name="Picture 39"/>
+          <p:cNvPicPr>
+            <a:picLocks noChangeAspect="1"/>
+          </p:cNvPicPr>
+          <p:nvPr/>
+        </p:nvPicPr>
+        <p:blipFill>
+          <a:blip r:embed="rId4"/>
+          <a:stretch/>
+        </p:blipFill>
+        <p:spPr>
+          <a:xfrm>
+            <a:off x="4183784" y="2190750"/>
+            <a:ext cx="1062182" cy="1095375"/>
+          </a:xfrm>
+          <a:prstGeom prst="rect">
+            <a:avLst/>
+          </a:prstGeom>
+        </p:spPr>
+      </p:pic>
+      <p:sp>
+        <p:nvSpPr>
+          <p:cNvPr id="16" name="commit-line">
+            <a:extLst>
+              <a:ext uri="{FF2B5EF4-FFF2-40B4-BE49-F238E27FC236}">
+                <a16:creationId xmlns:a16="http://schemas.microsoft.com/office/drawing/2014/main" id="{D0E352E8-FE3E-4179-9E73-CBA36EE64DAB}"/>
+              </a:ext>
+            </a:extLst>
+          </p:cNvPr>
+          <p:cNvSpPr>
+            <a:spLocks noGrp="1"/>
+          </p:cNvSpPr>
+          <p:nvPr/>
+        </p:nvSpPr>
+        <p:spPr>
+          <a:xfrm>
+            <a:off x="4362450" y="3381375"/>
+            <a:ext cx="714375" cy="0"/>
+          </a:xfrm>
+          <a:prstGeom prst="line">
+            <a:avLst/>
+          </a:prstGeom>
+          <a:noFill/>
+          <a:ln w="19050">
+            <a:solidFill>
+              <a:srgbClr val="000000"/>
+            </a:solidFill>
+            <a:prstDash val="solid"/>
+          </a:ln>
+        </p:spPr>
+        <p:txBody>
+          <a:bodyPr/>
+          <a:lstStyle/>
+          <a:p>
+            <a:endParaRPr lang="en-US"/>
+          </a:p>
+        </p:txBody>
+      </p:sp>
+      <p:sp>
+        <p:nvSpPr>
+          <p:cNvPr id="17" name="commit-dot-0">
+            <a:extLst>
+              <a:ext uri="{FF2B5EF4-FFF2-40B4-BE49-F238E27FC236}">
+                <a16:creationId xmlns:a16="http://schemas.microsoft.com/office/drawing/2014/main" id="{B89BCABF-8A3B-421E-807E-BF4201004D2F}"/>
+              </a:ext>
+            </a:extLst>
+          </p:cNvPr>
+          <p:cNvSpPr>
+            <a:spLocks noGrp="1"/>
+          </p:cNvSpPr>
+          <p:nvPr/>
+        </p:nvSpPr>
+        <p:spPr>
+          <a:xfrm>
+            <a:off x="4305300" y="3324225"/>
+            <a:ext cx="114300" cy="114300"/>
+          </a:xfrm>
+          <a:prstGeom prst="ellipse">
+            <a:avLst/>
+          </a:prstGeom>
+          <a:solidFill>
+            <a:srgbClr val="000000"/>
+          </a:solidFill>
+          <a:ln w="0">
+            <a:solidFill>
+              <a:srgbClr val="000000"/>
+            </a:solidFill>
+            <a:prstDash val="solid"/>
+          </a:ln>
+        </p:spPr>
+        <p:txBody>
+          <a:bodyPr/>
+          <a:lstStyle/>
+          <a:p>
+            <a:endParaRPr lang="en-US"/>
+          </a:p>
+        </p:txBody>
+      </p:sp>
+      <p:sp>
+        <p:nvSpPr>
+          <p:cNvPr id="18" name="commit-dot-1">
+            <a:extLst>
+              <a:ext uri="{FF2B5EF4-FFF2-40B4-BE49-F238E27FC236}">
+                <a16:creationId xmlns:a16="http://schemas.microsoft.com/office/drawing/2014/main" id="{D227963A-3749-4FC1-9E3A-FC9A7FB69A1E}"/>
+              </a:ext>
+            </a:extLst>
+          </p:cNvPr>
+          <p:cNvSpPr>
+            <a:spLocks noGrp="1"/>
+          </p:cNvSpPr>
+          <p:nvPr/>
+        </p:nvSpPr>
+        <p:spPr>
+          <a:xfrm>
+            <a:off x="4657725" y="3324225"/>
+            <a:ext cx="114300" cy="114300"/>
+          </a:xfrm>
+          <a:prstGeom prst="ellipse">
+            <a:avLst/>
+          </a:prstGeom>
+          <a:solidFill>
+            <a:srgbClr val="000000"/>
+          </a:solidFill>
+          <a:ln w="0">
+            <a:solidFill>
+              <a:srgbClr val="000000"/>
+            </a:solidFill>
+            <a:prstDash val="solid"/>
+          </a:ln>
+        </p:spPr>
+        <p:txBody>
+          <a:bodyPr/>
+          <a:lstStyle/>
+          <a:p>
+            <a:endParaRPr lang="en-US"/>
+          </a:p>
+        </p:txBody>
+      </p:sp>
+      <p:sp>
+        <p:nvSpPr>
+          <p:cNvPr id="19" name="commit-dot-2">
+            <a:extLst>
+              <a:ext uri="{FF2B5EF4-FFF2-40B4-BE49-F238E27FC236}">
+                <a16:creationId xmlns:a16="http://schemas.microsoft.com/office/drawing/2014/main" id="{26E097A4-E4F4-4956-A6E5-9CAB5BC027D5}"/>
+              </a:ext>
+            </a:extLst>
+          </p:cNvPr>
+          <p:cNvSpPr>
+            <a:spLocks noGrp="1"/>
+          </p:cNvSpPr>
+          <p:nvPr/>
+        </p:nvSpPr>
+        <p:spPr>
+          <a:xfrm>
+            <a:off x="5019675" y="3324225"/>
+            <a:ext cx="114300" cy="114300"/>
+          </a:xfrm>
+          <a:prstGeom prst="ellipse">
+            <a:avLst/>
+          </a:prstGeom>
+          <a:solidFill>
+            <a:srgbClr val="000000"/>
+          </a:solidFill>
+          <a:ln w="0">
+            <a:solidFill>
+              <a:srgbClr val="000000"/>
+            </a:solidFill>
+            <a:prstDash val="solid"/>
+          </a:ln>
+        </p:spPr>
+        <p:txBody>
+          <a:bodyPr/>
+          <a:lstStyle/>
+          <a:p>
+            <a:endParaRPr lang="en-US"/>
+          </a:p>
+        </p:txBody>
+      </p:sp>
+      <p:pic>
+        <p:nvPicPr>
+          <p:cNvPr id="45" name="Picture 44"/>
+          <p:cNvPicPr>
+            <a:picLocks noChangeAspect="1"/>
+          </p:cNvPicPr>
+          <p:nvPr/>
+        </p:nvPicPr>
+        <p:blipFill>
+          <a:blip r:embed="rId5"/>
+          <a:stretch/>
+        </p:blipFill>
+        <p:spPr>
+          <a:xfrm>
+            <a:off x="6929438" y="2190750"/>
+            <a:ext cx="1095375" cy="1095375"/>
+          </a:xfrm>
+          <a:prstGeom prst="rect">
+            <a:avLst/>
+          </a:prstGeom>
+        </p:spPr>
+      </p:pic>
+      <p:pic>
+        <p:nvPicPr>
+          <p:cNvPr id="46" name="Picture 45"/>
+          <p:cNvPicPr>
+            <a:picLocks noChangeAspect="1"/>
+          </p:cNvPicPr>
+          <p:nvPr/>
+        </p:nvPicPr>
+        <p:blipFill>
+          <a:blip r:embed="rId6"/>
+          <a:stretch/>
+        </p:blipFill>
+        <p:spPr>
+          <a:xfrm>
+            <a:off x="9382125" y="2238375"/>
+            <a:ext cx="876300" cy="876300"/>
+          </a:xfrm>
+          <a:prstGeom prst="rect">
+            <a:avLst/>
+          </a:prstGeom>
+        </p:spPr>
+      </p:pic>
+      <p:pic>
+        <p:nvPicPr>
+          <p:cNvPr id="47" name="Picture 46"/>
+          <p:cNvPicPr>
+            <a:picLocks noChangeAspect="1"/>
+          </p:cNvPicPr>
+          <p:nvPr/>
+        </p:nvPicPr>
+        <p:blipFill>
+          <a:blip r:embed="rId7"/>
+          <a:stretch/>
+        </p:blipFill>
+        <p:spPr>
+          <a:xfrm>
+            <a:off x="10334625" y="2238375"/>
+            <a:ext cx="876300" cy="876300"/>
+          </a:xfrm>
+          <a:prstGeom prst="rect">
+            <a:avLst/>
+          </a:prstGeom>
+        </p:spPr>
+      </p:pic>
+      <p:sp>
+        <p:nvSpPr>
+          <p:cNvPr id="23" name="gitband">
+            <a:extLst>
+              <a:ext uri="{FF2B5EF4-FFF2-40B4-BE49-F238E27FC236}">
+                <a16:creationId xmlns:a16="http://schemas.microsoft.com/office/drawing/2014/main" id="{08DFEE6B-A097-4ECE-8CB7-6D6ACA296464}"/>
+              </a:ext>
+            </a:extLst>
+          </p:cNvPr>
+          <p:cNvSpPr>
+            <a:spLocks noGrp="1"/>
+          </p:cNvSpPr>
+          <p:nvPr/>
+        </p:nvSpPr>
+        <p:spPr>
+          <a:xfrm>
+            <a:off x="1381125" y="5219700"/>
+            <a:ext cx="9429750" cy="914400"/>
+          </a:xfrm>
+          <a:prstGeom prst="roundRect">
+            <a:avLst>
+              <a:gd name="adj" fmla="val 8333"/>
+            </a:avLst>
+          </a:prstGeom>
+          <a:solidFill>
+            <a:srgbClr val="EAF2F8"/>
+          </a:solidFill>
+          <a:ln w="9525">
+            <a:solidFill>
+              <a:srgbClr val="C9DDEA"/>
+            </a:solidFill>
+            <a:prstDash val="solid"/>
+          </a:ln>
+        </p:spPr>
+        <p:txBody>
+          <a:bodyPr/>
+          <a:lstStyle/>
+          <a:p>
+            <a:endParaRPr lang="en-US"/>
+          </a:p>
+        </p:txBody>
+      </p:sp>
+      <p:sp>
+        <p:nvSpPr>
+          <p:cNvPr id="24" name="gitbandh">
+            <a:extLst>
+              <a:ext uri="{FF2B5EF4-FFF2-40B4-BE49-F238E27FC236}">
+                <a16:creationId xmlns:a16="http://schemas.microsoft.com/office/drawing/2014/main" id="{400B9181-067C-4FA0-ACC0-C2133B2128C1}"/>
+              </a:ext>
+            </a:extLst>
+          </p:cNvPr>
+          <p:cNvSpPr>
+            <a:spLocks noGrp="1"/>
+          </p:cNvSpPr>
+          <p:nvPr/>
+        </p:nvSpPr>
+        <p:spPr>
+          <a:xfrm>
+            <a:off x="1809750" y="5391150"/>
+            <a:ext cx="8572500" cy="323850"/>
+          </a:xfrm>
+          <a:prstGeom prst="rect">
+            <a:avLst/>
+          </a:prstGeom>
+          <a:noFill/>
+          <a:ln w="0">
+            <a:noFill/>
+            <a:prstDash val="solid"/>
+          </a:ln>
+        </p:spPr>
+        <p:txBody>
+          <a:bodyPr/>
+          <a:lstStyle/>
+          <a:p>
+            <a:pPr algn="ctr">
+              <a:defRPr sz="1800" b="1">
+                <a:solidFill>
+                  <a:srgbClr val="1F4E79"/>
+                </a:solidFill>
+              </a:defRPr>
+            </a:pPr>
+            <a:r>
+              <a:rPr sz="2400" b="1" dirty="0">
+                <a:solidFill>
+                  <a:srgbClr val="1F4E79"/>
+                </a:solidFill>
+              </a:rPr>
+              <a:t>The repository becomes the record of collaboration</a:t>
+            </a:r>
+          </a:p>
+        </p:txBody>
+      </p:sp>
+      <p:sp>
+        <p:nvSpPr>
+          <p:cNvPr id="25" name="gitbandb">
+            <a:extLst>
+              <a:ext uri="{FF2B5EF4-FFF2-40B4-BE49-F238E27FC236}">
+                <a16:creationId xmlns:a16="http://schemas.microsoft.com/office/drawing/2014/main" id="{FA0E5640-74BD-4800-8CE7-3122CC206B65}"/>
+              </a:ext>
+            </a:extLst>
+          </p:cNvPr>
+          <p:cNvSpPr>
+            <a:spLocks noGrp="1"/>
+          </p:cNvSpPr>
+          <p:nvPr/>
+        </p:nvSpPr>
+        <p:spPr>
+          <a:xfrm>
+            <a:off x="1809750" y="5781675"/>
+            <a:ext cx="8572500" cy="266700"/>
+          </a:xfrm>
+          <a:prstGeom prst="rect">
+            <a:avLst/>
+          </a:prstGeom>
+          <a:noFill/>
+          <a:ln w="0">
+            <a:noFill/>
+            <a:prstDash val="solid"/>
+          </a:ln>
+        </p:spPr>
+        <p:txBody>
+          <a:bodyPr/>
+          <a:lstStyle/>
+          <a:p>
+            <a:pPr algn="ctr">
+              <a:defRPr sz="1500">
+                <a:solidFill>
+                  <a:srgbClr val="000000"/>
+                </a:solidFill>
+              </a:defRPr>
+            </a:pPr>
+            <a:r>
+              <a:rPr sz="2000" dirty="0">
+                <a:solidFill>
+                  <a:srgbClr val="000000"/>
+                </a:solidFill>
+              </a:rPr>
+              <a:t>Issues, commits, PRs, reviews, and merges show how the team worked.</a:t>
+            </a:r>
+          </a:p>
+        </p:txBody>
+      </p:sp>
+    </p:spTree>
+    <p:extLst>
+      <p:ext uri="{BB962C8B-B14F-4D97-AF65-F5344CB8AC3E}">
+        <p14:creationId xmlns:p14="http://schemas.microsoft.com/office/powerpoint/2010/main" val="1612546867"/>
+      </p:ext>
+    </p:extLst>
+  </p:cSld>
+  <p:clrMapOvr>
+    <a:masterClrMapping/>
+  </p:clrMapOvr>
+</p:sld>
+</file>
+
 <file path=ppt/slides/slide16.xml><?xml version="1.0" encoding="utf-8"?>
 <p:sld xmlns:a="http://schemas.openxmlformats.org/drawingml/2006/main" xmlns:r="http://schemas.openxmlformats.org/officeDocument/2006/relationships" xmlns:p="http://schemas.openxmlformats.org/presentationml/2006/main">
   <p:cSld>
@@ -14726,10 +14634,10 @@
       </p:grpSpPr>
       <p:sp>
         <p:nvSpPr>
-          <p:cNvPr id="26" name="title">
-            <a:extLst>
-              <a:ext uri="{FF2B5EF4-FFF2-40B4-BE49-F238E27FC236}">
-                <a16:creationId xmlns:a16="http://schemas.microsoft.com/office/drawing/2014/main" id="{CAC8877D-8692-4B39-AF09-82B4AD9D3650}"/>
+          <p:cNvPr id="17" name="title">
+            <a:extLst>
+              <a:ext uri="{FF2B5EF4-FFF2-40B4-BE49-F238E27FC236}">
+                <a16:creationId xmlns:a16="http://schemas.microsoft.com/office/drawing/2014/main" id="{C45C5D28-FD4F-4306-A3A4-034F2DBE95A2}"/>
               </a:ext>
             </a:extLst>
           </p:cNvPr>
@@ -14769,7 +14677,7 @@
                   <a:srgbClr val="1F4E79"/>
                 </a:solidFill>
               </a:rPr>
-              <a:t>Git and GitHub: A Shared Path from Task to Merge</a:t>
+              <a:t>Testing and CI: Three Questions Before We Merge</a:t>
             </a:r>
           </a:p>
         </p:txBody>
@@ -14779,7 +14687,7 @@
           <p:cNvPr id="2" name="subtitle">
             <a:extLst>
               <a:ext uri="{FF2B5EF4-FFF2-40B4-BE49-F238E27FC236}">
-                <a16:creationId xmlns:a16="http://schemas.microsoft.com/office/drawing/2014/main" id="{5A00E2FB-A5AC-445C-AC53-7E56D3C8F46E}"/>
+                <a16:creationId xmlns:a16="http://schemas.microsoft.com/office/drawing/2014/main" id="{76D65660-756B-4F06-A4BD-D692F8C6810D}"/>
               </a:ext>
             </a:extLst>
           </p:cNvPr>
@@ -14819,29 +14727,29 @@
                   <a:srgbClr val="000000"/>
                 </a:solidFill>
               </a:rPr>
-              <a:t>The workflow makes ownership, progress, and review visible.</a:t>
-            </a:r>
-          </a:p>
-        </p:txBody>
-      </p:sp>
-      <p:sp>
-        <p:nvSpPr>
-          <p:cNvPr id="3" name="gh0">
-            <a:extLst>
-              <a:ext uri="{FF2B5EF4-FFF2-40B4-BE49-F238E27FC236}">
-                <a16:creationId xmlns:a16="http://schemas.microsoft.com/office/drawing/2014/main" id="{6D1A8C43-639F-420C-98B3-51C18CF87D39}"/>
-              </a:ext>
-            </a:extLst>
-          </p:cNvPr>
-          <p:cNvSpPr>
-            <a:spLocks noGrp="1"/>
-          </p:cNvSpPr>
-          <p:nvPr/>
-        </p:nvSpPr>
-        <p:spPr>
-          <a:xfrm>
-            <a:off x="666750" y="1666875"/>
-            <a:ext cx="2667000" cy="400050"/>
+              <a:t>Each practice provides a different kind of evidence.</a:t>
+            </a:r>
+          </a:p>
+        </p:txBody>
+      </p:sp>
+      <p:sp>
+        <p:nvSpPr>
+          <p:cNvPr id="3" name="rh0">
+            <a:extLst>
+              <a:ext uri="{FF2B5EF4-FFF2-40B4-BE49-F238E27FC236}">
+                <a16:creationId xmlns:a16="http://schemas.microsoft.com/office/drawing/2014/main" id="{F84C7E52-A68A-4A4F-81EE-25834AF003AD}"/>
+              </a:ext>
+            </a:extLst>
+          </p:cNvPr>
+          <p:cNvSpPr>
+            <a:spLocks noGrp="1"/>
+          </p:cNvSpPr>
+          <p:nvPr/>
+        </p:nvSpPr>
+        <p:spPr>
+          <a:xfrm>
+            <a:off x="2381250" y="1790700"/>
+            <a:ext cx="2857500" cy="381000"/>
           </a:xfrm>
           <a:prstGeom prst="rect">
             <a:avLst/>
@@ -14856,7 +14764,7 @@
           <a:bodyPr/>
           <a:lstStyle/>
           <a:p>
-            <a:pPr algn="ctr">
+            <a:pPr>
               <a:defRPr sz="1800" b="1">
                 <a:solidFill>
                   <a:srgbClr val="1F4E79"/>
@@ -14864,34 +14772,34 @@
               </a:defRPr>
             </a:pPr>
             <a:r>
-              <a:rPr sz="2000" b="1" dirty="0">
+              <a:rPr sz="2200" b="1" dirty="0">
                 <a:solidFill>
                   <a:srgbClr val="1F4E79"/>
                 </a:solidFill>
               </a:rPr>
-              <a:t>ISSUE</a:t>
-            </a:r>
-          </a:p>
-        </p:txBody>
-      </p:sp>
-      <p:sp>
-        <p:nvSpPr>
-          <p:cNvPr id="4" name="gb0">
-            <a:extLst>
-              <a:ext uri="{FF2B5EF4-FFF2-40B4-BE49-F238E27FC236}">
-                <a16:creationId xmlns:a16="http://schemas.microsoft.com/office/drawing/2014/main" id="{08D06220-FD81-4197-86CE-63040B656171}"/>
-              </a:ext>
-            </a:extLst>
-          </p:cNvPr>
-          <p:cNvSpPr>
-            <a:spLocks noGrp="1"/>
-          </p:cNvSpPr>
-          <p:nvPr/>
-        </p:nvSpPr>
-        <p:spPr>
-          <a:xfrm>
-            <a:off x="809625" y="3743325"/>
-            <a:ext cx="2381250" cy="647700"/>
+              <a:t>DOES IT WORK?</a:t>
+            </a:r>
+          </a:p>
+        </p:txBody>
+      </p:sp>
+      <p:sp>
+        <p:nvSpPr>
+          <p:cNvPr id="4" name="rb0">
+            <a:extLst>
+              <a:ext uri="{FF2B5EF4-FFF2-40B4-BE49-F238E27FC236}">
+                <a16:creationId xmlns:a16="http://schemas.microsoft.com/office/drawing/2014/main" id="{82EE8CA5-FD2F-4988-A10F-A6D9D1780C0F}"/>
+              </a:ext>
+            </a:extLst>
+          </p:cNvPr>
+          <p:cNvSpPr>
+            <a:spLocks noGrp="1"/>
+          </p:cNvSpPr>
+          <p:nvPr/>
+        </p:nvSpPr>
+        <p:spPr>
+          <a:xfrm>
+            <a:off x="5286375" y="1790700"/>
+            <a:ext cx="5619750" cy="552450"/>
           </a:xfrm>
           <a:prstGeom prst="rect">
             <a:avLst/>
@@ -14906,7 +14814,7 @@
           <a:bodyPr/>
           <a:lstStyle/>
           <a:p>
-            <a:pPr algn="ctr">
+            <a:pPr>
               <a:defRPr sz="1500">
                 <a:solidFill>
                   <a:srgbClr val="000000"/>
@@ -14919,46 +14827,69 @@
                   <a:srgbClr val="000000"/>
                 </a:solidFill>
               </a:rPr>
-              <a:t>Agree on the task</a:t>
-            </a:r>
-          </a:p>
-          <a:p>
-            <a:pPr algn="ctr">
-              <a:defRPr sz="1500">
-                <a:solidFill>
-                  <a:srgbClr val="000000"/>
-                </a:solidFill>
-              </a:defRPr>
-            </a:pPr>
-            <a:r>
-              <a:rPr sz="2000" dirty="0">
-                <a:solidFill>
-                  <a:srgbClr val="000000"/>
-                </a:solidFill>
-              </a:rPr>
-              <a:t>and ownership</a:t>
-            </a:r>
-          </a:p>
-        </p:txBody>
-      </p:sp>
-      <p:sp>
-        <p:nvSpPr>
-          <p:cNvPr id="5" name="arrow0">
-            <a:extLst>
-              <a:ext uri="{FF2B5EF4-FFF2-40B4-BE49-F238E27FC236}">
-                <a16:creationId xmlns:a16="http://schemas.microsoft.com/office/drawing/2014/main" id="{968E19D2-CB37-4E32-ADBA-23EBDF635F6A}"/>
-              </a:ext>
-            </a:extLst>
-          </p:cNvPr>
-          <p:cNvSpPr>
-            <a:spLocks noGrp="1"/>
-          </p:cNvSpPr>
-          <p:nvPr/>
-        </p:nvSpPr>
-        <p:spPr>
-          <a:xfrm>
-            <a:off x="3238500" y="2714625"/>
-            <a:ext cx="381000" cy="419100"/>
+              <a:t>Write tests for expected behavior and important edge cases.</a:t>
+            </a:r>
+          </a:p>
+        </p:txBody>
+      </p:sp>
+      <p:sp>
+        <p:nvSpPr>
+          <p:cNvPr id="5" name="sep0">
+            <a:extLst>
+              <a:ext uri="{FF2B5EF4-FFF2-40B4-BE49-F238E27FC236}">
+                <a16:creationId xmlns:a16="http://schemas.microsoft.com/office/drawing/2014/main" id="{100DED03-F279-4037-B936-289DD4D2CB4A}"/>
+              </a:ext>
+            </a:extLst>
+          </p:cNvPr>
+          <p:cNvSpPr>
+            <a:spLocks noGrp="1"/>
+          </p:cNvSpPr>
+          <p:nvPr/>
+        </p:nvSpPr>
+        <p:spPr>
+          <a:xfrm>
+            <a:off x="2381250" y="2581275"/>
+            <a:ext cx="8524875" cy="19050"/>
+          </a:xfrm>
+          <a:prstGeom prst="rect">
+            <a:avLst/>
+          </a:prstGeom>
+          <a:solidFill>
+            <a:srgbClr val="D9E2E8"/>
+          </a:solidFill>
+          <a:ln w="0">
+            <a:solidFill>
+              <a:srgbClr val="D9E2E8"/>
+            </a:solidFill>
+            <a:prstDash val="solid"/>
+          </a:ln>
+        </p:spPr>
+        <p:txBody>
+          <a:bodyPr/>
+          <a:lstStyle/>
+          <a:p>
+            <a:endParaRPr lang="en-US"/>
+          </a:p>
+        </p:txBody>
+      </p:sp>
+      <p:sp>
+        <p:nvSpPr>
+          <p:cNvPr id="6" name="rh1">
+            <a:extLst>
+              <a:ext uri="{FF2B5EF4-FFF2-40B4-BE49-F238E27FC236}">
+                <a16:creationId xmlns:a16="http://schemas.microsoft.com/office/drawing/2014/main" id="{79D07BAA-5E90-4FE0-A7DA-AB0E5A77DDEF}"/>
+              </a:ext>
+            </a:extLst>
+          </p:cNvPr>
+          <p:cNvSpPr>
+            <a:spLocks noGrp="1"/>
+          </p:cNvSpPr>
+          <p:nvPr/>
+        </p:nvSpPr>
+        <p:spPr>
+          <a:xfrm>
+            <a:off x="2381250" y="2933700"/>
+            <a:ext cx="2857500" cy="381000"/>
           </a:xfrm>
           <a:prstGeom prst="rect">
             <a:avLst/>
@@ -14973,42 +14904,42 @@
           <a:bodyPr/>
           <a:lstStyle/>
           <a:p>
-            <a:pPr algn="ctr">
-              <a:defRPr sz="2100" b="1">
-                <a:solidFill>
-                  <a:srgbClr val="D9E2E8"/>
+            <a:pPr>
+              <a:defRPr sz="1800" b="1">
+                <a:solidFill>
+                  <a:srgbClr val="008C95"/>
                 </a:solidFill>
               </a:defRPr>
             </a:pPr>
             <a:r>
-              <a:rPr sz="2100" b="1">
-                <a:solidFill>
-                  <a:srgbClr val="D9E2E8"/>
+              <a:rPr sz="2200" b="1" dirty="0">
+                <a:solidFill>
+                  <a:srgbClr val="008C95"/>
                 </a:solidFill>
               </a:rPr>
-              <a:t>→</a:t>
-            </a:r>
-          </a:p>
-        </p:txBody>
-      </p:sp>
-      <p:sp>
-        <p:nvSpPr>
-          <p:cNvPr id="6" name="gh1">
-            <a:extLst>
-              <a:ext uri="{FF2B5EF4-FFF2-40B4-BE49-F238E27FC236}">
-                <a16:creationId xmlns:a16="http://schemas.microsoft.com/office/drawing/2014/main" id="{AC024BB6-9893-4A38-AC6F-D403CC79963F}"/>
-              </a:ext>
-            </a:extLst>
-          </p:cNvPr>
-          <p:cNvSpPr>
-            <a:spLocks noGrp="1"/>
-          </p:cNvSpPr>
-          <p:nvPr/>
-        </p:nvSpPr>
-        <p:spPr>
-          <a:xfrm>
-            <a:off x="3333750" y="1666875"/>
-            <a:ext cx="2667000" cy="400050"/>
+              <a:t>WHAT IS UNTESTED?</a:t>
+            </a:r>
+          </a:p>
+        </p:txBody>
+      </p:sp>
+      <p:sp>
+        <p:nvSpPr>
+          <p:cNvPr id="7" name="rb1">
+            <a:extLst>
+              <a:ext uri="{FF2B5EF4-FFF2-40B4-BE49-F238E27FC236}">
+                <a16:creationId xmlns:a16="http://schemas.microsoft.com/office/drawing/2014/main" id="{D4C56E0B-733E-488C-8F87-FD7C136D7B90}"/>
+              </a:ext>
+            </a:extLst>
+          </p:cNvPr>
+          <p:cNvSpPr>
+            <a:spLocks noGrp="1"/>
+          </p:cNvSpPr>
+          <p:nvPr/>
+        </p:nvSpPr>
+        <p:spPr>
+          <a:xfrm>
+            <a:off x="5286375" y="2933700"/>
+            <a:ext cx="5619750" cy="552450"/>
           </a:xfrm>
           <a:prstGeom prst="rect">
             <a:avLst/>
@@ -15023,42 +14954,82 @@
           <a:bodyPr/>
           <a:lstStyle/>
           <a:p>
-            <a:pPr algn="ctr">
-              <a:defRPr sz="1800" b="1">
-                <a:solidFill>
-                  <a:srgbClr val="008C95"/>
+            <a:pPr>
+              <a:defRPr sz="1500">
+                <a:solidFill>
+                  <a:srgbClr val="000000"/>
                 </a:solidFill>
               </a:defRPr>
             </a:pPr>
             <a:r>
-              <a:rPr sz="2000" b="1" dirty="0">
-                <a:solidFill>
-                  <a:srgbClr val="008C95"/>
+              <a:rPr sz="2000" dirty="0">
+                <a:solidFill>
+                  <a:srgbClr val="000000"/>
                 </a:solidFill>
               </a:rPr>
-              <a:t>BRANCH + COMMITS</a:t>
-            </a:r>
-          </a:p>
-        </p:txBody>
-      </p:sp>
-      <p:sp>
-        <p:nvSpPr>
-          <p:cNvPr id="7" name="gb1">
-            <a:extLst>
-              <a:ext uri="{FF2B5EF4-FFF2-40B4-BE49-F238E27FC236}">
-                <a16:creationId xmlns:a16="http://schemas.microsoft.com/office/drawing/2014/main" id="{F385DECF-1B0F-4206-B9E0-AE1FBADAA088}"/>
-              </a:ext>
-            </a:extLst>
-          </p:cNvPr>
-          <p:cNvSpPr>
-            <a:spLocks noGrp="1"/>
-          </p:cNvSpPr>
-          <p:nvPr/>
-        </p:nvSpPr>
-        <p:spPr>
-          <a:xfrm>
-            <a:off x="3476625" y="3743325"/>
-            <a:ext cx="2381250" cy="647700"/>
+              <a:t>Use coverage to find important code the tests do not exercise.</a:t>
+            </a:r>
+          </a:p>
+        </p:txBody>
+      </p:sp>
+      <p:sp>
+        <p:nvSpPr>
+          <p:cNvPr id="8" name="sep1">
+            <a:extLst>
+              <a:ext uri="{FF2B5EF4-FFF2-40B4-BE49-F238E27FC236}">
+                <a16:creationId xmlns:a16="http://schemas.microsoft.com/office/drawing/2014/main" id="{9970290D-2C2B-47EE-8378-A01CCEF3ABA0}"/>
+              </a:ext>
+            </a:extLst>
+          </p:cNvPr>
+          <p:cNvSpPr>
+            <a:spLocks noGrp="1"/>
+          </p:cNvSpPr>
+          <p:nvPr/>
+        </p:nvSpPr>
+        <p:spPr>
+          <a:xfrm>
+            <a:off x="2381250" y="3724275"/>
+            <a:ext cx="8524875" cy="19050"/>
+          </a:xfrm>
+          <a:prstGeom prst="rect">
+            <a:avLst/>
+          </a:prstGeom>
+          <a:solidFill>
+            <a:srgbClr val="D9E2E8"/>
+          </a:solidFill>
+          <a:ln w="0">
+            <a:solidFill>
+              <a:srgbClr val="D9E2E8"/>
+            </a:solidFill>
+            <a:prstDash val="solid"/>
+          </a:ln>
+        </p:spPr>
+        <p:txBody>
+          <a:bodyPr/>
+          <a:lstStyle/>
+          <a:p>
+            <a:endParaRPr lang="en-US"/>
+          </a:p>
+        </p:txBody>
+      </p:sp>
+      <p:sp>
+        <p:nvSpPr>
+          <p:cNvPr id="9" name="rh2">
+            <a:extLst>
+              <a:ext uri="{FF2B5EF4-FFF2-40B4-BE49-F238E27FC236}">
+                <a16:creationId xmlns:a16="http://schemas.microsoft.com/office/drawing/2014/main" id="{7739F007-52B9-4D4B-B495-98FE21331850}"/>
+              </a:ext>
+            </a:extLst>
+          </p:cNvPr>
+          <p:cNvSpPr>
+            <a:spLocks noGrp="1"/>
+          </p:cNvSpPr>
+          <p:nvPr/>
+        </p:nvSpPr>
+        <p:spPr>
+          <a:xfrm>
+            <a:off x="2381250" y="4076700"/>
+            <a:ext cx="2857500" cy="381000"/>
           </a:xfrm>
           <a:prstGeom prst="rect">
             <a:avLst/>
@@ -15073,59 +15044,42 @@
           <a:bodyPr/>
           <a:lstStyle/>
           <a:p>
-            <a:pPr algn="ctr">
-              <a:defRPr sz="1500">
-                <a:solidFill>
-                  <a:srgbClr val="000000"/>
+            <a:pPr>
+              <a:defRPr sz="1800" b="1">
+                <a:solidFill>
+                  <a:srgbClr val="1F4E79"/>
                 </a:solidFill>
               </a:defRPr>
             </a:pPr>
             <a:r>
-              <a:rPr sz="2000" dirty="0">
-                <a:solidFill>
-                  <a:srgbClr val="000000"/>
+              <a:rPr sz="2200" b="1" dirty="0">
+                <a:solidFill>
+                  <a:srgbClr val="1F4E79"/>
                 </a:solidFill>
               </a:rPr>
-              <a:t>Develop a focused</a:t>
-            </a:r>
-          </a:p>
-          <a:p>
-            <a:pPr algn="ctr">
-              <a:defRPr sz="1500">
-                <a:solidFill>
-                  <a:srgbClr val="000000"/>
-                </a:solidFill>
-              </a:defRPr>
-            </a:pPr>
-            <a:r>
-              <a:rPr sz="2000" dirty="0">
-                <a:solidFill>
-                  <a:srgbClr val="000000"/>
-                </a:solidFill>
-              </a:rPr>
-              <a:t>change</a:t>
-            </a:r>
-          </a:p>
-        </p:txBody>
-      </p:sp>
-      <p:sp>
-        <p:nvSpPr>
-          <p:cNvPr id="8" name="arrow1">
-            <a:extLst>
-              <a:ext uri="{FF2B5EF4-FFF2-40B4-BE49-F238E27FC236}">
-                <a16:creationId xmlns:a16="http://schemas.microsoft.com/office/drawing/2014/main" id="{48B0A54F-D6A8-4A90-9B99-19ABCBBEF5B7}"/>
-              </a:ext>
-            </a:extLst>
-          </p:cNvPr>
-          <p:cNvSpPr>
-            <a:spLocks noGrp="1"/>
-          </p:cNvSpPr>
-          <p:nvPr/>
-        </p:nvSpPr>
-        <p:spPr>
-          <a:xfrm>
-            <a:off x="5905500" y="2714625"/>
-            <a:ext cx="381000" cy="419100"/>
+              <a:t>WILL IT STAY CHECKED?</a:t>
+            </a:r>
+          </a:p>
+        </p:txBody>
+      </p:sp>
+      <p:sp>
+        <p:nvSpPr>
+          <p:cNvPr id="10" name="rb2">
+            <a:extLst>
+              <a:ext uri="{FF2B5EF4-FFF2-40B4-BE49-F238E27FC236}">
+                <a16:creationId xmlns:a16="http://schemas.microsoft.com/office/drawing/2014/main" id="{2598A10D-4012-4808-8BBF-ED3DDF4AAA35}"/>
+              </a:ext>
+            </a:extLst>
+          </p:cNvPr>
+          <p:cNvSpPr>
+            <a:spLocks noGrp="1"/>
+          </p:cNvSpPr>
+          <p:nvPr/>
+        </p:nvSpPr>
+        <p:spPr>
+          <a:xfrm>
+            <a:off x="5286375" y="4076700"/>
+            <a:ext cx="5619750" cy="552450"/>
           </a:xfrm>
           <a:prstGeom prst="rect">
             <a:avLst/>
@@ -15140,311 +15094,27 @@
           <a:bodyPr/>
           <a:lstStyle/>
           <a:p>
-            <a:pPr algn="ctr">
-              <a:defRPr sz="2100" b="1">
-                <a:solidFill>
-                  <a:srgbClr val="D9E2E8"/>
+            <a:pPr>
+              <a:defRPr sz="1500">
+                <a:solidFill>
+                  <a:srgbClr val="000000"/>
                 </a:solidFill>
               </a:defRPr>
             </a:pPr>
             <a:r>
-              <a:rPr sz="2100" b="1">
-                <a:solidFill>
-                  <a:srgbClr val="D9E2E8"/>
+              <a:rPr sz="2000" dirty="0">
+                <a:solidFill>
+                  <a:srgbClr val="000000"/>
                 </a:solidFill>
               </a:rPr>
-              <a:t>→</a:t>
-            </a:r>
-          </a:p>
-        </p:txBody>
-      </p:sp>
-      <p:sp>
-        <p:nvSpPr>
-          <p:cNvPr id="9" name="gh2">
-            <a:extLst>
-              <a:ext uri="{FF2B5EF4-FFF2-40B4-BE49-F238E27FC236}">
-                <a16:creationId xmlns:a16="http://schemas.microsoft.com/office/drawing/2014/main" id="{C8B1C6A3-59AB-4378-A85C-DA70AC887DE4}"/>
-              </a:ext>
-            </a:extLst>
-          </p:cNvPr>
-          <p:cNvSpPr>
-            <a:spLocks noGrp="1"/>
-          </p:cNvSpPr>
-          <p:nvPr/>
-        </p:nvSpPr>
-        <p:spPr>
-          <a:xfrm>
-            <a:off x="6191250" y="1666875"/>
-            <a:ext cx="2667000" cy="400050"/>
-          </a:xfrm>
-          <a:prstGeom prst="rect">
-            <a:avLst/>
-          </a:prstGeom>
-          <a:noFill/>
-          <a:ln w="0">
-            <a:noFill/>
-            <a:prstDash val="solid"/>
-          </a:ln>
-        </p:spPr>
-        <p:txBody>
-          <a:bodyPr/>
-          <a:lstStyle/>
-          <a:p>
-            <a:pPr algn="ctr">
-              <a:defRPr sz="1800" b="1">
-                <a:solidFill>
-                  <a:srgbClr val="1F4E79"/>
-                </a:solidFill>
-              </a:defRPr>
-            </a:pPr>
-            <a:r>
-              <a:rPr sz="2000" b="1" dirty="0">
-                <a:solidFill>
-                  <a:srgbClr val="1F4E79"/>
-                </a:solidFill>
-              </a:rPr>
-              <a:t>PULL REQUEST</a:t>
-            </a:r>
-          </a:p>
-        </p:txBody>
-      </p:sp>
-      <p:sp>
-        <p:nvSpPr>
-          <p:cNvPr id="10" name="gb2">
-            <a:extLst>
-              <a:ext uri="{FF2B5EF4-FFF2-40B4-BE49-F238E27FC236}">
-                <a16:creationId xmlns:a16="http://schemas.microsoft.com/office/drawing/2014/main" id="{978A1F63-0861-4A63-985E-154D95A56819}"/>
-              </a:ext>
-            </a:extLst>
-          </p:cNvPr>
-          <p:cNvSpPr>
-            <a:spLocks noGrp="1"/>
-          </p:cNvSpPr>
-          <p:nvPr/>
-        </p:nvSpPr>
-        <p:spPr>
-          <a:xfrm>
-            <a:off x="6334125" y="3743325"/>
-            <a:ext cx="2381250" cy="647700"/>
-          </a:xfrm>
-          <a:prstGeom prst="rect">
-            <a:avLst/>
-          </a:prstGeom>
-          <a:noFill/>
-          <a:ln w="0">
-            <a:noFill/>
-            <a:prstDash val="solid"/>
-          </a:ln>
-        </p:spPr>
-        <p:txBody>
-          <a:bodyPr/>
-          <a:lstStyle/>
-          <a:p>
-            <a:pPr algn="ctr">
-              <a:defRPr sz="1500">
-                <a:solidFill>
-                  <a:srgbClr val="000000"/>
-                </a:solidFill>
-              </a:defRPr>
-            </a:pPr>
-            <a:r>
-              <a:rPr sz="2000" dirty="0">
-                <a:solidFill>
-                  <a:srgbClr val="000000"/>
-                </a:solidFill>
-              </a:rPr>
-              <a:t>Explain the change</a:t>
-            </a:r>
-          </a:p>
-          <a:p>
-            <a:pPr algn="ctr">
-              <a:defRPr sz="1500">
-                <a:solidFill>
-                  <a:srgbClr val="000000"/>
-                </a:solidFill>
-              </a:defRPr>
-            </a:pPr>
-            <a:r>
-              <a:rPr sz="2000" dirty="0">
-                <a:solidFill>
-                  <a:srgbClr val="000000"/>
-                </a:solidFill>
-              </a:rPr>
-              <a:t>and request review</a:t>
-            </a:r>
-          </a:p>
-        </p:txBody>
-      </p:sp>
-      <p:sp>
-        <p:nvSpPr>
-          <p:cNvPr id="11" name="arrow2">
-            <a:extLst>
-              <a:ext uri="{FF2B5EF4-FFF2-40B4-BE49-F238E27FC236}">
-                <a16:creationId xmlns:a16="http://schemas.microsoft.com/office/drawing/2014/main" id="{9BB9FA6A-C079-47E5-BBB1-3160CE1AAC76}"/>
-              </a:ext>
-            </a:extLst>
-          </p:cNvPr>
-          <p:cNvSpPr>
-            <a:spLocks noGrp="1"/>
-          </p:cNvSpPr>
-          <p:nvPr/>
-        </p:nvSpPr>
-        <p:spPr>
-          <a:xfrm>
-            <a:off x="8763000" y="2714625"/>
-            <a:ext cx="381000" cy="419100"/>
-          </a:xfrm>
-          <a:prstGeom prst="rect">
-            <a:avLst/>
-          </a:prstGeom>
-          <a:noFill/>
-          <a:ln w="0">
-            <a:noFill/>
-            <a:prstDash val="solid"/>
-          </a:ln>
-        </p:spPr>
-        <p:txBody>
-          <a:bodyPr/>
-          <a:lstStyle/>
-          <a:p>
-            <a:pPr algn="ctr">
-              <a:defRPr sz="2100" b="1">
-                <a:solidFill>
-                  <a:srgbClr val="D9E2E8"/>
-                </a:solidFill>
-              </a:defRPr>
-            </a:pPr>
-            <a:r>
-              <a:rPr sz="2100" b="1">
-                <a:solidFill>
-                  <a:srgbClr val="D9E2E8"/>
-                </a:solidFill>
-              </a:rPr>
-              <a:t>→</a:t>
-            </a:r>
-          </a:p>
-        </p:txBody>
-      </p:sp>
-      <p:sp>
-        <p:nvSpPr>
-          <p:cNvPr id="12" name="gh3">
-            <a:extLst>
-              <a:ext uri="{FF2B5EF4-FFF2-40B4-BE49-F238E27FC236}">
-                <a16:creationId xmlns:a16="http://schemas.microsoft.com/office/drawing/2014/main" id="{64272012-AABD-46D0-9B42-2D9599BA1CD6}"/>
-              </a:ext>
-            </a:extLst>
-          </p:cNvPr>
-          <p:cNvSpPr>
-            <a:spLocks noGrp="1"/>
-          </p:cNvSpPr>
-          <p:nvPr/>
-        </p:nvSpPr>
-        <p:spPr>
-          <a:xfrm>
-            <a:off x="8953500" y="1666875"/>
-            <a:ext cx="2667000" cy="400050"/>
-          </a:xfrm>
-          <a:prstGeom prst="rect">
-            <a:avLst/>
-          </a:prstGeom>
-          <a:noFill/>
-          <a:ln w="0">
-            <a:noFill/>
-            <a:prstDash val="solid"/>
-          </a:ln>
-        </p:spPr>
-        <p:txBody>
-          <a:bodyPr/>
-          <a:lstStyle/>
-          <a:p>
-            <a:pPr algn="ctr">
-              <a:defRPr sz="1800" b="1">
-                <a:solidFill>
-                  <a:srgbClr val="008C95"/>
-                </a:solidFill>
-              </a:defRPr>
-            </a:pPr>
-            <a:r>
-              <a:rPr sz="2000" b="1" dirty="0">
-                <a:solidFill>
-                  <a:srgbClr val="008C95"/>
-                </a:solidFill>
-              </a:rPr>
-              <a:t>REVIEW + MERGE</a:t>
-            </a:r>
-          </a:p>
-        </p:txBody>
-      </p:sp>
-      <p:sp>
-        <p:nvSpPr>
-          <p:cNvPr id="13" name="gb3">
-            <a:extLst>
-              <a:ext uri="{FF2B5EF4-FFF2-40B4-BE49-F238E27FC236}">
-                <a16:creationId xmlns:a16="http://schemas.microsoft.com/office/drawing/2014/main" id="{5ED1EE1C-295E-448E-A714-841772606EB3}"/>
-              </a:ext>
-            </a:extLst>
-          </p:cNvPr>
-          <p:cNvSpPr>
-            <a:spLocks noGrp="1"/>
-          </p:cNvSpPr>
-          <p:nvPr/>
-        </p:nvSpPr>
-        <p:spPr>
-          <a:xfrm>
-            <a:off x="9096375" y="3743325"/>
-            <a:ext cx="2381250" cy="647700"/>
-          </a:xfrm>
-          <a:prstGeom prst="rect">
-            <a:avLst/>
-          </a:prstGeom>
-          <a:noFill/>
-          <a:ln w="0">
-            <a:noFill/>
-            <a:prstDash val="solid"/>
-          </a:ln>
-        </p:spPr>
-        <p:txBody>
-          <a:bodyPr/>
-          <a:lstStyle/>
-          <a:p>
-            <a:pPr algn="ctr">
-              <a:defRPr sz="1500">
-                <a:solidFill>
-                  <a:srgbClr val="000000"/>
-                </a:solidFill>
-              </a:defRPr>
-            </a:pPr>
-            <a:r>
-              <a:rPr sz="2000" dirty="0">
-                <a:solidFill>
-                  <a:srgbClr val="000000"/>
-                </a:solidFill>
-              </a:rPr>
-              <a:t>Improve it before</a:t>
-            </a:r>
-          </a:p>
-          <a:p>
-            <a:pPr algn="ctr">
-              <a:defRPr sz="1500">
-                <a:solidFill>
-                  <a:srgbClr val="000000"/>
-                </a:solidFill>
-              </a:defRPr>
-            </a:pPr>
-            <a:r>
-              <a:rPr sz="2000" dirty="0">
-                <a:solidFill>
-                  <a:srgbClr val="000000"/>
-                </a:solidFill>
-              </a:rPr>
-              <a:t>it reaches main</a:t>
+              <a:t>Use CI to run tests and quality checks on every pull request.</a:t>
             </a:r>
           </a:p>
         </p:txBody>
       </p:sp>
       <p:pic>
         <p:nvPicPr>
-          <p:cNvPr id="39" name="Picture 38"/>
+          <p:cNvPr id="27" name="Picture 26"/>
           <p:cNvPicPr>
             <a:picLocks noChangeAspect="1"/>
           </p:cNvPicPr>
@@ -15456,8 +15126,8 @@
         </p:blipFill>
         <p:spPr>
           <a:xfrm>
-            <a:off x="1381125" y="2385810"/>
-            <a:ext cx="1143000" cy="705255"/>
+            <a:off x="1095375" y="1736217"/>
+            <a:ext cx="876300" cy="718566"/>
           </a:xfrm>
           <a:prstGeom prst="rect">
             <a:avLst/>
@@ -15466,7 +15136,7 @@
       </p:pic>
       <p:pic>
         <p:nvPicPr>
-          <p:cNvPr id="40" name="Picture 39"/>
+          <p:cNvPr id="28" name="Picture 27"/>
           <p:cNvPicPr>
             <a:picLocks noChangeAspect="1"/>
           </p:cNvPicPr>
@@ -15478,175 +15148,17 @@
         </p:blipFill>
         <p:spPr>
           <a:xfrm>
-            <a:off x="4183784" y="2190750"/>
-            <a:ext cx="1062182" cy="1095375"/>
+            <a:off x="1104900" y="2828925"/>
+            <a:ext cx="857250" cy="857250"/>
           </a:xfrm>
           <a:prstGeom prst="rect">
             <a:avLst/>
           </a:prstGeom>
         </p:spPr>
       </p:pic>
-      <p:sp>
-        <p:nvSpPr>
-          <p:cNvPr id="16" name="commit-line">
-            <a:extLst>
-              <a:ext uri="{FF2B5EF4-FFF2-40B4-BE49-F238E27FC236}">
-                <a16:creationId xmlns:a16="http://schemas.microsoft.com/office/drawing/2014/main" id="{D0E352E8-FE3E-4179-9E73-CBA36EE64DAB}"/>
-              </a:ext>
-            </a:extLst>
-          </p:cNvPr>
-          <p:cNvSpPr>
-            <a:spLocks noGrp="1"/>
-          </p:cNvSpPr>
-          <p:nvPr/>
-        </p:nvSpPr>
-        <p:spPr>
-          <a:xfrm>
-            <a:off x="4362450" y="3381375"/>
-            <a:ext cx="714375" cy="0"/>
-          </a:xfrm>
-          <a:prstGeom prst="line">
-            <a:avLst/>
-          </a:prstGeom>
-          <a:noFill/>
-          <a:ln w="19050">
-            <a:solidFill>
-              <a:srgbClr val="000000"/>
-            </a:solidFill>
-            <a:prstDash val="solid"/>
-          </a:ln>
-        </p:spPr>
-        <p:txBody>
-          <a:bodyPr/>
-          <a:lstStyle/>
-          <a:p>
-            <a:endParaRPr lang="en-US"/>
-          </a:p>
-        </p:txBody>
-      </p:sp>
-      <p:sp>
-        <p:nvSpPr>
-          <p:cNvPr id="17" name="commit-dot-0">
-            <a:extLst>
-              <a:ext uri="{FF2B5EF4-FFF2-40B4-BE49-F238E27FC236}">
-                <a16:creationId xmlns:a16="http://schemas.microsoft.com/office/drawing/2014/main" id="{B89BCABF-8A3B-421E-807E-BF4201004D2F}"/>
-              </a:ext>
-            </a:extLst>
-          </p:cNvPr>
-          <p:cNvSpPr>
-            <a:spLocks noGrp="1"/>
-          </p:cNvSpPr>
-          <p:nvPr/>
-        </p:nvSpPr>
-        <p:spPr>
-          <a:xfrm>
-            <a:off x="4305300" y="3324225"/>
-            <a:ext cx="114300" cy="114300"/>
-          </a:xfrm>
-          <a:prstGeom prst="ellipse">
-            <a:avLst/>
-          </a:prstGeom>
-          <a:solidFill>
-            <a:srgbClr val="000000"/>
-          </a:solidFill>
-          <a:ln w="0">
-            <a:solidFill>
-              <a:srgbClr val="000000"/>
-            </a:solidFill>
-            <a:prstDash val="solid"/>
-          </a:ln>
-        </p:spPr>
-        <p:txBody>
-          <a:bodyPr/>
-          <a:lstStyle/>
-          <a:p>
-            <a:endParaRPr lang="en-US"/>
-          </a:p>
-        </p:txBody>
-      </p:sp>
-      <p:sp>
-        <p:nvSpPr>
-          <p:cNvPr id="18" name="commit-dot-1">
-            <a:extLst>
-              <a:ext uri="{FF2B5EF4-FFF2-40B4-BE49-F238E27FC236}">
-                <a16:creationId xmlns:a16="http://schemas.microsoft.com/office/drawing/2014/main" id="{D227963A-3749-4FC1-9E3A-FC9A7FB69A1E}"/>
-              </a:ext>
-            </a:extLst>
-          </p:cNvPr>
-          <p:cNvSpPr>
-            <a:spLocks noGrp="1"/>
-          </p:cNvSpPr>
-          <p:nvPr/>
-        </p:nvSpPr>
-        <p:spPr>
-          <a:xfrm>
-            <a:off x="4657725" y="3324225"/>
-            <a:ext cx="114300" cy="114300"/>
-          </a:xfrm>
-          <a:prstGeom prst="ellipse">
-            <a:avLst/>
-          </a:prstGeom>
-          <a:solidFill>
-            <a:srgbClr val="000000"/>
-          </a:solidFill>
-          <a:ln w="0">
-            <a:solidFill>
-              <a:srgbClr val="000000"/>
-            </a:solidFill>
-            <a:prstDash val="solid"/>
-          </a:ln>
-        </p:spPr>
-        <p:txBody>
-          <a:bodyPr/>
-          <a:lstStyle/>
-          <a:p>
-            <a:endParaRPr lang="en-US"/>
-          </a:p>
-        </p:txBody>
-      </p:sp>
-      <p:sp>
-        <p:nvSpPr>
-          <p:cNvPr id="19" name="commit-dot-2">
-            <a:extLst>
-              <a:ext uri="{FF2B5EF4-FFF2-40B4-BE49-F238E27FC236}">
-                <a16:creationId xmlns:a16="http://schemas.microsoft.com/office/drawing/2014/main" id="{26E097A4-E4F4-4956-A6E5-9CAB5BC027D5}"/>
-              </a:ext>
-            </a:extLst>
-          </p:cNvPr>
-          <p:cNvSpPr>
-            <a:spLocks noGrp="1"/>
-          </p:cNvSpPr>
-          <p:nvPr/>
-        </p:nvSpPr>
-        <p:spPr>
-          <a:xfrm>
-            <a:off x="5019675" y="3324225"/>
-            <a:ext cx="114300" cy="114300"/>
-          </a:xfrm>
-          <a:prstGeom prst="ellipse">
-            <a:avLst/>
-          </a:prstGeom>
-          <a:solidFill>
-            <a:srgbClr val="000000"/>
-          </a:solidFill>
-          <a:ln w="0">
-            <a:solidFill>
-              <a:srgbClr val="000000"/>
-            </a:solidFill>
-            <a:prstDash val="solid"/>
-          </a:ln>
-        </p:spPr>
-        <p:txBody>
-          <a:bodyPr/>
-          <a:lstStyle/>
-          <a:p>
-            <a:endParaRPr lang="en-US"/>
-          </a:p>
-        </p:txBody>
-      </p:sp>
       <p:pic>
         <p:nvPicPr>
-          <p:cNvPr id="45" name="Picture 44"/>
+          <p:cNvPr id="29" name="Picture 28"/>
           <p:cNvPicPr>
             <a:picLocks noChangeAspect="1"/>
           </p:cNvPicPr>
@@ -15658,64 +15170,20 @@
         </p:blipFill>
         <p:spPr>
           <a:xfrm>
-            <a:off x="6929438" y="2190750"/>
-            <a:ext cx="1095375" cy="1095375"/>
+            <a:off x="1000125" y="3970564"/>
+            <a:ext cx="1066800" cy="783771"/>
           </a:xfrm>
           <a:prstGeom prst="rect">
             <a:avLst/>
           </a:prstGeom>
         </p:spPr>
       </p:pic>
-      <p:pic>
-        <p:nvPicPr>
-          <p:cNvPr id="46" name="Picture 45"/>
-          <p:cNvPicPr>
-            <a:picLocks noChangeAspect="1"/>
-          </p:cNvPicPr>
-          <p:nvPr/>
-        </p:nvPicPr>
-        <p:blipFill>
-          <a:blip r:embed="rId6"/>
-          <a:stretch/>
-        </p:blipFill>
-        <p:spPr>
-          <a:xfrm>
-            <a:off x="9382125" y="2238375"/>
-            <a:ext cx="876300" cy="876300"/>
-          </a:xfrm>
-          <a:prstGeom prst="rect">
-            <a:avLst/>
-          </a:prstGeom>
-        </p:spPr>
-      </p:pic>
-      <p:pic>
-        <p:nvPicPr>
-          <p:cNvPr id="47" name="Picture 46"/>
-          <p:cNvPicPr>
-            <a:picLocks noChangeAspect="1"/>
-          </p:cNvPicPr>
-          <p:nvPr/>
-        </p:nvPicPr>
-        <p:blipFill>
-          <a:blip r:embed="rId7"/>
-          <a:stretch/>
-        </p:blipFill>
-        <p:spPr>
-          <a:xfrm>
-            <a:off x="10334625" y="2238375"/>
-            <a:ext cx="876300" cy="876300"/>
-          </a:xfrm>
-          <a:prstGeom prst="rect">
-            <a:avLst/>
-          </a:prstGeom>
-        </p:spPr>
-      </p:pic>
-      <p:sp>
-        <p:nvSpPr>
-          <p:cNvPr id="23" name="gitband">
-            <a:extLst>
-              <a:ext uri="{FF2B5EF4-FFF2-40B4-BE49-F238E27FC236}">
-                <a16:creationId xmlns:a16="http://schemas.microsoft.com/office/drawing/2014/main" id="{08DFEE6B-A097-4ECE-8CB7-6D6ACA296464}"/>
+      <p:sp>
+        <p:nvSpPr>
+          <p:cNvPr id="14" name="testband">
+            <a:extLst>
+              <a:ext uri="{FF2B5EF4-FFF2-40B4-BE49-F238E27FC236}">
+                <a16:creationId xmlns:a16="http://schemas.microsoft.com/office/drawing/2014/main" id="{6A799A53-366A-4704-A933-BAC9317D4BC8}"/>
               </a:ext>
             </a:extLst>
           </p:cNvPr>
@@ -15735,11 +15203,11 @@
             </a:avLst>
           </a:prstGeom>
           <a:solidFill>
-            <a:srgbClr val="EAF2F8"/>
+            <a:srgbClr val="FFF2E8"/>
           </a:solidFill>
           <a:ln w="9525">
             <a:solidFill>
-              <a:srgbClr val="C9DDEA"/>
+              <a:srgbClr val="F0C7A7"/>
             </a:solidFill>
             <a:prstDash val="solid"/>
           </a:ln>
@@ -15754,10 +15222,10 @@
       </p:sp>
       <p:sp>
         <p:nvSpPr>
-          <p:cNvPr id="24" name="gitbandh">
-            <a:extLst>
-              <a:ext uri="{FF2B5EF4-FFF2-40B4-BE49-F238E27FC236}">
-                <a16:creationId xmlns:a16="http://schemas.microsoft.com/office/drawing/2014/main" id="{400B9181-067C-4FA0-ACC0-C2133B2128C1}"/>
+          <p:cNvPr id="15" name="testbandh">
+            <a:extLst>
+              <a:ext uri="{FF2B5EF4-FFF2-40B4-BE49-F238E27FC236}">
+                <a16:creationId xmlns:a16="http://schemas.microsoft.com/office/drawing/2014/main" id="{F6E1AA77-15B4-4A86-86C4-DB56EDC73B9F}"/>
               </a:ext>
             </a:extLst>
           </p:cNvPr>
@@ -15787,27 +15255,27 @@
             <a:pPr algn="ctr">
               <a:defRPr sz="1800" b="1">
                 <a:solidFill>
-                  <a:srgbClr val="1F4E79"/>
+                  <a:srgbClr val="C55A11"/>
                 </a:solidFill>
               </a:defRPr>
             </a:pPr>
             <a:r>
-              <a:rPr sz="2400" b="1" dirty="0">
-                <a:solidFill>
-                  <a:srgbClr val="1F4E79"/>
+              <a:rPr sz="1800" b="1">
+                <a:solidFill>
+                  <a:srgbClr val="C55A11"/>
                 </a:solidFill>
               </a:rPr>
-              <a:t>The repository becomes the record of collaboration</a:t>
-            </a:r>
-          </a:p>
-        </p:txBody>
-      </p:sp>
-      <p:sp>
-        <p:nvSpPr>
-          <p:cNvPr id="25" name="gitbandb">
-            <a:extLst>
-              <a:ext uri="{FF2B5EF4-FFF2-40B4-BE49-F238E27FC236}">
-                <a16:creationId xmlns:a16="http://schemas.microsoft.com/office/drawing/2014/main" id="{FA0E5640-74BD-4800-8CE7-3122CC206B65}"/>
+              <a:t>A green pipeline supports review</a:t>
+            </a:r>
+          </a:p>
+        </p:txBody>
+      </p:sp>
+      <p:sp>
+        <p:nvSpPr>
+          <p:cNvPr id="16" name="testbandb">
+            <a:extLst>
+              <a:ext uri="{FF2B5EF4-FFF2-40B4-BE49-F238E27FC236}">
+                <a16:creationId xmlns:a16="http://schemas.microsoft.com/office/drawing/2014/main" id="{28774AE0-E7FF-455E-BA9B-08EE5C5D706F}"/>
               </a:ext>
             </a:extLst>
           </p:cNvPr>
@@ -15842,12 +15310,12 @@
               </a:defRPr>
             </a:pPr>
             <a:r>
-              <a:rPr sz="2000" dirty="0">
+              <a:rPr sz="1500">
                 <a:solidFill>
                   <a:srgbClr val="000000"/>
                 </a:solidFill>
               </a:rPr>
-              <a:t>Issues, commits, PRs, reviews, and merges show how the team worked.</a:t>
+              <a:t>It provides fast feedback, but it does not replace thoughtful review.</a:t>
             </a:r>
           </a:p>
         </p:txBody>
@@ -15855,7 +15323,7 @@
     </p:spTree>
     <p:extLst>
       <p:ext uri="{BB962C8B-B14F-4D97-AF65-F5344CB8AC3E}">
-        <p14:creationId xmlns:p14="http://schemas.microsoft.com/office/powerpoint/2010/main" val="1612546867"/>
+        <p14:creationId xmlns:p14="http://schemas.microsoft.com/office/powerpoint/2010/main" val="1231033312"/>
       </p:ext>
     </p:extLst>
   </p:cSld>
@@ -15884,10 +15352,10 @@
       </p:grpSpPr>
       <p:sp>
         <p:nvSpPr>
-          <p:cNvPr id="17" name="title">
-            <a:extLst>
-              <a:ext uri="{FF2B5EF4-FFF2-40B4-BE49-F238E27FC236}">
-                <a16:creationId xmlns:a16="http://schemas.microsoft.com/office/drawing/2014/main" id="{C45C5D28-FD4F-4306-A3A4-034F2DBE95A2}"/>
+          <p:cNvPr id="15" name="title">
+            <a:extLst>
+              <a:ext uri="{FF2B5EF4-FFF2-40B4-BE49-F238E27FC236}">
+                <a16:creationId xmlns:a16="http://schemas.microsoft.com/office/drawing/2014/main" id="{50FDE64E-E997-417E-B04B-442D56FDF48C}"/>
               </a:ext>
             </a:extLst>
           </p:cNvPr>
@@ -15927,7 +15395,7 @@
                   <a:srgbClr val="1F4E79"/>
                 </a:solidFill>
               </a:rPr>
-              <a:t>Testing and CI: Three Questions Before We Merge</a:t>
+              <a:t>Collaborative Design: Decide What the Change Affects</a:t>
             </a:r>
           </a:p>
         </p:txBody>
@@ -15937,7 +15405,7 @@
           <p:cNvPr id="2" name="subtitle">
             <a:extLst>
               <a:ext uri="{FF2B5EF4-FFF2-40B4-BE49-F238E27FC236}">
-                <a16:creationId xmlns:a16="http://schemas.microsoft.com/office/drawing/2014/main" id="{76D65660-756B-4F06-A4BD-D692F8C6810D}"/>
+                <a16:creationId xmlns:a16="http://schemas.microsoft.com/office/drawing/2014/main" id="{68AE4DE7-9788-4FCF-AA5B-2C6F8B4A63BC}"/>
               </a:ext>
             </a:extLst>
           </p:cNvPr>
@@ -15977,129 +15445,29 @@
                   <a:srgbClr val="000000"/>
                 </a:solidFill>
               </a:rPr>
-              <a:t>Each practice provides a different kind of evidence.</a:t>
-            </a:r>
-          </a:p>
-        </p:txBody>
-      </p:sp>
-      <p:sp>
-        <p:nvSpPr>
-          <p:cNvPr id="3" name="rh0">
-            <a:extLst>
-              <a:ext uri="{FF2B5EF4-FFF2-40B4-BE49-F238E27FC236}">
-                <a16:creationId xmlns:a16="http://schemas.microsoft.com/office/drawing/2014/main" id="{F84C7E52-A68A-4A4F-81EE-25834AF003AD}"/>
-              </a:ext>
-            </a:extLst>
-          </p:cNvPr>
-          <p:cNvSpPr>
-            <a:spLocks noGrp="1"/>
-          </p:cNvSpPr>
-          <p:nvPr/>
-        </p:nvSpPr>
-        <p:spPr>
-          <a:xfrm>
-            <a:off x="2381250" y="1790700"/>
-            <a:ext cx="2857500" cy="381000"/>
-          </a:xfrm>
-          <a:prstGeom prst="rect">
-            <a:avLst/>
-          </a:prstGeom>
-          <a:noFill/>
-          <a:ln w="0">
-            <a:noFill/>
-            <a:prstDash val="solid"/>
-          </a:ln>
-        </p:spPr>
-        <p:txBody>
-          <a:bodyPr/>
-          <a:lstStyle/>
-          <a:p>
-            <a:pPr>
-              <a:defRPr sz="1800" b="1">
-                <a:solidFill>
-                  <a:srgbClr val="1F4E79"/>
-                </a:solidFill>
-              </a:defRPr>
-            </a:pPr>
-            <a:r>
-              <a:rPr sz="2200" b="1" dirty="0">
-                <a:solidFill>
-                  <a:srgbClr val="1F4E79"/>
-                </a:solidFill>
-              </a:rPr>
-              <a:t>DOES IT WORK?</a:t>
-            </a:r>
-          </a:p>
-        </p:txBody>
-      </p:sp>
-      <p:sp>
-        <p:nvSpPr>
-          <p:cNvPr id="4" name="rb0">
-            <a:extLst>
-              <a:ext uri="{FF2B5EF4-FFF2-40B4-BE49-F238E27FC236}">
-                <a16:creationId xmlns:a16="http://schemas.microsoft.com/office/drawing/2014/main" id="{82EE8CA5-FD2F-4988-A10F-A6D9D1780C0F}"/>
-              </a:ext>
-            </a:extLst>
-          </p:cNvPr>
-          <p:cNvSpPr>
-            <a:spLocks noGrp="1"/>
-          </p:cNvSpPr>
-          <p:nvPr/>
-        </p:nvSpPr>
-        <p:spPr>
-          <a:xfrm>
-            <a:off x="5286375" y="1790700"/>
-            <a:ext cx="5619750" cy="552450"/>
-          </a:xfrm>
-          <a:prstGeom prst="rect">
-            <a:avLst/>
-          </a:prstGeom>
-          <a:noFill/>
-          <a:ln w="0">
-            <a:noFill/>
-            <a:prstDash val="solid"/>
-          </a:ln>
-        </p:spPr>
-        <p:txBody>
-          <a:bodyPr/>
-          <a:lstStyle/>
-          <a:p>
-            <a:pPr>
-              <a:defRPr sz="1500">
-                <a:solidFill>
-                  <a:srgbClr val="000000"/>
-                </a:solidFill>
-              </a:defRPr>
-            </a:pPr>
-            <a:r>
-              <a:rPr sz="2000" dirty="0">
-                <a:solidFill>
-                  <a:srgbClr val="000000"/>
-                </a:solidFill>
-              </a:rPr>
-              <a:t>Write tests for expected behavior and important edge cases.</a:t>
-            </a:r>
-          </a:p>
-        </p:txBody>
-      </p:sp>
-      <p:sp>
-        <p:nvSpPr>
-          <p:cNvPr id="5" name="sep0">
-            <a:extLst>
-              <a:ext uri="{FF2B5EF4-FFF2-40B4-BE49-F238E27FC236}">
-                <a16:creationId xmlns:a16="http://schemas.microsoft.com/office/drawing/2014/main" id="{100DED03-F279-4037-B936-289DD4D2CB4A}"/>
-              </a:ext>
-            </a:extLst>
-          </p:cNvPr>
-          <p:cNvSpPr>
-            <a:spLocks noGrp="1"/>
-          </p:cNvSpPr>
-          <p:nvPr/>
-        </p:nvSpPr>
-        <p:spPr>
-          <a:xfrm>
-            <a:off x="2381250" y="2581275"/>
-            <a:ext cx="8524875" cy="19050"/>
+              <a:t>Use only the design evidence needed to explain the contribution.</a:t>
+            </a:r>
+          </a:p>
+        </p:txBody>
+      </p:sp>
+      <p:sp>
+        <p:nvSpPr>
+          <p:cNvPr id="3" name="divider">
+            <a:extLst>
+              <a:ext uri="{FF2B5EF4-FFF2-40B4-BE49-F238E27FC236}">
+                <a16:creationId xmlns:a16="http://schemas.microsoft.com/office/drawing/2014/main" id="{8D22EDBC-57FF-446F-86F4-C035B009CF07}"/>
+              </a:ext>
+            </a:extLst>
+          </p:cNvPr>
+          <p:cNvSpPr>
+            <a:spLocks noGrp="1"/>
+          </p:cNvSpPr>
+          <p:nvPr/>
+        </p:nvSpPr>
+        <p:spPr>
+          <a:xfrm>
+            <a:off x="6096000" y="1666875"/>
+            <a:ext cx="19050" cy="3238500"/>
           </a:xfrm>
           <a:prstGeom prst="rect">
             <a:avLst/>
@@ -16122,249 +15490,9 @@
           </a:p>
         </p:txBody>
       </p:sp>
-      <p:sp>
-        <p:nvSpPr>
-          <p:cNvPr id="6" name="rh1">
-            <a:extLst>
-              <a:ext uri="{FF2B5EF4-FFF2-40B4-BE49-F238E27FC236}">
-                <a16:creationId xmlns:a16="http://schemas.microsoft.com/office/drawing/2014/main" id="{79D07BAA-5E90-4FE0-A7DA-AB0E5A77DDEF}"/>
-              </a:ext>
-            </a:extLst>
-          </p:cNvPr>
-          <p:cNvSpPr>
-            <a:spLocks noGrp="1"/>
-          </p:cNvSpPr>
-          <p:nvPr/>
-        </p:nvSpPr>
-        <p:spPr>
-          <a:xfrm>
-            <a:off x="2381250" y="2933700"/>
-            <a:ext cx="2857500" cy="381000"/>
-          </a:xfrm>
-          <a:prstGeom prst="rect">
-            <a:avLst/>
-          </a:prstGeom>
-          <a:noFill/>
-          <a:ln w="0">
-            <a:noFill/>
-            <a:prstDash val="solid"/>
-          </a:ln>
-        </p:spPr>
-        <p:txBody>
-          <a:bodyPr/>
-          <a:lstStyle/>
-          <a:p>
-            <a:pPr>
-              <a:defRPr sz="1800" b="1">
-                <a:solidFill>
-                  <a:srgbClr val="008C95"/>
-                </a:solidFill>
-              </a:defRPr>
-            </a:pPr>
-            <a:r>
-              <a:rPr sz="2200" b="1" dirty="0">
-                <a:solidFill>
-                  <a:srgbClr val="008C95"/>
-                </a:solidFill>
-              </a:rPr>
-              <a:t>WHAT IS UNTESTED?</a:t>
-            </a:r>
-          </a:p>
-        </p:txBody>
-      </p:sp>
-      <p:sp>
-        <p:nvSpPr>
-          <p:cNvPr id="7" name="rb1">
-            <a:extLst>
-              <a:ext uri="{FF2B5EF4-FFF2-40B4-BE49-F238E27FC236}">
-                <a16:creationId xmlns:a16="http://schemas.microsoft.com/office/drawing/2014/main" id="{D4C56E0B-733E-488C-8F87-FD7C136D7B90}"/>
-              </a:ext>
-            </a:extLst>
-          </p:cNvPr>
-          <p:cNvSpPr>
-            <a:spLocks noGrp="1"/>
-          </p:cNvSpPr>
-          <p:nvPr/>
-        </p:nvSpPr>
-        <p:spPr>
-          <a:xfrm>
-            <a:off x="5286375" y="2933700"/>
-            <a:ext cx="5619750" cy="552450"/>
-          </a:xfrm>
-          <a:prstGeom prst="rect">
-            <a:avLst/>
-          </a:prstGeom>
-          <a:noFill/>
-          <a:ln w="0">
-            <a:noFill/>
-            <a:prstDash val="solid"/>
-          </a:ln>
-        </p:spPr>
-        <p:txBody>
-          <a:bodyPr/>
-          <a:lstStyle/>
-          <a:p>
-            <a:pPr>
-              <a:defRPr sz="1500">
-                <a:solidFill>
-                  <a:srgbClr val="000000"/>
-                </a:solidFill>
-              </a:defRPr>
-            </a:pPr>
-            <a:r>
-              <a:rPr sz="2000" dirty="0">
-                <a:solidFill>
-                  <a:srgbClr val="000000"/>
-                </a:solidFill>
-              </a:rPr>
-              <a:t>Use coverage to find important code the tests do not exercise.</a:t>
-            </a:r>
-          </a:p>
-        </p:txBody>
-      </p:sp>
-      <p:sp>
-        <p:nvSpPr>
-          <p:cNvPr id="8" name="sep1">
-            <a:extLst>
-              <a:ext uri="{FF2B5EF4-FFF2-40B4-BE49-F238E27FC236}">
-                <a16:creationId xmlns:a16="http://schemas.microsoft.com/office/drawing/2014/main" id="{9970290D-2C2B-47EE-8378-A01CCEF3ABA0}"/>
-              </a:ext>
-            </a:extLst>
-          </p:cNvPr>
-          <p:cNvSpPr>
-            <a:spLocks noGrp="1"/>
-          </p:cNvSpPr>
-          <p:nvPr/>
-        </p:nvSpPr>
-        <p:spPr>
-          <a:xfrm>
-            <a:off x="2381250" y="3724275"/>
-            <a:ext cx="8524875" cy="19050"/>
-          </a:xfrm>
-          <a:prstGeom prst="rect">
-            <a:avLst/>
-          </a:prstGeom>
-          <a:solidFill>
-            <a:srgbClr val="D9E2E8"/>
-          </a:solidFill>
-          <a:ln w="0">
-            <a:solidFill>
-              <a:srgbClr val="D9E2E8"/>
-            </a:solidFill>
-            <a:prstDash val="solid"/>
-          </a:ln>
-        </p:spPr>
-        <p:txBody>
-          <a:bodyPr/>
-          <a:lstStyle/>
-          <a:p>
-            <a:endParaRPr lang="en-US"/>
-          </a:p>
-        </p:txBody>
-      </p:sp>
-      <p:sp>
-        <p:nvSpPr>
-          <p:cNvPr id="9" name="rh2">
-            <a:extLst>
-              <a:ext uri="{FF2B5EF4-FFF2-40B4-BE49-F238E27FC236}">
-                <a16:creationId xmlns:a16="http://schemas.microsoft.com/office/drawing/2014/main" id="{7739F007-52B9-4D4B-B495-98FE21331850}"/>
-              </a:ext>
-            </a:extLst>
-          </p:cNvPr>
-          <p:cNvSpPr>
-            <a:spLocks noGrp="1"/>
-          </p:cNvSpPr>
-          <p:nvPr/>
-        </p:nvSpPr>
-        <p:spPr>
-          <a:xfrm>
-            <a:off x="2381250" y="4076700"/>
-            <a:ext cx="2857500" cy="381000"/>
-          </a:xfrm>
-          <a:prstGeom prst="rect">
-            <a:avLst/>
-          </a:prstGeom>
-          <a:noFill/>
-          <a:ln w="0">
-            <a:noFill/>
-            <a:prstDash val="solid"/>
-          </a:ln>
-        </p:spPr>
-        <p:txBody>
-          <a:bodyPr/>
-          <a:lstStyle/>
-          <a:p>
-            <a:pPr>
-              <a:defRPr sz="1800" b="1">
-                <a:solidFill>
-                  <a:srgbClr val="1F4E79"/>
-                </a:solidFill>
-              </a:defRPr>
-            </a:pPr>
-            <a:r>
-              <a:rPr sz="2200" b="1" dirty="0">
-                <a:solidFill>
-                  <a:srgbClr val="1F4E79"/>
-                </a:solidFill>
-              </a:rPr>
-              <a:t>WILL IT STAY CHECKED?</a:t>
-            </a:r>
-          </a:p>
-        </p:txBody>
-      </p:sp>
-      <p:sp>
-        <p:nvSpPr>
-          <p:cNvPr id="10" name="rb2">
-            <a:extLst>
-              <a:ext uri="{FF2B5EF4-FFF2-40B4-BE49-F238E27FC236}">
-                <a16:creationId xmlns:a16="http://schemas.microsoft.com/office/drawing/2014/main" id="{2598A10D-4012-4808-8BBF-ED3DDF4AAA35}"/>
-              </a:ext>
-            </a:extLst>
-          </p:cNvPr>
-          <p:cNvSpPr>
-            <a:spLocks noGrp="1"/>
-          </p:cNvSpPr>
-          <p:nvPr/>
-        </p:nvSpPr>
-        <p:spPr>
-          <a:xfrm>
-            <a:off x="5286375" y="4076700"/>
-            <a:ext cx="5619750" cy="552450"/>
-          </a:xfrm>
-          <a:prstGeom prst="rect">
-            <a:avLst/>
-          </a:prstGeom>
-          <a:noFill/>
-          <a:ln w="0">
-            <a:noFill/>
-            <a:prstDash val="solid"/>
-          </a:ln>
-        </p:spPr>
-        <p:txBody>
-          <a:bodyPr/>
-          <a:lstStyle/>
-          <a:p>
-            <a:pPr>
-              <a:defRPr sz="1500">
-                <a:solidFill>
-                  <a:srgbClr val="000000"/>
-                </a:solidFill>
-              </a:defRPr>
-            </a:pPr>
-            <a:r>
-              <a:rPr sz="2000" dirty="0">
-                <a:solidFill>
-                  <a:srgbClr val="000000"/>
-                </a:solidFill>
-              </a:rPr>
-              <a:t>Use CI to run tests and quality checks on every pull request.</a:t>
-            </a:r>
-          </a:p>
-        </p:txBody>
-      </p:sp>
       <p:pic>
         <p:nvPicPr>
-          <p:cNvPr id="27" name="Picture 26"/>
+          <p:cNvPr id="18" name="Picture 17"/>
           <p:cNvPicPr>
             <a:picLocks noChangeAspect="1"/>
           </p:cNvPicPr>
@@ -16376,8 +15504,8 @@
         </p:blipFill>
         <p:spPr>
           <a:xfrm>
-            <a:off x="1095375" y="1736217"/>
-            <a:ext cx="876300" cy="718566"/>
+            <a:off x="2361079" y="1456204"/>
+            <a:ext cx="1564341" cy="1564341"/>
           </a:xfrm>
           <a:prstGeom prst="rect">
             <a:avLst/>
@@ -16386,7 +15514,7 @@
       </p:pic>
       <p:pic>
         <p:nvPicPr>
-          <p:cNvPr id="28" name="Picture 27"/>
+          <p:cNvPr id="19" name="Picture 18"/>
           <p:cNvPicPr>
             <a:picLocks noChangeAspect="1"/>
           </p:cNvPicPr>
@@ -16398,42 +15526,320 @@
         </p:blipFill>
         <p:spPr>
           <a:xfrm>
-            <a:off x="1104900" y="2828925"/>
-            <a:ext cx="857250" cy="857250"/>
+            <a:off x="8131688" y="1211776"/>
+            <a:ext cx="2074629" cy="2074629"/>
           </a:xfrm>
           <a:prstGeom prst="rect">
             <a:avLst/>
           </a:prstGeom>
         </p:spPr>
       </p:pic>
-      <p:pic>
-        <p:nvPicPr>
-          <p:cNvPr id="29" name="Picture 28"/>
-          <p:cNvPicPr>
-            <a:picLocks noChangeAspect="1"/>
-          </p:cNvPicPr>
-          <p:nvPr/>
-        </p:nvPicPr>
-        <p:blipFill>
-          <a:blip r:embed="rId5"/>
-          <a:stretch/>
-        </p:blipFill>
-        <p:spPr>
-          <a:xfrm>
-            <a:off x="1000125" y="3970564"/>
-            <a:ext cx="1066800" cy="783771"/>
+      <p:sp>
+        <p:nvSpPr>
+          <p:cNvPr id="6" name="sh">
+            <a:extLst>
+              <a:ext uri="{FF2B5EF4-FFF2-40B4-BE49-F238E27FC236}">
+                <a16:creationId xmlns:a16="http://schemas.microsoft.com/office/drawing/2014/main" id="{E34AF905-703F-49B9-8954-0837C74AC161}"/>
+              </a:ext>
+            </a:extLst>
+          </p:cNvPr>
+          <p:cNvSpPr>
+            <a:spLocks noGrp="1"/>
+          </p:cNvSpPr>
+          <p:nvPr/>
+        </p:nvSpPr>
+        <p:spPr>
+          <a:xfrm>
+            <a:off x="1000125" y="2952750"/>
+            <a:ext cx="4286250" cy="400050"/>
           </a:xfrm>
           <a:prstGeom prst="rect">
             <a:avLst/>
           </a:prstGeom>
-        </p:spPr>
-      </p:pic>
-      <p:sp>
-        <p:nvSpPr>
-          <p:cNvPr id="14" name="testband">
-            <a:extLst>
-              <a:ext uri="{FF2B5EF4-FFF2-40B4-BE49-F238E27FC236}">
-                <a16:creationId xmlns:a16="http://schemas.microsoft.com/office/drawing/2014/main" id="{6A799A53-366A-4704-A933-BAC9317D4BC8}"/>
+          <a:noFill/>
+          <a:ln w="0">
+            <a:noFill/>
+            <a:prstDash val="solid"/>
+          </a:ln>
+        </p:spPr>
+        <p:txBody>
+          <a:bodyPr/>
+          <a:lstStyle/>
+          <a:p>
+            <a:pPr algn="ctr">
+              <a:defRPr sz="1800" b="1">
+                <a:solidFill>
+                  <a:srgbClr val="6B5B95"/>
+                </a:solidFill>
+              </a:defRPr>
+            </a:pPr>
+            <a:r>
+              <a:rPr sz="1800" b="1">
+                <a:solidFill>
+                  <a:srgbClr val="6B5B95"/>
+                </a:solidFill>
+              </a:rPr>
+              <a:t>STRUCTURE</a:t>
+            </a:r>
+          </a:p>
+        </p:txBody>
+      </p:sp>
+      <p:sp>
+        <p:nvSpPr>
+          <p:cNvPr id="7" name="sq">
+            <a:extLst>
+              <a:ext uri="{FF2B5EF4-FFF2-40B4-BE49-F238E27FC236}">
+                <a16:creationId xmlns:a16="http://schemas.microsoft.com/office/drawing/2014/main" id="{6DB3518E-1D1D-4D1F-8367-3ACDC071777B}"/>
+              </a:ext>
+            </a:extLst>
+          </p:cNvPr>
+          <p:cNvSpPr>
+            <a:spLocks noGrp="1"/>
+          </p:cNvSpPr>
+          <p:nvPr/>
+        </p:nvSpPr>
+        <p:spPr>
+          <a:xfrm>
+            <a:off x="1095375" y="3486150"/>
+            <a:ext cx="4095750" cy="647700"/>
+          </a:xfrm>
+          <a:prstGeom prst="rect">
+            <a:avLst/>
+          </a:prstGeom>
+          <a:noFill/>
+          <a:ln w="0">
+            <a:noFill/>
+            <a:prstDash val="solid"/>
+          </a:ln>
+        </p:spPr>
+        <p:txBody>
+          <a:bodyPr/>
+          <a:lstStyle/>
+          <a:p>
+            <a:pPr algn="ctr">
+              <a:defRPr sz="1800" b="1">
+                <a:solidFill>
+                  <a:srgbClr val="000000"/>
+                </a:solidFill>
+              </a:defRPr>
+            </a:pPr>
+            <a:r>
+              <a:rPr sz="1800" b="1">
+                <a:solidFill>
+                  <a:srgbClr val="000000"/>
+                </a:solidFill>
+              </a:rPr>
+              <a:t>Are classes, responsibilities, or relationships changing?</a:t>
+            </a:r>
+          </a:p>
+        </p:txBody>
+      </p:sp>
+      <p:sp>
+        <p:nvSpPr>
+          <p:cNvPr id="8" name="sa">
+            <a:extLst>
+              <a:ext uri="{FF2B5EF4-FFF2-40B4-BE49-F238E27FC236}">
+                <a16:creationId xmlns:a16="http://schemas.microsoft.com/office/drawing/2014/main" id="{858C2FA6-311D-4950-BCA9-67CBA9375D88}"/>
+              </a:ext>
+            </a:extLst>
+          </p:cNvPr>
+          <p:cNvSpPr>
+            <a:spLocks noGrp="1"/>
+          </p:cNvSpPr>
+          <p:nvPr/>
+        </p:nvSpPr>
+        <p:spPr>
+          <a:xfrm>
+            <a:off x="1238250" y="4429125"/>
+            <a:ext cx="3810000" cy="381000"/>
+          </a:xfrm>
+          <a:prstGeom prst="rect">
+            <a:avLst/>
+          </a:prstGeom>
+          <a:noFill/>
+          <a:ln w="0">
+            <a:noFill/>
+            <a:prstDash val="solid"/>
+          </a:ln>
+        </p:spPr>
+        <p:txBody>
+          <a:bodyPr/>
+          <a:lstStyle/>
+          <a:p>
+            <a:pPr algn="ctr">
+              <a:defRPr sz="1500">
+                <a:solidFill>
+                  <a:srgbClr val="000000"/>
+                </a:solidFill>
+              </a:defRPr>
+            </a:pPr>
+            <a:r>
+              <a:rPr sz="1500" dirty="0">
+                <a:solidFill>
+                  <a:srgbClr val="000000"/>
+                </a:solidFill>
+              </a:rPr>
+              <a:t>Update the relevant class diagram.</a:t>
+            </a:r>
+          </a:p>
+        </p:txBody>
+      </p:sp>
+      <p:sp>
+        <p:nvSpPr>
+          <p:cNvPr id="9" name="bh">
+            <a:extLst>
+              <a:ext uri="{FF2B5EF4-FFF2-40B4-BE49-F238E27FC236}">
+                <a16:creationId xmlns:a16="http://schemas.microsoft.com/office/drawing/2014/main" id="{5EF5B811-439E-4E50-A517-39D0E70B137E}"/>
+              </a:ext>
+            </a:extLst>
+          </p:cNvPr>
+          <p:cNvSpPr>
+            <a:spLocks noGrp="1"/>
+          </p:cNvSpPr>
+          <p:nvPr/>
+        </p:nvSpPr>
+        <p:spPr>
+          <a:xfrm>
+            <a:off x="6905625" y="3075734"/>
+            <a:ext cx="4286250" cy="400050"/>
+          </a:xfrm>
+          <a:prstGeom prst="rect">
+            <a:avLst/>
+          </a:prstGeom>
+          <a:noFill/>
+          <a:ln w="0">
+            <a:noFill/>
+            <a:prstDash val="solid"/>
+          </a:ln>
+        </p:spPr>
+        <p:txBody>
+          <a:bodyPr/>
+          <a:lstStyle/>
+          <a:p>
+            <a:pPr algn="ctr">
+              <a:defRPr sz="1800" b="1">
+                <a:solidFill>
+                  <a:srgbClr val="008C95"/>
+                </a:solidFill>
+              </a:defRPr>
+            </a:pPr>
+            <a:r>
+              <a:rPr sz="1800" b="1" dirty="0">
+                <a:solidFill>
+                  <a:srgbClr val="008C95"/>
+                </a:solidFill>
+              </a:rPr>
+              <a:t>BEHAVIOR</a:t>
+            </a:r>
+          </a:p>
+        </p:txBody>
+      </p:sp>
+      <p:sp>
+        <p:nvSpPr>
+          <p:cNvPr id="10" name="bq">
+            <a:extLst>
+              <a:ext uri="{FF2B5EF4-FFF2-40B4-BE49-F238E27FC236}">
+                <a16:creationId xmlns:a16="http://schemas.microsoft.com/office/drawing/2014/main" id="{232EB6CB-80B6-4012-9058-A0F57EE354B8}"/>
+              </a:ext>
+            </a:extLst>
+          </p:cNvPr>
+          <p:cNvSpPr>
+            <a:spLocks noGrp="1"/>
+          </p:cNvSpPr>
+          <p:nvPr/>
+        </p:nvSpPr>
+        <p:spPr>
+          <a:xfrm>
+            <a:off x="7000875" y="3486150"/>
+            <a:ext cx="4095750" cy="647700"/>
+          </a:xfrm>
+          <a:prstGeom prst="rect">
+            <a:avLst/>
+          </a:prstGeom>
+          <a:noFill/>
+          <a:ln w="0">
+            <a:noFill/>
+            <a:prstDash val="solid"/>
+          </a:ln>
+        </p:spPr>
+        <p:txBody>
+          <a:bodyPr/>
+          <a:lstStyle/>
+          <a:p>
+            <a:pPr algn="ctr">
+              <a:defRPr sz="1800" b="1">
+                <a:solidFill>
+                  <a:srgbClr val="000000"/>
+                </a:solidFill>
+              </a:defRPr>
+            </a:pPr>
+            <a:r>
+              <a:rPr sz="1800" b="1">
+                <a:solidFill>
+                  <a:srgbClr val="000000"/>
+                </a:solidFill>
+              </a:rPr>
+              <a:t>Are interactions between objects changing?</a:t>
+            </a:r>
+          </a:p>
+        </p:txBody>
+      </p:sp>
+      <p:sp>
+        <p:nvSpPr>
+          <p:cNvPr id="11" name="ba">
+            <a:extLst>
+              <a:ext uri="{FF2B5EF4-FFF2-40B4-BE49-F238E27FC236}">
+                <a16:creationId xmlns:a16="http://schemas.microsoft.com/office/drawing/2014/main" id="{68CC013A-6AC6-42FE-8AB8-7B5BE1A93B76}"/>
+              </a:ext>
+            </a:extLst>
+          </p:cNvPr>
+          <p:cNvSpPr>
+            <a:spLocks noGrp="1"/>
+          </p:cNvSpPr>
+          <p:nvPr/>
+        </p:nvSpPr>
+        <p:spPr>
+          <a:xfrm>
+            <a:off x="7143750" y="4429125"/>
+            <a:ext cx="3810000" cy="381000"/>
+          </a:xfrm>
+          <a:prstGeom prst="rect">
+            <a:avLst/>
+          </a:prstGeom>
+          <a:noFill/>
+          <a:ln w="0">
+            <a:noFill/>
+            <a:prstDash val="solid"/>
+          </a:ln>
+        </p:spPr>
+        <p:txBody>
+          <a:bodyPr/>
+          <a:lstStyle/>
+          <a:p>
+            <a:pPr algn="ctr">
+              <a:defRPr sz="1500">
+                <a:solidFill>
+                  <a:srgbClr val="000000"/>
+                </a:solidFill>
+              </a:defRPr>
+            </a:pPr>
+            <a:r>
+              <a:rPr sz="1500" dirty="0">
+                <a:solidFill>
+                  <a:srgbClr val="000000"/>
+                </a:solidFill>
+              </a:rPr>
+              <a:t>Update the relevant sequence diagram.</a:t>
+            </a:r>
+          </a:p>
+        </p:txBody>
+      </p:sp>
+      <p:sp>
+        <p:nvSpPr>
+          <p:cNvPr id="12" name="designband">
+            <a:extLst>
+              <a:ext uri="{FF2B5EF4-FFF2-40B4-BE49-F238E27FC236}">
+                <a16:creationId xmlns:a16="http://schemas.microsoft.com/office/drawing/2014/main" id="{452D306C-F63E-456C-AE1B-82D11DEC786B}"/>
               </a:ext>
             </a:extLst>
           </p:cNvPr>
@@ -16453,11 +15859,11 @@
             </a:avLst>
           </a:prstGeom>
           <a:solidFill>
-            <a:srgbClr val="FFF2E8"/>
+            <a:srgbClr val="EAF2F8"/>
           </a:solidFill>
           <a:ln w="9525">
             <a:solidFill>
-              <a:srgbClr val="F0C7A7"/>
+              <a:srgbClr val="C9DDEA"/>
             </a:solidFill>
             <a:prstDash val="solid"/>
           </a:ln>
@@ -16472,10 +15878,10 @@
       </p:sp>
       <p:sp>
         <p:nvSpPr>
-          <p:cNvPr id="15" name="testbandh">
-            <a:extLst>
-              <a:ext uri="{FF2B5EF4-FFF2-40B4-BE49-F238E27FC236}">
-                <a16:creationId xmlns:a16="http://schemas.microsoft.com/office/drawing/2014/main" id="{F6E1AA77-15B4-4A86-86C4-DB56EDC73B9F}"/>
+          <p:cNvPr id="13" name="designbandh">
+            <a:extLst>
+              <a:ext uri="{FF2B5EF4-FFF2-40B4-BE49-F238E27FC236}">
+                <a16:creationId xmlns:a16="http://schemas.microsoft.com/office/drawing/2014/main" id="{43D28F96-9BE9-476D-B150-852E5206EC78}"/>
               </a:ext>
             </a:extLst>
           </p:cNvPr>
@@ -16505,27 +15911,27 @@
             <a:pPr algn="ctr">
               <a:defRPr sz="1800" b="1">
                 <a:solidFill>
-                  <a:srgbClr val="C55A11"/>
+                  <a:srgbClr val="1F4E79"/>
                 </a:solidFill>
               </a:defRPr>
             </a:pPr>
             <a:r>
               <a:rPr sz="1800" b="1">
                 <a:solidFill>
-                  <a:srgbClr val="C55A11"/>
+                  <a:srgbClr val="1F4E79"/>
                 </a:solidFill>
               </a:rPr>
-              <a:t>A green pipeline supports review</a:t>
-            </a:r>
-          </a:p>
-        </p:txBody>
-      </p:sp>
-      <p:sp>
-        <p:nvSpPr>
-          <p:cNvPr id="16" name="testbandb">
-            <a:extLst>
-              <a:ext uri="{FF2B5EF4-FFF2-40B4-BE49-F238E27FC236}">
-                <a16:creationId xmlns:a16="http://schemas.microsoft.com/office/drawing/2014/main" id="{28774AE0-E7FF-455E-BA9B-08EE5C5D706F}"/>
+              <a:t>The PR connects design to implementation</a:t>
+            </a:r>
+          </a:p>
+        </p:txBody>
+      </p:sp>
+      <p:sp>
+        <p:nvSpPr>
+          <p:cNvPr id="14" name="designbandb">
+            <a:extLst>
+              <a:ext uri="{FF2B5EF4-FFF2-40B4-BE49-F238E27FC236}">
+                <a16:creationId xmlns:a16="http://schemas.microsoft.com/office/drawing/2014/main" id="{48E63A64-515E-422F-9747-13CD2D4E7916}"/>
               </a:ext>
             </a:extLst>
           </p:cNvPr>
@@ -16565,7 +15971,7 @@
                   <a:srgbClr val="000000"/>
                 </a:solidFill>
               </a:rPr>
-              <a:t>It provides fast feedback, but it does not replace thoughtful review.</a:t>
+              <a:t>Show the affected part of the system—not the entire system.</a:t>
             </a:r>
           </a:p>
         </p:txBody>
@@ -16573,7 +15979,7 @@
     </p:spTree>
     <p:extLst>
       <p:ext uri="{BB962C8B-B14F-4D97-AF65-F5344CB8AC3E}">
-        <p14:creationId xmlns:p14="http://schemas.microsoft.com/office/powerpoint/2010/main" val="1231033312"/>
+        <p14:creationId xmlns:p14="http://schemas.microsoft.com/office/powerpoint/2010/main" val="1874078860"/>
       </p:ext>
     </p:extLst>
   </p:cSld>
@@ -16602,634 +16008,90 @@
       </p:grpSpPr>
       <p:sp>
         <p:nvSpPr>
-          <p:cNvPr id="15" name="title">
-            <a:extLst>
-              <a:ext uri="{FF2B5EF4-FFF2-40B4-BE49-F238E27FC236}">
-                <a16:creationId xmlns:a16="http://schemas.microsoft.com/office/drawing/2014/main" id="{50FDE64E-E997-417E-B04B-442D56FDF48C}"/>
-              </a:ext>
-            </a:extLst>
-          </p:cNvPr>
-          <p:cNvSpPr>
-            <a:spLocks noGrp="1"/>
-          </p:cNvSpPr>
-          <p:nvPr/>
-        </p:nvSpPr>
-        <p:spPr>
-          <a:xfrm>
-            <a:off x="685800" y="361950"/>
-            <a:ext cx="10820400" cy="571500"/>
-          </a:xfrm>
-          <a:prstGeom prst="rect">
-            <a:avLst/>
-          </a:prstGeom>
-          <a:noFill/>
-          <a:ln w="0">
-            <a:noFill/>
-            <a:prstDash val="solid"/>
-          </a:ln>
-        </p:spPr>
-        <p:txBody>
-          <a:bodyPr/>
-          <a:lstStyle/>
-          <a:p>
-            <a:pPr>
-              <a:defRPr sz="2400" b="1">
-                <a:solidFill>
-                  <a:srgbClr val="1F4E79"/>
-                </a:solidFill>
-              </a:defRPr>
-            </a:pPr>
-            <a:r>
-              <a:rPr sz="3200" b="1" dirty="0">
-                <a:solidFill>
-                  <a:srgbClr val="1F4E79"/>
-                </a:solidFill>
-              </a:rPr>
-              <a:t>Collaborative Design: Decide What the Change Affects</a:t>
-            </a:r>
-          </a:p>
-        </p:txBody>
-      </p:sp>
-      <p:sp>
-        <p:nvSpPr>
-          <p:cNvPr id="2" name="subtitle">
-            <a:extLst>
-              <a:ext uri="{FF2B5EF4-FFF2-40B4-BE49-F238E27FC236}">
-                <a16:creationId xmlns:a16="http://schemas.microsoft.com/office/drawing/2014/main" id="{68AE4DE7-9788-4FCF-AA5B-2C6F8B4A63BC}"/>
-              </a:ext>
-            </a:extLst>
-          </p:cNvPr>
-          <p:cNvSpPr>
-            <a:spLocks noGrp="1"/>
-          </p:cNvSpPr>
-          <p:nvPr/>
-        </p:nvSpPr>
-        <p:spPr>
-          <a:xfrm>
-            <a:off x="685800" y="981075"/>
-            <a:ext cx="10668000" cy="323850"/>
-          </a:xfrm>
-          <a:prstGeom prst="rect">
-            <a:avLst/>
-          </a:prstGeom>
-          <a:noFill/>
-          <a:ln w="0">
-            <a:noFill/>
-            <a:prstDash val="solid"/>
-          </a:ln>
-        </p:spPr>
-        <p:txBody>
-          <a:bodyPr/>
-          <a:lstStyle/>
-          <a:p>
-            <a:pPr>
-              <a:defRPr sz="1500" b="1">
-                <a:solidFill>
-                  <a:srgbClr val="000000"/>
-                </a:solidFill>
-              </a:defRPr>
-            </a:pPr>
-            <a:r>
-              <a:rPr sz="2000" b="1" dirty="0">
-                <a:solidFill>
-                  <a:srgbClr val="000000"/>
-                </a:solidFill>
-              </a:rPr>
-              <a:t>Use only the design evidence needed to explain the contribution.</a:t>
-            </a:r>
-          </a:p>
-        </p:txBody>
-      </p:sp>
-      <p:sp>
-        <p:nvSpPr>
-          <p:cNvPr id="3" name="divider">
-            <a:extLst>
-              <a:ext uri="{FF2B5EF4-FFF2-40B4-BE49-F238E27FC236}">
-                <a16:creationId xmlns:a16="http://schemas.microsoft.com/office/drawing/2014/main" id="{8D22EDBC-57FF-446F-86F4-C035B009CF07}"/>
-              </a:ext>
-            </a:extLst>
-          </p:cNvPr>
-          <p:cNvSpPr>
-            <a:spLocks noGrp="1"/>
-          </p:cNvSpPr>
-          <p:nvPr/>
-        </p:nvSpPr>
-        <p:spPr>
-          <a:xfrm>
-            <a:off x="6096000" y="1666875"/>
-            <a:ext cx="19050" cy="3238500"/>
-          </a:xfrm>
-          <a:prstGeom prst="rect">
-            <a:avLst/>
-          </a:prstGeom>
-          <a:solidFill>
-            <a:srgbClr val="D9E2E8"/>
-          </a:solidFill>
-          <a:ln w="0">
-            <a:solidFill>
-              <a:srgbClr val="D9E2E8"/>
-            </a:solidFill>
-            <a:prstDash val="solid"/>
-          </a:ln>
-        </p:spPr>
-        <p:txBody>
-          <a:bodyPr/>
-          <a:lstStyle/>
-          <a:p>
-            <a:endParaRPr lang="en-US"/>
+          <p:cNvPr id="2" name="Title 1">
+            <a:extLst>
+              <a:ext uri="{FF2B5EF4-FFF2-40B4-BE49-F238E27FC236}">
+                <a16:creationId xmlns:a16="http://schemas.microsoft.com/office/drawing/2014/main" id="{0B9FFB77-4E0B-D410-3C2C-BD30AC625364}"/>
+              </a:ext>
+            </a:extLst>
+          </p:cNvPr>
+          <p:cNvSpPr>
+            <a:spLocks noGrp="1"/>
+          </p:cNvSpPr>
+          <p:nvPr>
+            <p:ph type="title"/>
+          </p:nvPr>
+        </p:nvSpPr>
+        <p:spPr>
+          <a:xfrm>
+            <a:off x="838200" y="115792"/>
+            <a:ext cx="10515600" cy="538258"/>
+          </a:xfrm>
+        </p:spPr>
+        <p:txBody>
+          <a:bodyPr>
+            <a:normAutofit fontScale="90000"/>
+          </a:bodyPr>
+          <a:lstStyle/>
+          <a:p>
+            <a:r>
+              <a:rPr lang="en-BE" dirty="0"/>
+              <a:t>Assessment</a:t>
+            </a:r>
           </a:p>
         </p:txBody>
       </p:sp>
       <p:pic>
         <p:nvPicPr>
-          <p:cNvPr id="18" name="Picture 17"/>
+          <p:cNvPr id="11266" name="Picture 2">
+            <a:extLst>
+              <a:ext uri="{FF2B5EF4-FFF2-40B4-BE49-F238E27FC236}">
+                <a16:creationId xmlns:a16="http://schemas.microsoft.com/office/drawing/2014/main" id="{9BA72932-EF1F-8D1E-2208-B862B281B067}"/>
+              </a:ext>
+            </a:extLst>
+          </p:cNvPr>
           <p:cNvPicPr>
-            <a:picLocks noChangeAspect="1"/>
+            <a:picLocks noChangeAspect="1" noChangeArrowheads="1"/>
           </p:cNvPicPr>
           <p:nvPr/>
         </p:nvPicPr>
         <p:blipFill>
-          <a:blip r:embed="rId3"/>
-          <a:stretch/>
+          <a:blip r:embed="rId3">
+            <a:extLst>
+              <a:ext uri="{28A0092B-C50C-407E-A947-70E740481C1C}">
+                <a14:useLocalDpi xmlns:a14="http://schemas.microsoft.com/office/drawing/2010/main" val="0"/>
+              </a:ext>
+            </a:extLst>
+          </a:blip>
+          <a:srcRect/>
+          <a:stretch>
+            <a:fillRect/>
+          </a:stretch>
         </p:blipFill>
-        <p:spPr>
-          <a:xfrm>
-            <a:off x="2361079" y="1456204"/>
-            <a:ext cx="1564341" cy="1564341"/>
+        <p:spPr bwMode="auto">
+          <a:xfrm>
+            <a:off x="2196182" y="830320"/>
+            <a:ext cx="7645400" cy="5549900"/>
           </a:xfrm>
           <a:prstGeom prst="rect">
             <a:avLst/>
           </a:prstGeom>
+          <a:noFill/>
+          <a:extLst>
+            <a:ext uri="{909E8E84-426E-40DD-AFC4-6F175D3DCCD1}">
+              <a14:hiddenFill xmlns:a14="http://schemas.microsoft.com/office/drawing/2010/main">
+                <a:solidFill>
+                  <a:srgbClr val="FFFFFF"/>
+                </a:solidFill>
+              </a14:hiddenFill>
+            </a:ext>
+          </a:extLst>
         </p:spPr>
       </p:pic>
-      <p:pic>
-        <p:nvPicPr>
-          <p:cNvPr id="19" name="Picture 18"/>
-          <p:cNvPicPr>
-            <a:picLocks noChangeAspect="1"/>
-          </p:cNvPicPr>
-          <p:nvPr/>
-        </p:nvPicPr>
-        <p:blipFill>
-          <a:blip r:embed="rId4"/>
-          <a:stretch/>
-        </p:blipFill>
-        <p:spPr>
-          <a:xfrm>
-            <a:off x="8131688" y="1211776"/>
-            <a:ext cx="2074629" cy="2074629"/>
-          </a:xfrm>
-          <a:prstGeom prst="rect">
-            <a:avLst/>
-          </a:prstGeom>
-        </p:spPr>
-      </p:pic>
-      <p:sp>
-        <p:nvSpPr>
-          <p:cNvPr id="6" name="sh">
-            <a:extLst>
-              <a:ext uri="{FF2B5EF4-FFF2-40B4-BE49-F238E27FC236}">
-                <a16:creationId xmlns:a16="http://schemas.microsoft.com/office/drawing/2014/main" id="{E34AF905-703F-49B9-8954-0837C74AC161}"/>
-              </a:ext>
-            </a:extLst>
-          </p:cNvPr>
-          <p:cNvSpPr>
-            <a:spLocks noGrp="1"/>
-          </p:cNvSpPr>
-          <p:nvPr/>
-        </p:nvSpPr>
-        <p:spPr>
-          <a:xfrm>
-            <a:off x="1000125" y="2952750"/>
-            <a:ext cx="4286250" cy="400050"/>
-          </a:xfrm>
-          <a:prstGeom prst="rect">
-            <a:avLst/>
-          </a:prstGeom>
-          <a:noFill/>
-          <a:ln w="0">
-            <a:noFill/>
-            <a:prstDash val="solid"/>
-          </a:ln>
-        </p:spPr>
-        <p:txBody>
-          <a:bodyPr/>
-          <a:lstStyle/>
-          <a:p>
-            <a:pPr algn="ctr">
-              <a:defRPr sz="1800" b="1">
-                <a:solidFill>
-                  <a:srgbClr val="6B5B95"/>
-                </a:solidFill>
-              </a:defRPr>
-            </a:pPr>
-            <a:r>
-              <a:rPr sz="1800" b="1">
-                <a:solidFill>
-                  <a:srgbClr val="6B5B95"/>
-                </a:solidFill>
-              </a:rPr>
-              <a:t>STRUCTURE</a:t>
-            </a:r>
-          </a:p>
-        </p:txBody>
-      </p:sp>
-      <p:sp>
-        <p:nvSpPr>
-          <p:cNvPr id="7" name="sq">
-            <a:extLst>
-              <a:ext uri="{FF2B5EF4-FFF2-40B4-BE49-F238E27FC236}">
-                <a16:creationId xmlns:a16="http://schemas.microsoft.com/office/drawing/2014/main" id="{6DB3518E-1D1D-4D1F-8367-3ACDC071777B}"/>
-              </a:ext>
-            </a:extLst>
-          </p:cNvPr>
-          <p:cNvSpPr>
-            <a:spLocks noGrp="1"/>
-          </p:cNvSpPr>
-          <p:nvPr/>
-        </p:nvSpPr>
-        <p:spPr>
-          <a:xfrm>
-            <a:off x="1095375" y="3486150"/>
-            <a:ext cx="4095750" cy="647700"/>
-          </a:xfrm>
-          <a:prstGeom prst="rect">
-            <a:avLst/>
-          </a:prstGeom>
-          <a:noFill/>
-          <a:ln w="0">
-            <a:noFill/>
-            <a:prstDash val="solid"/>
-          </a:ln>
-        </p:spPr>
-        <p:txBody>
-          <a:bodyPr/>
-          <a:lstStyle/>
-          <a:p>
-            <a:pPr algn="ctr">
-              <a:defRPr sz="1800" b="1">
-                <a:solidFill>
-                  <a:srgbClr val="000000"/>
-                </a:solidFill>
-              </a:defRPr>
-            </a:pPr>
-            <a:r>
-              <a:rPr sz="1800" b="1">
-                <a:solidFill>
-                  <a:srgbClr val="000000"/>
-                </a:solidFill>
-              </a:rPr>
-              <a:t>Are classes, responsibilities, or relationships changing?</a:t>
-            </a:r>
-          </a:p>
-        </p:txBody>
-      </p:sp>
-      <p:sp>
-        <p:nvSpPr>
-          <p:cNvPr id="8" name="sa">
-            <a:extLst>
-              <a:ext uri="{FF2B5EF4-FFF2-40B4-BE49-F238E27FC236}">
-                <a16:creationId xmlns:a16="http://schemas.microsoft.com/office/drawing/2014/main" id="{858C2FA6-311D-4950-BCA9-67CBA9375D88}"/>
-              </a:ext>
-            </a:extLst>
-          </p:cNvPr>
-          <p:cNvSpPr>
-            <a:spLocks noGrp="1"/>
-          </p:cNvSpPr>
-          <p:nvPr/>
-        </p:nvSpPr>
-        <p:spPr>
-          <a:xfrm>
-            <a:off x="1238250" y="4429125"/>
-            <a:ext cx="3810000" cy="381000"/>
-          </a:xfrm>
-          <a:prstGeom prst="rect">
-            <a:avLst/>
-          </a:prstGeom>
-          <a:noFill/>
-          <a:ln w="0">
-            <a:noFill/>
-            <a:prstDash val="solid"/>
-          </a:ln>
-        </p:spPr>
-        <p:txBody>
-          <a:bodyPr/>
-          <a:lstStyle/>
-          <a:p>
-            <a:pPr algn="ctr">
-              <a:defRPr sz="1500">
-                <a:solidFill>
-                  <a:srgbClr val="000000"/>
-                </a:solidFill>
-              </a:defRPr>
-            </a:pPr>
-            <a:r>
-              <a:rPr sz="1500" dirty="0">
-                <a:solidFill>
-                  <a:srgbClr val="000000"/>
-                </a:solidFill>
-              </a:rPr>
-              <a:t>Update the relevant class diagram.</a:t>
-            </a:r>
-          </a:p>
-        </p:txBody>
-      </p:sp>
-      <p:sp>
-        <p:nvSpPr>
-          <p:cNvPr id="9" name="bh">
-            <a:extLst>
-              <a:ext uri="{FF2B5EF4-FFF2-40B4-BE49-F238E27FC236}">
-                <a16:creationId xmlns:a16="http://schemas.microsoft.com/office/drawing/2014/main" id="{5EF5B811-439E-4E50-A517-39D0E70B137E}"/>
-              </a:ext>
-            </a:extLst>
-          </p:cNvPr>
-          <p:cNvSpPr>
-            <a:spLocks noGrp="1"/>
-          </p:cNvSpPr>
-          <p:nvPr/>
-        </p:nvSpPr>
-        <p:spPr>
-          <a:xfrm>
-            <a:off x="6905625" y="3075734"/>
-            <a:ext cx="4286250" cy="400050"/>
-          </a:xfrm>
-          <a:prstGeom prst="rect">
-            <a:avLst/>
-          </a:prstGeom>
-          <a:noFill/>
-          <a:ln w="0">
-            <a:noFill/>
-            <a:prstDash val="solid"/>
-          </a:ln>
-        </p:spPr>
-        <p:txBody>
-          <a:bodyPr/>
-          <a:lstStyle/>
-          <a:p>
-            <a:pPr algn="ctr">
-              <a:defRPr sz="1800" b="1">
-                <a:solidFill>
-                  <a:srgbClr val="008C95"/>
-                </a:solidFill>
-              </a:defRPr>
-            </a:pPr>
-            <a:r>
-              <a:rPr sz="1800" b="1" dirty="0">
-                <a:solidFill>
-                  <a:srgbClr val="008C95"/>
-                </a:solidFill>
-              </a:rPr>
-              <a:t>BEHAVIOR</a:t>
-            </a:r>
-          </a:p>
-        </p:txBody>
-      </p:sp>
-      <p:sp>
-        <p:nvSpPr>
-          <p:cNvPr id="10" name="bq">
-            <a:extLst>
-              <a:ext uri="{FF2B5EF4-FFF2-40B4-BE49-F238E27FC236}">
-                <a16:creationId xmlns:a16="http://schemas.microsoft.com/office/drawing/2014/main" id="{232EB6CB-80B6-4012-9058-A0F57EE354B8}"/>
-              </a:ext>
-            </a:extLst>
-          </p:cNvPr>
-          <p:cNvSpPr>
-            <a:spLocks noGrp="1"/>
-          </p:cNvSpPr>
-          <p:nvPr/>
-        </p:nvSpPr>
-        <p:spPr>
-          <a:xfrm>
-            <a:off x="7000875" y="3486150"/>
-            <a:ext cx="4095750" cy="647700"/>
-          </a:xfrm>
-          <a:prstGeom prst="rect">
-            <a:avLst/>
-          </a:prstGeom>
-          <a:noFill/>
-          <a:ln w="0">
-            <a:noFill/>
-            <a:prstDash val="solid"/>
-          </a:ln>
-        </p:spPr>
-        <p:txBody>
-          <a:bodyPr/>
-          <a:lstStyle/>
-          <a:p>
-            <a:pPr algn="ctr">
-              <a:defRPr sz="1800" b="1">
-                <a:solidFill>
-                  <a:srgbClr val="000000"/>
-                </a:solidFill>
-              </a:defRPr>
-            </a:pPr>
-            <a:r>
-              <a:rPr sz="1800" b="1">
-                <a:solidFill>
-                  <a:srgbClr val="000000"/>
-                </a:solidFill>
-              </a:rPr>
-              <a:t>Are interactions between objects changing?</a:t>
-            </a:r>
-          </a:p>
-        </p:txBody>
-      </p:sp>
-      <p:sp>
-        <p:nvSpPr>
-          <p:cNvPr id="11" name="ba">
-            <a:extLst>
-              <a:ext uri="{FF2B5EF4-FFF2-40B4-BE49-F238E27FC236}">
-                <a16:creationId xmlns:a16="http://schemas.microsoft.com/office/drawing/2014/main" id="{68CC013A-6AC6-42FE-8AB8-7B5BE1A93B76}"/>
-              </a:ext>
-            </a:extLst>
-          </p:cNvPr>
-          <p:cNvSpPr>
-            <a:spLocks noGrp="1"/>
-          </p:cNvSpPr>
-          <p:nvPr/>
-        </p:nvSpPr>
-        <p:spPr>
-          <a:xfrm>
-            <a:off x="7143750" y="4429125"/>
-            <a:ext cx="3810000" cy="381000"/>
-          </a:xfrm>
-          <a:prstGeom prst="rect">
-            <a:avLst/>
-          </a:prstGeom>
-          <a:noFill/>
-          <a:ln w="0">
-            <a:noFill/>
-            <a:prstDash val="solid"/>
-          </a:ln>
-        </p:spPr>
-        <p:txBody>
-          <a:bodyPr/>
-          <a:lstStyle/>
-          <a:p>
-            <a:pPr algn="ctr">
-              <a:defRPr sz="1500">
-                <a:solidFill>
-                  <a:srgbClr val="000000"/>
-                </a:solidFill>
-              </a:defRPr>
-            </a:pPr>
-            <a:r>
-              <a:rPr sz="1500" dirty="0">
-                <a:solidFill>
-                  <a:srgbClr val="000000"/>
-                </a:solidFill>
-              </a:rPr>
-              <a:t>Update the relevant sequence diagram.</a:t>
-            </a:r>
-          </a:p>
-        </p:txBody>
-      </p:sp>
-      <p:sp>
-        <p:nvSpPr>
-          <p:cNvPr id="12" name="designband">
-            <a:extLst>
-              <a:ext uri="{FF2B5EF4-FFF2-40B4-BE49-F238E27FC236}">
-                <a16:creationId xmlns:a16="http://schemas.microsoft.com/office/drawing/2014/main" id="{452D306C-F63E-456C-AE1B-82D11DEC786B}"/>
-              </a:ext>
-            </a:extLst>
-          </p:cNvPr>
-          <p:cNvSpPr>
-            <a:spLocks noGrp="1"/>
-          </p:cNvSpPr>
-          <p:nvPr/>
-        </p:nvSpPr>
-        <p:spPr>
-          <a:xfrm>
-            <a:off x="1381125" y="5219700"/>
-            <a:ext cx="9429750" cy="914400"/>
-          </a:xfrm>
-          <a:prstGeom prst="roundRect">
-            <a:avLst>
-              <a:gd name="adj" fmla="val 8333"/>
-            </a:avLst>
-          </a:prstGeom>
-          <a:solidFill>
-            <a:srgbClr val="EAF2F8"/>
-          </a:solidFill>
-          <a:ln w="9525">
-            <a:solidFill>
-              <a:srgbClr val="C9DDEA"/>
-            </a:solidFill>
-            <a:prstDash val="solid"/>
-          </a:ln>
-        </p:spPr>
-        <p:txBody>
-          <a:bodyPr/>
-          <a:lstStyle/>
-          <a:p>
-            <a:endParaRPr lang="en-US"/>
-          </a:p>
-        </p:txBody>
-      </p:sp>
-      <p:sp>
-        <p:nvSpPr>
-          <p:cNvPr id="13" name="designbandh">
-            <a:extLst>
-              <a:ext uri="{FF2B5EF4-FFF2-40B4-BE49-F238E27FC236}">
-                <a16:creationId xmlns:a16="http://schemas.microsoft.com/office/drawing/2014/main" id="{43D28F96-9BE9-476D-B150-852E5206EC78}"/>
-              </a:ext>
-            </a:extLst>
-          </p:cNvPr>
-          <p:cNvSpPr>
-            <a:spLocks noGrp="1"/>
-          </p:cNvSpPr>
-          <p:nvPr/>
-        </p:nvSpPr>
-        <p:spPr>
-          <a:xfrm>
-            <a:off x="1809750" y="5391150"/>
-            <a:ext cx="8572500" cy="323850"/>
-          </a:xfrm>
-          <a:prstGeom prst="rect">
-            <a:avLst/>
-          </a:prstGeom>
-          <a:noFill/>
-          <a:ln w="0">
-            <a:noFill/>
-            <a:prstDash val="solid"/>
-          </a:ln>
-        </p:spPr>
-        <p:txBody>
-          <a:bodyPr/>
-          <a:lstStyle/>
-          <a:p>
-            <a:pPr algn="ctr">
-              <a:defRPr sz="1800" b="1">
-                <a:solidFill>
-                  <a:srgbClr val="1F4E79"/>
-                </a:solidFill>
-              </a:defRPr>
-            </a:pPr>
-            <a:r>
-              <a:rPr sz="1800" b="1">
-                <a:solidFill>
-                  <a:srgbClr val="1F4E79"/>
-                </a:solidFill>
-              </a:rPr>
-              <a:t>The PR connects design to implementation</a:t>
-            </a:r>
-          </a:p>
-        </p:txBody>
-      </p:sp>
-      <p:sp>
-        <p:nvSpPr>
-          <p:cNvPr id="14" name="designbandb">
-            <a:extLst>
-              <a:ext uri="{FF2B5EF4-FFF2-40B4-BE49-F238E27FC236}">
-                <a16:creationId xmlns:a16="http://schemas.microsoft.com/office/drawing/2014/main" id="{48E63A64-515E-422F-9747-13CD2D4E7916}"/>
-              </a:ext>
-            </a:extLst>
-          </p:cNvPr>
-          <p:cNvSpPr>
-            <a:spLocks noGrp="1"/>
-          </p:cNvSpPr>
-          <p:nvPr/>
-        </p:nvSpPr>
-        <p:spPr>
-          <a:xfrm>
-            <a:off x="1809750" y="5781675"/>
-            <a:ext cx="8572500" cy="266700"/>
-          </a:xfrm>
-          <a:prstGeom prst="rect">
-            <a:avLst/>
-          </a:prstGeom>
-          <a:noFill/>
-          <a:ln w="0">
-            <a:noFill/>
-            <a:prstDash val="solid"/>
-          </a:ln>
-        </p:spPr>
-        <p:txBody>
-          <a:bodyPr/>
-          <a:lstStyle/>
-          <a:p>
-            <a:pPr algn="ctr">
-              <a:defRPr sz="1500">
-                <a:solidFill>
-                  <a:srgbClr val="000000"/>
-                </a:solidFill>
-              </a:defRPr>
-            </a:pPr>
-            <a:r>
-              <a:rPr sz="1500">
-                <a:solidFill>
-                  <a:srgbClr val="000000"/>
-                </a:solidFill>
-              </a:rPr>
-              <a:t>Show the affected part of the system—not the entire system.</a:t>
-            </a:r>
-          </a:p>
-        </p:txBody>
-      </p:sp>
     </p:spTree>
     <p:extLst>
       <p:ext uri="{BB962C8B-B14F-4D97-AF65-F5344CB8AC3E}">
-        <p14:creationId xmlns:p14="http://schemas.microsoft.com/office/powerpoint/2010/main" val="1874078860"/>
+        <p14:creationId xmlns:p14="http://schemas.microsoft.com/office/powerpoint/2010/main" val="3835379694"/>
       </p:ext>
     </p:extLst>
   </p:cSld>
@@ -17261,7 +16123,7 @@
           <p:cNvPr id="2" name="Title 1">
             <a:extLst>
               <a:ext uri="{FF2B5EF4-FFF2-40B4-BE49-F238E27FC236}">
-                <a16:creationId xmlns:a16="http://schemas.microsoft.com/office/drawing/2014/main" id="{0B9FFB77-4E0B-D410-3C2C-BD30AC625364}"/>
+                <a16:creationId xmlns:a16="http://schemas.microsoft.com/office/drawing/2014/main" id="{B08DE891-5030-49D9-8CEB-2E70D87DD31B}"/>
               </a:ext>
             </a:extLst>
           </p:cNvPr>
@@ -17272,76 +16134,63 @@
             <p:ph type="title"/>
           </p:nvPr>
         </p:nvSpPr>
-        <p:spPr>
-          <a:xfrm>
-            <a:off x="838200" y="115792"/>
-            <a:ext cx="10515600" cy="538258"/>
-          </a:xfrm>
-        </p:spPr>
-        <p:txBody>
-          <a:bodyPr>
-            <a:normAutofit fontScale="90000"/>
+        <p:spPr/>
+        <p:txBody>
+          <a:bodyPr/>
+          <a:lstStyle/>
+          <a:p>
+            <a:r>
+              <a:rPr lang="en-US" dirty="0"/>
+              <a:t>A list of previous projects by students</a:t>
+            </a:r>
+          </a:p>
+        </p:txBody>
+      </p:sp>
+      <p:sp>
+        <p:nvSpPr>
+          <p:cNvPr id="5" name="TextBox 4">
+            <a:extLst>
+              <a:ext uri="{FF2B5EF4-FFF2-40B4-BE49-F238E27FC236}">
+                <a16:creationId xmlns:a16="http://schemas.microsoft.com/office/drawing/2014/main" id="{251CBEFF-1C56-B803-C345-BD8B196284D3}"/>
+              </a:ext>
+            </a:extLst>
+          </p:cNvPr>
+          <p:cNvSpPr txBox="1"/>
+          <p:nvPr/>
+        </p:nvSpPr>
+        <p:spPr>
+          <a:xfrm>
+            <a:off x="1022888" y="3109709"/>
+            <a:ext cx="9159498" cy="830997"/>
+          </a:xfrm>
+          <a:prstGeom prst="rect">
+            <a:avLst/>
+          </a:prstGeom>
+          <a:noFill/>
+        </p:spPr>
+        <p:txBody>
+          <a:bodyPr wrap="square">
+            <a:spAutoFit/>
           </a:bodyPr>
           <a:lstStyle/>
           <a:p>
             <a:r>
-              <a:rPr lang="en-BE" dirty="0"/>
-              <a:t>Assessment</a:t>
-            </a:r>
-          </a:p>
-        </p:txBody>
-      </p:sp>
-      <p:pic>
-        <p:nvPicPr>
-          <p:cNvPr id="11266" name="Picture 2">
-            <a:extLst>
-              <a:ext uri="{FF2B5EF4-FFF2-40B4-BE49-F238E27FC236}">
-                <a16:creationId xmlns:a16="http://schemas.microsoft.com/office/drawing/2014/main" id="{9BA72932-EF1F-8D1E-2208-B862B281B067}"/>
-              </a:ext>
-            </a:extLst>
-          </p:cNvPr>
-          <p:cNvPicPr>
-            <a:picLocks noChangeAspect="1" noChangeArrowheads="1"/>
-          </p:cNvPicPr>
-          <p:nvPr/>
-        </p:nvPicPr>
-        <p:blipFill>
-          <a:blip r:embed="rId3">
-            <a:extLst>
-              <a:ext uri="{28A0092B-C50C-407E-A947-70E740481C1C}">
-                <a14:useLocalDpi xmlns:a14="http://schemas.microsoft.com/office/drawing/2010/main" val="0"/>
-              </a:ext>
-            </a:extLst>
-          </a:blip>
-          <a:srcRect/>
-          <a:stretch>
-            <a:fillRect/>
-          </a:stretch>
-        </p:blipFill>
-        <p:spPr bwMode="auto">
-          <a:xfrm>
-            <a:off x="2196182" y="830320"/>
-            <a:ext cx="7645400" cy="5549900"/>
-          </a:xfrm>
-          <a:prstGeom prst="rect">
-            <a:avLst/>
-          </a:prstGeom>
-          <a:noFill/>
-          <a:extLst>
-            <a:ext uri="{909E8E84-426E-40DD-AFC4-6F175D3DCCD1}">
-              <a14:hiddenFill xmlns:a14="http://schemas.microsoft.com/office/drawing/2010/main">
-                <a:solidFill>
-                  <a:srgbClr val="FFFFFF"/>
-                </a:solidFill>
-              </a14:hiddenFill>
-            </a:ext>
-          </a:extLst>
-        </p:spPr>
-      </p:pic>
+              <a:rPr lang="en-US" sz="2400" dirty="0">
+                <a:hlinkClick r:id="rId2"/>
+              </a:rPr>
+              <a:t>https://github.com/orgs/UNLV-CS472-672/repositories?type=all</a:t>
+            </a:r>
+            <a:endParaRPr lang="en-US" sz="2400" dirty="0"/>
+          </a:p>
+          <a:p>
+            <a:endParaRPr lang="en-US" sz="2400" dirty="0"/>
+          </a:p>
+        </p:txBody>
+      </p:sp>
     </p:spTree>
     <p:extLst>
       <p:ext uri="{BB962C8B-B14F-4D97-AF65-F5344CB8AC3E}">
-        <p14:creationId xmlns:p14="http://schemas.microsoft.com/office/powerpoint/2010/main" val="3835379694"/>
+        <p14:creationId xmlns:p14="http://schemas.microsoft.com/office/powerpoint/2010/main" val="3319831364"/>
       </p:ext>
     </p:extLst>
   </p:cSld>
@@ -17447,105 +16296,6 @@
 </file>
 
 <file path=ppt/slides/slide20.xml><?xml version="1.0" encoding="utf-8"?>
-<p:sld xmlns:a="http://schemas.openxmlformats.org/drawingml/2006/main" xmlns:r="http://schemas.openxmlformats.org/officeDocument/2006/relationships" xmlns:p="http://schemas.openxmlformats.org/presentationml/2006/main">
-  <p:cSld>
-    <p:spTree>
-      <p:nvGrpSpPr>
-        <p:cNvPr id="1" name=""/>
-        <p:cNvGrpSpPr/>
-        <p:nvPr/>
-      </p:nvGrpSpPr>
-      <p:grpSpPr>
-        <a:xfrm>
-          <a:off x="0" y="0"/>
-          <a:ext cx="0" cy="0"/>
-          <a:chOff x="0" y="0"/>
-          <a:chExt cx="0" cy="0"/>
-        </a:xfrm>
-      </p:grpSpPr>
-      <p:sp>
-        <p:nvSpPr>
-          <p:cNvPr id="2" name="Title 1">
-            <a:extLst>
-              <a:ext uri="{FF2B5EF4-FFF2-40B4-BE49-F238E27FC236}">
-                <a16:creationId xmlns:a16="http://schemas.microsoft.com/office/drawing/2014/main" id="{B08DE891-5030-49D9-8CEB-2E70D87DD31B}"/>
-              </a:ext>
-            </a:extLst>
-          </p:cNvPr>
-          <p:cNvSpPr>
-            <a:spLocks noGrp="1"/>
-          </p:cNvSpPr>
-          <p:nvPr>
-            <p:ph type="title"/>
-          </p:nvPr>
-        </p:nvSpPr>
-        <p:spPr/>
-        <p:txBody>
-          <a:bodyPr/>
-          <a:lstStyle/>
-          <a:p>
-            <a:r>
-              <a:rPr lang="en-US" dirty="0"/>
-              <a:t>A list of previous projects by students</a:t>
-            </a:r>
-          </a:p>
-        </p:txBody>
-      </p:sp>
-      <p:sp>
-        <p:nvSpPr>
-          <p:cNvPr id="5" name="TextBox 4">
-            <a:extLst>
-              <a:ext uri="{FF2B5EF4-FFF2-40B4-BE49-F238E27FC236}">
-                <a16:creationId xmlns:a16="http://schemas.microsoft.com/office/drawing/2014/main" id="{251CBEFF-1C56-B803-C345-BD8B196284D3}"/>
-              </a:ext>
-            </a:extLst>
-          </p:cNvPr>
-          <p:cNvSpPr txBox="1"/>
-          <p:nvPr/>
-        </p:nvSpPr>
-        <p:spPr>
-          <a:xfrm>
-            <a:off x="1022888" y="3109709"/>
-            <a:ext cx="9159498" cy="830997"/>
-          </a:xfrm>
-          <a:prstGeom prst="rect">
-            <a:avLst/>
-          </a:prstGeom>
-          <a:noFill/>
-        </p:spPr>
-        <p:txBody>
-          <a:bodyPr wrap="square">
-            <a:spAutoFit/>
-          </a:bodyPr>
-          <a:lstStyle/>
-          <a:p>
-            <a:r>
-              <a:rPr lang="en-US" sz="2400" dirty="0">
-                <a:hlinkClick r:id="rId2"/>
-              </a:rPr>
-              <a:t>https://github.com/orgs/UNLV-CS472-672/repositories?type=all</a:t>
-            </a:r>
-            <a:endParaRPr lang="en-US" sz="2400" dirty="0"/>
-          </a:p>
-          <a:p>
-            <a:endParaRPr lang="en-US" sz="2400" dirty="0"/>
-          </a:p>
-        </p:txBody>
-      </p:sp>
-    </p:spTree>
-    <p:extLst>
-      <p:ext uri="{BB962C8B-B14F-4D97-AF65-F5344CB8AC3E}">
-        <p14:creationId xmlns:p14="http://schemas.microsoft.com/office/powerpoint/2010/main" val="3319831364"/>
-      </p:ext>
-    </p:extLst>
-  </p:cSld>
-  <p:clrMapOvr>
-    <a:masterClrMapping/>
-  </p:clrMapOvr>
-</p:sld>
-</file>
-
-<file path=ppt/slides/slide21.xml><?xml version="1.0" encoding="utf-8"?>
 <p:sld xmlns:a="http://schemas.openxmlformats.org/drawingml/2006/main" xmlns:r="http://schemas.openxmlformats.org/officeDocument/2006/relationships" xmlns:p="http://schemas.openxmlformats.org/presentationml/2006/main">
   <p:cSld>
     <p:spTree>
@@ -17808,7 +16558,7 @@
           <a:p>
             <a:r>
               <a:rPr lang="en-US" sz="2000" dirty="0"/>
-              <a:t>Fall 2025</a:t>
+              <a:t>Spring 2026</a:t>
             </a:r>
           </a:p>
         </p:txBody>
@@ -17885,7 +16635,7 @@
           <a:p>
             <a:r>
               <a:rPr lang="en-US" sz="2000" dirty="0"/>
-              <a:t>Spring 2025</a:t>
+              <a:t>Fall 2025</a:t>
             </a:r>
           </a:p>
         </p:txBody>
@@ -17934,132 +16684,6 @@
 </file>
 
 <file path=ppt/slides/slide5.xml><?xml version="1.0" encoding="utf-8"?>
-<p:sld xmlns:a="http://schemas.openxmlformats.org/drawingml/2006/main" xmlns:r="http://schemas.openxmlformats.org/officeDocument/2006/relationships" xmlns:p="http://schemas.openxmlformats.org/presentationml/2006/main">
-  <p:cSld>
-    <p:spTree>
-      <p:nvGrpSpPr>
-        <p:cNvPr id="1" name=""/>
-        <p:cNvGrpSpPr/>
-        <p:nvPr/>
-      </p:nvGrpSpPr>
-      <p:grpSpPr>
-        <a:xfrm>
-          <a:off x="0" y="0"/>
-          <a:ext cx="0" cy="0"/>
-          <a:chOff x="0" y="0"/>
-          <a:chExt cx="0" cy="0"/>
-        </a:xfrm>
-      </p:grpSpPr>
-      <p:sp>
-        <p:nvSpPr>
-          <p:cNvPr id="2" name="Title 1">
-            <a:extLst>
-              <a:ext uri="{FF2B5EF4-FFF2-40B4-BE49-F238E27FC236}">
-                <a16:creationId xmlns:a16="http://schemas.microsoft.com/office/drawing/2014/main" id="{64E97D90-E729-C447-89D9-240E50008923}"/>
-              </a:ext>
-            </a:extLst>
-          </p:cNvPr>
-          <p:cNvSpPr>
-            <a:spLocks noGrp="1"/>
-          </p:cNvSpPr>
-          <p:nvPr>
-            <p:ph type="title"/>
-          </p:nvPr>
-        </p:nvSpPr>
-        <p:spPr/>
-        <p:txBody>
-          <a:bodyPr/>
-          <a:lstStyle/>
-          <a:p>
-            <a:r>
-              <a:rPr lang="en-GB" dirty="0">
-                <a:latin typeface="+mn-lt"/>
-              </a:rPr>
-              <a:t>Inclusivity and Gradual Learning</a:t>
-            </a:r>
-            <a:endParaRPr lang="en-US" dirty="0">
-              <a:latin typeface="+mn-lt"/>
-            </a:endParaRPr>
-          </a:p>
-        </p:txBody>
-      </p:sp>
-      <p:sp>
-        <p:nvSpPr>
-          <p:cNvPr id="3" name="Content Placeholder 2">
-            <a:extLst>
-              <a:ext uri="{FF2B5EF4-FFF2-40B4-BE49-F238E27FC236}">
-                <a16:creationId xmlns:a16="http://schemas.microsoft.com/office/drawing/2014/main" id="{B1E0D806-9615-5FBB-A79D-0D41D3A9090B}"/>
-              </a:ext>
-            </a:extLst>
-          </p:cNvPr>
-          <p:cNvSpPr>
-            <a:spLocks noGrp="1"/>
-          </p:cNvSpPr>
-          <p:nvPr>
-            <p:ph idx="1"/>
-          </p:nvPr>
-        </p:nvSpPr>
-        <p:spPr/>
-        <p:txBody>
-          <a:bodyPr/>
-          <a:lstStyle/>
-          <a:p>
-            <a:r>
-              <a:rPr lang="en-GB" dirty="0"/>
-              <a:t>We want to build confidence for all students through gradual, structured learning</a:t>
-            </a:r>
-          </a:p>
-          <a:p>
-            <a:r>
-              <a:rPr lang="en-GB" dirty="0"/>
-              <a:t>Familiar material for experienced developers serves as refinement and perspective-sharing</a:t>
-            </a:r>
-          </a:p>
-          <a:p>
-            <a:r>
-              <a:rPr lang="en-GB" dirty="0"/>
-              <a:t>Help in reflecting real-world collaboration where diverse teams work together</a:t>
-            </a:r>
-          </a:p>
-          <a:p>
-            <a:r>
-              <a:rPr lang="en-GB" dirty="0"/>
-              <a:t>Encourages mutual support between </a:t>
-            </a:r>
-            <a:r>
-              <a:rPr lang="en-GB" b="1" dirty="0"/>
-              <a:t>experienced</a:t>
-            </a:r>
-            <a:r>
-              <a:rPr lang="en-GB" dirty="0"/>
-              <a:t> and </a:t>
-            </a:r>
-            <a:r>
-              <a:rPr lang="en-GB" b="1" dirty="0"/>
-              <a:t>novice</a:t>
-            </a:r>
-            <a:r>
-              <a:rPr lang="en-GB" dirty="0"/>
-              <a:t> peers</a:t>
-            </a:r>
-            <a:endParaRPr lang="en-US" dirty="0"/>
-          </a:p>
-        </p:txBody>
-      </p:sp>
-    </p:spTree>
-    <p:extLst>
-      <p:ext uri="{BB962C8B-B14F-4D97-AF65-F5344CB8AC3E}">
-        <p14:creationId xmlns:p14="http://schemas.microsoft.com/office/powerpoint/2010/main" val="3364827142"/>
-      </p:ext>
-    </p:extLst>
-  </p:cSld>
-  <p:clrMapOvr>
-    <a:masterClrMapping/>
-  </p:clrMapOvr>
-</p:sld>
-</file>
-
-<file path=ppt/slides/slide6.xml><?xml version="1.0" encoding="utf-8"?>
 <p:sld xmlns:a="http://schemas.openxmlformats.org/drawingml/2006/main" xmlns:r="http://schemas.openxmlformats.org/officeDocument/2006/relationships" xmlns:p="http://schemas.openxmlformats.org/presentationml/2006/main">
   <p:cSld>
     <p:spTree>
@@ -19435,7 +18059,7 @@
 </p:sld>
 </file>
 
-<file path=ppt/slides/slide7.xml><?xml version="1.0" encoding="utf-8"?>
+<file path=ppt/slides/slide6.xml><?xml version="1.0" encoding="utf-8"?>
 <p:sld xmlns:a="http://schemas.openxmlformats.org/drawingml/2006/main" xmlns:r="http://schemas.openxmlformats.org/officeDocument/2006/relationships" xmlns:p="http://schemas.openxmlformats.org/presentationml/2006/main">
   <p:cSld>
     <p:spTree>
@@ -20545,7 +19169,7 @@
 </p:sld>
 </file>
 
-<file path=ppt/slides/slide8.xml><?xml version="1.0" encoding="utf-8"?>
+<file path=ppt/slides/slide7.xml><?xml version="1.0" encoding="utf-8"?>
 <p:sld xmlns:a="http://schemas.openxmlformats.org/drawingml/2006/main" xmlns:r="http://schemas.openxmlformats.org/officeDocument/2006/relationships" xmlns:p="http://schemas.openxmlformats.org/presentationml/2006/main">
   <p:cSld>
     <p:spTree>
@@ -23125,6 +21749,986 @@
 </p:sld>
 </file>
 
+<file path=ppt/slides/slide8.xml><?xml version="1.0" encoding="utf-8"?>
+<p:sld xmlns:a="http://schemas.openxmlformats.org/drawingml/2006/main" xmlns:r="http://schemas.openxmlformats.org/officeDocument/2006/relationships" xmlns:p="http://schemas.openxmlformats.org/presentationml/2006/main">
+  <p:cSld>
+    <p:spTree>
+      <p:nvGrpSpPr>
+        <p:cNvPr id="1" name=""/>
+        <p:cNvGrpSpPr/>
+        <p:nvPr/>
+      </p:nvGrpSpPr>
+      <p:grpSpPr>
+        <a:xfrm>
+          <a:off x="0" y="0"/>
+          <a:ext cx="0" cy="0"/>
+          <a:chOff x="0" y="0"/>
+          <a:chExt cx="0" cy="0"/>
+        </a:xfrm>
+      </p:grpSpPr>
+      <p:sp>
+        <p:nvSpPr>
+          <p:cNvPr id="21" name="title">
+            <a:extLst>
+              <a:ext uri="{FF2B5EF4-FFF2-40B4-BE49-F238E27FC236}">
+                <a16:creationId xmlns:a16="http://schemas.microsoft.com/office/drawing/2014/main" id="{B301118C-B32A-4023-B167-91A64245A0A2}"/>
+              </a:ext>
+            </a:extLst>
+          </p:cNvPr>
+          <p:cNvSpPr>
+            <a:spLocks noGrp="1"/>
+          </p:cNvSpPr>
+          <p:nvPr/>
+        </p:nvSpPr>
+        <p:spPr>
+          <a:xfrm>
+            <a:off x="685800" y="361950"/>
+            <a:ext cx="10820400" cy="590550"/>
+          </a:xfrm>
+          <a:prstGeom prst="rect">
+            <a:avLst/>
+          </a:prstGeom>
+          <a:noFill/>
+          <a:ln w="0">
+            <a:noFill/>
+            <a:prstDash val="solid"/>
+          </a:ln>
+        </p:spPr>
+        <p:txBody>
+          <a:bodyPr/>
+          <a:lstStyle/>
+          <a:p>
+            <a:pPr algn="l">
+              <a:defRPr sz="2400" b="1">
+                <a:solidFill>
+                  <a:srgbClr val="1F4E79"/>
+                </a:solidFill>
+              </a:defRPr>
+            </a:pPr>
+            <a:r>
+              <a:rPr sz="3200" b="1" dirty="0">
+                <a:solidFill>
+                  <a:srgbClr val="1F4E79"/>
+                </a:solidFill>
+              </a:rPr>
+              <a:t>Teams, Iterative Development, and Design Portfolios</a:t>
+            </a:r>
+          </a:p>
+        </p:txBody>
+      </p:sp>
+      <p:sp>
+        <p:nvSpPr>
+          <p:cNvPr id="3" name="timeline">
+            <a:extLst>
+              <a:ext uri="{FF2B5EF4-FFF2-40B4-BE49-F238E27FC236}">
+                <a16:creationId xmlns:a16="http://schemas.microsoft.com/office/drawing/2014/main" id="{90636572-FB86-4B38-83FB-AC8C1EC02115}"/>
+              </a:ext>
+            </a:extLst>
+          </p:cNvPr>
+          <p:cNvSpPr>
+            <a:spLocks noGrp="1"/>
+          </p:cNvSpPr>
+          <p:nvPr/>
+        </p:nvSpPr>
+        <p:spPr>
+          <a:xfrm>
+            <a:off x="2143125" y="2609850"/>
+            <a:ext cx="7905750" cy="47625"/>
+          </a:xfrm>
+          <a:prstGeom prst="rect">
+            <a:avLst/>
+          </a:prstGeom>
+          <a:solidFill>
+            <a:srgbClr val="D9E1E8"/>
+          </a:solidFill>
+          <a:ln w="0">
+            <a:noFill/>
+            <a:prstDash val="solid"/>
+          </a:ln>
+        </p:spPr>
+        <p:txBody>
+          <a:bodyPr/>
+          <a:lstStyle/>
+          <a:p>
+            <a:endParaRPr lang="en-US"/>
+          </a:p>
+        </p:txBody>
+      </p:sp>
+      <p:sp>
+        <p:nvSpPr>
+          <p:cNvPr id="4" name="arrow-1">
+            <a:extLst>
+              <a:ext uri="{FF2B5EF4-FFF2-40B4-BE49-F238E27FC236}">
+                <a16:creationId xmlns:a16="http://schemas.microsoft.com/office/drawing/2014/main" id="{03EDBC59-62D0-49B2-BC46-4D7B2C0ED978}"/>
+              </a:ext>
+            </a:extLst>
+          </p:cNvPr>
+          <p:cNvSpPr>
+            <a:spLocks noGrp="1"/>
+          </p:cNvSpPr>
+          <p:nvPr/>
+        </p:nvSpPr>
+        <p:spPr>
+          <a:xfrm>
+            <a:off x="3810000" y="2400300"/>
+            <a:ext cx="666750" cy="428625"/>
+          </a:xfrm>
+          <a:prstGeom prst="rect">
+            <a:avLst/>
+          </a:prstGeom>
+          <a:noFill/>
+          <a:ln w="0">
+            <a:noFill/>
+            <a:prstDash val="solid"/>
+          </a:ln>
+        </p:spPr>
+        <p:txBody>
+          <a:bodyPr/>
+          <a:lstStyle/>
+          <a:p>
+            <a:pPr algn="ctr">
+              <a:defRPr sz="2100" b="1">
+                <a:solidFill>
+                  <a:srgbClr val="7A8793"/>
+                </a:solidFill>
+              </a:defRPr>
+            </a:pPr>
+            <a:r>
+              <a:rPr sz="2100" b="1">
+                <a:solidFill>
+                  <a:srgbClr val="7A8793"/>
+                </a:solidFill>
+              </a:rPr>
+              <a:t>→</a:t>
+            </a:r>
+          </a:p>
+        </p:txBody>
+      </p:sp>
+      <p:sp>
+        <p:nvSpPr>
+          <p:cNvPr id="5" name="arrow-2">
+            <a:extLst>
+              <a:ext uri="{FF2B5EF4-FFF2-40B4-BE49-F238E27FC236}">
+                <a16:creationId xmlns:a16="http://schemas.microsoft.com/office/drawing/2014/main" id="{5BDDEC2A-98DD-4EDD-B97F-1B4A6A0A9841}"/>
+              </a:ext>
+            </a:extLst>
+          </p:cNvPr>
+          <p:cNvSpPr>
+            <a:spLocks noGrp="1"/>
+          </p:cNvSpPr>
+          <p:nvPr/>
+        </p:nvSpPr>
+        <p:spPr>
+          <a:xfrm>
+            <a:off x="7762875" y="2400300"/>
+            <a:ext cx="666750" cy="428625"/>
+          </a:xfrm>
+          <a:prstGeom prst="rect">
+            <a:avLst/>
+          </a:prstGeom>
+          <a:noFill/>
+          <a:ln w="0">
+            <a:noFill/>
+            <a:prstDash val="solid"/>
+          </a:ln>
+        </p:spPr>
+        <p:txBody>
+          <a:bodyPr/>
+          <a:lstStyle/>
+          <a:p>
+            <a:pPr algn="ctr">
+              <a:defRPr sz="2100" b="1">
+                <a:solidFill>
+                  <a:srgbClr val="7A8793"/>
+                </a:solidFill>
+              </a:defRPr>
+            </a:pPr>
+            <a:r>
+              <a:rPr sz="2100" b="1">
+                <a:solidFill>
+                  <a:srgbClr val="7A8793"/>
+                </a:solidFill>
+              </a:rPr>
+              <a:t>→</a:t>
+            </a:r>
+          </a:p>
+        </p:txBody>
+      </p:sp>
+      <p:sp>
+        <p:nvSpPr>
+          <p:cNvPr id="6" name="portfolio-I">
+            <a:extLst>
+              <a:ext uri="{FF2B5EF4-FFF2-40B4-BE49-F238E27FC236}">
+                <a16:creationId xmlns:a16="http://schemas.microsoft.com/office/drawing/2014/main" id="{F50A4BF3-7BC8-49CE-AC23-71DD29368D96}"/>
+              </a:ext>
+            </a:extLst>
+          </p:cNvPr>
+          <p:cNvSpPr>
+            <a:spLocks noGrp="1"/>
+          </p:cNvSpPr>
+          <p:nvPr/>
+        </p:nvSpPr>
+        <p:spPr>
+          <a:xfrm>
+            <a:off x="1685925" y="2190750"/>
+            <a:ext cx="914400" cy="914400"/>
+          </a:xfrm>
+          <a:prstGeom prst="ellipse">
+            <a:avLst/>
+          </a:prstGeom>
+          <a:solidFill>
+            <a:srgbClr val="1F4E79"/>
+          </a:solidFill>
+          <a:ln w="0">
+            <a:solidFill>
+              <a:srgbClr val="1F4E79"/>
+            </a:solidFill>
+            <a:prstDash val="solid"/>
+          </a:ln>
+        </p:spPr>
+        <p:txBody>
+          <a:bodyPr/>
+          <a:lstStyle/>
+          <a:p>
+            <a:endParaRPr lang="en-US"/>
+          </a:p>
+        </p:txBody>
+      </p:sp>
+      <p:sp>
+        <p:nvSpPr>
+          <p:cNvPr id="7" name="portfolio-label-I">
+            <a:extLst>
+              <a:ext uri="{FF2B5EF4-FFF2-40B4-BE49-F238E27FC236}">
+                <a16:creationId xmlns:a16="http://schemas.microsoft.com/office/drawing/2014/main" id="{109F9D8F-2C45-4CF1-8007-EE92E4AE9FE2}"/>
+              </a:ext>
+            </a:extLst>
+          </p:cNvPr>
+          <p:cNvSpPr>
+            <a:spLocks noGrp="1"/>
+          </p:cNvSpPr>
+          <p:nvPr/>
+        </p:nvSpPr>
+        <p:spPr>
+          <a:xfrm>
+            <a:off x="1685925" y="2428875"/>
+            <a:ext cx="914400" cy="400050"/>
+          </a:xfrm>
+          <a:prstGeom prst="rect">
+            <a:avLst/>
+          </a:prstGeom>
+          <a:noFill/>
+          <a:ln w="0">
+            <a:noFill/>
+            <a:prstDash val="solid"/>
+          </a:ln>
+        </p:spPr>
+        <p:txBody>
+          <a:bodyPr/>
+          <a:lstStyle/>
+          <a:p>
+            <a:pPr algn="ctr">
+              <a:defRPr sz="1800" b="1">
+                <a:solidFill>
+                  <a:srgbClr val="FFFFFF"/>
+                </a:solidFill>
+              </a:defRPr>
+            </a:pPr>
+            <a:r>
+              <a:rPr sz="1800" b="1" dirty="0">
+                <a:solidFill>
+                  <a:srgbClr val="FFFFFF"/>
+                </a:solidFill>
+              </a:rPr>
+              <a:t>DP I</a:t>
+            </a:r>
+          </a:p>
+        </p:txBody>
+      </p:sp>
+      <p:sp>
+        <p:nvSpPr>
+          <p:cNvPr id="8" name="portfolio-heading-I">
+            <a:extLst>
+              <a:ext uri="{FF2B5EF4-FFF2-40B4-BE49-F238E27FC236}">
+                <a16:creationId xmlns:a16="http://schemas.microsoft.com/office/drawing/2014/main" id="{03B80DDB-932F-4A7C-9F1D-78437713DEA0}"/>
+              </a:ext>
+            </a:extLst>
+          </p:cNvPr>
+          <p:cNvSpPr>
+            <a:spLocks noGrp="1"/>
+          </p:cNvSpPr>
+          <p:nvPr/>
+        </p:nvSpPr>
+        <p:spPr>
+          <a:xfrm>
+            <a:off x="428625" y="3333750"/>
+            <a:ext cx="3429000" cy="342900"/>
+          </a:xfrm>
+          <a:prstGeom prst="rect">
+            <a:avLst/>
+          </a:prstGeom>
+          <a:noFill/>
+          <a:ln w="0">
+            <a:noFill/>
+            <a:prstDash val="solid"/>
+          </a:ln>
+        </p:spPr>
+        <p:txBody>
+          <a:bodyPr/>
+          <a:lstStyle/>
+          <a:p>
+            <a:pPr algn="ctr">
+              <a:defRPr sz="1800" b="1">
+                <a:solidFill>
+                  <a:srgbClr val="1F4E79"/>
+                </a:solidFill>
+              </a:defRPr>
+            </a:pPr>
+            <a:r>
+              <a:rPr sz="1800" b="1">
+                <a:solidFill>
+                  <a:srgbClr val="1F4E79"/>
+                </a:solidFill>
+              </a:rPr>
+              <a:t>PLAN THE MVP</a:t>
+            </a:r>
+          </a:p>
+        </p:txBody>
+      </p:sp>
+      <p:sp>
+        <p:nvSpPr>
+          <p:cNvPr id="9" name="portfolio-body-I">
+            <a:extLst>
+              <a:ext uri="{FF2B5EF4-FFF2-40B4-BE49-F238E27FC236}">
+                <a16:creationId xmlns:a16="http://schemas.microsoft.com/office/drawing/2014/main" id="{77F03B4F-C6C0-4672-A9BC-25048E5025C1}"/>
+              </a:ext>
+            </a:extLst>
+          </p:cNvPr>
+          <p:cNvSpPr>
+            <a:spLocks noGrp="1"/>
+          </p:cNvSpPr>
+          <p:nvPr/>
+        </p:nvSpPr>
+        <p:spPr>
+          <a:xfrm>
+            <a:off x="381000" y="3771900"/>
+            <a:ext cx="3524250" cy="723900"/>
+          </a:xfrm>
+          <a:prstGeom prst="rect">
+            <a:avLst/>
+          </a:prstGeom>
+          <a:noFill/>
+          <a:ln w="0">
+            <a:noFill/>
+            <a:prstDash val="solid"/>
+          </a:ln>
+        </p:spPr>
+        <p:txBody>
+          <a:bodyPr/>
+          <a:lstStyle/>
+          <a:p>
+            <a:pPr algn="ctr">
+              <a:defRPr sz="1500">
+                <a:solidFill>
+                  <a:srgbClr val="000000"/>
+                </a:solidFill>
+              </a:defRPr>
+            </a:pPr>
+            <a:r>
+              <a:rPr sz="2000" dirty="0">
+                <a:solidFill>
+                  <a:srgbClr val="000000"/>
+                </a:solidFill>
+              </a:rPr>
+              <a:t>Scope • requirements • architecture</a:t>
+            </a:r>
+          </a:p>
+        </p:txBody>
+      </p:sp>
+      <p:sp>
+        <p:nvSpPr>
+          <p:cNvPr id="10" name="portfolio-II">
+            <a:extLst>
+              <a:ext uri="{FF2B5EF4-FFF2-40B4-BE49-F238E27FC236}">
+                <a16:creationId xmlns:a16="http://schemas.microsoft.com/office/drawing/2014/main" id="{97BBA381-B6E4-491A-9EF5-80BD5D13D2A9}"/>
+              </a:ext>
+            </a:extLst>
+          </p:cNvPr>
+          <p:cNvSpPr>
+            <a:spLocks noGrp="1"/>
+          </p:cNvSpPr>
+          <p:nvPr/>
+        </p:nvSpPr>
+        <p:spPr>
+          <a:xfrm>
+            <a:off x="5638800" y="2190750"/>
+            <a:ext cx="914400" cy="914400"/>
+          </a:xfrm>
+          <a:prstGeom prst="ellipse">
+            <a:avLst/>
+          </a:prstGeom>
+          <a:solidFill>
+            <a:srgbClr val="008C95"/>
+          </a:solidFill>
+          <a:ln w="0">
+            <a:solidFill>
+              <a:srgbClr val="008C95"/>
+            </a:solidFill>
+            <a:prstDash val="solid"/>
+          </a:ln>
+        </p:spPr>
+        <p:txBody>
+          <a:bodyPr/>
+          <a:lstStyle/>
+          <a:p>
+            <a:endParaRPr lang="en-US"/>
+          </a:p>
+        </p:txBody>
+      </p:sp>
+      <p:sp>
+        <p:nvSpPr>
+          <p:cNvPr id="11" name="portfolio-label-II">
+            <a:extLst>
+              <a:ext uri="{FF2B5EF4-FFF2-40B4-BE49-F238E27FC236}">
+                <a16:creationId xmlns:a16="http://schemas.microsoft.com/office/drawing/2014/main" id="{D9EBAF27-6BD1-4E86-B1E1-CDBFFDF3EB2A}"/>
+              </a:ext>
+            </a:extLst>
+          </p:cNvPr>
+          <p:cNvSpPr>
+            <a:spLocks noGrp="1"/>
+          </p:cNvSpPr>
+          <p:nvPr/>
+        </p:nvSpPr>
+        <p:spPr>
+          <a:xfrm>
+            <a:off x="5638800" y="2428875"/>
+            <a:ext cx="914400" cy="400050"/>
+          </a:xfrm>
+          <a:prstGeom prst="rect">
+            <a:avLst/>
+          </a:prstGeom>
+          <a:noFill/>
+          <a:ln w="0">
+            <a:noFill/>
+            <a:prstDash val="solid"/>
+          </a:ln>
+        </p:spPr>
+        <p:txBody>
+          <a:bodyPr/>
+          <a:lstStyle/>
+          <a:p>
+            <a:pPr algn="ctr">
+              <a:defRPr sz="1800" b="1">
+                <a:solidFill>
+                  <a:srgbClr val="FFFFFF"/>
+                </a:solidFill>
+              </a:defRPr>
+            </a:pPr>
+            <a:r>
+              <a:rPr sz="1800" b="1">
+                <a:solidFill>
+                  <a:srgbClr val="FFFFFF"/>
+                </a:solidFill>
+              </a:rPr>
+              <a:t>DP II</a:t>
+            </a:r>
+          </a:p>
+        </p:txBody>
+      </p:sp>
+      <p:sp>
+        <p:nvSpPr>
+          <p:cNvPr id="12" name="portfolio-heading-II">
+            <a:extLst>
+              <a:ext uri="{FF2B5EF4-FFF2-40B4-BE49-F238E27FC236}">
+                <a16:creationId xmlns:a16="http://schemas.microsoft.com/office/drawing/2014/main" id="{367C2D9E-1D04-4158-82BB-28CD1074E5A0}"/>
+              </a:ext>
+            </a:extLst>
+          </p:cNvPr>
+          <p:cNvSpPr>
+            <a:spLocks noGrp="1"/>
+          </p:cNvSpPr>
+          <p:nvPr/>
+        </p:nvSpPr>
+        <p:spPr>
+          <a:xfrm>
+            <a:off x="4381500" y="3333750"/>
+            <a:ext cx="3429000" cy="342900"/>
+          </a:xfrm>
+          <a:prstGeom prst="rect">
+            <a:avLst/>
+          </a:prstGeom>
+          <a:noFill/>
+          <a:ln w="0">
+            <a:noFill/>
+            <a:prstDash val="solid"/>
+          </a:ln>
+        </p:spPr>
+        <p:txBody>
+          <a:bodyPr/>
+          <a:lstStyle/>
+          <a:p>
+            <a:pPr algn="ctr">
+              <a:defRPr sz="1800" b="1">
+                <a:solidFill>
+                  <a:srgbClr val="008C95"/>
+                </a:solidFill>
+              </a:defRPr>
+            </a:pPr>
+            <a:r>
+              <a:rPr sz="1800" b="1">
+                <a:solidFill>
+                  <a:srgbClr val="008C95"/>
+                </a:solidFill>
+              </a:rPr>
+              <a:t>BUILD AND TEST</a:t>
+            </a:r>
+          </a:p>
+        </p:txBody>
+      </p:sp>
+      <p:sp>
+        <p:nvSpPr>
+          <p:cNvPr id="13" name="portfolio-body-II">
+            <a:extLst>
+              <a:ext uri="{FF2B5EF4-FFF2-40B4-BE49-F238E27FC236}">
+                <a16:creationId xmlns:a16="http://schemas.microsoft.com/office/drawing/2014/main" id="{2B7BDA28-C354-4B4F-8A8C-48D6FA5A50EC}"/>
+              </a:ext>
+            </a:extLst>
+          </p:cNvPr>
+          <p:cNvSpPr>
+            <a:spLocks noGrp="1"/>
+          </p:cNvSpPr>
+          <p:nvPr/>
+        </p:nvSpPr>
+        <p:spPr>
+          <a:xfrm>
+            <a:off x="4333875" y="3771900"/>
+            <a:ext cx="3524250" cy="723900"/>
+          </a:xfrm>
+          <a:prstGeom prst="rect">
+            <a:avLst/>
+          </a:prstGeom>
+          <a:noFill/>
+          <a:ln w="0">
+            <a:noFill/>
+            <a:prstDash val="solid"/>
+          </a:ln>
+        </p:spPr>
+        <p:txBody>
+          <a:bodyPr/>
+          <a:lstStyle/>
+          <a:p>
+            <a:pPr algn="ctr">
+              <a:defRPr sz="1500">
+                <a:solidFill>
+                  <a:srgbClr val="000000"/>
+                </a:solidFill>
+              </a:defRPr>
+            </a:pPr>
+            <a:r>
+              <a:rPr sz="2000" dirty="0">
+                <a:solidFill>
+                  <a:srgbClr val="000000"/>
+                </a:solidFill>
+              </a:rPr>
+              <a:t>≥3 substantive PRs</a:t>
+            </a:r>
+          </a:p>
+          <a:p>
+            <a:pPr algn="ctr">
+              <a:defRPr sz="1500">
+                <a:solidFill>
+                  <a:srgbClr val="000000"/>
+                </a:solidFill>
+              </a:defRPr>
+            </a:pPr>
+            <a:r>
+              <a:rPr sz="2000" dirty="0">
+                <a:solidFill>
+                  <a:srgbClr val="000000"/>
+                </a:solidFill>
+              </a:rPr>
+              <a:t>≥3 evidence-based reviews</a:t>
+            </a:r>
+          </a:p>
+        </p:txBody>
+      </p:sp>
+      <p:sp>
+        <p:nvSpPr>
+          <p:cNvPr id="14" name="portfolio-III">
+            <a:extLst>
+              <a:ext uri="{FF2B5EF4-FFF2-40B4-BE49-F238E27FC236}">
+                <a16:creationId xmlns:a16="http://schemas.microsoft.com/office/drawing/2014/main" id="{9E552166-617D-49D1-86EE-3857FEB98233}"/>
+              </a:ext>
+            </a:extLst>
+          </p:cNvPr>
+          <p:cNvSpPr>
+            <a:spLocks noGrp="1"/>
+          </p:cNvSpPr>
+          <p:nvPr/>
+        </p:nvSpPr>
+        <p:spPr>
+          <a:xfrm>
+            <a:off x="9591675" y="2190750"/>
+            <a:ext cx="914400" cy="914400"/>
+          </a:xfrm>
+          <a:prstGeom prst="ellipse">
+            <a:avLst/>
+          </a:prstGeom>
+          <a:solidFill>
+            <a:srgbClr val="C55A11"/>
+          </a:solidFill>
+          <a:ln w="0">
+            <a:solidFill>
+              <a:srgbClr val="C55A11"/>
+            </a:solidFill>
+            <a:prstDash val="solid"/>
+          </a:ln>
+        </p:spPr>
+        <p:txBody>
+          <a:bodyPr/>
+          <a:lstStyle/>
+          <a:p>
+            <a:endParaRPr lang="en-US"/>
+          </a:p>
+        </p:txBody>
+      </p:sp>
+      <p:sp>
+        <p:nvSpPr>
+          <p:cNvPr id="15" name="portfolio-label-III">
+            <a:extLst>
+              <a:ext uri="{FF2B5EF4-FFF2-40B4-BE49-F238E27FC236}">
+                <a16:creationId xmlns:a16="http://schemas.microsoft.com/office/drawing/2014/main" id="{809BE954-57BC-4874-91C4-73BB3D0635B3}"/>
+              </a:ext>
+            </a:extLst>
+          </p:cNvPr>
+          <p:cNvSpPr>
+            <a:spLocks noGrp="1"/>
+          </p:cNvSpPr>
+          <p:nvPr/>
+        </p:nvSpPr>
+        <p:spPr>
+          <a:xfrm>
+            <a:off x="9591675" y="2428875"/>
+            <a:ext cx="914400" cy="400050"/>
+          </a:xfrm>
+          <a:prstGeom prst="rect">
+            <a:avLst/>
+          </a:prstGeom>
+          <a:noFill/>
+          <a:ln w="0">
+            <a:noFill/>
+            <a:prstDash val="solid"/>
+          </a:ln>
+        </p:spPr>
+        <p:txBody>
+          <a:bodyPr/>
+          <a:lstStyle/>
+          <a:p>
+            <a:pPr algn="ctr">
+              <a:defRPr sz="1800" b="1">
+                <a:solidFill>
+                  <a:srgbClr val="FFFFFF"/>
+                </a:solidFill>
+              </a:defRPr>
+            </a:pPr>
+            <a:r>
+              <a:rPr sz="1800" b="1">
+                <a:solidFill>
+                  <a:srgbClr val="FFFFFF"/>
+                </a:solidFill>
+              </a:rPr>
+              <a:t>DP III</a:t>
+            </a:r>
+          </a:p>
+        </p:txBody>
+      </p:sp>
+      <p:sp>
+        <p:nvSpPr>
+          <p:cNvPr id="16" name="portfolio-heading-III">
+            <a:extLst>
+              <a:ext uri="{FF2B5EF4-FFF2-40B4-BE49-F238E27FC236}">
+                <a16:creationId xmlns:a16="http://schemas.microsoft.com/office/drawing/2014/main" id="{CF68D79D-3678-4F28-83B6-22FC1910A7ED}"/>
+              </a:ext>
+            </a:extLst>
+          </p:cNvPr>
+          <p:cNvSpPr>
+            <a:spLocks noGrp="1"/>
+          </p:cNvSpPr>
+          <p:nvPr/>
+        </p:nvSpPr>
+        <p:spPr>
+          <a:xfrm>
+            <a:off x="8334375" y="3333750"/>
+            <a:ext cx="3429000" cy="342900"/>
+          </a:xfrm>
+          <a:prstGeom prst="rect">
+            <a:avLst/>
+          </a:prstGeom>
+          <a:noFill/>
+          <a:ln w="0">
+            <a:noFill/>
+            <a:prstDash val="solid"/>
+          </a:ln>
+        </p:spPr>
+        <p:txBody>
+          <a:bodyPr/>
+          <a:lstStyle/>
+          <a:p>
+            <a:pPr algn="ctr">
+              <a:defRPr sz="1800" b="1">
+                <a:solidFill>
+                  <a:srgbClr val="C55A11"/>
+                </a:solidFill>
+              </a:defRPr>
+            </a:pPr>
+            <a:r>
+              <a:rPr sz="1800" b="1">
+                <a:solidFill>
+                  <a:srgbClr val="C55A11"/>
+                </a:solidFill>
+              </a:rPr>
+              <a:t>INTEGRATE AND DELIVER</a:t>
+            </a:r>
+          </a:p>
+        </p:txBody>
+      </p:sp>
+      <p:sp>
+        <p:nvSpPr>
+          <p:cNvPr id="17" name="portfolio-body-III">
+            <a:extLst>
+              <a:ext uri="{FF2B5EF4-FFF2-40B4-BE49-F238E27FC236}">
+                <a16:creationId xmlns:a16="http://schemas.microsoft.com/office/drawing/2014/main" id="{30632668-244C-42E7-866E-2D58C6FBB384}"/>
+              </a:ext>
+            </a:extLst>
+          </p:cNvPr>
+          <p:cNvSpPr>
+            <a:spLocks noGrp="1"/>
+          </p:cNvSpPr>
+          <p:nvPr/>
+        </p:nvSpPr>
+        <p:spPr>
+          <a:xfrm>
+            <a:off x="8286750" y="3771900"/>
+            <a:ext cx="3524250" cy="723900"/>
+          </a:xfrm>
+          <a:prstGeom prst="rect">
+            <a:avLst/>
+          </a:prstGeom>
+          <a:noFill/>
+          <a:ln w="0">
+            <a:noFill/>
+            <a:prstDash val="solid"/>
+          </a:ln>
+        </p:spPr>
+        <p:txBody>
+          <a:bodyPr/>
+          <a:lstStyle/>
+          <a:p>
+            <a:pPr algn="ctr">
+              <a:defRPr sz="1500">
+                <a:solidFill>
+                  <a:srgbClr val="000000"/>
+                </a:solidFill>
+              </a:defRPr>
+            </a:pPr>
+            <a:r>
+              <a:rPr sz="2000" dirty="0">
+                <a:solidFill>
+                  <a:srgbClr val="000000"/>
+                </a:solidFill>
+              </a:rPr>
+              <a:t>≥3 substantive PRs</a:t>
+            </a:r>
+          </a:p>
+          <a:p>
+            <a:pPr algn="ctr">
+              <a:defRPr sz="1500">
+                <a:solidFill>
+                  <a:srgbClr val="000000"/>
+                </a:solidFill>
+              </a:defRPr>
+            </a:pPr>
+            <a:r>
+              <a:rPr sz="2000" dirty="0">
+                <a:solidFill>
+                  <a:srgbClr val="000000"/>
+                </a:solidFill>
+              </a:rPr>
+              <a:t>≥3 evidence-based reviews</a:t>
+            </a:r>
+          </a:p>
+        </p:txBody>
+      </p:sp>
+      <p:sp>
+        <p:nvSpPr>
+          <p:cNvPr id="18" name="accountability-band">
+            <a:extLst>
+              <a:ext uri="{FF2B5EF4-FFF2-40B4-BE49-F238E27FC236}">
+                <a16:creationId xmlns:a16="http://schemas.microsoft.com/office/drawing/2014/main" id="{45464A6A-7047-444A-A51F-946E1F42CF81}"/>
+              </a:ext>
+            </a:extLst>
+          </p:cNvPr>
+          <p:cNvSpPr>
+            <a:spLocks noGrp="1"/>
+          </p:cNvSpPr>
+          <p:nvPr/>
+        </p:nvSpPr>
+        <p:spPr>
+          <a:xfrm>
+            <a:off x="685800" y="5095875"/>
+            <a:ext cx="10820400" cy="1066800"/>
+          </a:xfrm>
+          <a:prstGeom prst="roundRect">
+            <a:avLst>
+              <a:gd name="adj" fmla="val 7143"/>
+            </a:avLst>
+          </a:prstGeom>
+          <a:solidFill>
+            <a:srgbClr val="EAF2F8"/>
+          </a:solidFill>
+          <a:ln w="9525">
+            <a:solidFill>
+              <a:srgbClr val="C9DDEA"/>
+            </a:solidFill>
+            <a:prstDash val="solid"/>
+          </a:ln>
+        </p:spPr>
+        <p:txBody>
+          <a:bodyPr/>
+          <a:lstStyle/>
+          <a:p>
+            <a:endParaRPr lang="en-US"/>
+          </a:p>
+        </p:txBody>
+      </p:sp>
+      <p:sp>
+        <p:nvSpPr>
+          <p:cNvPr id="19" name="accountability-heading">
+            <a:extLst>
+              <a:ext uri="{FF2B5EF4-FFF2-40B4-BE49-F238E27FC236}">
+                <a16:creationId xmlns:a16="http://schemas.microsoft.com/office/drawing/2014/main" id="{EF855D26-AA24-4963-BECD-EEEC62DA1E88}"/>
+              </a:ext>
+            </a:extLst>
+          </p:cNvPr>
+          <p:cNvSpPr>
+            <a:spLocks noGrp="1"/>
+          </p:cNvSpPr>
+          <p:nvPr/>
+        </p:nvSpPr>
+        <p:spPr>
+          <a:xfrm>
+            <a:off x="1104900" y="5276850"/>
+            <a:ext cx="9982200" cy="342900"/>
+          </a:xfrm>
+          <a:prstGeom prst="rect">
+            <a:avLst/>
+          </a:prstGeom>
+          <a:noFill/>
+          <a:ln w="0">
+            <a:noFill/>
+            <a:prstDash val="solid"/>
+          </a:ln>
+        </p:spPr>
+        <p:txBody>
+          <a:bodyPr/>
+          <a:lstStyle/>
+          <a:p>
+            <a:pPr algn="ctr">
+              <a:defRPr sz="1800" b="1">
+                <a:solidFill>
+                  <a:srgbClr val="1F4E79"/>
+                </a:solidFill>
+              </a:defRPr>
+            </a:pPr>
+            <a:r>
+              <a:rPr sz="2400" b="1" dirty="0">
+                <a:solidFill>
+                  <a:srgbClr val="1F4E79"/>
+                </a:solidFill>
+              </a:rPr>
+              <a:t>Individual contribution across DP II and DP III</a:t>
+            </a:r>
+          </a:p>
+        </p:txBody>
+      </p:sp>
+      <p:sp>
+        <p:nvSpPr>
+          <p:cNvPr id="20" name="accountability-body">
+            <a:extLst>
+              <a:ext uri="{FF2B5EF4-FFF2-40B4-BE49-F238E27FC236}">
+                <a16:creationId xmlns:a16="http://schemas.microsoft.com/office/drawing/2014/main" id="{09AFBB86-F1AE-47A8-A038-39DB8796E42D}"/>
+              </a:ext>
+            </a:extLst>
+          </p:cNvPr>
+          <p:cNvSpPr>
+            <a:spLocks noGrp="1"/>
+          </p:cNvSpPr>
+          <p:nvPr/>
+        </p:nvSpPr>
+        <p:spPr>
+          <a:xfrm>
+            <a:off x="1104900" y="5695950"/>
+            <a:ext cx="9982200" cy="323850"/>
+          </a:xfrm>
+          <a:prstGeom prst="rect">
+            <a:avLst/>
+          </a:prstGeom>
+          <a:noFill/>
+          <a:ln w="0">
+            <a:noFill/>
+            <a:prstDash val="solid"/>
+          </a:ln>
+        </p:spPr>
+        <p:txBody>
+          <a:bodyPr/>
+          <a:lstStyle/>
+          <a:p>
+            <a:pPr algn="ctr">
+              <a:defRPr sz="1500">
+                <a:solidFill>
+                  <a:srgbClr val="000000"/>
+                </a:solidFill>
+              </a:defRPr>
+            </a:pPr>
+            <a:r>
+              <a:rPr sz="2000" dirty="0">
+                <a:solidFill>
+                  <a:srgbClr val="000000"/>
+                </a:solidFill>
+              </a:rPr>
+              <a:t>Each member:  ≥6 PRs  •  ≥6 reviews   |   Quality and relevance matter</a:t>
+            </a:r>
+            <a:r>
+              <a:rPr lang="en-US" sz="2000" dirty="0">
+                <a:solidFill>
+                  <a:srgbClr val="000000"/>
+                </a:solidFill>
+              </a:rPr>
+              <a:t> - </a:t>
+            </a:r>
+            <a:r>
+              <a:rPr sz="2000" dirty="0">
+                <a:solidFill>
+                  <a:srgbClr val="000000"/>
+                </a:solidFill>
+              </a:rPr>
+              <a:t>not only the count.</a:t>
+            </a:r>
+          </a:p>
+        </p:txBody>
+      </p:sp>
+    </p:spTree>
+    <p:extLst>
+      <p:ext uri="{BB962C8B-B14F-4D97-AF65-F5344CB8AC3E}">
+        <p14:creationId xmlns:p14="http://schemas.microsoft.com/office/powerpoint/2010/main" val="846923857"/>
+      </p:ext>
+    </p:extLst>
+  </p:cSld>
+  <p:clrMapOvr>
+    <a:masterClrMapping/>
+  </p:clrMapOvr>
+</p:sld>
+</file>
+
 <file path=ppt/slides/slide9.xml><?xml version="1.0" encoding="utf-8"?>
 <p:sld xmlns:a="http://schemas.openxmlformats.org/drawingml/2006/main" xmlns:r="http://schemas.openxmlformats.org/officeDocument/2006/relationships" xmlns:p="http://schemas.openxmlformats.org/presentationml/2006/main">
   <p:cSld>
@@ -23144,10 +22748,10 @@
       </p:grpSpPr>
       <p:sp>
         <p:nvSpPr>
-          <p:cNvPr id="21" name="title">
-            <a:extLst>
-              <a:ext uri="{FF2B5EF4-FFF2-40B4-BE49-F238E27FC236}">
-                <a16:creationId xmlns:a16="http://schemas.microsoft.com/office/drawing/2014/main" id="{B301118C-B32A-4023-B167-91A64245A0A2}"/>
+          <p:cNvPr id="18" name="title">
+            <a:extLst>
+              <a:ext uri="{FF2B5EF4-FFF2-40B4-BE49-F238E27FC236}">
+                <a16:creationId xmlns:a16="http://schemas.microsoft.com/office/drawing/2014/main" id="{9BC9DEC9-9478-460C-ACDE-C32BDEF1EE5C}"/>
               </a:ext>
             </a:extLst>
           </p:cNvPr>
@@ -23187,775 +22791,33 @@
                   <a:srgbClr val="1F4E79"/>
                 </a:solidFill>
               </a:rPr>
-              <a:t>Teams, Iterative Development, and Design Portfolios</a:t>
-            </a:r>
-          </a:p>
-        </p:txBody>
-      </p:sp>
-      <p:sp>
-        <p:nvSpPr>
-          <p:cNvPr id="3" name="timeline">
-            <a:extLst>
-              <a:ext uri="{FF2B5EF4-FFF2-40B4-BE49-F238E27FC236}">
-                <a16:creationId xmlns:a16="http://schemas.microsoft.com/office/drawing/2014/main" id="{90636572-FB86-4B38-83FB-AC8C1EC02115}"/>
-              </a:ext>
-            </a:extLst>
-          </p:cNvPr>
-          <p:cNvSpPr>
-            <a:spLocks noGrp="1"/>
-          </p:cNvSpPr>
-          <p:nvPr/>
-        </p:nvSpPr>
-        <p:spPr>
-          <a:xfrm>
-            <a:off x="2143125" y="2609850"/>
-            <a:ext cx="7905750" cy="47625"/>
-          </a:xfrm>
-          <a:prstGeom prst="rect">
-            <a:avLst/>
-          </a:prstGeom>
-          <a:solidFill>
-            <a:srgbClr val="D9E1E8"/>
-          </a:solidFill>
-          <a:ln w="0">
-            <a:noFill/>
-            <a:prstDash val="solid"/>
-          </a:ln>
-        </p:spPr>
-        <p:txBody>
-          <a:bodyPr/>
-          <a:lstStyle/>
-          <a:p>
-            <a:endParaRPr lang="en-US"/>
-          </a:p>
-        </p:txBody>
-      </p:sp>
-      <p:sp>
-        <p:nvSpPr>
-          <p:cNvPr id="4" name="arrow-1">
-            <a:extLst>
-              <a:ext uri="{FF2B5EF4-FFF2-40B4-BE49-F238E27FC236}">
-                <a16:creationId xmlns:a16="http://schemas.microsoft.com/office/drawing/2014/main" id="{03EDBC59-62D0-49B2-BC46-4D7B2C0ED978}"/>
-              </a:ext>
-            </a:extLst>
-          </p:cNvPr>
-          <p:cNvSpPr>
-            <a:spLocks noGrp="1"/>
-          </p:cNvSpPr>
-          <p:nvPr/>
-        </p:nvSpPr>
-        <p:spPr>
-          <a:xfrm>
-            <a:off x="3810000" y="2400300"/>
-            <a:ext cx="666750" cy="428625"/>
-          </a:xfrm>
-          <a:prstGeom prst="rect">
-            <a:avLst/>
-          </a:prstGeom>
-          <a:noFill/>
-          <a:ln w="0">
-            <a:noFill/>
-            <a:prstDash val="solid"/>
-          </a:ln>
-        </p:spPr>
-        <p:txBody>
-          <a:bodyPr/>
-          <a:lstStyle/>
-          <a:p>
-            <a:pPr algn="ctr">
-              <a:defRPr sz="2100" b="1">
-                <a:solidFill>
-                  <a:srgbClr val="7A8793"/>
-                </a:solidFill>
-              </a:defRPr>
-            </a:pPr>
-            <a:r>
-              <a:rPr sz="2100" b="1">
-                <a:solidFill>
-                  <a:srgbClr val="7A8793"/>
-                </a:solidFill>
-              </a:rPr>
-              <a:t>→</a:t>
-            </a:r>
-          </a:p>
-        </p:txBody>
-      </p:sp>
-      <p:sp>
-        <p:nvSpPr>
-          <p:cNvPr id="5" name="arrow-2">
-            <a:extLst>
-              <a:ext uri="{FF2B5EF4-FFF2-40B4-BE49-F238E27FC236}">
-                <a16:creationId xmlns:a16="http://schemas.microsoft.com/office/drawing/2014/main" id="{5BDDEC2A-98DD-4EDD-B97F-1B4A6A0A9841}"/>
-              </a:ext>
-            </a:extLst>
-          </p:cNvPr>
-          <p:cNvSpPr>
-            <a:spLocks noGrp="1"/>
-          </p:cNvSpPr>
-          <p:nvPr/>
-        </p:nvSpPr>
-        <p:spPr>
-          <a:xfrm>
-            <a:off x="7762875" y="2400300"/>
-            <a:ext cx="666750" cy="428625"/>
-          </a:xfrm>
-          <a:prstGeom prst="rect">
-            <a:avLst/>
-          </a:prstGeom>
-          <a:noFill/>
-          <a:ln w="0">
-            <a:noFill/>
-            <a:prstDash val="solid"/>
-          </a:ln>
-        </p:spPr>
-        <p:txBody>
-          <a:bodyPr/>
-          <a:lstStyle/>
-          <a:p>
-            <a:pPr algn="ctr">
-              <a:defRPr sz="2100" b="1">
-                <a:solidFill>
-                  <a:srgbClr val="7A8793"/>
-                </a:solidFill>
-              </a:defRPr>
-            </a:pPr>
-            <a:r>
-              <a:rPr sz="2100" b="1">
-                <a:solidFill>
-                  <a:srgbClr val="7A8793"/>
-                </a:solidFill>
-              </a:rPr>
-              <a:t>→</a:t>
-            </a:r>
-          </a:p>
-        </p:txBody>
-      </p:sp>
-      <p:sp>
-        <p:nvSpPr>
-          <p:cNvPr id="6" name="portfolio-I">
-            <a:extLst>
-              <a:ext uri="{FF2B5EF4-FFF2-40B4-BE49-F238E27FC236}">
-                <a16:creationId xmlns:a16="http://schemas.microsoft.com/office/drawing/2014/main" id="{F50A4BF3-7BC8-49CE-AC23-71DD29368D96}"/>
-              </a:ext>
-            </a:extLst>
-          </p:cNvPr>
-          <p:cNvSpPr>
-            <a:spLocks noGrp="1"/>
-          </p:cNvSpPr>
-          <p:nvPr/>
-        </p:nvSpPr>
-        <p:spPr>
-          <a:xfrm>
-            <a:off x="1685925" y="2190750"/>
-            <a:ext cx="914400" cy="914400"/>
-          </a:xfrm>
-          <a:prstGeom prst="ellipse">
-            <a:avLst/>
-          </a:prstGeom>
-          <a:solidFill>
-            <a:srgbClr val="1F4E79"/>
-          </a:solidFill>
-          <a:ln w="0">
-            <a:solidFill>
-              <a:srgbClr val="1F4E79"/>
-            </a:solidFill>
-            <a:prstDash val="solid"/>
-          </a:ln>
-        </p:spPr>
-        <p:txBody>
-          <a:bodyPr/>
-          <a:lstStyle/>
-          <a:p>
-            <a:endParaRPr lang="en-US"/>
-          </a:p>
-        </p:txBody>
-      </p:sp>
-      <p:sp>
-        <p:nvSpPr>
-          <p:cNvPr id="7" name="portfolio-label-I">
-            <a:extLst>
-              <a:ext uri="{FF2B5EF4-FFF2-40B4-BE49-F238E27FC236}">
-                <a16:creationId xmlns:a16="http://schemas.microsoft.com/office/drawing/2014/main" id="{109F9D8F-2C45-4CF1-8007-EE92E4AE9FE2}"/>
-              </a:ext>
-            </a:extLst>
-          </p:cNvPr>
-          <p:cNvSpPr>
-            <a:spLocks noGrp="1"/>
-          </p:cNvSpPr>
-          <p:nvPr/>
-        </p:nvSpPr>
-        <p:spPr>
-          <a:xfrm>
-            <a:off x="1685925" y="2428875"/>
-            <a:ext cx="914400" cy="400050"/>
-          </a:xfrm>
-          <a:prstGeom prst="rect">
-            <a:avLst/>
-          </a:prstGeom>
-          <a:noFill/>
-          <a:ln w="0">
-            <a:noFill/>
-            <a:prstDash val="solid"/>
-          </a:ln>
-        </p:spPr>
-        <p:txBody>
-          <a:bodyPr/>
-          <a:lstStyle/>
-          <a:p>
-            <a:pPr algn="ctr">
-              <a:defRPr sz="1800" b="1">
-                <a:solidFill>
-                  <a:srgbClr val="FFFFFF"/>
-                </a:solidFill>
-              </a:defRPr>
-            </a:pPr>
-            <a:r>
-              <a:rPr sz="1800" b="1" dirty="0">
-                <a:solidFill>
-                  <a:srgbClr val="FFFFFF"/>
-                </a:solidFill>
-              </a:rPr>
-              <a:t>DP I</a:t>
-            </a:r>
-          </a:p>
-        </p:txBody>
-      </p:sp>
-      <p:sp>
-        <p:nvSpPr>
-          <p:cNvPr id="8" name="portfolio-heading-I">
-            <a:extLst>
-              <a:ext uri="{FF2B5EF4-FFF2-40B4-BE49-F238E27FC236}">
-                <a16:creationId xmlns:a16="http://schemas.microsoft.com/office/drawing/2014/main" id="{03B80DDB-932F-4A7C-9F1D-78437713DEA0}"/>
-              </a:ext>
-            </a:extLst>
-          </p:cNvPr>
-          <p:cNvSpPr>
-            <a:spLocks noGrp="1"/>
-          </p:cNvSpPr>
-          <p:nvPr/>
-        </p:nvSpPr>
-        <p:spPr>
-          <a:xfrm>
-            <a:off x="428625" y="3333750"/>
-            <a:ext cx="3429000" cy="342900"/>
-          </a:xfrm>
-          <a:prstGeom prst="rect">
-            <a:avLst/>
-          </a:prstGeom>
-          <a:noFill/>
-          <a:ln w="0">
-            <a:noFill/>
-            <a:prstDash val="solid"/>
-          </a:ln>
-        </p:spPr>
-        <p:txBody>
-          <a:bodyPr/>
-          <a:lstStyle/>
-          <a:p>
-            <a:pPr algn="ctr">
-              <a:defRPr sz="1800" b="1">
-                <a:solidFill>
-                  <a:srgbClr val="1F4E79"/>
-                </a:solidFill>
-              </a:defRPr>
-            </a:pPr>
-            <a:r>
-              <a:rPr sz="1800" b="1">
-                <a:solidFill>
-                  <a:srgbClr val="1F4E79"/>
-                </a:solidFill>
-              </a:rPr>
-              <a:t>PLAN THE MVP</a:t>
-            </a:r>
-          </a:p>
-        </p:txBody>
-      </p:sp>
-      <p:sp>
-        <p:nvSpPr>
-          <p:cNvPr id="9" name="portfolio-body-I">
-            <a:extLst>
-              <a:ext uri="{FF2B5EF4-FFF2-40B4-BE49-F238E27FC236}">
-                <a16:creationId xmlns:a16="http://schemas.microsoft.com/office/drawing/2014/main" id="{77F03B4F-C6C0-4672-A9BC-25048E5025C1}"/>
-              </a:ext>
-            </a:extLst>
-          </p:cNvPr>
-          <p:cNvSpPr>
-            <a:spLocks noGrp="1"/>
-          </p:cNvSpPr>
-          <p:nvPr/>
-        </p:nvSpPr>
-        <p:spPr>
-          <a:xfrm>
-            <a:off x="381000" y="3771900"/>
-            <a:ext cx="3524250" cy="723900"/>
-          </a:xfrm>
-          <a:prstGeom prst="rect">
-            <a:avLst/>
-          </a:prstGeom>
-          <a:noFill/>
-          <a:ln w="0">
-            <a:noFill/>
-            <a:prstDash val="solid"/>
-          </a:ln>
-        </p:spPr>
-        <p:txBody>
-          <a:bodyPr/>
-          <a:lstStyle/>
-          <a:p>
-            <a:pPr algn="ctr">
-              <a:defRPr sz="1500">
-                <a:solidFill>
-                  <a:srgbClr val="000000"/>
-                </a:solidFill>
-              </a:defRPr>
-            </a:pPr>
-            <a:r>
-              <a:rPr sz="2000" dirty="0">
-                <a:solidFill>
-                  <a:srgbClr val="000000"/>
-                </a:solidFill>
-              </a:rPr>
-              <a:t>Scope • requirements • architecture</a:t>
-            </a:r>
-          </a:p>
-        </p:txBody>
-      </p:sp>
-      <p:sp>
-        <p:nvSpPr>
-          <p:cNvPr id="10" name="portfolio-II">
-            <a:extLst>
-              <a:ext uri="{FF2B5EF4-FFF2-40B4-BE49-F238E27FC236}">
-                <a16:creationId xmlns:a16="http://schemas.microsoft.com/office/drawing/2014/main" id="{97BBA381-B6E4-491A-9EF5-80BD5D13D2A9}"/>
-              </a:ext>
-            </a:extLst>
-          </p:cNvPr>
-          <p:cNvSpPr>
-            <a:spLocks noGrp="1"/>
-          </p:cNvSpPr>
-          <p:nvPr/>
-        </p:nvSpPr>
-        <p:spPr>
-          <a:xfrm>
-            <a:off x="5638800" y="2190750"/>
-            <a:ext cx="914400" cy="914400"/>
-          </a:xfrm>
-          <a:prstGeom prst="ellipse">
-            <a:avLst/>
-          </a:prstGeom>
-          <a:solidFill>
-            <a:srgbClr val="008C95"/>
-          </a:solidFill>
-          <a:ln w="0">
-            <a:solidFill>
-              <a:srgbClr val="008C95"/>
-            </a:solidFill>
-            <a:prstDash val="solid"/>
-          </a:ln>
-        </p:spPr>
-        <p:txBody>
-          <a:bodyPr/>
-          <a:lstStyle/>
-          <a:p>
-            <a:endParaRPr lang="en-US"/>
-          </a:p>
-        </p:txBody>
-      </p:sp>
-      <p:sp>
-        <p:nvSpPr>
-          <p:cNvPr id="11" name="portfolio-label-II">
-            <a:extLst>
-              <a:ext uri="{FF2B5EF4-FFF2-40B4-BE49-F238E27FC236}">
-                <a16:creationId xmlns:a16="http://schemas.microsoft.com/office/drawing/2014/main" id="{D9EBAF27-6BD1-4E86-B1E1-CDBFFDF3EB2A}"/>
-              </a:ext>
-            </a:extLst>
-          </p:cNvPr>
-          <p:cNvSpPr>
-            <a:spLocks noGrp="1"/>
-          </p:cNvSpPr>
-          <p:nvPr/>
-        </p:nvSpPr>
-        <p:spPr>
-          <a:xfrm>
-            <a:off x="5638800" y="2428875"/>
-            <a:ext cx="914400" cy="400050"/>
-          </a:xfrm>
-          <a:prstGeom prst="rect">
-            <a:avLst/>
-          </a:prstGeom>
-          <a:noFill/>
-          <a:ln w="0">
-            <a:noFill/>
-            <a:prstDash val="solid"/>
-          </a:ln>
-        </p:spPr>
-        <p:txBody>
-          <a:bodyPr/>
-          <a:lstStyle/>
-          <a:p>
-            <a:pPr algn="ctr">
-              <a:defRPr sz="1800" b="1">
-                <a:solidFill>
-                  <a:srgbClr val="FFFFFF"/>
-                </a:solidFill>
-              </a:defRPr>
-            </a:pPr>
-            <a:r>
-              <a:rPr sz="1800" b="1">
-                <a:solidFill>
-                  <a:srgbClr val="FFFFFF"/>
-                </a:solidFill>
-              </a:rPr>
-              <a:t>DP II</a:t>
-            </a:r>
-          </a:p>
-        </p:txBody>
-      </p:sp>
-      <p:sp>
-        <p:nvSpPr>
-          <p:cNvPr id="12" name="portfolio-heading-II">
-            <a:extLst>
-              <a:ext uri="{FF2B5EF4-FFF2-40B4-BE49-F238E27FC236}">
-                <a16:creationId xmlns:a16="http://schemas.microsoft.com/office/drawing/2014/main" id="{367C2D9E-1D04-4158-82BB-28CD1074E5A0}"/>
-              </a:ext>
-            </a:extLst>
-          </p:cNvPr>
-          <p:cNvSpPr>
-            <a:spLocks noGrp="1"/>
-          </p:cNvSpPr>
-          <p:nvPr/>
-        </p:nvSpPr>
-        <p:spPr>
-          <a:xfrm>
-            <a:off x="4381500" y="3333750"/>
-            <a:ext cx="3429000" cy="342900"/>
-          </a:xfrm>
-          <a:prstGeom prst="rect">
-            <a:avLst/>
-          </a:prstGeom>
-          <a:noFill/>
-          <a:ln w="0">
-            <a:noFill/>
-            <a:prstDash val="solid"/>
-          </a:ln>
-        </p:spPr>
-        <p:txBody>
-          <a:bodyPr/>
-          <a:lstStyle/>
-          <a:p>
-            <a:pPr algn="ctr">
-              <a:defRPr sz="1800" b="1">
-                <a:solidFill>
-                  <a:srgbClr val="008C95"/>
-                </a:solidFill>
-              </a:defRPr>
-            </a:pPr>
-            <a:r>
-              <a:rPr sz="1800" b="1">
-                <a:solidFill>
-                  <a:srgbClr val="008C95"/>
-                </a:solidFill>
-              </a:rPr>
-              <a:t>BUILD AND TEST</a:t>
-            </a:r>
-          </a:p>
-        </p:txBody>
-      </p:sp>
-      <p:sp>
-        <p:nvSpPr>
-          <p:cNvPr id="13" name="portfolio-body-II">
-            <a:extLst>
-              <a:ext uri="{FF2B5EF4-FFF2-40B4-BE49-F238E27FC236}">
-                <a16:creationId xmlns:a16="http://schemas.microsoft.com/office/drawing/2014/main" id="{2B7BDA28-C354-4B4F-8A8C-48D6FA5A50EC}"/>
-              </a:ext>
-            </a:extLst>
-          </p:cNvPr>
-          <p:cNvSpPr>
-            <a:spLocks noGrp="1"/>
-          </p:cNvSpPr>
-          <p:nvPr/>
-        </p:nvSpPr>
-        <p:spPr>
-          <a:xfrm>
-            <a:off x="4333875" y="3771900"/>
-            <a:ext cx="3524250" cy="723900"/>
-          </a:xfrm>
-          <a:prstGeom prst="rect">
-            <a:avLst/>
-          </a:prstGeom>
-          <a:noFill/>
-          <a:ln w="0">
-            <a:noFill/>
-            <a:prstDash val="solid"/>
-          </a:ln>
-        </p:spPr>
-        <p:txBody>
-          <a:bodyPr/>
-          <a:lstStyle/>
-          <a:p>
-            <a:pPr algn="ctr">
-              <a:defRPr sz="1500">
-                <a:solidFill>
-                  <a:srgbClr val="000000"/>
-                </a:solidFill>
-              </a:defRPr>
-            </a:pPr>
-            <a:r>
-              <a:rPr sz="2000" dirty="0">
-                <a:solidFill>
-                  <a:srgbClr val="000000"/>
-                </a:solidFill>
-              </a:rPr>
-              <a:t>≥3 substantive PRs</a:t>
-            </a:r>
-          </a:p>
-          <a:p>
-            <a:pPr algn="ctr">
-              <a:defRPr sz="1500">
-                <a:solidFill>
-                  <a:srgbClr val="000000"/>
-                </a:solidFill>
-              </a:defRPr>
-            </a:pPr>
-            <a:r>
-              <a:rPr sz="2000" dirty="0">
-                <a:solidFill>
-                  <a:srgbClr val="000000"/>
-                </a:solidFill>
-              </a:rPr>
-              <a:t>≥3 evidence-based reviews</a:t>
-            </a:r>
-          </a:p>
-        </p:txBody>
-      </p:sp>
-      <p:sp>
-        <p:nvSpPr>
-          <p:cNvPr id="14" name="portfolio-III">
-            <a:extLst>
-              <a:ext uri="{FF2B5EF4-FFF2-40B4-BE49-F238E27FC236}">
-                <a16:creationId xmlns:a16="http://schemas.microsoft.com/office/drawing/2014/main" id="{9E552166-617D-49D1-86EE-3857FEB98233}"/>
-              </a:ext>
-            </a:extLst>
-          </p:cNvPr>
-          <p:cNvSpPr>
-            <a:spLocks noGrp="1"/>
-          </p:cNvSpPr>
-          <p:nvPr/>
-        </p:nvSpPr>
-        <p:spPr>
-          <a:xfrm>
-            <a:off x="9591675" y="2190750"/>
-            <a:ext cx="914400" cy="914400"/>
-          </a:xfrm>
-          <a:prstGeom prst="ellipse">
-            <a:avLst/>
-          </a:prstGeom>
-          <a:solidFill>
-            <a:srgbClr val="C55A11"/>
-          </a:solidFill>
-          <a:ln w="0">
-            <a:solidFill>
-              <a:srgbClr val="C55A11"/>
-            </a:solidFill>
-            <a:prstDash val="solid"/>
-          </a:ln>
-        </p:spPr>
-        <p:txBody>
-          <a:bodyPr/>
-          <a:lstStyle/>
-          <a:p>
-            <a:endParaRPr lang="en-US"/>
-          </a:p>
-        </p:txBody>
-      </p:sp>
-      <p:sp>
-        <p:nvSpPr>
-          <p:cNvPr id="15" name="portfolio-label-III">
-            <a:extLst>
-              <a:ext uri="{FF2B5EF4-FFF2-40B4-BE49-F238E27FC236}">
-                <a16:creationId xmlns:a16="http://schemas.microsoft.com/office/drawing/2014/main" id="{809BE954-57BC-4874-91C4-73BB3D0635B3}"/>
-              </a:ext>
-            </a:extLst>
-          </p:cNvPr>
-          <p:cNvSpPr>
-            <a:spLocks noGrp="1"/>
-          </p:cNvSpPr>
-          <p:nvPr/>
-        </p:nvSpPr>
-        <p:spPr>
-          <a:xfrm>
-            <a:off x="9591675" y="2428875"/>
-            <a:ext cx="914400" cy="400050"/>
-          </a:xfrm>
-          <a:prstGeom prst="rect">
-            <a:avLst/>
-          </a:prstGeom>
-          <a:noFill/>
-          <a:ln w="0">
-            <a:noFill/>
-            <a:prstDash val="solid"/>
-          </a:ln>
-        </p:spPr>
-        <p:txBody>
-          <a:bodyPr/>
-          <a:lstStyle/>
-          <a:p>
-            <a:pPr algn="ctr">
-              <a:defRPr sz="1800" b="1">
-                <a:solidFill>
-                  <a:srgbClr val="FFFFFF"/>
-                </a:solidFill>
-              </a:defRPr>
-            </a:pPr>
-            <a:r>
-              <a:rPr sz="1800" b="1">
-                <a:solidFill>
-                  <a:srgbClr val="FFFFFF"/>
-                </a:solidFill>
-              </a:rPr>
-              <a:t>DP III</a:t>
-            </a:r>
-          </a:p>
-        </p:txBody>
-      </p:sp>
-      <p:sp>
-        <p:nvSpPr>
-          <p:cNvPr id="16" name="portfolio-heading-III">
-            <a:extLst>
-              <a:ext uri="{FF2B5EF4-FFF2-40B4-BE49-F238E27FC236}">
-                <a16:creationId xmlns:a16="http://schemas.microsoft.com/office/drawing/2014/main" id="{CF68D79D-3678-4F28-83B6-22FC1910A7ED}"/>
-              </a:ext>
-            </a:extLst>
-          </p:cNvPr>
-          <p:cNvSpPr>
-            <a:spLocks noGrp="1"/>
-          </p:cNvSpPr>
-          <p:nvPr/>
-        </p:nvSpPr>
-        <p:spPr>
-          <a:xfrm>
-            <a:off x="8334375" y="3333750"/>
-            <a:ext cx="3429000" cy="342900"/>
-          </a:xfrm>
-          <a:prstGeom prst="rect">
-            <a:avLst/>
-          </a:prstGeom>
-          <a:noFill/>
-          <a:ln w="0">
-            <a:noFill/>
-            <a:prstDash val="solid"/>
-          </a:ln>
-        </p:spPr>
-        <p:txBody>
-          <a:bodyPr/>
-          <a:lstStyle/>
-          <a:p>
-            <a:pPr algn="ctr">
-              <a:defRPr sz="1800" b="1">
-                <a:solidFill>
-                  <a:srgbClr val="C55A11"/>
-                </a:solidFill>
-              </a:defRPr>
-            </a:pPr>
-            <a:r>
-              <a:rPr sz="1800" b="1">
-                <a:solidFill>
-                  <a:srgbClr val="C55A11"/>
-                </a:solidFill>
-              </a:rPr>
-              <a:t>INTEGRATE AND DELIVER</a:t>
-            </a:r>
-          </a:p>
-        </p:txBody>
-      </p:sp>
-      <p:sp>
-        <p:nvSpPr>
-          <p:cNvPr id="17" name="portfolio-body-III">
-            <a:extLst>
-              <a:ext uri="{FF2B5EF4-FFF2-40B4-BE49-F238E27FC236}">
-                <a16:creationId xmlns:a16="http://schemas.microsoft.com/office/drawing/2014/main" id="{30632668-244C-42E7-866E-2D58C6FBB384}"/>
-              </a:ext>
-            </a:extLst>
-          </p:cNvPr>
-          <p:cNvSpPr>
-            <a:spLocks noGrp="1"/>
-          </p:cNvSpPr>
-          <p:nvPr/>
-        </p:nvSpPr>
-        <p:spPr>
-          <a:xfrm>
-            <a:off x="8286750" y="3771900"/>
-            <a:ext cx="3524250" cy="723900"/>
-          </a:xfrm>
-          <a:prstGeom prst="rect">
-            <a:avLst/>
-          </a:prstGeom>
-          <a:noFill/>
-          <a:ln w="0">
-            <a:noFill/>
-            <a:prstDash val="solid"/>
-          </a:ln>
-        </p:spPr>
-        <p:txBody>
-          <a:bodyPr/>
-          <a:lstStyle/>
-          <a:p>
-            <a:pPr algn="ctr">
-              <a:defRPr sz="1500">
-                <a:solidFill>
-                  <a:srgbClr val="000000"/>
-                </a:solidFill>
-              </a:defRPr>
-            </a:pPr>
-            <a:r>
-              <a:rPr sz="2000" dirty="0">
-                <a:solidFill>
-                  <a:srgbClr val="000000"/>
-                </a:solidFill>
-              </a:rPr>
-              <a:t>≥3 substantive PRs</a:t>
-            </a:r>
-          </a:p>
-          <a:p>
-            <a:pPr algn="ctr">
-              <a:defRPr sz="1500">
-                <a:solidFill>
-                  <a:srgbClr val="000000"/>
-                </a:solidFill>
-              </a:defRPr>
-            </a:pPr>
-            <a:r>
-              <a:rPr sz="2000" dirty="0">
-                <a:solidFill>
-                  <a:srgbClr val="000000"/>
-                </a:solidFill>
-              </a:rPr>
-              <a:t>≥3 evidence-based reviews</a:t>
-            </a:r>
-          </a:p>
-        </p:txBody>
-      </p:sp>
-      <p:sp>
-        <p:nvSpPr>
-          <p:cNvPr id="18" name="accountability-band">
-            <a:extLst>
-              <a:ext uri="{FF2B5EF4-FFF2-40B4-BE49-F238E27FC236}">
-                <a16:creationId xmlns:a16="http://schemas.microsoft.com/office/drawing/2014/main" id="{45464A6A-7047-444A-A51F-946E1F42CF81}"/>
-              </a:ext>
-            </a:extLst>
-          </p:cNvPr>
-          <p:cNvSpPr>
-            <a:spLocks noGrp="1"/>
-          </p:cNvSpPr>
-          <p:nvPr/>
-        </p:nvSpPr>
-        <p:spPr>
-          <a:xfrm>
-            <a:off x="685800" y="5095875"/>
-            <a:ext cx="10820400" cy="1066800"/>
+              <a:t>What Is a Minimum Viable Product?</a:t>
+            </a:r>
+          </a:p>
+        </p:txBody>
+      </p:sp>
+      <p:sp>
+        <p:nvSpPr>
+          <p:cNvPr id="2" name="definition-band">
+            <a:extLst>
+              <a:ext uri="{FF2B5EF4-FFF2-40B4-BE49-F238E27FC236}">
+                <a16:creationId xmlns:a16="http://schemas.microsoft.com/office/drawing/2014/main" id="{53EA5FB2-4583-4A85-92F7-976E8E9B311D}"/>
+              </a:ext>
+            </a:extLst>
+          </p:cNvPr>
+          <p:cNvSpPr>
+            <a:spLocks noGrp="1"/>
+          </p:cNvSpPr>
+          <p:nvPr/>
+        </p:nvSpPr>
+        <p:spPr>
+          <a:xfrm>
+            <a:off x="685800" y="1143000"/>
+            <a:ext cx="10820400" cy="1000125"/>
           </a:xfrm>
           <a:prstGeom prst="roundRect">
             <a:avLst>
-              <a:gd name="adj" fmla="val 7143"/>
+              <a:gd name="adj" fmla="val 7619"/>
             </a:avLst>
           </a:prstGeom>
           <a:solidFill>
@@ -23978,22 +22840,22 @@
       </p:sp>
       <p:sp>
         <p:nvSpPr>
-          <p:cNvPr id="19" name="accountability-heading">
-            <a:extLst>
-              <a:ext uri="{FF2B5EF4-FFF2-40B4-BE49-F238E27FC236}">
-                <a16:creationId xmlns:a16="http://schemas.microsoft.com/office/drawing/2014/main" id="{EF855D26-AA24-4963-BECD-EEEC62DA1E88}"/>
-              </a:ext>
-            </a:extLst>
-          </p:cNvPr>
-          <p:cNvSpPr>
-            <a:spLocks noGrp="1"/>
-          </p:cNvSpPr>
-          <p:nvPr/>
-        </p:nvSpPr>
-        <p:spPr>
-          <a:xfrm>
-            <a:off x="1104900" y="5276850"/>
-            <a:ext cx="9982200" cy="342900"/>
+          <p:cNvPr id="3" name="definition">
+            <a:extLst>
+              <a:ext uri="{FF2B5EF4-FFF2-40B4-BE49-F238E27FC236}">
+                <a16:creationId xmlns:a16="http://schemas.microsoft.com/office/drawing/2014/main" id="{824DE913-16CA-4534-AF07-663E4CCEBB7A}"/>
+              </a:ext>
+            </a:extLst>
+          </p:cNvPr>
+          <p:cNvSpPr>
+            <a:spLocks noGrp="1"/>
+          </p:cNvSpPr>
+          <p:nvPr/>
+        </p:nvSpPr>
+        <p:spPr>
+          <a:xfrm>
+            <a:off x="865414" y="1400175"/>
+            <a:ext cx="10319657" cy="533400"/>
           </a:xfrm>
           <a:prstGeom prst="rect">
             <a:avLst/>
@@ -24016,34 +22878,98 @@
               </a:defRPr>
             </a:pPr>
             <a:r>
-              <a:rPr sz="2400" b="1" dirty="0">
+              <a:rPr sz="2000" b="1" dirty="0">
                 <a:solidFill>
                   <a:srgbClr val="1F4E79"/>
                 </a:solidFill>
               </a:rPr>
-              <a:t>Individual contribution across DP II and DP III</a:t>
-            </a:r>
-          </a:p>
-        </p:txBody>
-      </p:sp>
-      <p:sp>
-        <p:nvSpPr>
-          <p:cNvPr id="20" name="accountability-body">
-            <a:extLst>
-              <a:ext uri="{FF2B5EF4-FFF2-40B4-BE49-F238E27FC236}">
-                <a16:creationId xmlns:a16="http://schemas.microsoft.com/office/drawing/2014/main" id="{09AFBB86-F1AE-47A8-A038-39DB8796E42D}"/>
-              </a:ext>
-            </a:extLst>
-          </p:cNvPr>
-          <p:cNvSpPr>
-            <a:spLocks noGrp="1"/>
-          </p:cNvSpPr>
-          <p:nvPr/>
-        </p:nvSpPr>
-        <p:spPr>
-          <a:xfrm>
-            <a:off x="1104900" y="5695950"/>
-            <a:ext cx="9982200" cy="323850"/>
+              <a:t>The smallest usable version that addresses a core user need and can be meaningfully evaluated.</a:t>
+            </a:r>
+          </a:p>
+        </p:txBody>
+      </p:sp>
+      <p:sp>
+        <p:nvSpPr>
+          <p:cNvPr id="4" name="criterion-value-tile">
+            <a:extLst>
+              <a:ext uri="{FF2B5EF4-FFF2-40B4-BE49-F238E27FC236}">
+                <a16:creationId xmlns:a16="http://schemas.microsoft.com/office/drawing/2014/main" id="{C7441B7A-E196-4AC6-B069-16F2E229ACFF}"/>
+              </a:ext>
+            </a:extLst>
+          </p:cNvPr>
+          <p:cNvSpPr>
+            <a:spLocks noGrp="1"/>
+          </p:cNvSpPr>
+          <p:nvPr/>
+        </p:nvSpPr>
+        <p:spPr>
+          <a:xfrm>
+            <a:off x="1695450" y="2714625"/>
+            <a:ext cx="990600" cy="876300"/>
+          </a:xfrm>
+          <a:prstGeom prst="roundRect">
+            <a:avLst>
+              <a:gd name="adj" fmla="val 8696"/>
+            </a:avLst>
+          </a:prstGeom>
+          <a:solidFill>
+            <a:srgbClr val="FFFFFF"/>
+          </a:solidFill>
+          <a:ln w="19050">
+            <a:solidFill>
+              <a:srgbClr val="1F4E79"/>
+            </a:solidFill>
+            <a:prstDash val="solid"/>
+          </a:ln>
+        </p:spPr>
+        <p:txBody>
+          <a:bodyPr/>
+          <a:lstStyle/>
+          <a:p>
+            <a:endParaRPr lang="en-US"/>
+          </a:p>
+        </p:txBody>
+      </p:sp>
+      <p:pic>
+        <p:nvPicPr>
+          <p:cNvPr id="22" name="Picture 21"/>
+          <p:cNvPicPr>
+            <a:picLocks noChangeAspect="1"/>
+          </p:cNvPicPr>
+          <p:nvPr/>
+        </p:nvPicPr>
+        <p:blipFill>
+          <a:blip r:embed="rId3"/>
+          <a:stretch/>
+        </p:blipFill>
+        <p:spPr>
+          <a:xfrm>
+            <a:off x="1800225" y="2865859"/>
+            <a:ext cx="781050" cy="573833"/>
+          </a:xfrm>
+          <a:prstGeom prst="rect">
+            <a:avLst/>
+          </a:prstGeom>
+        </p:spPr>
+      </p:pic>
+      <p:sp>
+        <p:nvSpPr>
+          <p:cNvPr id="6" name="criterion-heading-value">
+            <a:extLst>
+              <a:ext uri="{FF2B5EF4-FFF2-40B4-BE49-F238E27FC236}">
+                <a16:creationId xmlns:a16="http://schemas.microsoft.com/office/drawing/2014/main" id="{F7921666-DDC3-46D6-8C52-969234E18E3C}"/>
+              </a:ext>
+            </a:extLst>
+          </p:cNvPr>
+          <p:cNvSpPr>
+            <a:spLocks noGrp="1"/>
+          </p:cNvSpPr>
+          <p:nvPr/>
+        </p:nvSpPr>
+        <p:spPr>
+          <a:xfrm>
+            <a:off x="619125" y="3857625"/>
+            <a:ext cx="3143250" cy="342900"/>
           </a:xfrm>
           <a:prstGeom prst="rect">
             <a:avLst/>
@@ -24059,35 +22985,489 @@
           <a:lstStyle/>
           <a:p>
             <a:pPr algn="ctr">
-              <a:defRPr sz="1500">
-                <a:solidFill>
-                  <a:srgbClr val="000000"/>
+              <a:defRPr sz="1800" b="1">
+                <a:solidFill>
+                  <a:srgbClr val="1F4E79"/>
                 </a:solidFill>
               </a:defRPr>
             </a:pPr>
             <a:r>
+              <a:rPr sz="1800" b="1">
+                <a:solidFill>
+                  <a:srgbClr val="1F4E79"/>
+                </a:solidFill>
+              </a:rPr>
+              <a:t>VALUABLE</a:t>
+            </a:r>
+          </a:p>
+        </p:txBody>
+      </p:sp>
+      <p:sp>
+        <p:nvSpPr>
+          <p:cNvPr id="7" name="criterion-body-value">
+            <a:extLst>
+              <a:ext uri="{FF2B5EF4-FFF2-40B4-BE49-F238E27FC236}">
+                <a16:creationId xmlns:a16="http://schemas.microsoft.com/office/drawing/2014/main" id="{E36CCE72-B0B9-4B2C-8BBC-5F66F03580B1}"/>
+              </a:ext>
+            </a:extLst>
+          </p:cNvPr>
+          <p:cNvSpPr>
+            <a:spLocks noGrp="1"/>
+          </p:cNvSpPr>
+          <p:nvPr/>
+        </p:nvSpPr>
+        <p:spPr>
+          <a:xfrm>
+            <a:off x="523875" y="4295775"/>
+            <a:ext cx="3333750" cy="628650"/>
+          </a:xfrm>
+          <a:prstGeom prst="rect">
+            <a:avLst/>
+          </a:prstGeom>
+          <a:noFill/>
+          <a:ln w="0">
+            <a:noFill/>
+            <a:prstDash val="solid"/>
+          </a:ln>
+        </p:spPr>
+        <p:txBody>
+          <a:bodyPr/>
+          <a:lstStyle/>
+          <a:p>
+            <a:pPr algn="ctr">
+              <a:defRPr sz="1500">
+                <a:solidFill>
+                  <a:srgbClr val="000000"/>
+                </a:solidFill>
+              </a:defRPr>
+            </a:pPr>
+            <a:r>
               <a:rPr sz="2000" dirty="0">
                 <a:solidFill>
                   <a:srgbClr val="000000"/>
                 </a:solidFill>
               </a:rPr>
-              <a:t>Each member:  ≥6 PRs  •  ≥6 reviews   |   Quality and relevance matter</a:t>
-            </a:r>
-            <a:r>
-              <a:rPr lang="en-US" sz="2000" dirty="0">
+              <a:t>Addresses an important user need.</a:t>
+            </a:r>
+          </a:p>
+        </p:txBody>
+      </p:sp>
+      <p:sp>
+        <p:nvSpPr>
+          <p:cNvPr id="8" name="criterion-usable-tile">
+            <a:extLst>
+              <a:ext uri="{FF2B5EF4-FFF2-40B4-BE49-F238E27FC236}">
+                <a16:creationId xmlns:a16="http://schemas.microsoft.com/office/drawing/2014/main" id="{7C3A3B15-2E83-4507-85F1-337288311D4F}"/>
+              </a:ext>
+            </a:extLst>
+          </p:cNvPr>
+          <p:cNvSpPr>
+            <a:spLocks noGrp="1"/>
+          </p:cNvSpPr>
+          <p:nvPr/>
+        </p:nvSpPr>
+        <p:spPr>
+          <a:xfrm>
+            <a:off x="5600700" y="2714625"/>
+            <a:ext cx="990600" cy="876300"/>
+          </a:xfrm>
+          <a:prstGeom prst="roundRect">
+            <a:avLst>
+              <a:gd name="adj" fmla="val 8696"/>
+            </a:avLst>
+          </a:prstGeom>
+          <a:solidFill>
+            <a:srgbClr val="FFFFFF"/>
+          </a:solidFill>
+          <a:ln w="19050">
+            <a:solidFill>
+              <a:srgbClr val="008C95"/>
+            </a:solidFill>
+            <a:prstDash val="solid"/>
+          </a:ln>
+        </p:spPr>
+        <p:txBody>
+          <a:bodyPr/>
+          <a:lstStyle/>
+          <a:p>
+            <a:endParaRPr lang="en-US"/>
+          </a:p>
+        </p:txBody>
+      </p:sp>
+      <p:pic>
+        <p:nvPicPr>
+          <p:cNvPr id="26" name="Picture 25"/>
+          <p:cNvPicPr>
+            <a:picLocks noChangeAspect="1"/>
+          </p:cNvPicPr>
+          <p:nvPr/>
+        </p:nvPicPr>
+        <p:blipFill>
+          <a:blip r:embed="rId4"/>
+          <a:stretch/>
+        </p:blipFill>
+        <p:spPr>
+          <a:xfrm>
+            <a:off x="5753100" y="2809875"/>
+            <a:ext cx="685800" cy="685800"/>
+          </a:xfrm>
+          <a:prstGeom prst="rect">
+            <a:avLst/>
+          </a:prstGeom>
+        </p:spPr>
+      </p:pic>
+      <p:sp>
+        <p:nvSpPr>
+          <p:cNvPr id="10" name="criterion-heading-usable">
+            <a:extLst>
+              <a:ext uri="{FF2B5EF4-FFF2-40B4-BE49-F238E27FC236}">
+                <a16:creationId xmlns:a16="http://schemas.microsoft.com/office/drawing/2014/main" id="{EEE221E1-59B0-4EDE-936A-E39A4651A1E2}"/>
+              </a:ext>
+            </a:extLst>
+          </p:cNvPr>
+          <p:cNvSpPr>
+            <a:spLocks noGrp="1"/>
+          </p:cNvSpPr>
+          <p:nvPr/>
+        </p:nvSpPr>
+        <p:spPr>
+          <a:xfrm>
+            <a:off x="4524375" y="3857625"/>
+            <a:ext cx="3143250" cy="342900"/>
+          </a:xfrm>
+          <a:prstGeom prst="rect">
+            <a:avLst/>
+          </a:prstGeom>
+          <a:noFill/>
+          <a:ln w="0">
+            <a:noFill/>
+            <a:prstDash val="solid"/>
+          </a:ln>
+        </p:spPr>
+        <p:txBody>
+          <a:bodyPr/>
+          <a:lstStyle/>
+          <a:p>
+            <a:pPr algn="ctr">
+              <a:defRPr sz="1800" b="1">
+                <a:solidFill>
+                  <a:srgbClr val="008C95"/>
+                </a:solidFill>
+              </a:defRPr>
+            </a:pPr>
+            <a:r>
+              <a:rPr sz="1800" b="1">
+                <a:solidFill>
+                  <a:srgbClr val="008C95"/>
+                </a:solidFill>
+              </a:rPr>
+              <a:t>USABLE</a:t>
+            </a:r>
+          </a:p>
+        </p:txBody>
+      </p:sp>
+      <p:sp>
+        <p:nvSpPr>
+          <p:cNvPr id="11" name="criterion-body-usable">
+            <a:extLst>
+              <a:ext uri="{FF2B5EF4-FFF2-40B4-BE49-F238E27FC236}">
+                <a16:creationId xmlns:a16="http://schemas.microsoft.com/office/drawing/2014/main" id="{2F264A01-CE10-4FDE-BE60-AFED3A68DD61}"/>
+              </a:ext>
+            </a:extLst>
+          </p:cNvPr>
+          <p:cNvSpPr>
+            <a:spLocks noGrp="1"/>
+          </p:cNvSpPr>
+          <p:nvPr/>
+        </p:nvSpPr>
+        <p:spPr>
+          <a:xfrm>
+            <a:off x="4429125" y="4295775"/>
+            <a:ext cx="3333750" cy="628650"/>
+          </a:xfrm>
+          <a:prstGeom prst="rect">
+            <a:avLst/>
+          </a:prstGeom>
+          <a:noFill/>
+          <a:ln w="0">
+            <a:noFill/>
+            <a:prstDash val="solid"/>
+          </a:ln>
+        </p:spPr>
+        <p:txBody>
+          <a:bodyPr/>
+          <a:lstStyle/>
+          <a:p>
+            <a:pPr algn="ctr">
+              <a:defRPr sz="1500">
                 <a:solidFill>
                   <a:srgbClr val="000000"/>
                 </a:solidFill>
+              </a:defRPr>
+            </a:pPr>
+            <a:r>
+              <a:rPr sz="2000" dirty="0">
+                <a:solidFill>
+                  <a:srgbClr val="000000"/>
+                </a:solidFill>
               </a:rPr>
-              <a:t> - </a:t>
-            </a:r>
+              <a:t>Works as an integrated, end-to-end solution.</a:t>
+            </a:r>
+          </a:p>
+        </p:txBody>
+      </p:sp>
+      <p:sp>
+        <p:nvSpPr>
+          <p:cNvPr id="12" name="criterion-testable-tile">
+            <a:extLst>
+              <a:ext uri="{FF2B5EF4-FFF2-40B4-BE49-F238E27FC236}">
+                <a16:creationId xmlns:a16="http://schemas.microsoft.com/office/drawing/2014/main" id="{00255A37-4990-4734-93A1-BD1A4694A573}"/>
+              </a:ext>
+            </a:extLst>
+          </p:cNvPr>
+          <p:cNvSpPr>
+            <a:spLocks noGrp="1"/>
+          </p:cNvSpPr>
+          <p:nvPr/>
+        </p:nvSpPr>
+        <p:spPr>
+          <a:xfrm>
+            <a:off x="9505950" y="2714625"/>
+            <a:ext cx="990600" cy="876300"/>
+          </a:xfrm>
+          <a:prstGeom prst="roundRect">
+            <a:avLst>
+              <a:gd name="adj" fmla="val 8696"/>
+            </a:avLst>
+          </a:prstGeom>
+          <a:solidFill>
+            <a:srgbClr val="FFFFFF"/>
+          </a:solidFill>
+          <a:ln w="19050">
+            <a:solidFill>
+              <a:srgbClr val="6B5B95"/>
+            </a:solidFill>
+            <a:prstDash val="solid"/>
+          </a:ln>
+        </p:spPr>
+        <p:txBody>
+          <a:bodyPr/>
+          <a:lstStyle/>
+          <a:p>
+            <a:endParaRPr lang="en-US"/>
+          </a:p>
+        </p:txBody>
+      </p:sp>
+      <p:pic>
+        <p:nvPicPr>
+          <p:cNvPr id="30" name="Picture 29"/>
+          <p:cNvPicPr>
+            <a:picLocks noChangeAspect="1"/>
+          </p:cNvPicPr>
+          <p:nvPr/>
+        </p:nvPicPr>
+        <p:blipFill>
+          <a:blip r:embed="rId5"/>
+          <a:stretch/>
+        </p:blipFill>
+        <p:spPr>
+          <a:xfrm>
+            <a:off x="9658350" y="2809875"/>
+            <a:ext cx="685800" cy="685800"/>
+          </a:xfrm>
+          <a:prstGeom prst="rect">
+            <a:avLst/>
+          </a:prstGeom>
+        </p:spPr>
+      </p:pic>
+      <p:sp>
+        <p:nvSpPr>
+          <p:cNvPr id="14" name="criterion-heading-testable">
+            <a:extLst>
+              <a:ext uri="{FF2B5EF4-FFF2-40B4-BE49-F238E27FC236}">
+                <a16:creationId xmlns:a16="http://schemas.microsoft.com/office/drawing/2014/main" id="{21CFE0C1-60EF-455B-B6F2-202C477199EF}"/>
+              </a:ext>
+            </a:extLst>
+          </p:cNvPr>
+          <p:cNvSpPr>
+            <a:spLocks noGrp="1"/>
+          </p:cNvSpPr>
+          <p:nvPr/>
+        </p:nvSpPr>
+        <p:spPr>
+          <a:xfrm>
+            <a:off x="8429625" y="3857625"/>
+            <a:ext cx="3143250" cy="342900"/>
+          </a:xfrm>
+          <a:prstGeom prst="rect">
+            <a:avLst/>
+          </a:prstGeom>
+          <a:noFill/>
+          <a:ln w="0">
+            <a:noFill/>
+            <a:prstDash val="solid"/>
+          </a:ln>
+        </p:spPr>
+        <p:txBody>
+          <a:bodyPr/>
+          <a:lstStyle/>
+          <a:p>
+            <a:pPr algn="ctr">
+              <a:defRPr sz="1800" b="1">
+                <a:solidFill>
+                  <a:srgbClr val="6B5B95"/>
+                </a:solidFill>
+              </a:defRPr>
+            </a:pPr>
+            <a:r>
+              <a:rPr sz="1800" b="1">
+                <a:solidFill>
+                  <a:srgbClr val="6B5B95"/>
+                </a:solidFill>
+              </a:rPr>
+              <a:t>TESTABLE</a:t>
+            </a:r>
+          </a:p>
+        </p:txBody>
+      </p:sp>
+      <p:sp>
+        <p:nvSpPr>
+          <p:cNvPr id="15" name="criterion-body-testable">
+            <a:extLst>
+              <a:ext uri="{FF2B5EF4-FFF2-40B4-BE49-F238E27FC236}">
+                <a16:creationId xmlns:a16="http://schemas.microsoft.com/office/drawing/2014/main" id="{465FFBF5-85A3-470F-946B-B90F00BBE6AE}"/>
+              </a:ext>
+            </a:extLst>
+          </p:cNvPr>
+          <p:cNvSpPr>
+            <a:spLocks noGrp="1"/>
+          </p:cNvSpPr>
+          <p:nvPr/>
+        </p:nvSpPr>
+        <p:spPr>
+          <a:xfrm>
+            <a:off x="8334375" y="4295775"/>
+            <a:ext cx="3333750" cy="628650"/>
+          </a:xfrm>
+          <a:prstGeom prst="rect">
+            <a:avLst/>
+          </a:prstGeom>
+          <a:noFill/>
+          <a:ln w="0">
+            <a:noFill/>
+            <a:prstDash val="solid"/>
+          </a:ln>
+        </p:spPr>
+        <p:txBody>
+          <a:bodyPr/>
+          <a:lstStyle/>
+          <a:p>
+            <a:pPr algn="ctr">
+              <a:defRPr sz="1500">
+                <a:solidFill>
+                  <a:srgbClr val="000000"/>
+                </a:solidFill>
+              </a:defRPr>
+            </a:pPr>
             <a:r>
               <a:rPr sz="2000" dirty="0">
                 <a:solidFill>
                   <a:srgbClr val="000000"/>
                 </a:solidFill>
               </a:rPr>
-              <a:t>not only the count.</a:t>
+              <a:t>Produces evidence and feedback for improvement.</a:t>
+            </a:r>
+          </a:p>
+        </p:txBody>
+      </p:sp>
+      <p:sp>
+        <p:nvSpPr>
+          <p:cNvPr id="16" name="quality-band">
+            <a:extLst>
+              <a:ext uri="{FF2B5EF4-FFF2-40B4-BE49-F238E27FC236}">
+                <a16:creationId xmlns:a16="http://schemas.microsoft.com/office/drawing/2014/main" id="{6900996A-C2B9-40E1-A915-6160EC79890F}"/>
+              </a:ext>
+            </a:extLst>
+          </p:cNvPr>
+          <p:cNvSpPr>
+            <a:spLocks noGrp="1"/>
+          </p:cNvSpPr>
+          <p:nvPr/>
+        </p:nvSpPr>
+        <p:spPr>
+          <a:xfrm>
+            <a:off x="2667000" y="5391150"/>
+            <a:ext cx="6858000" cy="666750"/>
+          </a:xfrm>
+          <a:prstGeom prst="roundRect">
+            <a:avLst>
+              <a:gd name="adj" fmla="val 11429"/>
+            </a:avLst>
+          </a:prstGeom>
+          <a:solidFill>
+            <a:srgbClr val="FFF2E8"/>
+          </a:solidFill>
+          <a:ln w="9525">
+            <a:solidFill>
+              <a:srgbClr val="F0C7A7"/>
+            </a:solidFill>
+            <a:prstDash val="solid"/>
+          </a:ln>
+        </p:spPr>
+        <p:txBody>
+          <a:bodyPr/>
+          <a:lstStyle/>
+          <a:p>
+            <a:endParaRPr lang="en-US"/>
+          </a:p>
+        </p:txBody>
+      </p:sp>
+      <p:sp>
+        <p:nvSpPr>
+          <p:cNvPr id="17" name="quality-takeaway">
+            <a:extLst>
+              <a:ext uri="{FF2B5EF4-FFF2-40B4-BE49-F238E27FC236}">
+                <a16:creationId xmlns:a16="http://schemas.microsoft.com/office/drawing/2014/main" id="{BFE2EC88-2F9C-4F52-A027-C7F3CE9DF7AC}"/>
+              </a:ext>
+            </a:extLst>
+          </p:cNvPr>
+          <p:cNvSpPr>
+            <a:spLocks noGrp="1"/>
+          </p:cNvSpPr>
+          <p:nvPr/>
+        </p:nvSpPr>
+        <p:spPr>
+          <a:xfrm>
+            <a:off x="3000375" y="5581650"/>
+            <a:ext cx="6191250" cy="342900"/>
+          </a:xfrm>
+          <a:prstGeom prst="rect">
+            <a:avLst/>
+          </a:prstGeom>
+          <a:noFill/>
+          <a:ln w="0">
+            <a:noFill/>
+            <a:prstDash val="solid"/>
+          </a:ln>
+        </p:spPr>
+        <p:txBody>
+          <a:bodyPr/>
+          <a:lstStyle/>
+          <a:p>
+            <a:pPr algn="ctr">
+              <a:defRPr sz="1800" b="1">
+                <a:solidFill>
+                  <a:srgbClr val="C55A11"/>
+                </a:solidFill>
+              </a:defRPr>
+            </a:pPr>
+            <a:r>
+              <a:rPr sz="2000" b="1" dirty="0">
+                <a:solidFill>
+                  <a:srgbClr val="C55A11"/>
+                </a:solidFill>
+              </a:rPr>
+              <a:t>Minimum scope—not minimum quality.</a:t>
             </a:r>
           </a:p>
         </p:txBody>
@@ -24095,13 +23475,506 @@
     </p:spTree>
     <p:extLst>
       <p:ext uri="{BB962C8B-B14F-4D97-AF65-F5344CB8AC3E}">
-        <p14:creationId xmlns:p14="http://schemas.microsoft.com/office/powerpoint/2010/main" val="846923857"/>
+        <p14:creationId xmlns:p14="http://schemas.microsoft.com/office/powerpoint/2010/main" val="1650864483"/>
       </p:ext>
     </p:extLst>
   </p:cSld>
   <p:clrMapOvr>
     <a:masterClrMapping/>
   </p:clrMapOvr>
+  <p:timing>
+    <p:tnLst>
+      <p:par>
+        <p:cTn id="1" dur="indefinite" restart="never" nodeType="tmRoot">
+          <p:childTnLst>
+            <p:seq concurrent="1" nextAc="seek">
+              <p:cTn id="2" dur="indefinite" nodeType="mainSeq">
+                <p:childTnLst>
+                  <p:par>
+                    <p:cTn id="3" fill="hold">
+                      <p:stCondLst>
+                        <p:cond delay="indefinite"/>
+                      </p:stCondLst>
+                      <p:childTnLst>
+                        <p:par>
+                          <p:cTn id="4" fill="hold">
+                            <p:stCondLst>
+                              <p:cond delay="0"/>
+                            </p:stCondLst>
+                            <p:childTnLst>
+                              <p:par>
+                                <p:cTn id="5" presetID="1" presetClass="entr" presetSubtype="0" fill="hold" grpId="0" nodeType="clickEffect">
+                                  <p:stCondLst>
+                                    <p:cond delay="0"/>
+                                  </p:stCondLst>
+                                  <p:childTnLst>
+                                    <p:set>
+                                      <p:cBhvr>
+                                        <p:cTn id="6" dur="1" fill="hold">
+                                          <p:stCondLst>
+                                            <p:cond delay="0"/>
+                                          </p:stCondLst>
+                                        </p:cTn>
+                                        <p:tgtEl>
+                                          <p:spTgt spid="4"/>
+                                        </p:tgtEl>
+                                        <p:attrNameLst>
+                                          <p:attrName>style.visibility</p:attrName>
+                                        </p:attrNameLst>
+                                      </p:cBhvr>
+                                      <p:to>
+                                        <p:strVal val="visible"/>
+                                      </p:to>
+                                    </p:set>
+                                  </p:childTnLst>
+                                </p:cTn>
+                              </p:par>
+                              <p:par>
+                                <p:cTn id="7" presetID="1" presetClass="entr" presetSubtype="0" fill="hold" nodeType="withEffect">
+                                  <p:stCondLst>
+                                    <p:cond delay="0"/>
+                                  </p:stCondLst>
+                                  <p:childTnLst>
+                                    <p:set>
+                                      <p:cBhvr>
+                                        <p:cTn id="8" dur="1" fill="hold">
+                                          <p:stCondLst>
+                                            <p:cond delay="0"/>
+                                          </p:stCondLst>
+                                        </p:cTn>
+                                        <p:tgtEl>
+                                          <p:spTgt spid="22"/>
+                                        </p:tgtEl>
+                                        <p:attrNameLst>
+                                          <p:attrName>style.visibility</p:attrName>
+                                        </p:attrNameLst>
+                                      </p:cBhvr>
+                                      <p:to>
+                                        <p:strVal val="visible"/>
+                                      </p:to>
+                                    </p:set>
+                                  </p:childTnLst>
+                                </p:cTn>
+                              </p:par>
+                              <p:par>
+                                <p:cTn id="9" presetID="1" presetClass="entr" presetSubtype="0" fill="hold" grpId="0" nodeType="withEffect">
+                                  <p:stCondLst>
+                                    <p:cond delay="0"/>
+                                  </p:stCondLst>
+                                  <p:childTnLst>
+                                    <p:set>
+                                      <p:cBhvr>
+                                        <p:cTn id="10" dur="1" fill="hold">
+                                          <p:stCondLst>
+                                            <p:cond delay="0"/>
+                                          </p:stCondLst>
+                                        </p:cTn>
+                                        <p:tgtEl>
+                                          <p:spTgt spid="6"/>
+                                        </p:tgtEl>
+                                        <p:attrNameLst>
+                                          <p:attrName>style.visibility</p:attrName>
+                                        </p:attrNameLst>
+                                      </p:cBhvr>
+                                      <p:to>
+                                        <p:strVal val="visible"/>
+                                      </p:to>
+                                    </p:set>
+                                  </p:childTnLst>
+                                </p:cTn>
+                              </p:par>
+                              <p:par>
+                                <p:cTn id="11" presetID="1" presetClass="entr" presetSubtype="0" fill="hold" grpId="0" nodeType="withEffect">
+                                  <p:stCondLst>
+                                    <p:cond delay="0"/>
+                                  </p:stCondLst>
+                                  <p:childTnLst>
+                                    <p:set>
+                                      <p:cBhvr>
+                                        <p:cTn id="12" dur="1" fill="hold">
+                                          <p:stCondLst>
+                                            <p:cond delay="0"/>
+                                          </p:stCondLst>
+                                        </p:cTn>
+                                        <p:tgtEl>
+                                          <p:spTgt spid="7"/>
+                                        </p:tgtEl>
+                                        <p:attrNameLst>
+                                          <p:attrName>style.visibility</p:attrName>
+                                        </p:attrNameLst>
+                                      </p:cBhvr>
+                                      <p:to>
+                                        <p:strVal val="visible"/>
+                                      </p:to>
+                                    </p:set>
+                                  </p:childTnLst>
+                                </p:cTn>
+                              </p:par>
+                            </p:childTnLst>
+                          </p:cTn>
+                        </p:par>
+                      </p:childTnLst>
+                    </p:cTn>
+                  </p:par>
+                  <p:par>
+                    <p:cTn id="13" fill="hold">
+                      <p:stCondLst>
+                        <p:cond delay="indefinite"/>
+                      </p:stCondLst>
+                      <p:childTnLst>
+                        <p:par>
+                          <p:cTn id="14" fill="hold">
+                            <p:stCondLst>
+                              <p:cond delay="0"/>
+                            </p:stCondLst>
+                            <p:childTnLst>
+                              <p:par>
+                                <p:cTn id="15" presetID="1" presetClass="entr" presetSubtype="0" fill="hold" grpId="0" nodeType="clickEffect">
+                                  <p:stCondLst>
+                                    <p:cond delay="0"/>
+                                  </p:stCondLst>
+                                  <p:childTnLst>
+                                    <p:set>
+                                      <p:cBhvr>
+                                        <p:cTn id="16" dur="1" fill="hold">
+                                          <p:stCondLst>
+                                            <p:cond delay="0"/>
+                                          </p:stCondLst>
+                                        </p:cTn>
+                                        <p:tgtEl>
+                                          <p:spTgt spid="8"/>
+                                        </p:tgtEl>
+                                        <p:attrNameLst>
+                                          <p:attrName>style.visibility</p:attrName>
+                                        </p:attrNameLst>
+                                      </p:cBhvr>
+                                      <p:to>
+                                        <p:strVal val="visible"/>
+                                      </p:to>
+                                    </p:set>
+                                  </p:childTnLst>
+                                </p:cTn>
+                              </p:par>
+                              <p:par>
+                                <p:cTn id="17" presetID="1" presetClass="entr" presetSubtype="0" fill="hold" nodeType="withEffect">
+                                  <p:stCondLst>
+                                    <p:cond delay="0"/>
+                                  </p:stCondLst>
+                                  <p:childTnLst>
+                                    <p:set>
+                                      <p:cBhvr>
+                                        <p:cTn id="18" dur="1" fill="hold">
+                                          <p:stCondLst>
+                                            <p:cond delay="0"/>
+                                          </p:stCondLst>
+                                        </p:cTn>
+                                        <p:tgtEl>
+                                          <p:spTgt spid="26"/>
+                                        </p:tgtEl>
+                                        <p:attrNameLst>
+                                          <p:attrName>style.visibility</p:attrName>
+                                        </p:attrNameLst>
+                                      </p:cBhvr>
+                                      <p:to>
+                                        <p:strVal val="visible"/>
+                                      </p:to>
+                                    </p:set>
+                                  </p:childTnLst>
+                                </p:cTn>
+                              </p:par>
+                              <p:par>
+                                <p:cTn id="19" presetID="1" presetClass="entr" presetSubtype="0" fill="hold" grpId="0" nodeType="withEffect">
+                                  <p:stCondLst>
+                                    <p:cond delay="0"/>
+                                  </p:stCondLst>
+                                  <p:childTnLst>
+                                    <p:set>
+                                      <p:cBhvr>
+                                        <p:cTn id="20" dur="1" fill="hold">
+                                          <p:stCondLst>
+                                            <p:cond delay="0"/>
+                                          </p:stCondLst>
+                                        </p:cTn>
+                                        <p:tgtEl>
+                                          <p:spTgt spid="10"/>
+                                        </p:tgtEl>
+                                        <p:attrNameLst>
+                                          <p:attrName>style.visibility</p:attrName>
+                                        </p:attrNameLst>
+                                      </p:cBhvr>
+                                      <p:to>
+                                        <p:strVal val="visible"/>
+                                      </p:to>
+                                    </p:set>
+                                  </p:childTnLst>
+                                </p:cTn>
+                              </p:par>
+                              <p:par>
+                                <p:cTn id="21" presetID="1" presetClass="entr" presetSubtype="0" fill="hold" grpId="0" nodeType="withEffect">
+                                  <p:stCondLst>
+                                    <p:cond delay="0"/>
+                                  </p:stCondLst>
+                                  <p:childTnLst>
+                                    <p:set>
+                                      <p:cBhvr>
+                                        <p:cTn id="22" dur="1" fill="hold">
+                                          <p:stCondLst>
+                                            <p:cond delay="0"/>
+                                          </p:stCondLst>
+                                        </p:cTn>
+                                        <p:tgtEl>
+                                          <p:spTgt spid="11"/>
+                                        </p:tgtEl>
+                                        <p:attrNameLst>
+                                          <p:attrName>style.visibility</p:attrName>
+                                        </p:attrNameLst>
+                                      </p:cBhvr>
+                                      <p:to>
+                                        <p:strVal val="visible"/>
+                                      </p:to>
+                                    </p:set>
+                                  </p:childTnLst>
+                                </p:cTn>
+                              </p:par>
+                            </p:childTnLst>
+                          </p:cTn>
+                        </p:par>
+                      </p:childTnLst>
+                    </p:cTn>
+                  </p:par>
+                  <p:par>
+                    <p:cTn id="23" fill="hold">
+                      <p:stCondLst>
+                        <p:cond delay="indefinite"/>
+                      </p:stCondLst>
+                      <p:childTnLst>
+                        <p:par>
+                          <p:cTn id="24" fill="hold">
+                            <p:stCondLst>
+                              <p:cond delay="0"/>
+                            </p:stCondLst>
+                            <p:childTnLst>
+                              <p:par>
+                                <p:cTn id="25" presetID="1" presetClass="entr" presetSubtype="0" fill="hold" grpId="0" nodeType="clickEffect">
+                                  <p:stCondLst>
+                                    <p:cond delay="0"/>
+                                  </p:stCondLst>
+                                  <p:childTnLst>
+                                    <p:set>
+                                      <p:cBhvr>
+                                        <p:cTn id="26" dur="1" fill="hold">
+                                          <p:stCondLst>
+                                            <p:cond delay="0"/>
+                                          </p:stCondLst>
+                                        </p:cTn>
+                                        <p:tgtEl>
+                                          <p:spTgt spid="12"/>
+                                        </p:tgtEl>
+                                        <p:attrNameLst>
+                                          <p:attrName>style.visibility</p:attrName>
+                                        </p:attrNameLst>
+                                      </p:cBhvr>
+                                      <p:to>
+                                        <p:strVal val="visible"/>
+                                      </p:to>
+                                    </p:set>
+                                  </p:childTnLst>
+                                </p:cTn>
+                              </p:par>
+                              <p:par>
+                                <p:cTn id="27" presetID="1" presetClass="entr" presetSubtype="0" fill="hold" nodeType="withEffect">
+                                  <p:stCondLst>
+                                    <p:cond delay="0"/>
+                                  </p:stCondLst>
+                                  <p:childTnLst>
+                                    <p:set>
+                                      <p:cBhvr>
+                                        <p:cTn id="28" dur="1" fill="hold">
+                                          <p:stCondLst>
+                                            <p:cond delay="0"/>
+                                          </p:stCondLst>
+                                        </p:cTn>
+                                        <p:tgtEl>
+                                          <p:spTgt spid="30"/>
+                                        </p:tgtEl>
+                                        <p:attrNameLst>
+                                          <p:attrName>style.visibility</p:attrName>
+                                        </p:attrNameLst>
+                                      </p:cBhvr>
+                                      <p:to>
+                                        <p:strVal val="visible"/>
+                                      </p:to>
+                                    </p:set>
+                                  </p:childTnLst>
+                                </p:cTn>
+                              </p:par>
+                              <p:par>
+                                <p:cTn id="29" presetID="1" presetClass="entr" presetSubtype="0" fill="hold" grpId="0" nodeType="withEffect">
+                                  <p:stCondLst>
+                                    <p:cond delay="0"/>
+                                  </p:stCondLst>
+                                  <p:childTnLst>
+                                    <p:set>
+                                      <p:cBhvr>
+                                        <p:cTn id="30" dur="1" fill="hold">
+                                          <p:stCondLst>
+                                            <p:cond delay="0"/>
+                                          </p:stCondLst>
+                                        </p:cTn>
+                                        <p:tgtEl>
+                                          <p:spTgt spid="14"/>
+                                        </p:tgtEl>
+                                        <p:attrNameLst>
+                                          <p:attrName>style.visibility</p:attrName>
+                                        </p:attrNameLst>
+                                      </p:cBhvr>
+                                      <p:to>
+                                        <p:strVal val="visible"/>
+                                      </p:to>
+                                    </p:set>
+                                  </p:childTnLst>
+                                </p:cTn>
+                              </p:par>
+                              <p:par>
+                                <p:cTn id="31" presetID="1" presetClass="entr" presetSubtype="0" fill="hold" grpId="0" nodeType="withEffect">
+                                  <p:stCondLst>
+                                    <p:cond delay="0"/>
+                                  </p:stCondLst>
+                                  <p:childTnLst>
+                                    <p:set>
+                                      <p:cBhvr>
+                                        <p:cTn id="32" dur="1" fill="hold">
+                                          <p:stCondLst>
+                                            <p:cond delay="0"/>
+                                          </p:stCondLst>
+                                        </p:cTn>
+                                        <p:tgtEl>
+                                          <p:spTgt spid="15"/>
+                                        </p:tgtEl>
+                                        <p:attrNameLst>
+                                          <p:attrName>style.visibility</p:attrName>
+                                        </p:attrNameLst>
+                                      </p:cBhvr>
+                                      <p:to>
+                                        <p:strVal val="visible"/>
+                                      </p:to>
+                                    </p:set>
+                                  </p:childTnLst>
+                                </p:cTn>
+                              </p:par>
+                            </p:childTnLst>
+                          </p:cTn>
+                        </p:par>
+                      </p:childTnLst>
+                    </p:cTn>
+                  </p:par>
+                  <p:par>
+                    <p:cTn id="33" fill="hold">
+                      <p:stCondLst>
+                        <p:cond delay="indefinite"/>
+                      </p:stCondLst>
+                      <p:childTnLst>
+                        <p:par>
+                          <p:cTn id="34" fill="hold">
+                            <p:stCondLst>
+                              <p:cond delay="0"/>
+                            </p:stCondLst>
+                            <p:childTnLst>
+                              <p:par>
+                                <p:cTn id="35" presetID="1" presetClass="entr" presetSubtype="0" fill="hold" grpId="0" nodeType="clickEffect">
+                                  <p:stCondLst>
+                                    <p:cond delay="0"/>
+                                  </p:stCondLst>
+                                  <p:childTnLst>
+                                    <p:set>
+                                      <p:cBhvr>
+                                        <p:cTn id="36" dur="1" fill="hold">
+                                          <p:stCondLst>
+                                            <p:cond delay="0"/>
+                                          </p:stCondLst>
+                                        </p:cTn>
+                                        <p:tgtEl>
+                                          <p:spTgt spid="16"/>
+                                        </p:tgtEl>
+                                        <p:attrNameLst>
+                                          <p:attrName>style.visibility</p:attrName>
+                                        </p:attrNameLst>
+                                      </p:cBhvr>
+                                      <p:to>
+                                        <p:strVal val="visible"/>
+                                      </p:to>
+                                    </p:set>
+                                  </p:childTnLst>
+                                </p:cTn>
+                              </p:par>
+                              <p:par>
+                                <p:cTn id="37" presetID="1" presetClass="entr" presetSubtype="0" fill="hold" grpId="0" nodeType="withEffect">
+                                  <p:stCondLst>
+                                    <p:cond delay="0"/>
+                                  </p:stCondLst>
+                                  <p:childTnLst>
+                                    <p:set>
+                                      <p:cBhvr>
+                                        <p:cTn id="38" dur="1" fill="hold">
+                                          <p:stCondLst>
+                                            <p:cond delay="0"/>
+                                          </p:stCondLst>
+                                        </p:cTn>
+                                        <p:tgtEl>
+                                          <p:spTgt spid="17"/>
+                                        </p:tgtEl>
+                                        <p:attrNameLst>
+                                          <p:attrName>style.visibility</p:attrName>
+                                        </p:attrNameLst>
+                                      </p:cBhvr>
+                                      <p:to>
+                                        <p:strVal val="visible"/>
+                                      </p:to>
+                                    </p:set>
+                                  </p:childTnLst>
+                                </p:cTn>
+                              </p:par>
+                            </p:childTnLst>
+                          </p:cTn>
+                        </p:par>
+                      </p:childTnLst>
+                    </p:cTn>
+                  </p:par>
+                </p:childTnLst>
+              </p:cTn>
+              <p:prevCondLst>
+                <p:cond evt="onPrev" delay="0">
+                  <p:tgtEl>
+                    <p:sldTgt/>
+                  </p:tgtEl>
+                </p:cond>
+              </p:prevCondLst>
+              <p:nextCondLst>
+                <p:cond evt="onNext" delay="0">
+                  <p:tgtEl>
+                    <p:sldTgt/>
+                  </p:tgtEl>
+                </p:cond>
+              </p:nextCondLst>
+            </p:seq>
+          </p:childTnLst>
+        </p:cTn>
+      </p:par>
+    </p:tnLst>
+    <p:bldLst>
+      <p:bldP spid="4" grpId="0" animBg="1"/>
+      <p:bldP spid="6" grpId="0"/>
+      <p:bldP spid="7" grpId="0"/>
+      <p:bldP spid="8" grpId="0" animBg="1"/>
+      <p:bldP spid="10" grpId="0"/>
+      <p:bldP spid="11" grpId="0"/>
+      <p:bldP spid="12" grpId="0" animBg="1"/>
+      <p:bldP spid="14" grpId="0"/>
+      <p:bldP spid="15" grpId="0"/>
+      <p:bldP spid="16" grpId="0" animBg="1"/>
+      <p:bldP spid="17" grpId="0"/>
+    </p:bldLst>
+  </p:timing>
 </p:sld>
 </file>
 

--- a/teaching/CS472/Timetable/ClassOverview-V2.pptx
+++ b/teaching/CS472/Timetable/ClassOverview-V2.pptx
@@ -5,7 +5,7 @@
     <p:sldMasterId id="2147483648" r:id="rId1"/>
   </p:sldMasterIdLst>
   <p:notesMasterIdLst>
-    <p:notesMasterId r:id="rId22"/>
+    <p:notesMasterId r:id="rId23"/>
   </p:notesMasterIdLst>
   <p:sldIdLst>
     <p:sldId id="267" r:id="rId2"/>
@@ -19,15 +19,16 @@
     <p:sldId id="329" r:id="rId10"/>
     <p:sldId id="330" r:id="rId11"/>
     <p:sldId id="323" r:id="rId12"/>
-    <p:sldId id="324" r:id="rId13"/>
-    <p:sldId id="325" r:id="rId14"/>
-    <p:sldId id="326" r:id="rId15"/>
-    <p:sldId id="327" r:id="rId16"/>
-    <p:sldId id="328" r:id="rId17"/>
-    <p:sldId id="258" r:id="rId18"/>
-    <p:sldId id="305" r:id="rId19"/>
-    <p:sldId id="314" r:id="rId20"/>
-    <p:sldId id="309" r:id="rId21"/>
+    <p:sldId id="331" r:id="rId13"/>
+    <p:sldId id="324" r:id="rId14"/>
+    <p:sldId id="325" r:id="rId15"/>
+    <p:sldId id="326" r:id="rId16"/>
+    <p:sldId id="327" r:id="rId17"/>
+    <p:sldId id="328" r:id="rId18"/>
+    <p:sldId id="258" r:id="rId19"/>
+    <p:sldId id="305" r:id="rId20"/>
+    <p:sldId id="314" r:id="rId21"/>
+    <p:sldId id="309" r:id="rId22"/>
   </p:sldIdLst>
   <p:sldSz cx="12192000" cy="6858000"/>
   <p:notesSz cx="6858000" cy="9144000"/>
@@ -705,51 +706,64 @@
           <a:lstStyle/>
           <a:p>
             <a:r>
-              <a:rPr dirty="0"/>
-              <a:t>This example uses a student assignment portal, a workflow students already understand from systems such as Canvas.</a:t>
-            </a:r>
-          </a:p>
-          <a:p>
-            <a:r>
               <a:rPr lang="en-BE" dirty="0"/>
-              <a:t>The database, API, and basic interface are necessary components, but they do not provide a complete user outcome.</a:t>
-            </a:r>
-          </a:p>
-          <a:p>
-            <a:r>
+              <a:t>Consider a student assignment portal similar to Canvas.</a:t>
+            </a:r>
+          </a:p>
+          <a:p>
+            <a:r>
+              <a:rPr lang="en-BE" b="1" dirty="0"/>
+              <a:t>[Click 1 — Components]</a:t>
+            </a:r>
+            <a:br>
               <a:rPr lang="en-BE" dirty="0"/>
-              <a:t>The three increments build one working assignment workflow: view the assignment, submit the work, and receive feedback.</a:t>
-            </a:r>
-          </a:p>
-          <a:p>
+            </a:br>
             <a:r>
               <a:rPr lang="en-BE" dirty="0"/>
-              <a:t>Together, they form an MVP that is </a:t>
-            </a:r>
+              <a:t>A database, an API, and an interface are necessary. However, completing these components separately does not yet give the student a useful outcome.</a:t>
+            </a:r>
+          </a:p>
+          <a:p>
             <a:r>
               <a:rPr lang="en-BE" b="1" dirty="0"/>
-              <a:t>valuable</a:t>
-            </a:r>
-            <a:r>
+              <a:t>[Click 2 — Components-only message]</a:t>
+            </a:r>
+            <a:br>
               <a:rPr lang="en-BE" dirty="0"/>
-              <a:t> because it addresses a real need, </a:t>
-            </a:r>
+            </a:br>
+            <a:r>
+              <a:rPr lang="en-BE" dirty="0"/>
+              <a:t>The student still cannot complete a meaningful task. This is why we should not define progress only by technical layers or the amount of code produced.</a:t>
+            </a:r>
+          </a:p>
+          <a:p>
             <a:r>
               <a:rPr lang="en-BE" b="1" dirty="0"/>
-              <a:t>usable</a:t>
-            </a:r>
-            <a:r>
+              <a:t>[Click 3 — Usable increments]</a:t>
+            </a:r>
+            <a:br>
               <a:rPr lang="en-BE" dirty="0"/>
-              <a:t> because it works end to end, and </a:t>
-            </a:r>
+            </a:br>
+            <a:r>
+              <a:rPr lang="en-BE" dirty="0"/>
+              <a:t>Instead, build the system through usable increments. First, students can view an assignment and its due date. Next, they can submit their work and receive confirmation. Then, the instructor can review the submission and return feedback. Each increment completes a real workflow and extends the previous one.</a:t>
+            </a:r>
+          </a:p>
+          <a:p>
             <a:r>
               <a:rPr lang="en-BE" b="1" dirty="0"/>
-              <a:t>testable</a:t>
-            </a:r>
-            <a:r>
+              <a:t>[Click 4 — Final message]</a:t>
+            </a:r>
+            <a:br>
               <a:rPr lang="en-BE" dirty="0"/>
-              <a:t> because students and instructors can use and evaluate it.</a:t>
-            </a:r>
+            </a:br>
+            <a:r>
+              <a:rPr lang="en-BE" dirty="0"/>
+              <a:t>This connects to our MVP definition: each increment provides value, works end to end, and can be tested and evaluated. What matters is not merely completing components, but delivering working outcomes that guide the next decision.</a:t>
+            </a:r>
+          </a:p>
+          <a:p>
+            <a:endParaRPr lang="en-BE" dirty="0"/>
           </a:p>
         </p:txBody>
       </p:sp>
@@ -927,32 +941,39 @@
           <a:lstStyle/>
           <a:p>
             <a:r>
-              <a:rPr dirty="0"/>
-              <a:t>A client project introduces the realities that are difficult to reproduce in a purely classroom-defined assignment.</a:t>
-            </a:r>
-          </a:p>
-          <a:p>
-            <a:r>
-              <a:rPr dirty="0"/>
-              <a:t>The team must understand a real problem, negotiate an achievable MVP, and work within the client’s technical and organizational constraints.</a:t>
-            </a:r>
-          </a:p>
-          <a:p>
-            <a:r>
-              <a:rPr dirty="0"/>
-              <a:t>Students must communicate professionally: ask clarifying questions, document decisions, report progress, manage access or confidentiality requirements, and respond constructively to feedback.</a:t>
-            </a:r>
-          </a:p>
-          <a:p>
-            <a:r>
-              <a:rPr dirty="0"/>
-              <a:t>The client is a stakeholder, not the team’s project manager. Students remain responsible for planning, technical decisions, testing, documentation, and delivery.</a:t>
-            </a:r>
-          </a:p>
-          <a:p>
-            <a:r>
-              <a:rPr dirty="0"/>
-              <a:t>A technically functioning system is not sufficient if the team fails to communicate, disregards agreed requirements, or leaves the client unable to use or maintain the result.</a:t>
+              <a:t>Client projects provide external needs and constraints. Student-designed projects offer a different but equally valuable experience: the team becomes both the product owner and the engineering team.</a:t>
+            </a:r>
+          </a:p>
+          <a:p>
+            <a:endParaRPr/>
+          </a:p>
+          <a:p>
+            <a:r>
+              <a:t>[Click 1] First, the team owns the problem. Choose something meaningful—not simply an application that is easy to build.</a:t>
+            </a:r>
+          </a:p>
+          <a:p>
+            <a:endParaRPr/>
+          </a:p>
+          <a:p>
+            <a:r>
+              <a:t>[Click 2] Next, shape the product. Identify real users, prepare the precondition report, define the requirements, and agree on an achievable MVP.</a:t>
+            </a:r>
+          </a:p>
+          <a:p>
+            <a:endParaRPr/>
+          </a:p>
+          <a:p>
+            <a:r>
+              <a:t>[Click 3] Finally, lead the engineering. The team must make and justify the design, implementation, testing, and integration decisions.</a:t>
+            </a:r>
+          </a:p>
+          <a:p>
+            <a:endParaRPr/>
+          </a:p>
+          <a:p>
+            <a:r>
+              <a:t>[Click 4] Both project types are judged by the same standard: a valuable, usable, tested product supported by evidence from real users. The difference is where the initial problem and constraints come from.</a:t>
             </a:r>
           </a:p>
         </p:txBody>
@@ -1030,37 +1051,31 @@
           <a:p>
             <a:r>
               <a:rPr dirty="0"/>
-              <a:t>Team difficulties become engineering risks when they remain invisible.</a:t>
+              <a:t>A client project introduces the realities that are difficult to reproduce in a purely classroom-defined assignment.</a:t>
             </a:r>
           </a:p>
           <a:p>
             <a:r>
               <a:rPr dirty="0"/>
-              <a:t>Uneven participation can overload a few students and leave other members without sufficient evidence of contribution.</a:t>
+              <a:t>The team must understand a real problem, negotiate an achievable MVP, and work within the client’s technical and organizational constraints.</a:t>
             </a:r>
           </a:p>
           <a:p>
             <a:r>
               <a:rPr dirty="0"/>
-              <a:t>Unclear ownership leads to duplicated work, missed dependencies, and tasks that everyone assumes someone else will complete.</a:t>
+              <a:t>Students must communicate professionally: ask clarifying questions, document decisions, report progress, manage access or confidentiality requirements, and respond constructively to feedback.</a:t>
             </a:r>
           </a:p>
           <a:p>
             <a:r>
               <a:rPr dirty="0"/>
-              <a:t>Late integration produces larger conflicts, rushed reviews, inadequate testing, and unstable demonstrations.</a:t>
+              <a:t>The client is a stakeholder, not the team’s project manager. Students remain responsible for planning, technical decisions, testing, documentation, and delivery.</a:t>
             </a:r>
           </a:p>
           <a:p>
             <a:r>
               <a:rPr dirty="0"/>
-              <a:t>Silent problems include technical blockers, unavailable teammates, client delays, and scope concerns that are reported only when little recovery time remains.</a:t>
-            </a:r>
-          </a:p>
-          <a:p>
-            <a:r>
-              <a:rPr dirty="0"/>
-              <a:t>Use issues, assignments, pull requests, reviews, meetings, and written decisions to make the team’s actual state visible.</a:t>
+              <a:t>A technically functioning system is not sufficient if the team fails to communicate, disregards agreed requirements, or leaves the client unable to use or maintain the result.</a:t>
             </a:r>
           </a:p>
         </p:txBody>
@@ -1138,49 +1153,37 @@
           <a:p>
             <a:r>
               <a:rPr dirty="0"/>
-              <a:t>This policy applies to the Git and GitHub lab, the Testing and CI lab, and the team project.</a:t>
+              <a:t>Team difficulties become engineering risks when they remain invisible.</a:t>
             </a:r>
           </a:p>
           <a:p>
             <a:r>
               <a:rPr dirty="0"/>
-              <a:t>A review-ready pull request contains the required work, links to its issue, and is not marked as a draft.</a:t>
+              <a:t>Uneven participation can overload a few students and leave other members without sufficient evidence of contribution.</a:t>
             </a:r>
           </a:p>
           <a:p>
             <a:r>
               <a:rPr dirty="0"/>
-              <a:t>The author should open the pull request at least 24 hours before the assignment deadline so that review feedback can be addressed.</a:t>
+              <a:t>Unclear ownership leads to duplicated work, missed dependencies, and tasks that everyone assumes someone else will complete.</a:t>
             </a:r>
           </a:p>
           <a:p>
             <a:r>
               <a:rPr dirty="0"/>
-              <a:t>Round-robin assignments identify the initial reviewer, not the only possible reviewer.</a:t>
+              <a:t>Late integration produces larger conflicts, rushed reviews, inadequate testing, and unstable demonstrations.</a:t>
             </a:r>
           </a:p>
           <a:p>
             <a:r>
               <a:rPr dirty="0"/>
-              <a:t>If the assigned reviewer is unavailable, the author should request another teammate. If the assigned author has no review-ready pull request, the reviewer should review another available pull request.</a:t>
+              <a:t>Silent problems include technical blockers, unavailable teammates, client delays, and scope concerns that are reported only when little recovery time remains.</a:t>
             </a:r>
           </a:p>
           <a:p>
             <a:r>
               <a:rPr dirty="0"/>
-              <a:t>Notify the instructor or TA before the deadline if no teammate is available.</a:t>
-            </a:r>
-          </a:p>
-          <a:p>
-            <a:r>
-              <a:rPr dirty="0"/>
-              <a:t>A student who is ready on time and makes a reasonable effort to obtain a review will not be penalized for another student’s delay. GitHub timestamps provide evidence.</a:t>
-            </a:r>
-          </a:p>
-          <a:p>
-            <a:r>
-              <a:rPr dirty="0"/>
-              <a:t>Students who submit late remain responsible for obtaining the required review. Teammates are not required to delay completed work to accommodate a late contribution.</a:t>
+              <a:t>Use issues, assignments, pull requests, reviews, meetings, and written decisions to make the team’s actual state visible.</a:t>
             </a:r>
           </a:p>
         </p:txBody>
@@ -1258,39 +1261,49 @@
           <a:p>
             <a:r>
               <a:rPr dirty="0"/>
-              <a:t>Preview the visible path from task definition to reviewed work on main.</a:t>
+              <a:t>This policy applies to the Git and GitHub lab, the Testing and CI lab, and the team project.</a:t>
             </a:r>
           </a:p>
           <a:p>
             <a:r>
               <a:rPr dirty="0"/>
-              <a:t>Students use the workflow in the lab and later in the team project.</a:t>
+              <a:t>A review-ready pull request contains the required work, links to its issue, and is not marked as a draft.</a:t>
             </a:r>
           </a:p>
           <a:p>
             <a:r>
               <a:rPr dirty="0"/>
-              <a:t>[Sources]</a:t>
+              <a:t>The author should open the pull request at least 24 hours before the assignment deadline so that review feedback can be addressed.</a:t>
             </a:r>
           </a:p>
           <a:p>
             <a:r>
               <a:rPr dirty="0"/>
-              <a:t>- User-provided Git-and-</a:t>
-            </a:r>
-            <a:r>
-              <a:rPr dirty="0" err="1"/>
-              <a:t>GitHub.pdf</a:t>
-            </a:r>
+              <a:t>Round-robin assignments identify the initial reviewer, not the only possible reviewer.</a:t>
+            </a:r>
+          </a:p>
+          <a:p>
             <a:r>
               <a:rPr dirty="0"/>
-              <a:t>.</a:t>
+              <a:t>If the assigned reviewer is unavailable, the author should request another teammate. If the assigned author has no review-ready pull request, the reviewer should review another available pull request.</a:t>
             </a:r>
           </a:p>
           <a:p>
             <a:r>
               <a:rPr dirty="0"/>
-              <a:t>- User-provided Git workflow icon examples.</a:t>
+              <a:t>Notify the instructor or TA before the deadline if no teammate is available.</a:t>
+            </a:r>
+          </a:p>
+          <a:p>
+            <a:r>
+              <a:rPr dirty="0"/>
+              <a:t>A student who is ready on time and makes a reasonable effort to obtain a review will not be penalized for another student’s delay. GitHub timestamps provide evidence.</a:t>
+            </a:r>
+          </a:p>
+          <a:p>
+            <a:r>
+              <a:rPr dirty="0"/>
+              <a:t>Students who submit late remain responsible for obtaining the required review. Teammates are not required to delay completed work to accommodate a late contribution.</a:t>
             </a:r>
           </a:p>
         </p:txBody>
@@ -1367,32 +1380,40 @@
           <a:lstStyle/>
           <a:p>
             <a:r>
-              <a:t>Tests check behavior; coverage identifies unexercised code; CI automates agreed checks.</a:t>
-            </a:r>
-          </a:p>
-          <a:p>
-            <a:r>
-              <a:t>Coverage is evidence, not a guarantee of test quality.</a:t>
-            </a:r>
-          </a:p>
-          <a:p>
-            <a:r>
+              <a:rPr dirty="0"/>
+              <a:t>Preview the visible path from task definition to reviewed work on main.</a:t>
+            </a:r>
+          </a:p>
+          <a:p>
+            <a:r>
+              <a:rPr dirty="0"/>
+              <a:t>Students use the workflow in the lab and later in the team project.</a:t>
+            </a:r>
+          </a:p>
+          <a:p>
+            <a:r>
+              <a:rPr dirty="0"/>
               <a:t>[Sources]</a:t>
             </a:r>
           </a:p>
           <a:p>
             <a:r>
-              <a:t>- User-provided CS472 - Software Testing.pdf.</a:t>
-            </a:r>
-          </a:p>
-          <a:p>
-            <a:r>
-              <a:t>- User-provided CS472 - CI - Using GitHub Actions - Setting up workflow.pdf.</a:t>
-            </a:r>
-          </a:p>
-          <a:p>
-            <a:r>
-              <a:t>- User-provided software testing icon examples.</a:t>
+              <a:rPr dirty="0"/>
+              <a:t>- User-provided Git-and-</a:t>
+            </a:r>
+            <a:r>
+              <a:rPr dirty="0" err="1"/>
+              <a:t>GitHub.pdf</a:t>
+            </a:r>
+            <a:r>
+              <a:rPr dirty="0"/>
+              <a:t>.</a:t>
+            </a:r>
+          </a:p>
+          <a:p>
+            <a:r>
+              <a:rPr dirty="0"/>
+              <a:t>- User-provided Git workflow icon examples.</a:t>
             </a:r>
           </a:p>
         </p:txBody>
@@ -1469,12 +1490,12 @@
           <a:lstStyle/>
           <a:p>
             <a:r>
-              <a:t>Structural changes normally need class-diagram evidence; behavioral changes normally need sequence-diagram evidence.</a:t>
-            </a:r>
-          </a:p>
-          <a:p>
-            <a:r>
-              <a:t>Students should show only the part of the system affected by the PR.</a:t>
+              <a:t>Tests check behavior; coverage identifies unexercised code; CI automates agreed checks.</a:t>
+            </a:r>
+          </a:p>
+          <a:p>
+            <a:r>
+              <a:t>Coverage is evidence, not a guarantee of test quality.</a:t>
             </a:r>
           </a:p>
           <a:p>
@@ -1484,12 +1505,17 @@
           </a:p>
           <a:p>
             <a:r>
-              <a:t>- User-provided OOD-V2.pptx.</a:t>
-            </a:r>
-          </a:p>
-          <a:p>
-            <a:r>
-              <a:t>- User-provided class and sequence diagram icon examples.</a:t>
+              <a:t>- User-provided CS472 - Software Testing.pdf.</a:t>
+            </a:r>
+          </a:p>
+          <a:p>
+            <a:r>
+              <a:t>- User-provided CS472 - CI - Using GitHub Actions - Setting up workflow.pdf.</a:t>
+            </a:r>
+          </a:p>
+          <a:p>
+            <a:r>
+              <a:t>- User-provided software testing icon examples.</a:t>
             </a:r>
           </a:p>
         </p:txBody>
@@ -1565,6 +1591,103 @@
           <a:bodyPr/>
           <a:lstStyle/>
           <a:p>
+            <a:r>
+              <a:t>Structural changes normally need class-diagram evidence; behavioral changes normally need sequence-diagram evidence.</a:t>
+            </a:r>
+          </a:p>
+          <a:p>
+            <a:r>
+              <a:t>Students should show only the part of the system affected by the PR.</a:t>
+            </a:r>
+          </a:p>
+          <a:p>
+            <a:r>
+              <a:t>[Sources]</a:t>
+            </a:r>
+          </a:p>
+          <a:p>
+            <a:r>
+              <a:t>- User-provided OOD-V2.pptx.</a:t>
+            </a:r>
+          </a:p>
+          <a:p>
+            <a:r>
+              <a:t>- User-provided class and sequence diagram icon examples.</a:t>
+            </a:r>
+          </a:p>
+        </p:txBody>
+      </p:sp>
+      <p:sp>
+        <p:nvSpPr>
+          <p:cNvPr id="4" name="Slide Number Placeholder 3"/>
+          <p:cNvSpPr>
+            <a:spLocks noGrp="1"/>
+          </p:cNvSpPr>
+          <p:nvPr>
+            <p:ph type="sldNum" idx="5"/>
+          </p:nvPr>
+        </p:nvSpPr>
+        <p:spPr/>
+        <p:txBody>
+          <a:bodyPr/>
+          <a:lstStyle/>
+          <a:p>
+            <a:endParaRPr/>
+          </a:p>
+        </p:txBody>
+      </p:sp>
+    </p:spTree>
+  </p:cSld>
+  <p:clrMapOvr>
+    <a:masterClrMapping/>
+  </p:clrMapOvr>
+</p:notes>
+</file>
+
+<file path=ppt/notesSlides/notesSlide19.xml><?xml version="1.0" encoding="utf-8"?>
+<p:notes xmlns:a="http://schemas.openxmlformats.org/drawingml/2006/main" xmlns:r="http://schemas.openxmlformats.org/officeDocument/2006/relationships" xmlns:p="http://schemas.openxmlformats.org/presentationml/2006/main">
+  <p:cSld>
+    <p:spTree>
+      <p:nvGrpSpPr>
+        <p:cNvPr id="1" name=""/>
+        <p:cNvGrpSpPr/>
+        <p:nvPr/>
+      </p:nvGrpSpPr>
+      <p:grpSpPr>
+        <a:xfrm>
+          <a:off x="0" y="0"/>
+          <a:ext cx="0" cy="0"/>
+          <a:chOff x="0" y="0"/>
+          <a:chExt cx="0" cy="0"/>
+        </a:xfrm>
+      </p:grpSpPr>
+      <p:sp>
+        <p:nvSpPr>
+          <p:cNvPr id="2" name="Slide Image Placeholder 1"/>
+          <p:cNvSpPr>
+            <a:spLocks noGrp="1" noRot="1" noChangeAspect="1"/>
+          </p:cNvSpPr>
+          <p:nvPr>
+            <p:ph type="sldImg"/>
+          </p:nvPr>
+        </p:nvSpPr>
+        <p:spPr/>
+      </p:sp>
+      <p:sp>
+        <p:nvSpPr>
+          <p:cNvPr id="3" name="Notes Placeholder 2"/>
+          <p:cNvSpPr>
+            <a:spLocks noGrp="1"/>
+          </p:cNvSpPr>
+          <p:nvPr>
+            <p:ph type="body" idx="1"/>
+          </p:nvPr>
+        </p:nvSpPr>
+        <p:spPr/>
+        <p:txBody>
+          <a:bodyPr/>
+          <a:lstStyle/>
+          <a:p>
             <a:endParaRPr lang="en-BE" dirty="0"/>
           </a:p>
         </p:txBody>
@@ -1586,7 +1709,7 @@
           <a:p>
             <a:fld id="{D5181410-5F61-C247-9B70-F663CDE0B230}" type="slidenum">
               <a:rPr lang="en-BE" smtClean="0"/>
-              <a:t>18</a:t>
+              <a:t>19</a:t>
             </a:fld>
             <a:endParaRPr lang="en-BE"/>
           </a:p>
@@ -2095,7 +2218,7 @@
           <a:bodyPr/>
           <a:lstStyle/>
           <a:p>
-            <a:endParaRPr/>
+            <a:endParaRPr dirty="0"/>
           </a:p>
         </p:txBody>
       </p:sp>
@@ -2246,27 +2369,109 @@
           <a:lstStyle/>
           <a:p>
             <a:r>
-              <a:t>An MVP is not simply the smallest amount of code a team can produce. It must provide a usable outcome for a real user or client.</a:t>
-            </a:r>
-          </a:p>
-          <a:p>
-            <a:r>
-              <a:t>A mockup may evaluate an interface, and a technical prototype may reduce uncertainty, but neither is automatically an MVP.</a:t>
-            </a:r>
-          </a:p>
-          <a:p>
-            <a:r>
-              <a:t>For this course, viable means the product addresses a core need, works from end to end, and can be meaningfully evaluated.</a:t>
-            </a:r>
-          </a:p>
-          <a:p>
-            <a:r>
-              <a:t>Minimum refers to scope, not engineering quality. The selected features should still be integrated, tested, and professionally implemented.</a:t>
-            </a:r>
-          </a:p>
-          <a:p>
-            <a:r>
-              <a:t>Teams agree on the MVP scope with the client. Feedback may refine priorities and implementation decisions, but substantial scope changes should be discussed and documented with the client and instructor.</a:t>
+              <a:rPr lang="en-BE" dirty="0"/>
+              <a:t>An MVP is not simply the smallest amount of code a team can produce. It is the smallest version of the product that delivers a useful outcome for a real user or client.</a:t>
+            </a:r>
+          </a:p>
+          <a:p>
+            <a:r>
+              <a:rPr lang="en-BE" dirty="0"/>
+              <a:t>For this course, an MVP must satisfy three conditions.</a:t>
+            </a:r>
+          </a:p>
+          <a:p>
+            <a:r>
+              <a:rPr lang="en-BE" b="1" dirty="0"/>
+              <a:t>[Click 1 — Valuable]</a:t>
+            </a:r>
+            <a:endParaRPr lang="en-BE" dirty="0"/>
+          </a:p>
+          <a:p>
+            <a:r>
+              <a:rPr lang="en-BE" dirty="0"/>
+              <a:t>First, it must be </a:t>
+            </a:r>
+            <a:r>
+              <a:rPr lang="en-BE" b="1" dirty="0"/>
+              <a:t>valuable</a:t>
+            </a:r>
+            <a:r>
+              <a:rPr lang="en-BE" dirty="0"/>
+              <a:t>. It should address an important user or client need. A feature is not valuable merely because it was technically interesting to implement. Ask: </a:t>
+            </a:r>
+            <a:r>
+              <a:rPr lang="en-BE" i="1" dirty="0"/>
+              <a:t>Does this solve a real problem for the intended user?</a:t>
+            </a:r>
+            <a:endParaRPr lang="en-BE" dirty="0"/>
+          </a:p>
+          <a:p>
+            <a:r>
+              <a:rPr lang="en-BE" b="1" dirty="0"/>
+              <a:t>[Click 2 — Usable]</a:t>
+            </a:r>
+            <a:endParaRPr lang="en-BE" dirty="0"/>
+          </a:p>
+          <a:p>
+            <a:r>
+              <a:rPr lang="en-BE" dirty="0"/>
+              <a:t>Second, it must be </a:t>
+            </a:r>
+            <a:r>
+              <a:rPr lang="en-BE" b="1" dirty="0"/>
+              <a:t>usable</a:t>
+            </a:r>
+            <a:r>
+              <a:rPr lang="en-BE" dirty="0"/>
+              <a:t>. The selected features should work together as an integrated, end-to-end solution. A collection of disconnected screens, isolated components, or unfinished features is not yet a usable MVP. A user should be able to complete at least one meaningful workflow.</a:t>
+            </a:r>
+          </a:p>
+          <a:p>
+            <a:r>
+              <a:rPr lang="en-BE" b="1" dirty="0"/>
+              <a:t>[Click 3 — Testable]</a:t>
+            </a:r>
+            <a:endParaRPr lang="en-BE" dirty="0"/>
+          </a:p>
+          <a:p>
+            <a:r>
+              <a:rPr lang="en-BE" dirty="0"/>
+              <a:t>Third, it must be </a:t>
+            </a:r>
+            <a:r>
+              <a:rPr lang="en-BE" b="1" dirty="0"/>
+              <a:t>testable</a:t>
+            </a:r>
+            <a:r>
+              <a:rPr lang="en-BE" dirty="0"/>
+              <a:t>. The team should be able to evaluate whether the MVP works and whether it meets the intended need. Evidence may come from functional tests, CI results, a working demonstration, and feedback from users or the client. The purpose is to identify what works, what does not, and what should be improved.</a:t>
+            </a:r>
+          </a:p>
+          <a:p>
+            <a:r>
+              <a:rPr lang="en-BE" b="1" dirty="0"/>
+              <a:t>[Click 4 — Minimum scope, not minimum quality]</a:t>
+            </a:r>
+            <a:endParaRPr lang="en-BE" dirty="0"/>
+          </a:p>
+          <a:p>
+            <a:r>
+              <a:rPr lang="en-BE" dirty="0"/>
+              <a:t>Finally, “minimum” refers to the </a:t>
+            </a:r>
+            <a:r>
+              <a:rPr lang="en-BE" b="1" dirty="0"/>
+              <a:t>scope</a:t>
+            </a:r>
+            <a:r>
+              <a:rPr lang="en-BE" dirty="0"/>
+              <a:t>, not the quality. You may deliver fewer features, but the features you select should be integrated, tested, and professionally implemented.</a:t>
+            </a:r>
+          </a:p>
+          <a:p>
+            <a:r>
+              <a:rPr lang="en-BE" dirty="0"/>
+              <a:t>The team should agree on the MVP scope with the client. Feedback may refine priorities and implementation decisions, but substantial scope changes should be discussed and documented with both the client and the instructor.</a:t>
             </a:r>
           </a:p>
         </p:txBody>
@@ -7605,6 +7810,33 @@
                                   </p:childTnLst>
                                 </p:cTn>
                               </p:par>
+                              <p:par>
+                                <p:cTn id="29" presetID="1" presetClass="entr" presetSubtype="0" fill="hold" grpId="0" nodeType="withEffect">
+                                  <p:stCondLst>
+                                    <p:cond delay="0"/>
+                                  </p:stCondLst>
+                                  <p:childTnLst>
+                                    <p:set>
+                                      <p:cBhvr>
+                                        <p:cTn id="30" dur="1" fill="hold">
+                                          <p:stCondLst>
+                                            <p:cond delay="0"/>
+                                          </p:stCondLst>
+                                        </p:cTn>
+                                        <p:tgtEl>
+                                          <p:spTgt spid="15"/>
+                                        </p:tgtEl>
+                                        <p:attrNameLst>
+                                          <p:attrName>style.visibility</p:attrName>
+                                        </p:attrNameLst>
+                                      </p:cBhvr>
+                                      <p:to>
+                                        <p:strVal val="visible"/>
+                                      </p:to>
+                                    </p:set>
+                                  </p:childTnLst>
+                                </p:cTn>
+                              </p:par>
                             </p:childTnLst>
                           </p:cTn>
                         </p:par>
@@ -7612,32 +7844,509 @@
                     </p:cTn>
                   </p:par>
                   <p:par>
-                    <p:cTn id="29" fill="hold">
+                    <p:cTn id="31" fill="hold">
                       <p:stCondLst>
                         <p:cond delay="indefinite"/>
                       </p:stCondLst>
                       <p:childTnLst>
                         <p:par>
-                          <p:cTn id="30" fill="hold">
+                          <p:cTn id="32" fill="hold">
                             <p:stCondLst>
                               <p:cond delay="0"/>
                             </p:stCondLst>
                             <p:childTnLst>
                               <p:par>
-                                <p:cTn id="31" presetID="1" presetClass="entr" presetSubtype="0" fill="hold" grpId="0" nodeType="clickEffect">
+                                <p:cTn id="33" presetID="1" presetClass="entr" presetSubtype="0" fill="hold" grpId="0" nodeType="clickEffect">
                                   <p:stCondLst>
                                     <p:cond delay="0"/>
                                   </p:stCondLst>
                                   <p:childTnLst>
                                     <p:set>
                                       <p:cBhvr>
-                                        <p:cTn id="32" dur="1" fill="hold">
+                                        <p:cTn id="34" dur="1" fill="hold">
                                           <p:stCondLst>
                                             <p:cond delay="0"/>
                                           </p:stCondLst>
                                         </p:cTn>
                                         <p:tgtEl>
-                                          <p:spTgt spid="15"/>
+                                          <p:spTgt spid="16"/>
+                                        </p:tgtEl>
+                                        <p:attrNameLst>
+                                          <p:attrName>style.visibility</p:attrName>
+                                        </p:attrNameLst>
+                                      </p:cBhvr>
+                                      <p:to>
+                                        <p:strVal val="visible"/>
+                                      </p:to>
+                                    </p:set>
+                                  </p:childTnLst>
+                                </p:cTn>
+                              </p:par>
+                              <p:par>
+                                <p:cTn id="35" presetID="1" presetClass="entr" presetSubtype="0" fill="hold" grpId="0" nodeType="withEffect">
+                                  <p:stCondLst>
+                                    <p:cond delay="0"/>
+                                  </p:stCondLst>
+                                  <p:childTnLst>
+                                    <p:set>
+                                      <p:cBhvr>
+                                        <p:cTn id="36" dur="1" fill="hold">
+                                          <p:stCondLst>
+                                            <p:cond delay="0"/>
+                                          </p:stCondLst>
+                                        </p:cTn>
+                                        <p:tgtEl>
+                                          <p:spTgt spid="17"/>
+                                        </p:tgtEl>
+                                        <p:attrNameLst>
+                                          <p:attrName>style.visibility</p:attrName>
+                                        </p:attrNameLst>
+                                      </p:cBhvr>
+                                      <p:to>
+                                        <p:strVal val="visible"/>
+                                      </p:to>
+                                    </p:set>
+                                  </p:childTnLst>
+                                </p:cTn>
+                              </p:par>
+                              <p:par>
+                                <p:cTn id="37" presetID="1" presetClass="entr" presetSubtype="0" fill="hold" grpId="0" nodeType="withEffect">
+                                  <p:stCondLst>
+                                    <p:cond delay="0"/>
+                                  </p:stCondLst>
+                                  <p:childTnLst>
+                                    <p:set>
+                                      <p:cBhvr>
+                                        <p:cTn id="38" dur="1" fill="hold">
+                                          <p:stCondLst>
+                                            <p:cond delay="0"/>
+                                          </p:stCondLst>
+                                        </p:cTn>
+                                        <p:tgtEl>
+                                          <p:spTgt spid="18"/>
+                                        </p:tgtEl>
+                                        <p:attrNameLst>
+                                          <p:attrName>style.visibility</p:attrName>
+                                        </p:attrNameLst>
+                                      </p:cBhvr>
+                                      <p:to>
+                                        <p:strVal val="visible"/>
+                                      </p:to>
+                                    </p:set>
+                                  </p:childTnLst>
+                                </p:cTn>
+                              </p:par>
+                              <p:par>
+                                <p:cTn id="39" presetID="1" presetClass="entr" presetSubtype="0" fill="hold" grpId="0" nodeType="withEffect">
+                                  <p:stCondLst>
+                                    <p:cond delay="0"/>
+                                  </p:stCondLst>
+                                  <p:childTnLst>
+                                    <p:set>
+                                      <p:cBhvr>
+                                        <p:cTn id="40" dur="1" fill="hold">
+                                          <p:stCondLst>
+                                            <p:cond delay="0"/>
+                                          </p:stCondLst>
+                                        </p:cTn>
+                                        <p:tgtEl>
+                                          <p:spTgt spid="19"/>
+                                        </p:tgtEl>
+                                        <p:attrNameLst>
+                                          <p:attrName>style.visibility</p:attrName>
+                                        </p:attrNameLst>
+                                      </p:cBhvr>
+                                      <p:to>
+                                        <p:strVal val="visible"/>
+                                      </p:to>
+                                    </p:set>
+                                  </p:childTnLst>
+                                </p:cTn>
+                              </p:par>
+                              <p:par>
+                                <p:cTn id="41" presetID="1" presetClass="entr" presetSubtype="0" fill="hold" nodeType="withEffect">
+                                  <p:stCondLst>
+                                    <p:cond delay="0"/>
+                                  </p:stCondLst>
+                                  <p:childTnLst>
+                                    <p:set>
+                                      <p:cBhvr>
+                                        <p:cTn id="42" dur="1" fill="hold">
+                                          <p:stCondLst>
+                                            <p:cond delay="0"/>
+                                          </p:stCondLst>
+                                        </p:cTn>
+                                        <p:tgtEl>
+                                          <p:spTgt spid="53"/>
+                                        </p:tgtEl>
+                                        <p:attrNameLst>
+                                          <p:attrName>style.visibility</p:attrName>
+                                        </p:attrNameLst>
+                                      </p:cBhvr>
+                                      <p:to>
+                                        <p:strVal val="visible"/>
+                                      </p:to>
+                                    </p:set>
+                                  </p:childTnLst>
+                                </p:cTn>
+                              </p:par>
+                              <p:par>
+                                <p:cTn id="43" presetID="1" presetClass="entr" presetSubtype="0" fill="hold" grpId="0" nodeType="withEffect">
+                                  <p:stCondLst>
+                                    <p:cond delay="0"/>
+                                  </p:stCondLst>
+                                  <p:childTnLst>
+                                    <p:set>
+                                      <p:cBhvr>
+                                        <p:cTn id="44" dur="1" fill="hold">
+                                          <p:stCondLst>
+                                            <p:cond delay="0"/>
+                                          </p:stCondLst>
+                                        </p:cTn>
+                                        <p:tgtEl>
+                                          <p:spTgt spid="21"/>
+                                        </p:tgtEl>
+                                        <p:attrNameLst>
+                                          <p:attrName>style.visibility</p:attrName>
+                                        </p:attrNameLst>
+                                      </p:cBhvr>
+                                      <p:to>
+                                        <p:strVal val="visible"/>
+                                      </p:to>
+                                    </p:set>
+                                  </p:childTnLst>
+                                </p:cTn>
+                              </p:par>
+                              <p:par>
+                                <p:cTn id="45" presetID="1" presetClass="entr" presetSubtype="0" fill="hold" grpId="0" nodeType="withEffect">
+                                  <p:stCondLst>
+                                    <p:cond delay="0"/>
+                                  </p:stCondLst>
+                                  <p:childTnLst>
+                                    <p:set>
+                                      <p:cBhvr>
+                                        <p:cTn id="46" dur="1" fill="hold">
+                                          <p:stCondLst>
+                                            <p:cond delay="0"/>
+                                          </p:stCondLst>
+                                        </p:cTn>
+                                        <p:tgtEl>
+                                          <p:spTgt spid="22"/>
+                                        </p:tgtEl>
+                                        <p:attrNameLst>
+                                          <p:attrName>style.visibility</p:attrName>
+                                        </p:attrNameLst>
+                                      </p:cBhvr>
+                                      <p:to>
+                                        <p:strVal val="visible"/>
+                                      </p:to>
+                                    </p:set>
+                                  </p:childTnLst>
+                                </p:cTn>
+                              </p:par>
+                              <p:par>
+                                <p:cTn id="47" presetID="1" presetClass="entr" presetSubtype="0" fill="hold" grpId="0" nodeType="withEffect">
+                                  <p:stCondLst>
+                                    <p:cond delay="0"/>
+                                  </p:stCondLst>
+                                  <p:childTnLst>
+                                    <p:set>
+                                      <p:cBhvr>
+                                        <p:cTn id="48" dur="1" fill="hold">
+                                          <p:stCondLst>
+                                            <p:cond delay="0"/>
+                                          </p:stCondLst>
+                                        </p:cTn>
+                                        <p:tgtEl>
+                                          <p:spTgt spid="23"/>
+                                        </p:tgtEl>
+                                        <p:attrNameLst>
+                                          <p:attrName>style.visibility</p:attrName>
+                                        </p:attrNameLst>
+                                      </p:cBhvr>
+                                      <p:to>
+                                        <p:strVal val="visible"/>
+                                      </p:to>
+                                    </p:set>
+                                  </p:childTnLst>
+                                </p:cTn>
+                              </p:par>
+                              <p:par>
+                                <p:cTn id="49" presetID="1" presetClass="entr" presetSubtype="0" fill="hold" grpId="0" nodeType="withEffect">
+                                  <p:stCondLst>
+                                    <p:cond delay="0"/>
+                                  </p:stCondLst>
+                                  <p:childTnLst>
+                                    <p:set>
+                                      <p:cBhvr>
+                                        <p:cTn id="50" dur="1" fill="hold">
+                                          <p:stCondLst>
+                                            <p:cond delay="0"/>
+                                          </p:stCondLst>
+                                        </p:cTn>
+                                        <p:tgtEl>
+                                          <p:spTgt spid="24"/>
+                                        </p:tgtEl>
+                                        <p:attrNameLst>
+                                          <p:attrName>style.visibility</p:attrName>
+                                        </p:attrNameLst>
+                                      </p:cBhvr>
+                                      <p:to>
+                                        <p:strVal val="visible"/>
+                                      </p:to>
+                                    </p:set>
+                                  </p:childTnLst>
+                                </p:cTn>
+                              </p:par>
+                              <p:par>
+                                <p:cTn id="51" presetID="1" presetClass="entr" presetSubtype="0" fill="hold" nodeType="withEffect">
+                                  <p:stCondLst>
+                                    <p:cond delay="0"/>
+                                  </p:stCondLst>
+                                  <p:childTnLst>
+                                    <p:set>
+                                      <p:cBhvr>
+                                        <p:cTn id="52" dur="1" fill="hold">
+                                          <p:stCondLst>
+                                            <p:cond delay="0"/>
+                                          </p:stCondLst>
+                                        </p:cTn>
+                                        <p:tgtEl>
+                                          <p:spTgt spid="58"/>
+                                        </p:tgtEl>
+                                        <p:attrNameLst>
+                                          <p:attrName>style.visibility</p:attrName>
+                                        </p:attrNameLst>
+                                      </p:cBhvr>
+                                      <p:to>
+                                        <p:strVal val="visible"/>
+                                      </p:to>
+                                    </p:set>
+                                  </p:childTnLst>
+                                </p:cTn>
+                              </p:par>
+                              <p:par>
+                                <p:cTn id="53" presetID="1" presetClass="entr" presetSubtype="0" fill="hold" grpId="0" nodeType="withEffect">
+                                  <p:stCondLst>
+                                    <p:cond delay="0"/>
+                                  </p:stCondLst>
+                                  <p:childTnLst>
+                                    <p:set>
+                                      <p:cBhvr>
+                                        <p:cTn id="54" dur="1" fill="hold">
+                                          <p:stCondLst>
+                                            <p:cond delay="0"/>
+                                          </p:stCondLst>
+                                        </p:cTn>
+                                        <p:tgtEl>
+                                          <p:spTgt spid="26"/>
+                                        </p:tgtEl>
+                                        <p:attrNameLst>
+                                          <p:attrName>style.visibility</p:attrName>
+                                        </p:attrNameLst>
+                                      </p:cBhvr>
+                                      <p:to>
+                                        <p:strVal val="visible"/>
+                                      </p:to>
+                                    </p:set>
+                                  </p:childTnLst>
+                                </p:cTn>
+                              </p:par>
+                              <p:par>
+                                <p:cTn id="55" presetID="1" presetClass="entr" presetSubtype="0" fill="hold" grpId="0" nodeType="withEffect">
+                                  <p:stCondLst>
+                                    <p:cond delay="0"/>
+                                  </p:stCondLst>
+                                  <p:childTnLst>
+                                    <p:set>
+                                      <p:cBhvr>
+                                        <p:cTn id="56" dur="1" fill="hold">
+                                          <p:stCondLst>
+                                            <p:cond delay="0"/>
+                                          </p:stCondLst>
+                                        </p:cTn>
+                                        <p:tgtEl>
+                                          <p:spTgt spid="27"/>
+                                        </p:tgtEl>
+                                        <p:attrNameLst>
+                                          <p:attrName>style.visibility</p:attrName>
+                                        </p:attrNameLst>
+                                      </p:cBhvr>
+                                      <p:to>
+                                        <p:strVal val="visible"/>
+                                      </p:to>
+                                    </p:set>
+                                  </p:childTnLst>
+                                </p:cTn>
+                              </p:par>
+                              <p:par>
+                                <p:cTn id="57" presetID="1" presetClass="entr" presetSubtype="0" fill="hold" grpId="0" nodeType="withEffect">
+                                  <p:stCondLst>
+                                    <p:cond delay="0"/>
+                                  </p:stCondLst>
+                                  <p:childTnLst>
+                                    <p:set>
+                                      <p:cBhvr>
+                                        <p:cTn id="58" dur="1" fill="hold">
+                                          <p:stCondLst>
+                                            <p:cond delay="0"/>
+                                          </p:stCondLst>
+                                        </p:cTn>
+                                        <p:tgtEl>
+                                          <p:spTgt spid="28"/>
+                                        </p:tgtEl>
+                                        <p:attrNameLst>
+                                          <p:attrName>style.visibility</p:attrName>
+                                        </p:attrNameLst>
+                                      </p:cBhvr>
+                                      <p:to>
+                                        <p:strVal val="visible"/>
+                                      </p:to>
+                                    </p:set>
+                                  </p:childTnLst>
+                                </p:cTn>
+                              </p:par>
+                              <p:par>
+                                <p:cTn id="59" presetID="1" presetClass="entr" presetSubtype="0" fill="hold" nodeType="withEffect">
+                                  <p:stCondLst>
+                                    <p:cond delay="0"/>
+                                  </p:stCondLst>
+                                  <p:childTnLst>
+                                    <p:set>
+                                      <p:cBhvr>
+                                        <p:cTn id="60" dur="1" fill="hold">
+                                          <p:stCondLst>
+                                            <p:cond delay="0"/>
+                                          </p:stCondLst>
+                                        </p:cTn>
+                                        <p:tgtEl>
+                                          <p:spTgt spid="62"/>
+                                        </p:tgtEl>
+                                        <p:attrNameLst>
+                                          <p:attrName>style.visibility</p:attrName>
+                                        </p:attrNameLst>
+                                      </p:cBhvr>
+                                      <p:to>
+                                        <p:strVal val="visible"/>
+                                      </p:to>
+                                    </p:set>
+                                  </p:childTnLst>
+                                </p:cTn>
+                              </p:par>
+                              <p:par>
+                                <p:cTn id="61" presetID="1" presetClass="entr" presetSubtype="0" fill="hold" grpId="0" nodeType="withEffect">
+                                  <p:stCondLst>
+                                    <p:cond delay="0"/>
+                                  </p:stCondLst>
+                                  <p:childTnLst>
+                                    <p:set>
+                                      <p:cBhvr>
+                                        <p:cTn id="62" dur="1" fill="hold">
+                                          <p:stCondLst>
+                                            <p:cond delay="0"/>
+                                          </p:stCondLst>
+                                        </p:cTn>
+                                        <p:tgtEl>
+                                          <p:spTgt spid="30"/>
+                                        </p:tgtEl>
+                                        <p:attrNameLst>
+                                          <p:attrName>style.visibility</p:attrName>
+                                        </p:attrNameLst>
+                                      </p:cBhvr>
+                                      <p:to>
+                                        <p:strVal val="visible"/>
+                                      </p:to>
+                                    </p:set>
+                                  </p:childTnLst>
+                                </p:cTn>
+                              </p:par>
+                              <p:par>
+                                <p:cTn id="63" presetID="1" presetClass="entr" presetSubtype="0" fill="hold" grpId="0" nodeType="withEffect">
+                                  <p:stCondLst>
+                                    <p:cond delay="0"/>
+                                  </p:stCondLst>
+                                  <p:childTnLst>
+                                    <p:set>
+                                      <p:cBhvr>
+                                        <p:cTn id="64" dur="1" fill="hold">
+                                          <p:stCondLst>
+                                            <p:cond delay="0"/>
+                                          </p:stCondLst>
+                                        </p:cTn>
+                                        <p:tgtEl>
+                                          <p:spTgt spid="31"/>
+                                        </p:tgtEl>
+                                        <p:attrNameLst>
+                                          <p:attrName>style.visibility</p:attrName>
+                                        </p:attrNameLst>
+                                      </p:cBhvr>
+                                      <p:to>
+                                        <p:strVal val="visible"/>
+                                      </p:to>
+                                    </p:set>
+                                  </p:childTnLst>
+                                </p:cTn>
+                              </p:par>
+                            </p:childTnLst>
+                          </p:cTn>
+                        </p:par>
+                      </p:childTnLst>
+                    </p:cTn>
+                  </p:par>
+                  <p:par>
+                    <p:cTn id="65" fill="hold">
+                      <p:stCondLst>
+                        <p:cond delay="indefinite"/>
+                      </p:stCondLst>
+                      <p:childTnLst>
+                        <p:par>
+                          <p:cTn id="66" fill="hold">
+                            <p:stCondLst>
+                              <p:cond delay="0"/>
+                            </p:stCondLst>
+                            <p:childTnLst>
+                              <p:par>
+                                <p:cTn id="67" presetID="1" presetClass="entr" presetSubtype="0" fill="hold" grpId="0" nodeType="clickEffect">
+                                  <p:stCondLst>
+                                    <p:cond delay="0"/>
+                                  </p:stCondLst>
+                                  <p:childTnLst>
+                                    <p:set>
+                                      <p:cBhvr>
+                                        <p:cTn id="68" dur="1" fill="hold">
+                                          <p:stCondLst>
+                                            <p:cond delay="0"/>
+                                          </p:stCondLst>
+                                        </p:cTn>
+                                        <p:tgtEl>
+                                          <p:spTgt spid="32"/>
+                                        </p:tgtEl>
+                                        <p:attrNameLst>
+                                          <p:attrName>style.visibility</p:attrName>
+                                        </p:attrNameLst>
+                                      </p:cBhvr>
+                                      <p:to>
+                                        <p:strVal val="visible"/>
+                                      </p:to>
+                                    </p:set>
+                                  </p:childTnLst>
+                                </p:cTn>
+                              </p:par>
+                              <p:par>
+                                <p:cTn id="69" presetID="1" presetClass="entr" presetSubtype="0" fill="hold" grpId="0" nodeType="withEffect">
+                                  <p:stCondLst>
+                                    <p:cond delay="0"/>
+                                  </p:stCondLst>
+                                  <p:childTnLst>
+                                    <p:set>
+                                      <p:cBhvr>
+                                        <p:cTn id="70" dur="1" fill="hold">
+                                          <p:stCondLst>
+                                            <p:cond delay="0"/>
+                                          </p:stCondLst>
+                                        </p:cTn>
+                                        <p:tgtEl>
+                                          <p:spTgt spid="33"/>
                                         </p:tgtEl>
                                         <p:attrNameLst>
                                           <p:attrName>style.visibility</p:attrName>
@@ -7688,6 +8397,21 @@
       <p:bldP spid="12" grpId="0" animBg="1"/>
       <p:bldP spid="14" grpId="0"/>
       <p:bldP spid="15" grpId="0"/>
+      <p:bldP spid="16" grpId="0" animBg="1"/>
+      <p:bldP spid="17" grpId="0"/>
+      <p:bldP spid="18" grpId="0"/>
+      <p:bldP spid="19" grpId="0" animBg="1"/>
+      <p:bldP spid="21" grpId="0"/>
+      <p:bldP spid="22" grpId="0"/>
+      <p:bldP spid="23" grpId="0"/>
+      <p:bldP spid="24" grpId="0" animBg="1"/>
+      <p:bldP spid="26" grpId="0"/>
+      <p:bldP spid="27" grpId="0"/>
+      <p:bldP spid="28" grpId="0" animBg="1"/>
+      <p:bldP spid="30" grpId="0"/>
+      <p:bldP spid="31" grpId="0"/>
+      <p:bldP spid="32" grpId="0" animBg="1"/>
+      <p:bldP spid="33" grpId="0"/>
     </p:bldLst>
   </p:timing>
 </p:sld>
@@ -9466,6 +10190,1038 @@
       </p:grpSpPr>
       <p:sp>
         <p:nvSpPr>
+          <p:cNvPr id="13" name="title">
+            <a:extLst>
+              <a:ext uri="{FF2B5EF4-FFF2-40B4-BE49-F238E27FC236}">
+                <a16:creationId xmlns:a16="http://schemas.microsoft.com/office/drawing/2014/main" id="{52927AD7-9DD0-4B3C-A57D-D9BBEB612AF0}"/>
+              </a:ext>
+            </a:extLst>
+          </p:cNvPr>
+          <p:cNvSpPr>
+            <a:spLocks noGrp="1"/>
+          </p:cNvSpPr>
+          <p:nvPr/>
+        </p:nvSpPr>
+        <p:spPr>
+          <a:xfrm>
+            <a:off x="723900" y="457200"/>
+            <a:ext cx="10744200" cy="590550"/>
+          </a:xfrm>
+          <a:prstGeom prst="rect">
+            <a:avLst/>
+          </a:prstGeom>
+          <a:noFill/>
+          <a:ln w="0">
+            <a:noFill/>
+            <a:prstDash val="solid"/>
+          </a:ln>
+        </p:spPr>
+        <p:txBody>
+          <a:bodyPr anchor="ctr"/>
+          <a:lstStyle/>
+          <a:p>
+            <a:pPr algn="l">
+              <a:defRPr sz="3000" b="1">
+                <a:solidFill>
+                  <a:srgbClr val="255A89"/>
+                </a:solidFill>
+              </a:defRPr>
+            </a:pPr>
+            <a:r>
+              <a:rPr sz="3200" b="1" dirty="0">
+                <a:solidFill>
+                  <a:srgbClr val="255A89"/>
+                </a:solidFill>
+              </a:rPr>
+              <a:t>Why Student-Designed Projects Matter</a:t>
+            </a:r>
+          </a:p>
+        </p:txBody>
+      </p:sp>
+      <p:sp>
+        <p:nvSpPr>
+          <p:cNvPr id="2" name="subtitle">
+            <a:extLst>
+              <a:ext uri="{FF2B5EF4-FFF2-40B4-BE49-F238E27FC236}">
+                <a16:creationId xmlns:a16="http://schemas.microsoft.com/office/drawing/2014/main" id="{E717440E-D650-40D5-874C-99941D6145B5}"/>
+              </a:ext>
+            </a:extLst>
+          </p:cNvPr>
+          <p:cNvSpPr>
+            <a:spLocks noGrp="1"/>
+          </p:cNvSpPr>
+          <p:nvPr/>
+        </p:nvSpPr>
+        <p:spPr>
+          <a:xfrm>
+            <a:off x="723900" y="1181100"/>
+            <a:ext cx="10744200" cy="400050"/>
+          </a:xfrm>
+          <a:prstGeom prst="rect">
+            <a:avLst/>
+          </a:prstGeom>
+          <a:noFill/>
+          <a:ln w="0">
+            <a:noFill/>
+            <a:prstDash val="solid"/>
+          </a:ln>
+        </p:spPr>
+        <p:txBody>
+          <a:bodyPr anchor="ctr"/>
+          <a:lstStyle/>
+          <a:p>
+            <a:pPr algn="l">
+              <a:defRPr sz="1800" b="1">
+                <a:solidFill>
+                  <a:srgbClr val="111111"/>
+                </a:solidFill>
+              </a:defRPr>
+            </a:pPr>
+            <a:r>
+              <a:rPr sz="2000" b="1" dirty="0">
+                <a:solidFill>
+                  <a:srgbClr val="111111"/>
+                </a:solidFill>
+              </a:rPr>
+              <a:t>They build ownership, product judgment, and technical leadership.</a:t>
+            </a:r>
+          </a:p>
+        </p:txBody>
+      </p:sp>
+      <p:sp>
+        <p:nvSpPr>
+          <p:cNvPr id="3" name="number-1">
+            <a:extLst>
+              <a:ext uri="{FF2B5EF4-FFF2-40B4-BE49-F238E27FC236}">
+                <a16:creationId xmlns:a16="http://schemas.microsoft.com/office/drawing/2014/main" id="{777F1F29-74C8-4C7C-84FA-6041764DB2F2}"/>
+              </a:ext>
+            </a:extLst>
+          </p:cNvPr>
+          <p:cNvSpPr>
+            <a:spLocks noGrp="1"/>
+          </p:cNvSpPr>
+          <p:nvPr/>
+        </p:nvSpPr>
+        <p:spPr>
+          <a:xfrm>
+            <a:off x="2038350" y="2143125"/>
+            <a:ext cx="838200" cy="838200"/>
+          </a:xfrm>
+          <a:prstGeom prst="ellipse">
+            <a:avLst/>
+          </a:prstGeom>
+          <a:solidFill>
+            <a:srgbClr val="255A89"/>
+          </a:solidFill>
+          <a:ln w="0">
+            <a:solidFill>
+              <a:srgbClr val="255A89"/>
+            </a:solidFill>
+            <a:prstDash val="solid"/>
+          </a:ln>
+        </p:spPr>
+        <p:txBody>
+          <a:bodyPr anchor="ctr"/>
+          <a:lstStyle/>
+          <a:p>
+            <a:pPr algn="ctr">
+              <a:defRPr sz="1800" b="1">
+                <a:solidFill>
+                  <a:srgbClr val="FFFFFF"/>
+                </a:solidFill>
+              </a:defRPr>
+            </a:pPr>
+            <a:r>
+              <a:rPr sz="1800" b="1">
+                <a:solidFill>
+                  <a:srgbClr val="FFFFFF"/>
+                </a:solidFill>
+              </a:rPr>
+              <a:t>1</a:t>
+            </a:r>
+          </a:p>
+        </p:txBody>
+      </p:sp>
+      <p:sp>
+        <p:nvSpPr>
+          <p:cNvPr id="4" name="heading-1">
+            <a:extLst>
+              <a:ext uri="{FF2B5EF4-FFF2-40B4-BE49-F238E27FC236}">
+                <a16:creationId xmlns:a16="http://schemas.microsoft.com/office/drawing/2014/main" id="{77800D46-D708-4836-B346-07C3BAB7C05F}"/>
+              </a:ext>
+            </a:extLst>
+          </p:cNvPr>
+          <p:cNvSpPr>
+            <a:spLocks noGrp="1"/>
+          </p:cNvSpPr>
+          <p:nvPr/>
+        </p:nvSpPr>
+        <p:spPr>
+          <a:xfrm>
+            <a:off x="838200" y="3219450"/>
+            <a:ext cx="3238500" cy="400050"/>
+          </a:xfrm>
+          <a:prstGeom prst="rect">
+            <a:avLst/>
+          </a:prstGeom>
+          <a:noFill/>
+          <a:ln w="0">
+            <a:noFill/>
+            <a:prstDash val="solid"/>
+          </a:ln>
+        </p:spPr>
+        <p:txBody>
+          <a:bodyPr anchor="ctr"/>
+          <a:lstStyle/>
+          <a:p>
+            <a:pPr algn="ctr">
+              <a:defRPr sz="1575" b="1">
+                <a:solidFill>
+                  <a:srgbClr val="255A89"/>
+                </a:solidFill>
+              </a:defRPr>
+            </a:pPr>
+            <a:r>
+              <a:rPr sz="2000" b="1" dirty="0">
+                <a:solidFill>
+                  <a:srgbClr val="255A89"/>
+                </a:solidFill>
+              </a:rPr>
+              <a:t>OWN THE PROBLEM</a:t>
+            </a:r>
+          </a:p>
+        </p:txBody>
+      </p:sp>
+      <p:sp>
+        <p:nvSpPr>
+          <p:cNvPr id="5" name="body-1">
+            <a:extLst>
+              <a:ext uri="{FF2B5EF4-FFF2-40B4-BE49-F238E27FC236}">
+                <a16:creationId xmlns:a16="http://schemas.microsoft.com/office/drawing/2014/main" id="{3A4B1BAB-AC0D-4758-9DA7-42DA3AF66234}"/>
+              </a:ext>
+            </a:extLst>
+          </p:cNvPr>
+          <p:cNvSpPr>
+            <a:spLocks noGrp="1"/>
+          </p:cNvSpPr>
+          <p:nvPr/>
+        </p:nvSpPr>
+        <p:spPr>
+          <a:xfrm>
+            <a:off x="981075" y="3790950"/>
+            <a:ext cx="2952750" cy="876300"/>
+          </a:xfrm>
+          <a:prstGeom prst="rect">
+            <a:avLst/>
+          </a:prstGeom>
+          <a:noFill/>
+          <a:ln w="0">
+            <a:noFill/>
+            <a:prstDash val="solid"/>
+          </a:ln>
+        </p:spPr>
+        <p:txBody>
+          <a:bodyPr anchor="ctr"/>
+          <a:lstStyle/>
+          <a:p>
+            <a:pPr algn="ctr">
+              <a:defRPr sz="1350">
+                <a:solidFill>
+                  <a:srgbClr val="111111"/>
+                </a:solidFill>
+              </a:defRPr>
+            </a:pPr>
+            <a:r>
+              <a:rPr sz="1600" dirty="0">
+                <a:solidFill>
+                  <a:srgbClr val="111111"/>
+                </a:solidFill>
+              </a:rPr>
+              <a:t>Choose a problem the team understands and genuinely wants to solve.</a:t>
+            </a:r>
+          </a:p>
+        </p:txBody>
+      </p:sp>
+      <p:sp>
+        <p:nvSpPr>
+          <p:cNvPr id="6" name="number-2">
+            <a:extLst>
+              <a:ext uri="{FF2B5EF4-FFF2-40B4-BE49-F238E27FC236}">
+                <a16:creationId xmlns:a16="http://schemas.microsoft.com/office/drawing/2014/main" id="{EF79B2AA-4B6E-4383-9740-CBB36FE9BC84}"/>
+              </a:ext>
+            </a:extLst>
+          </p:cNvPr>
+          <p:cNvSpPr>
+            <a:spLocks noGrp="1"/>
+          </p:cNvSpPr>
+          <p:nvPr/>
+        </p:nvSpPr>
+        <p:spPr>
+          <a:xfrm>
+            <a:off x="5676900" y="2143125"/>
+            <a:ext cx="838200" cy="838200"/>
+          </a:xfrm>
+          <a:prstGeom prst="ellipse">
+            <a:avLst/>
+          </a:prstGeom>
+          <a:solidFill>
+            <a:srgbClr val="0097A7"/>
+          </a:solidFill>
+          <a:ln w="0">
+            <a:solidFill>
+              <a:srgbClr val="0097A7"/>
+            </a:solidFill>
+            <a:prstDash val="solid"/>
+          </a:ln>
+        </p:spPr>
+        <p:txBody>
+          <a:bodyPr anchor="ctr"/>
+          <a:lstStyle/>
+          <a:p>
+            <a:pPr algn="ctr">
+              <a:defRPr sz="1800" b="1">
+                <a:solidFill>
+                  <a:srgbClr val="FFFFFF"/>
+                </a:solidFill>
+              </a:defRPr>
+            </a:pPr>
+            <a:r>
+              <a:rPr sz="1800" b="1">
+                <a:solidFill>
+                  <a:srgbClr val="FFFFFF"/>
+                </a:solidFill>
+              </a:rPr>
+              <a:t>2</a:t>
+            </a:r>
+          </a:p>
+        </p:txBody>
+      </p:sp>
+      <p:sp>
+        <p:nvSpPr>
+          <p:cNvPr id="7" name="heading-2">
+            <a:extLst>
+              <a:ext uri="{FF2B5EF4-FFF2-40B4-BE49-F238E27FC236}">
+                <a16:creationId xmlns:a16="http://schemas.microsoft.com/office/drawing/2014/main" id="{8226ACC0-819A-4F12-8C19-648B412C5643}"/>
+              </a:ext>
+            </a:extLst>
+          </p:cNvPr>
+          <p:cNvSpPr>
+            <a:spLocks noGrp="1"/>
+          </p:cNvSpPr>
+          <p:nvPr/>
+        </p:nvSpPr>
+        <p:spPr>
+          <a:xfrm>
+            <a:off x="4476750" y="3219450"/>
+            <a:ext cx="3238500" cy="400050"/>
+          </a:xfrm>
+          <a:prstGeom prst="rect">
+            <a:avLst/>
+          </a:prstGeom>
+          <a:noFill/>
+          <a:ln w="0">
+            <a:noFill/>
+            <a:prstDash val="solid"/>
+          </a:ln>
+        </p:spPr>
+        <p:txBody>
+          <a:bodyPr anchor="ctr"/>
+          <a:lstStyle/>
+          <a:p>
+            <a:pPr algn="ctr">
+              <a:defRPr sz="1575" b="1">
+                <a:solidFill>
+                  <a:srgbClr val="0097A7"/>
+                </a:solidFill>
+              </a:defRPr>
+            </a:pPr>
+            <a:r>
+              <a:rPr sz="2000" b="1" dirty="0">
+                <a:solidFill>
+                  <a:srgbClr val="0097A7"/>
+                </a:solidFill>
+              </a:rPr>
+              <a:t>SHAPE THE PRODUCT</a:t>
+            </a:r>
+          </a:p>
+        </p:txBody>
+      </p:sp>
+      <p:sp>
+        <p:nvSpPr>
+          <p:cNvPr id="8" name="body-2">
+            <a:extLst>
+              <a:ext uri="{FF2B5EF4-FFF2-40B4-BE49-F238E27FC236}">
+                <a16:creationId xmlns:a16="http://schemas.microsoft.com/office/drawing/2014/main" id="{35415E6F-B600-450B-A87F-A0329A4D6F57}"/>
+              </a:ext>
+            </a:extLst>
+          </p:cNvPr>
+          <p:cNvSpPr>
+            <a:spLocks noGrp="1"/>
+          </p:cNvSpPr>
+          <p:nvPr/>
+        </p:nvSpPr>
+        <p:spPr>
+          <a:xfrm>
+            <a:off x="4619625" y="3790950"/>
+            <a:ext cx="2952750" cy="876300"/>
+          </a:xfrm>
+          <a:prstGeom prst="rect">
+            <a:avLst/>
+          </a:prstGeom>
+          <a:noFill/>
+          <a:ln w="0">
+            <a:noFill/>
+            <a:prstDash val="solid"/>
+          </a:ln>
+        </p:spPr>
+        <p:txBody>
+          <a:bodyPr anchor="ctr"/>
+          <a:lstStyle/>
+          <a:p>
+            <a:pPr algn="ctr">
+              <a:defRPr sz="1350">
+                <a:solidFill>
+                  <a:srgbClr val="111111"/>
+                </a:solidFill>
+              </a:defRPr>
+            </a:pPr>
+            <a:r>
+              <a:rPr sz="1600" dirty="0">
+                <a:solidFill>
+                  <a:srgbClr val="111111"/>
+                </a:solidFill>
+              </a:rPr>
+              <a:t>Define the users, requirements, priorities, and an achievable MVP.</a:t>
+            </a:r>
+          </a:p>
+        </p:txBody>
+      </p:sp>
+      <p:sp>
+        <p:nvSpPr>
+          <p:cNvPr id="9" name="number-3">
+            <a:extLst>
+              <a:ext uri="{FF2B5EF4-FFF2-40B4-BE49-F238E27FC236}">
+                <a16:creationId xmlns:a16="http://schemas.microsoft.com/office/drawing/2014/main" id="{746EEFC4-6A6C-48A3-8309-D11E4EB7FBE3}"/>
+              </a:ext>
+            </a:extLst>
+          </p:cNvPr>
+          <p:cNvSpPr>
+            <a:spLocks noGrp="1"/>
+          </p:cNvSpPr>
+          <p:nvPr/>
+        </p:nvSpPr>
+        <p:spPr>
+          <a:xfrm>
+            <a:off x="9315450" y="2143125"/>
+            <a:ext cx="838200" cy="838200"/>
+          </a:xfrm>
+          <a:prstGeom prst="ellipse">
+            <a:avLst/>
+          </a:prstGeom>
+          <a:solidFill>
+            <a:srgbClr val="705AA0"/>
+          </a:solidFill>
+          <a:ln w="0">
+            <a:solidFill>
+              <a:srgbClr val="705AA0"/>
+            </a:solidFill>
+            <a:prstDash val="solid"/>
+          </a:ln>
+        </p:spPr>
+        <p:txBody>
+          <a:bodyPr anchor="ctr"/>
+          <a:lstStyle/>
+          <a:p>
+            <a:pPr algn="ctr">
+              <a:defRPr sz="1800" b="1">
+                <a:solidFill>
+                  <a:srgbClr val="FFFFFF"/>
+                </a:solidFill>
+              </a:defRPr>
+            </a:pPr>
+            <a:r>
+              <a:rPr sz="1800" b="1">
+                <a:solidFill>
+                  <a:srgbClr val="FFFFFF"/>
+                </a:solidFill>
+              </a:rPr>
+              <a:t>3</a:t>
+            </a:r>
+          </a:p>
+        </p:txBody>
+      </p:sp>
+      <p:sp>
+        <p:nvSpPr>
+          <p:cNvPr id="10" name="heading-3">
+            <a:extLst>
+              <a:ext uri="{FF2B5EF4-FFF2-40B4-BE49-F238E27FC236}">
+                <a16:creationId xmlns:a16="http://schemas.microsoft.com/office/drawing/2014/main" id="{82718074-95E5-40EE-AE1E-9CEEFD6DA902}"/>
+              </a:ext>
+            </a:extLst>
+          </p:cNvPr>
+          <p:cNvSpPr>
+            <a:spLocks noGrp="1"/>
+          </p:cNvSpPr>
+          <p:nvPr/>
+        </p:nvSpPr>
+        <p:spPr>
+          <a:xfrm>
+            <a:off x="8115300" y="3219450"/>
+            <a:ext cx="3238500" cy="400050"/>
+          </a:xfrm>
+          <a:prstGeom prst="rect">
+            <a:avLst/>
+          </a:prstGeom>
+          <a:noFill/>
+          <a:ln w="0">
+            <a:noFill/>
+            <a:prstDash val="solid"/>
+          </a:ln>
+        </p:spPr>
+        <p:txBody>
+          <a:bodyPr anchor="ctr"/>
+          <a:lstStyle/>
+          <a:p>
+            <a:pPr algn="ctr">
+              <a:defRPr sz="1575" b="1">
+                <a:solidFill>
+                  <a:srgbClr val="705AA0"/>
+                </a:solidFill>
+              </a:defRPr>
+            </a:pPr>
+            <a:r>
+              <a:rPr sz="2000" b="1" dirty="0">
+                <a:solidFill>
+                  <a:srgbClr val="705AA0"/>
+                </a:solidFill>
+              </a:rPr>
+              <a:t>LEAD THE ENGINEERING</a:t>
+            </a:r>
+          </a:p>
+        </p:txBody>
+      </p:sp>
+      <p:sp>
+        <p:nvSpPr>
+          <p:cNvPr id="11" name="body-3">
+            <a:extLst>
+              <a:ext uri="{FF2B5EF4-FFF2-40B4-BE49-F238E27FC236}">
+                <a16:creationId xmlns:a16="http://schemas.microsoft.com/office/drawing/2014/main" id="{1006BF6A-9FFA-421A-A305-67489FAA729C}"/>
+              </a:ext>
+            </a:extLst>
+          </p:cNvPr>
+          <p:cNvSpPr>
+            <a:spLocks noGrp="1"/>
+          </p:cNvSpPr>
+          <p:nvPr/>
+        </p:nvSpPr>
+        <p:spPr>
+          <a:xfrm>
+            <a:off x="8258175" y="3790950"/>
+            <a:ext cx="2952750" cy="876300"/>
+          </a:xfrm>
+          <a:prstGeom prst="rect">
+            <a:avLst/>
+          </a:prstGeom>
+          <a:noFill/>
+          <a:ln w="0">
+            <a:noFill/>
+            <a:prstDash val="solid"/>
+          </a:ln>
+        </p:spPr>
+        <p:txBody>
+          <a:bodyPr anchor="ctr"/>
+          <a:lstStyle/>
+          <a:p>
+            <a:pPr algn="ctr">
+              <a:defRPr sz="1350">
+                <a:solidFill>
+                  <a:srgbClr val="111111"/>
+                </a:solidFill>
+              </a:defRPr>
+            </a:pPr>
+            <a:r>
+              <a:rPr sz="1600" dirty="0">
+                <a:solidFill>
+                  <a:srgbClr val="111111"/>
+                </a:solidFill>
+              </a:rPr>
+              <a:t>Make, justify, and validate the important technical decisions as a team.</a:t>
+            </a:r>
+          </a:p>
+        </p:txBody>
+      </p:sp>
+      <p:sp>
+        <p:nvSpPr>
+          <p:cNvPr id="12" name="success-callout">
+            <a:extLst>
+              <a:ext uri="{FF2B5EF4-FFF2-40B4-BE49-F238E27FC236}">
+                <a16:creationId xmlns:a16="http://schemas.microsoft.com/office/drawing/2014/main" id="{BAAD3BBB-2268-4AF9-AB0D-0DCE13FC9E2E}"/>
+              </a:ext>
+            </a:extLst>
+          </p:cNvPr>
+          <p:cNvSpPr>
+            <a:spLocks noGrp="1"/>
+          </p:cNvSpPr>
+          <p:nvPr/>
+        </p:nvSpPr>
+        <p:spPr>
+          <a:xfrm>
+            <a:off x="1571625" y="5314950"/>
+            <a:ext cx="9048750" cy="781050"/>
+          </a:xfrm>
+          <a:prstGeom prst="roundRect">
+            <a:avLst>
+              <a:gd name="adj" fmla="val 7317"/>
+            </a:avLst>
+          </a:prstGeom>
+          <a:solidFill>
+            <a:srgbClr val="FFF4E9"/>
+          </a:solidFill>
+          <a:ln w="9525">
+            <a:solidFill>
+              <a:srgbClr val="F0B684"/>
+            </a:solidFill>
+            <a:prstDash val="solid"/>
+          </a:ln>
+        </p:spPr>
+        <p:txBody>
+          <a:bodyPr anchor="ctr"/>
+          <a:lstStyle/>
+          <a:p>
+            <a:pPr algn="ctr">
+              <a:defRPr sz="1875" b="1">
+                <a:solidFill>
+                  <a:srgbClr val="C85C0A"/>
+                </a:solidFill>
+              </a:defRPr>
+            </a:pPr>
+            <a:r>
+              <a:rPr sz="2400" b="1" dirty="0">
+                <a:solidFill>
+                  <a:srgbClr val="C85C0A"/>
+                </a:solidFill>
+              </a:rPr>
+              <a:t>Success = a real need + a working product + evidence from users</a:t>
+            </a:r>
+          </a:p>
+        </p:txBody>
+      </p:sp>
+    </p:spTree>
+    <p:extLst>
+      <p:ext uri="{BB962C8B-B14F-4D97-AF65-F5344CB8AC3E}">
+        <p14:creationId xmlns:p14="http://schemas.microsoft.com/office/powerpoint/2010/main" val="1099874232"/>
+      </p:ext>
+    </p:extLst>
+  </p:cSld>
+  <p:clrMapOvr>
+    <a:masterClrMapping/>
+  </p:clrMapOvr>
+  <p:timing>
+    <p:tnLst>
+      <p:par>
+        <p:cTn id="1" dur="indefinite" restart="never" nodeType="tmRoot">
+          <p:childTnLst>
+            <p:seq concurrent="1" nextAc="seek">
+              <p:cTn id="2" dur="indefinite" nodeType="mainSeq">
+                <p:childTnLst>
+                  <p:par>
+                    <p:cTn id="3" fill="hold">
+                      <p:stCondLst>
+                        <p:cond delay="indefinite"/>
+                      </p:stCondLst>
+                      <p:childTnLst>
+                        <p:par>
+                          <p:cTn id="4" fill="hold">
+                            <p:stCondLst>
+                              <p:cond delay="0"/>
+                            </p:stCondLst>
+                            <p:childTnLst>
+                              <p:par>
+                                <p:cTn id="5" presetID="1" presetClass="entr" presetSubtype="0" fill="hold" grpId="0" nodeType="clickEffect">
+                                  <p:stCondLst>
+                                    <p:cond delay="0"/>
+                                  </p:stCondLst>
+                                  <p:childTnLst>
+                                    <p:set>
+                                      <p:cBhvr>
+                                        <p:cTn id="6" dur="1" fill="hold">
+                                          <p:stCondLst>
+                                            <p:cond delay="0"/>
+                                          </p:stCondLst>
+                                        </p:cTn>
+                                        <p:tgtEl>
+                                          <p:spTgt spid="3"/>
+                                        </p:tgtEl>
+                                        <p:attrNameLst>
+                                          <p:attrName>style.visibility</p:attrName>
+                                        </p:attrNameLst>
+                                      </p:cBhvr>
+                                      <p:to>
+                                        <p:strVal val="visible"/>
+                                      </p:to>
+                                    </p:set>
+                                  </p:childTnLst>
+                                </p:cTn>
+                              </p:par>
+                              <p:par>
+                                <p:cTn id="7" presetID="1" presetClass="entr" presetSubtype="0" fill="hold" grpId="0" nodeType="withEffect">
+                                  <p:stCondLst>
+                                    <p:cond delay="0"/>
+                                  </p:stCondLst>
+                                  <p:childTnLst>
+                                    <p:set>
+                                      <p:cBhvr>
+                                        <p:cTn id="8" dur="1" fill="hold">
+                                          <p:stCondLst>
+                                            <p:cond delay="0"/>
+                                          </p:stCondLst>
+                                        </p:cTn>
+                                        <p:tgtEl>
+                                          <p:spTgt spid="4"/>
+                                        </p:tgtEl>
+                                        <p:attrNameLst>
+                                          <p:attrName>style.visibility</p:attrName>
+                                        </p:attrNameLst>
+                                      </p:cBhvr>
+                                      <p:to>
+                                        <p:strVal val="visible"/>
+                                      </p:to>
+                                    </p:set>
+                                  </p:childTnLst>
+                                </p:cTn>
+                              </p:par>
+                              <p:par>
+                                <p:cTn id="9" presetID="1" presetClass="entr" presetSubtype="0" fill="hold" grpId="0" nodeType="withEffect">
+                                  <p:stCondLst>
+                                    <p:cond delay="0"/>
+                                  </p:stCondLst>
+                                  <p:childTnLst>
+                                    <p:set>
+                                      <p:cBhvr>
+                                        <p:cTn id="10" dur="1" fill="hold">
+                                          <p:stCondLst>
+                                            <p:cond delay="0"/>
+                                          </p:stCondLst>
+                                        </p:cTn>
+                                        <p:tgtEl>
+                                          <p:spTgt spid="5"/>
+                                        </p:tgtEl>
+                                        <p:attrNameLst>
+                                          <p:attrName>style.visibility</p:attrName>
+                                        </p:attrNameLst>
+                                      </p:cBhvr>
+                                      <p:to>
+                                        <p:strVal val="visible"/>
+                                      </p:to>
+                                    </p:set>
+                                  </p:childTnLst>
+                                </p:cTn>
+                              </p:par>
+                            </p:childTnLst>
+                          </p:cTn>
+                        </p:par>
+                      </p:childTnLst>
+                    </p:cTn>
+                  </p:par>
+                  <p:par>
+                    <p:cTn id="11" fill="hold">
+                      <p:stCondLst>
+                        <p:cond delay="indefinite"/>
+                      </p:stCondLst>
+                      <p:childTnLst>
+                        <p:par>
+                          <p:cTn id="12" fill="hold">
+                            <p:stCondLst>
+                              <p:cond delay="0"/>
+                            </p:stCondLst>
+                            <p:childTnLst>
+                              <p:par>
+                                <p:cTn id="13" presetID="1" presetClass="entr" presetSubtype="0" fill="hold" grpId="0" nodeType="clickEffect">
+                                  <p:stCondLst>
+                                    <p:cond delay="0"/>
+                                  </p:stCondLst>
+                                  <p:childTnLst>
+                                    <p:set>
+                                      <p:cBhvr>
+                                        <p:cTn id="14" dur="1" fill="hold">
+                                          <p:stCondLst>
+                                            <p:cond delay="0"/>
+                                          </p:stCondLst>
+                                        </p:cTn>
+                                        <p:tgtEl>
+                                          <p:spTgt spid="6"/>
+                                        </p:tgtEl>
+                                        <p:attrNameLst>
+                                          <p:attrName>style.visibility</p:attrName>
+                                        </p:attrNameLst>
+                                      </p:cBhvr>
+                                      <p:to>
+                                        <p:strVal val="visible"/>
+                                      </p:to>
+                                    </p:set>
+                                  </p:childTnLst>
+                                </p:cTn>
+                              </p:par>
+                              <p:par>
+                                <p:cTn id="15" presetID="1" presetClass="entr" presetSubtype="0" fill="hold" grpId="0" nodeType="withEffect">
+                                  <p:stCondLst>
+                                    <p:cond delay="0"/>
+                                  </p:stCondLst>
+                                  <p:childTnLst>
+                                    <p:set>
+                                      <p:cBhvr>
+                                        <p:cTn id="16" dur="1" fill="hold">
+                                          <p:stCondLst>
+                                            <p:cond delay="0"/>
+                                          </p:stCondLst>
+                                        </p:cTn>
+                                        <p:tgtEl>
+                                          <p:spTgt spid="7"/>
+                                        </p:tgtEl>
+                                        <p:attrNameLst>
+                                          <p:attrName>style.visibility</p:attrName>
+                                        </p:attrNameLst>
+                                      </p:cBhvr>
+                                      <p:to>
+                                        <p:strVal val="visible"/>
+                                      </p:to>
+                                    </p:set>
+                                  </p:childTnLst>
+                                </p:cTn>
+                              </p:par>
+                              <p:par>
+                                <p:cTn id="17" presetID="1" presetClass="entr" presetSubtype="0" fill="hold" grpId="0" nodeType="withEffect">
+                                  <p:stCondLst>
+                                    <p:cond delay="0"/>
+                                  </p:stCondLst>
+                                  <p:childTnLst>
+                                    <p:set>
+                                      <p:cBhvr>
+                                        <p:cTn id="18" dur="1" fill="hold">
+                                          <p:stCondLst>
+                                            <p:cond delay="0"/>
+                                          </p:stCondLst>
+                                        </p:cTn>
+                                        <p:tgtEl>
+                                          <p:spTgt spid="8"/>
+                                        </p:tgtEl>
+                                        <p:attrNameLst>
+                                          <p:attrName>style.visibility</p:attrName>
+                                        </p:attrNameLst>
+                                      </p:cBhvr>
+                                      <p:to>
+                                        <p:strVal val="visible"/>
+                                      </p:to>
+                                    </p:set>
+                                  </p:childTnLst>
+                                </p:cTn>
+                              </p:par>
+                            </p:childTnLst>
+                          </p:cTn>
+                        </p:par>
+                      </p:childTnLst>
+                    </p:cTn>
+                  </p:par>
+                  <p:par>
+                    <p:cTn id="19" fill="hold">
+                      <p:stCondLst>
+                        <p:cond delay="indefinite"/>
+                      </p:stCondLst>
+                      <p:childTnLst>
+                        <p:par>
+                          <p:cTn id="20" fill="hold">
+                            <p:stCondLst>
+                              <p:cond delay="0"/>
+                            </p:stCondLst>
+                            <p:childTnLst>
+                              <p:par>
+                                <p:cTn id="21" presetID="1" presetClass="entr" presetSubtype="0" fill="hold" grpId="0" nodeType="clickEffect">
+                                  <p:stCondLst>
+                                    <p:cond delay="0"/>
+                                  </p:stCondLst>
+                                  <p:childTnLst>
+                                    <p:set>
+                                      <p:cBhvr>
+                                        <p:cTn id="22" dur="1" fill="hold">
+                                          <p:stCondLst>
+                                            <p:cond delay="0"/>
+                                          </p:stCondLst>
+                                        </p:cTn>
+                                        <p:tgtEl>
+                                          <p:spTgt spid="9"/>
+                                        </p:tgtEl>
+                                        <p:attrNameLst>
+                                          <p:attrName>style.visibility</p:attrName>
+                                        </p:attrNameLst>
+                                      </p:cBhvr>
+                                      <p:to>
+                                        <p:strVal val="visible"/>
+                                      </p:to>
+                                    </p:set>
+                                  </p:childTnLst>
+                                </p:cTn>
+                              </p:par>
+                              <p:par>
+                                <p:cTn id="23" presetID="1" presetClass="entr" presetSubtype="0" fill="hold" grpId="0" nodeType="withEffect">
+                                  <p:stCondLst>
+                                    <p:cond delay="0"/>
+                                  </p:stCondLst>
+                                  <p:childTnLst>
+                                    <p:set>
+                                      <p:cBhvr>
+                                        <p:cTn id="24" dur="1" fill="hold">
+                                          <p:stCondLst>
+                                            <p:cond delay="0"/>
+                                          </p:stCondLst>
+                                        </p:cTn>
+                                        <p:tgtEl>
+                                          <p:spTgt spid="10"/>
+                                        </p:tgtEl>
+                                        <p:attrNameLst>
+                                          <p:attrName>style.visibility</p:attrName>
+                                        </p:attrNameLst>
+                                      </p:cBhvr>
+                                      <p:to>
+                                        <p:strVal val="visible"/>
+                                      </p:to>
+                                    </p:set>
+                                  </p:childTnLst>
+                                </p:cTn>
+                              </p:par>
+                              <p:par>
+                                <p:cTn id="25" presetID="1" presetClass="entr" presetSubtype="0" fill="hold" grpId="0" nodeType="withEffect">
+                                  <p:stCondLst>
+                                    <p:cond delay="0"/>
+                                  </p:stCondLst>
+                                  <p:childTnLst>
+                                    <p:set>
+                                      <p:cBhvr>
+                                        <p:cTn id="26" dur="1" fill="hold">
+                                          <p:stCondLst>
+                                            <p:cond delay="0"/>
+                                          </p:stCondLst>
+                                        </p:cTn>
+                                        <p:tgtEl>
+                                          <p:spTgt spid="11"/>
+                                        </p:tgtEl>
+                                        <p:attrNameLst>
+                                          <p:attrName>style.visibility</p:attrName>
+                                        </p:attrNameLst>
+                                      </p:cBhvr>
+                                      <p:to>
+                                        <p:strVal val="visible"/>
+                                      </p:to>
+                                    </p:set>
+                                  </p:childTnLst>
+                                </p:cTn>
+                              </p:par>
+                            </p:childTnLst>
+                          </p:cTn>
+                        </p:par>
+                      </p:childTnLst>
+                    </p:cTn>
+                  </p:par>
+                  <p:par>
+                    <p:cTn id="27" fill="hold">
+                      <p:stCondLst>
+                        <p:cond delay="indefinite"/>
+                      </p:stCondLst>
+                      <p:childTnLst>
+                        <p:par>
+                          <p:cTn id="28" fill="hold">
+                            <p:stCondLst>
+                              <p:cond delay="0"/>
+                            </p:stCondLst>
+                            <p:childTnLst>
+                              <p:par>
+                                <p:cTn id="29" presetID="1" presetClass="entr" presetSubtype="0" fill="hold" grpId="0" nodeType="clickEffect">
+                                  <p:stCondLst>
+                                    <p:cond delay="0"/>
+                                  </p:stCondLst>
+                                  <p:childTnLst>
+                                    <p:set>
+                                      <p:cBhvr>
+                                        <p:cTn id="30" dur="1" fill="hold">
+                                          <p:stCondLst>
+                                            <p:cond delay="0"/>
+                                          </p:stCondLst>
+                                        </p:cTn>
+                                        <p:tgtEl>
+                                          <p:spTgt spid="12"/>
+                                        </p:tgtEl>
+                                        <p:attrNameLst>
+                                          <p:attrName>style.visibility</p:attrName>
+                                        </p:attrNameLst>
+                                      </p:cBhvr>
+                                      <p:to>
+                                        <p:strVal val="visible"/>
+                                      </p:to>
+                                    </p:set>
+                                  </p:childTnLst>
+                                </p:cTn>
+                              </p:par>
+                            </p:childTnLst>
+                          </p:cTn>
+                        </p:par>
+                      </p:childTnLst>
+                    </p:cTn>
+                  </p:par>
+                </p:childTnLst>
+              </p:cTn>
+              <p:prevCondLst>
+                <p:cond evt="onPrev" delay="0">
+                  <p:tgtEl>
+                    <p:sldTgt/>
+                  </p:tgtEl>
+                </p:cond>
+              </p:prevCondLst>
+              <p:nextCondLst>
+                <p:cond evt="onNext" delay="0">
+                  <p:tgtEl>
+                    <p:sldTgt/>
+                  </p:tgtEl>
+                </p:cond>
+              </p:nextCondLst>
+            </p:seq>
+          </p:childTnLst>
+        </p:cTn>
+      </p:par>
+    </p:tnLst>
+    <p:bldLst>
+      <p:bldP spid="3" grpId="0" animBg="1"/>
+      <p:bldP spid="4" grpId="0"/>
+      <p:bldP spid="5" grpId="0"/>
+      <p:bldP spid="6" grpId="0" animBg="1"/>
+      <p:bldP spid="7" grpId="0"/>
+      <p:bldP spid="8" grpId="0"/>
+      <p:bldP spid="9" grpId="0" animBg="1"/>
+      <p:bldP spid="10" grpId="0"/>
+      <p:bldP spid="11" grpId="0"/>
+      <p:bldP spid="12" grpId="0" animBg="1"/>
+    </p:bldLst>
+  </p:timing>
+</p:sld>
+</file>
+
+<file path=ppt/slides/slide13.xml><?xml version="1.0" encoding="utf-8"?>
+<p:sld xmlns:a="http://schemas.openxmlformats.org/drawingml/2006/main" xmlns:r="http://schemas.openxmlformats.org/officeDocument/2006/relationships" xmlns:p="http://schemas.openxmlformats.org/presentationml/2006/main">
+  <p:cSld>
+    <p:spTree>
+      <p:nvGrpSpPr>
+        <p:cNvPr id="1" name=""/>
+        <p:cNvGrpSpPr/>
+        <p:nvPr/>
+      </p:nvGrpSpPr>
+      <p:grpSpPr>
+        <a:xfrm>
+          <a:off x="0" y="0"/>
+          <a:ext cx="0" cy="0"/>
+          <a:chOff x="0" y="0"/>
+          <a:chExt cx="0" cy="0"/>
+        </a:xfrm>
+      </p:grpSpPr>
+      <p:sp>
+        <p:nvSpPr>
           <p:cNvPr id="17" name="title">
             <a:extLst>
               <a:ext uri="{FF2B5EF4-FFF2-40B4-BE49-F238E27FC236}">
@@ -9694,7 +11450,7 @@
               </a:defRPr>
             </a:pPr>
             <a:r>
-              <a:rPr sz="1800" b="1">
+              <a:rPr sz="1800" b="1" dirty="0">
                 <a:solidFill>
                   <a:srgbClr val="1F4E79"/>
                 </a:solidFill>
@@ -10236,10 +11992,506 @@
   <p:clrMapOvr>
     <a:masterClrMapping/>
   </p:clrMapOvr>
+  <p:timing>
+    <p:tnLst>
+      <p:par>
+        <p:cTn id="1" dur="indefinite" restart="never" nodeType="tmRoot">
+          <p:childTnLst>
+            <p:seq concurrent="1" nextAc="seek">
+              <p:cTn id="2" dur="indefinite" nodeType="mainSeq">
+                <p:childTnLst>
+                  <p:par>
+                    <p:cTn id="3" fill="hold">
+                      <p:stCondLst>
+                        <p:cond delay="indefinite"/>
+                      </p:stCondLst>
+                      <p:childTnLst>
+                        <p:par>
+                          <p:cTn id="4" fill="hold">
+                            <p:stCondLst>
+                              <p:cond delay="0"/>
+                            </p:stCondLst>
+                            <p:childTnLst>
+                              <p:par>
+                                <p:cTn id="5" presetID="1" presetClass="entr" presetSubtype="0" fill="hold" grpId="0" nodeType="clickEffect">
+                                  <p:stCondLst>
+                                    <p:cond delay="0"/>
+                                  </p:stCondLst>
+                                  <p:childTnLst>
+                                    <p:set>
+                                      <p:cBhvr>
+                                        <p:cTn id="6" dur="1" fill="hold">
+                                          <p:stCondLst>
+                                            <p:cond delay="0"/>
+                                          </p:stCondLst>
+                                        </p:cTn>
+                                        <p:tgtEl>
+                                          <p:spTgt spid="3"/>
+                                        </p:tgtEl>
+                                        <p:attrNameLst>
+                                          <p:attrName>style.visibility</p:attrName>
+                                        </p:attrNameLst>
+                                      </p:cBhvr>
+                                      <p:to>
+                                        <p:strVal val="visible"/>
+                                      </p:to>
+                                    </p:set>
+                                  </p:childTnLst>
+                                </p:cTn>
+                              </p:par>
+                              <p:par>
+                                <p:cTn id="7" presetID="1" presetClass="entr" presetSubtype="0" fill="hold" grpId="0" nodeType="withEffect">
+                                  <p:stCondLst>
+                                    <p:cond delay="0"/>
+                                  </p:stCondLst>
+                                  <p:childTnLst>
+                                    <p:set>
+                                      <p:cBhvr>
+                                        <p:cTn id="8" dur="1" fill="hold">
+                                          <p:stCondLst>
+                                            <p:cond delay="0"/>
+                                          </p:stCondLst>
+                                        </p:cTn>
+                                        <p:tgtEl>
+                                          <p:spTgt spid="4"/>
+                                        </p:tgtEl>
+                                        <p:attrNameLst>
+                                          <p:attrName>style.visibility</p:attrName>
+                                        </p:attrNameLst>
+                                      </p:cBhvr>
+                                      <p:to>
+                                        <p:strVal val="visible"/>
+                                      </p:to>
+                                    </p:set>
+                                  </p:childTnLst>
+                                </p:cTn>
+                              </p:par>
+                              <p:par>
+                                <p:cTn id="9" presetID="1" presetClass="entr" presetSubtype="0" fill="hold" grpId="0" nodeType="withEffect">
+                                  <p:stCondLst>
+                                    <p:cond delay="0"/>
+                                  </p:stCondLst>
+                                  <p:childTnLst>
+                                    <p:set>
+                                      <p:cBhvr>
+                                        <p:cTn id="10" dur="1" fill="hold">
+                                          <p:stCondLst>
+                                            <p:cond delay="0"/>
+                                          </p:stCondLst>
+                                        </p:cTn>
+                                        <p:tgtEl>
+                                          <p:spTgt spid="5"/>
+                                        </p:tgtEl>
+                                        <p:attrNameLst>
+                                          <p:attrName>style.visibility</p:attrName>
+                                        </p:attrNameLst>
+                                      </p:cBhvr>
+                                      <p:to>
+                                        <p:strVal val="visible"/>
+                                      </p:to>
+                                    </p:set>
+                                  </p:childTnLst>
+                                </p:cTn>
+                              </p:par>
+                              <p:par>
+                                <p:cTn id="11" presetID="1" presetClass="entr" presetSubtype="0" fill="hold" grpId="0" nodeType="withEffect">
+                                  <p:stCondLst>
+                                    <p:cond delay="0"/>
+                                  </p:stCondLst>
+                                  <p:childTnLst>
+                                    <p:set>
+                                      <p:cBhvr>
+                                        <p:cTn id="12" dur="1" fill="hold">
+                                          <p:stCondLst>
+                                            <p:cond delay="0"/>
+                                          </p:stCondLst>
+                                        </p:cTn>
+                                        <p:tgtEl>
+                                          <p:spTgt spid="6"/>
+                                        </p:tgtEl>
+                                        <p:attrNameLst>
+                                          <p:attrName>style.visibility</p:attrName>
+                                        </p:attrNameLst>
+                                      </p:cBhvr>
+                                      <p:to>
+                                        <p:strVal val="visible"/>
+                                      </p:to>
+                                    </p:set>
+                                  </p:childTnLst>
+                                </p:cTn>
+                              </p:par>
+                            </p:childTnLst>
+                          </p:cTn>
+                        </p:par>
+                      </p:childTnLst>
+                    </p:cTn>
+                  </p:par>
+                  <p:par>
+                    <p:cTn id="13" fill="hold">
+                      <p:stCondLst>
+                        <p:cond delay="indefinite"/>
+                      </p:stCondLst>
+                      <p:childTnLst>
+                        <p:par>
+                          <p:cTn id="14" fill="hold">
+                            <p:stCondLst>
+                              <p:cond delay="0"/>
+                            </p:stCondLst>
+                            <p:childTnLst>
+                              <p:par>
+                                <p:cTn id="15" presetID="1" presetClass="entr" presetSubtype="0" fill="hold" grpId="0" nodeType="clickEffect">
+                                  <p:stCondLst>
+                                    <p:cond delay="0"/>
+                                  </p:stCondLst>
+                                  <p:childTnLst>
+                                    <p:set>
+                                      <p:cBhvr>
+                                        <p:cTn id="16" dur="1" fill="hold">
+                                          <p:stCondLst>
+                                            <p:cond delay="0"/>
+                                          </p:stCondLst>
+                                        </p:cTn>
+                                        <p:tgtEl>
+                                          <p:spTgt spid="7"/>
+                                        </p:tgtEl>
+                                        <p:attrNameLst>
+                                          <p:attrName>style.visibility</p:attrName>
+                                        </p:attrNameLst>
+                                      </p:cBhvr>
+                                      <p:to>
+                                        <p:strVal val="visible"/>
+                                      </p:to>
+                                    </p:set>
+                                  </p:childTnLst>
+                                </p:cTn>
+                              </p:par>
+                              <p:par>
+                                <p:cTn id="17" presetID="1" presetClass="entr" presetSubtype="0" fill="hold" grpId="0" nodeType="withEffect">
+                                  <p:stCondLst>
+                                    <p:cond delay="0"/>
+                                  </p:stCondLst>
+                                  <p:childTnLst>
+                                    <p:set>
+                                      <p:cBhvr>
+                                        <p:cTn id="18" dur="1" fill="hold">
+                                          <p:stCondLst>
+                                            <p:cond delay="0"/>
+                                          </p:stCondLst>
+                                        </p:cTn>
+                                        <p:tgtEl>
+                                          <p:spTgt spid="8"/>
+                                        </p:tgtEl>
+                                        <p:attrNameLst>
+                                          <p:attrName>style.visibility</p:attrName>
+                                        </p:attrNameLst>
+                                      </p:cBhvr>
+                                      <p:to>
+                                        <p:strVal val="visible"/>
+                                      </p:to>
+                                    </p:set>
+                                  </p:childTnLst>
+                                </p:cTn>
+                              </p:par>
+                              <p:par>
+                                <p:cTn id="19" presetID="1" presetClass="entr" presetSubtype="0" fill="hold" grpId="0" nodeType="withEffect">
+                                  <p:stCondLst>
+                                    <p:cond delay="0"/>
+                                  </p:stCondLst>
+                                  <p:childTnLst>
+                                    <p:set>
+                                      <p:cBhvr>
+                                        <p:cTn id="20" dur="1" fill="hold">
+                                          <p:stCondLst>
+                                            <p:cond delay="0"/>
+                                          </p:stCondLst>
+                                        </p:cTn>
+                                        <p:tgtEl>
+                                          <p:spTgt spid="9"/>
+                                        </p:tgtEl>
+                                        <p:attrNameLst>
+                                          <p:attrName>style.visibility</p:attrName>
+                                        </p:attrNameLst>
+                                      </p:cBhvr>
+                                      <p:to>
+                                        <p:strVal val="visible"/>
+                                      </p:to>
+                                    </p:set>
+                                  </p:childTnLst>
+                                </p:cTn>
+                              </p:par>
+                              <p:par>
+                                <p:cTn id="21" presetID="1" presetClass="entr" presetSubtype="0" fill="hold" grpId="0" nodeType="withEffect">
+                                  <p:stCondLst>
+                                    <p:cond delay="0"/>
+                                  </p:stCondLst>
+                                  <p:childTnLst>
+                                    <p:set>
+                                      <p:cBhvr>
+                                        <p:cTn id="22" dur="1" fill="hold">
+                                          <p:stCondLst>
+                                            <p:cond delay="0"/>
+                                          </p:stCondLst>
+                                        </p:cTn>
+                                        <p:tgtEl>
+                                          <p:spTgt spid="10"/>
+                                        </p:tgtEl>
+                                        <p:attrNameLst>
+                                          <p:attrName>style.visibility</p:attrName>
+                                        </p:attrNameLst>
+                                      </p:cBhvr>
+                                      <p:to>
+                                        <p:strVal val="visible"/>
+                                      </p:to>
+                                    </p:set>
+                                  </p:childTnLst>
+                                </p:cTn>
+                              </p:par>
+                            </p:childTnLst>
+                          </p:cTn>
+                        </p:par>
+                      </p:childTnLst>
+                    </p:cTn>
+                  </p:par>
+                  <p:par>
+                    <p:cTn id="23" fill="hold">
+                      <p:stCondLst>
+                        <p:cond delay="indefinite"/>
+                      </p:stCondLst>
+                      <p:childTnLst>
+                        <p:par>
+                          <p:cTn id="24" fill="hold">
+                            <p:stCondLst>
+                              <p:cond delay="0"/>
+                            </p:stCondLst>
+                            <p:childTnLst>
+                              <p:par>
+                                <p:cTn id="25" presetID="1" presetClass="entr" presetSubtype="0" fill="hold" grpId="0" nodeType="clickEffect">
+                                  <p:stCondLst>
+                                    <p:cond delay="0"/>
+                                  </p:stCondLst>
+                                  <p:childTnLst>
+                                    <p:set>
+                                      <p:cBhvr>
+                                        <p:cTn id="26" dur="1" fill="hold">
+                                          <p:stCondLst>
+                                            <p:cond delay="0"/>
+                                          </p:stCondLst>
+                                        </p:cTn>
+                                        <p:tgtEl>
+                                          <p:spTgt spid="11"/>
+                                        </p:tgtEl>
+                                        <p:attrNameLst>
+                                          <p:attrName>style.visibility</p:attrName>
+                                        </p:attrNameLst>
+                                      </p:cBhvr>
+                                      <p:to>
+                                        <p:strVal val="visible"/>
+                                      </p:to>
+                                    </p:set>
+                                  </p:childTnLst>
+                                </p:cTn>
+                              </p:par>
+                              <p:par>
+                                <p:cTn id="27" presetID="1" presetClass="entr" presetSubtype="0" fill="hold" grpId="0" nodeType="withEffect">
+                                  <p:stCondLst>
+                                    <p:cond delay="0"/>
+                                  </p:stCondLst>
+                                  <p:childTnLst>
+                                    <p:set>
+                                      <p:cBhvr>
+                                        <p:cTn id="28" dur="1" fill="hold">
+                                          <p:stCondLst>
+                                            <p:cond delay="0"/>
+                                          </p:stCondLst>
+                                        </p:cTn>
+                                        <p:tgtEl>
+                                          <p:spTgt spid="12"/>
+                                        </p:tgtEl>
+                                        <p:attrNameLst>
+                                          <p:attrName>style.visibility</p:attrName>
+                                        </p:attrNameLst>
+                                      </p:cBhvr>
+                                      <p:to>
+                                        <p:strVal val="visible"/>
+                                      </p:to>
+                                    </p:set>
+                                  </p:childTnLst>
+                                </p:cTn>
+                              </p:par>
+                              <p:par>
+                                <p:cTn id="29" presetID="1" presetClass="entr" presetSubtype="0" fill="hold" grpId="0" nodeType="withEffect">
+                                  <p:stCondLst>
+                                    <p:cond delay="0"/>
+                                  </p:stCondLst>
+                                  <p:childTnLst>
+                                    <p:set>
+                                      <p:cBhvr>
+                                        <p:cTn id="30" dur="1" fill="hold">
+                                          <p:stCondLst>
+                                            <p:cond delay="0"/>
+                                          </p:stCondLst>
+                                        </p:cTn>
+                                        <p:tgtEl>
+                                          <p:spTgt spid="13"/>
+                                        </p:tgtEl>
+                                        <p:attrNameLst>
+                                          <p:attrName>style.visibility</p:attrName>
+                                        </p:attrNameLst>
+                                      </p:cBhvr>
+                                      <p:to>
+                                        <p:strVal val="visible"/>
+                                      </p:to>
+                                    </p:set>
+                                  </p:childTnLst>
+                                </p:cTn>
+                              </p:par>
+                              <p:par>
+                                <p:cTn id="31" presetID="1" presetClass="entr" presetSubtype="0" fill="hold" grpId="0" nodeType="withEffect">
+                                  <p:stCondLst>
+                                    <p:cond delay="0"/>
+                                  </p:stCondLst>
+                                  <p:childTnLst>
+                                    <p:set>
+                                      <p:cBhvr>
+                                        <p:cTn id="32" dur="1" fill="hold">
+                                          <p:stCondLst>
+                                            <p:cond delay="0"/>
+                                          </p:stCondLst>
+                                        </p:cTn>
+                                        <p:tgtEl>
+                                          <p:spTgt spid="14"/>
+                                        </p:tgtEl>
+                                        <p:attrNameLst>
+                                          <p:attrName>style.visibility</p:attrName>
+                                        </p:attrNameLst>
+                                      </p:cBhvr>
+                                      <p:to>
+                                        <p:strVal val="visible"/>
+                                      </p:to>
+                                    </p:set>
+                                  </p:childTnLst>
+                                </p:cTn>
+                              </p:par>
+                            </p:childTnLst>
+                          </p:cTn>
+                        </p:par>
+                      </p:childTnLst>
+                    </p:cTn>
+                  </p:par>
+                  <p:par>
+                    <p:cTn id="33" fill="hold">
+                      <p:stCondLst>
+                        <p:cond delay="indefinite"/>
+                      </p:stCondLst>
+                      <p:childTnLst>
+                        <p:par>
+                          <p:cTn id="34" fill="hold">
+                            <p:stCondLst>
+                              <p:cond delay="0"/>
+                            </p:stCondLst>
+                            <p:childTnLst>
+                              <p:par>
+                                <p:cTn id="35" presetID="1" presetClass="entr" presetSubtype="0" fill="hold" grpId="0" nodeType="clickEffect">
+                                  <p:stCondLst>
+                                    <p:cond delay="0"/>
+                                  </p:stCondLst>
+                                  <p:childTnLst>
+                                    <p:set>
+                                      <p:cBhvr>
+                                        <p:cTn id="36" dur="1" fill="hold">
+                                          <p:stCondLst>
+                                            <p:cond delay="0"/>
+                                          </p:stCondLst>
+                                        </p:cTn>
+                                        <p:tgtEl>
+                                          <p:spTgt spid="15"/>
+                                        </p:tgtEl>
+                                        <p:attrNameLst>
+                                          <p:attrName>style.visibility</p:attrName>
+                                        </p:attrNameLst>
+                                      </p:cBhvr>
+                                      <p:to>
+                                        <p:strVal val="visible"/>
+                                      </p:to>
+                                    </p:set>
+                                  </p:childTnLst>
+                                </p:cTn>
+                              </p:par>
+                              <p:par>
+                                <p:cTn id="37" presetID="1" presetClass="entr" presetSubtype="0" fill="hold" grpId="0" nodeType="withEffect">
+                                  <p:stCondLst>
+                                    <p:cond delay="0"/>
+                                  </p:stCondLst>
+                                  <p:childTnLst>
+                                    <p:set>
+                                      <p:cBhvr>
+                                        <p:cTn id="38" dur="1" fill="hold">
+                                          <p:stCondLst>
+                                            <p:cond delay="0"/>
+                                          </p:stCondLst>
+                                        </p:cTn>
+                                        <p:tgtEl>
+                                          <p:spTgt spid="16"/>
+                                        </p:tgtEl>
+                                        <p:attrNameLst>
+                                          <p:attrName>style.visibility</p:attrName>
+                                        </p:attrNameLst>
+                                      </p:cBhvr>
+                                      <p:to>
+                                        <p:strVal val="visible"/>
+                                      </p:to>
+                                    </p:set>
+                                  </p:childTnLst>
+                                </p:cTn>
+                              </p:par>
+                            </p:childTnLst>
+                          </p:cTn>
+                        </p:par>
+                      </p:childTnLst>
+                    </p:cTn>
+                  </p:par>
+                </p:childTnLst>
+              </p:cTn>
+              <p:prevCondLst>
+                <p:cond evt="onPrev" delay="0">
+                  <p:tgtEl>
+                    <p:sldTgt/>
+                  </p:tgtEl>
+                </p:cond>
+              </p:prevCondLst>
+              <p:nextCondLst>
+                <p:cond evt="onNext" delay="0">
+                  <p:tgtEl>
+                    <p:sldTgt/>
+                  </p:tgtEl>
+                </p:cond>
+              </p:nextCondLst>
+            </p:seq>
+          </p:childTnLst>
+        </p:cTn>
+      </p:par>
+    </p:tnLst>
+    <p:bldLst>
+      <p:bldP spid="3" grpId="0" animBg="1"/>
+      <p:bldP spid="4" grpId="0"/>
+      <p:bldP spid="5" grpId="0"/>
+      <p:bldP spid="6" grpId="0"/>
+      <p:bldP spid="7" grpId="0" animBg="1"/>
+      <p:bldP spid="8" grpId="0"/>
+      <p:bldP spid="9" grpId="0"/>
+      <p:bldP spid="10" grpId="0"/>
+      <p:bldP spid="11" grpId="0" animBg="1"/>
+      <p:bldP spid="12" grpId="0"/>
+      <p:bldP spid="13" grpId="0"/>
+      <p:bldP spid="14" grpId="0"/>
+      <p:bldP spid="15" grpId="0" animBg="1"/>
+      <p:bldP spid="16" grpId="0"/>
+    </p:bldLst>
+  </p:timing>
 </p:sld>
 </file>
 
-<file path=ppt/slides/slide13.xml><?xml version="1.0" encoding="utf-8"?>
+<file path=ppt/slides/slide14.xml><?xml version="1.0" encoding="utf-8"?>
 <p:sld xmlns:a="http://schemas.openxmlformats.org/drawingml/2006/main" xmlns:r="http://schemas.openxmlformats.org/officeDocument/2006/relationships" xmlns:p="http://schemas.openxmlformats.org/presentationml/2006/main">
   <p:cSld>
     <p:spTree>
@@ -11847,7 +14099,7 @@
 </p:sld>
 </file>
 
-<file path=ppt/slides/slide14.xml><?xml version="1.0" encoding="utf-8"?>
+<file path=ppt/slides/slide15.xml><?xml version="1.0" encoding="utf-8"?>
 <p:sld xmlns:a="http://schemas.openxmlformats.org/drawingml/2006/main" xmlns:r="http://schemas.openxmlformats.org/officeDocument/2006/relationships" xmlns:p="http://schemas.openxmlformats.org/presentationml/2006/main">
   <p:cSld>
     <p:spTree>
@@ -13457,1164 +15709,6 @@
 </p:sld>
 </file>
 
-<file path=ppt/slides/slide15.xml><?xml version="1.0" encoding="utf-8"?>
-<p:sld xmlns:a="http://schemas.openxmlformats.org/drawingml/2006/main" xmlns:r="http://schemas.openxmlformats.org/officeDocument/2006/relationships" xmlns:p="http://schemas.openxmlformats.org/presentationml/2006/main">
-  <p:cSld>
-    <p:spTree>
-      <p:nvGrpSpPr>
-        <p:cNvPr id="1" name=""/>
-        <p:cNvGrpSpPr/>
-        <p:nvPr/>
-      </p:nvGrpSpPr>
-      <p:grpSpPr>
-        <a:xfrm>
-          <a:off x="0" y="0"/>
-          <a:ext cx="0" cy="0"/>
-          <a:chOff x="0" y="0"/>
-          <a:chExt cx="0" cy="0"/>
-        </a:xfrm>
-      </p:grpSpPr>
-      <p:sp>
-        <p:nvSpPr>
-          <p:cNvPr id="26" name="title">
-            <a:extLst>
-              <a:ext uri="{FF2B5EF4-FFF2-40B4-BE49-F238E27FC236}">
-                <a16:creationId xmlns:a16="http://schemas.microsoft.com/office/drawing/2014/main" id="{CAC8877D-8692-4B39-AF09-82B4AD9D3650}"/>
-              </a:ext>
-            </a:extLst>
-          </p:cNvPr>
-          <p:cNvSpPr>
-            <a:spLocks noGrp="1"/>
-          </p:cNvSpPr>
-          <p:nvPr/>
-        </p:nvSpPr>
-        <p:spPr>
-          <a:xfrm>
-            <a:off x="685800" y="361950"/>
-            <a:ext cx="10820400" cy="571500"/>
-          </a:xfrm>
-          <a:prstGeom prst="rect">
-            <a:avLst/>
-          </a:prstGeom>
-          <a:noFill/>
-          <a:ln w="0">
-            <a:noFill/>
-            <a:prstDash val="solid"/>
-          </a:ln>
-        </p:spPr>
-        <p:txBody>
-          <a:bodyPr/>
-          <a:lstStyle/>
-          <a:p>
-            <a:pPr>
-              <a:defRPr sz="2400" b="1">
-                <a:solidFill>
-                  <a:srgbClr val="1F4E79"/>
-                </a:solidFill>
-              </a:defRPr>
-            </a:pPr>
-            <a:r>
-              <a:rPr sz="3200" b="1" dirty="0">
-                <a:solidFill>
-                  <a:srgbClr val="1F4E79"/>
-                </a:solidFill>
-              </a:rPr>
-              <a:t>Git and GitHub: A Shared Path from Task to Merge</a:t>
-            </a:r>
-          </a:p>
-        </p:txBody>
-      </p:sp>
-      <p:sp>
-        <p:nvSpPr>
-          <p:cNvPr id="2" name="subtitle">
-            <a:extLst>
-              <a:ext uri="{FF2B5EF4-FFF2-40B4-BE49-F238E27FC236}">
-                <a16:creationId xmlns:a16="http://schemas.microsoft.com/office/drawing/2014/main" id="{5A00E2FB-A5AC-445C-AC53-7E56D3C8F46E}"/>
-              </a:ext>
-            </a:extLst>
-          </p:cNvPr>
-          <p:cNvSpPr>
-            <a:spLocks noGrp="1"/>
-          </p:cNvSpPr>
-          <p:nvPr/>
-        </p:nvSpPr>
-        <p:spPr>
-          <a:xfrm>
-            <a:off x="685800" y="981075"/>
-            <a:ext cx="10668000" cy="323850"/>
-          </a:xfrm>
-          <a:prstGeom prst="rect">
-            <a:avLst/>
-          </a:prstGeom>
-          <a:noFill/>
-          <a:ln w="0">
-            <a:noFill/>
-            <a:prstDash val="solid"/>
-          </a:ln>
-        </p:spPr>
-        <p:txBody>
-          <a:bodyPr/>
-          <a:lstStyle/>
-          <a:p>
-            <a:pPr>
-              <a:defRPr sz="1500" b="1">
-                <a:solidFill>
-                  <a:srgbClr val="000000"/>
-                </a:solidFill>
-              </a:defRPr>
-            </a:pPr>
-            <a:r>
-              <a:rPr sz="2000" b="1" dirty="0">
-                <a:solidFill>
-                  <a:srgbClr val="000000"/>
-                </a:solidFill>
-              </a:rPr>
-              <a:t>The workflow makes ownership, progress, and review visible.</a:t>
-            </a:r>
-          </a:p>
-        </p:txBody>
-      </p:sp>
-      <p:sp>
-        <p:nvSpPr>
-          <p:cNvPr id="3" name="gh0">
-            <a:extLst>
-              <a:ext uri="{FF2B5EF4-FFF2-40B4-BE49-F238E27FC236}">
-                <a16:creationId xmlns:a16="http://schemas.microsoft.com/office/drawing/2014/main" id="{6D1A8C43-639F-420C-98B3-51C18CF87D39}"/>
-              </a:ext>
-            </a:extLst>
-          </p:cNvPr>
-          <p:cNvSpPr>
-            <a:spLocks noGrp="1"/>
-          </p:cNvSpPr>
-          <p:nvPr/>
-        </p:nvSpPr>
-        <p:spPr>
-          <a:xfrm>
-            <a:off x="666750" y="1666875"/>
-            <a:ext cx="2667000" cy="400050"/>
-          </a:xfrm>
-          <a:prstGeom prst="rect">
-            <a:avLst/>
-          </a:prstGeom>
-          <a:noFill/>
-          <a:ln w="0">
-            <a:noFill/>
-            <a:prstDash val="solid"/>
-          </a:ln>
-        </p:spPr>
-        <p:txBody>
-          <a:bodyPr/>
-          <a:lstStyle/>
-          <a:p>
-            <a:pPr algn="ctr">
-              <a:defRPr sz="1800" b="1">
-                <a:solidFill>
-                  <a:srgbClr val="1F4E79"/>
-                </a:solidFill>
-              </a:defRPr>
-            </a:pPr>
-            <a:r>
-              <a:rPr sz="2000" b="1" dirty="0">
-                <a:solidFill>
-                  <a:srgbClr val="1F4E79"/>
-                </a:solidFill>
-              </a:rPr>
-              <a:t>ISSUE</a:t>
-            </a:r>
-          </a:p>
-        </p:txBody>
-      </p:sp>
-      <p:sp>
-        <p:nvSpPr>
-          <p:cNvPr id="4" name="gb0">
-            <a:extLst>
-              <a:ext uri="{FF2B5EF4-FFF2-40B4-BE49-F238E27FC236}">
-                <a16:creationId xmlns:a16="http://schemas.microsoft.com/office/drawing/2014/main" id="{08D06220-FD81-4197-86CE-63040B656171}"/>
-              </a:ext>
-            </a:extLst>
-          </p:cNvPr>
-          <p:cNvSpPr>
-            <a:spLocks noGrp="1"/>
-          </p:cNvSpPr>
-          <p:nvPr/>
-        </p:nvSpPr>
-        <p:spPr>
-          <a:xfrm>
-            <a:off x="809625" y="3743325"/>
-            <a:ext cx="2381250" cy="647700"/>
-          </a:xfrm>
-          <a:prstGeom prst="rect">
-            <a:avLst/>
-          </a:prstGeom>
-          <a:noFill/>
-          <a:ln w="0">
-            <a:noFill/>
-            <a:prstDash val="solid"/>
-          </a:ln>
-        </p:spPr>
-        <p:txBody>
-          <a:bodyPr/>
-          <a:lstStyle/>
-          <a:p>
-            <a:pPr algn="ctr">
-              <a:defRPr sz="1500">
-                <a:solidFill>
-                  <a:srgbClr val="000000"/>
-                </a:solidFill>
-              </a:defRPr>
-            </a:pPr>
-            <a:r>
-              <a:rPr sz="2000" dirty="0">
-                <a:solidFill>
-                  <a:srgbClr val="000000"/>
-                </a:solidFill>
-              </a:rPr>
-              <a:t>Agree on the task</a:t>
-            </a:r>
-          </a:p>
-          <a:p>
-            <a:pPr algn="ctr">
-              <a:defRPr sz="1500">
-                <a:solidFill>
-                  <a:srgbClr val="000000"/>
-                </a:solidFill>
-              </a:defRPr>
-            </a:pPr>
-            <a:r>
-              <a:rPr sz="2000" dirty="0">
-                <a:solidFill>
-                  <a:srgbClr val="000000"/>
-                </a:solidFill>
-              </a:rPr>
-              <a:t>and ownership</a:t>
-            </a:r>
-          </a:p>
-        </p:txBody>
-      </p:sp>
-      <p:sp>
-        <p:nvSpPr>
-          <p:cNvPr id="5" name="arrow0">
-            <a:extLst>
-              <a:ext uri="{FF2B5EF4-FFF2-40B4-BE49-F238E27FC236}">
-                <a16:creationId xmlns:a16="http://schemas.microsoft.com/office/drawing/2014/main" id="{968E19D2-CB37-4E32-ADBA-23EBDF635F6A}"/>
-              </a:ext>
-            </a:extLst>
-          </p:cNvPr>
-          <p:cNvSpPr>
-            <a:spLocks noGrp="1"/>
-          </p:cNvSpPr>
-          <p:nvPr/>
-        </p:nvSpPr>
-        <p:spPr>
-          <a:xfrm>
-            <a:off x="3238500" y="2714625"/>
-            <a:ext cx="381000" cy="419100"/>
-          </a:xfrm>
-          <a:prstGeom prst="rect">
-            <a:avLst/>
-          </a:prstGeom>
-          <a:noFill/>
-          <a:ln w="0">
-            <a:noFill/>
-            <a:prstDash val="solid"/>
-          </a:ln>
-        </p:spPr>
-        <p:txBody>
-          <a:bodyPr/>
-          <a:lstStyle/>
-          <a:p>
-            <a:pPr algn="ctr">
-              <a:defRPr sz="2100" b="1">
-                <a:solidFill>
-                  <a:srgbClr val="D9E2E8"/>
-                </a:solidFill>
-              </a:defRPr>
-            </a:pPr>
-            <a:r>
-              <a:rPr sz="2100" b="1">
-                <a:solidFill>
-                  <a:srgbClr val="D9E2E8"/>
-                </a:solidFill>
-              </a:rPr>
-              <a:t>→</a:t>
-            </a:r>
-          </a:p>
-        </p:txBody>
-      </p:sp>
-      <p:sp>
-        <p:nvSpPr>
-          <p:cNvPr id="6" name="gh1">
-            <a:extLst>
-              <a:ext uri="{FF2B5EF4-FFF2-40B4-BE49-F238E27FC236}">
-                <a16:creationId xmlns:a16="http://schemas.microsoft.com/office/drawing/2014/main" id="{AC024BB6-9893-4A38-AC6F-D403CC79963F}"/>
-              </a:ext>
-            </a:extLst>
-          </p:cNvPr>
-          <p:cNvSpPr>
-            <a:spLocks noGrp="1"/>
-          </p:cNvSpPr>
-          <p:nvPr/>
-        </p:nvSpPr>
-        <p:spPr>
-          <a:xfrm>
-            <a:off x="3333750" y="1666875"/>
-            <a:ext cx="2667000" cy="400050"/>
-          </a:xfrm>
-          <a:prstGeom prst="rect">
-            <a:avLst/>
-          </a:prstGeom>
-          <a:noFill/>
-          <a:ln w="0">
-            <a:noFill/>
-            <a:prstDash val="solid"/>
-          </a:ln>
-        </p:spPr>
-        <p:txBody>
-          <a:bodyPr/>
-          <a:lstStyle/>
-          <a:p>
-            <a:pPr algn="ctr">
-              <a:defRPr sz="1800" b="1">
-                <a:solidFill>
-                  <a:srgbClr val="008C95"/>
-                </a:solidFill>
-              </a:defRPr>
-            </a:pPr>
-            <a:r>
-              <a:rPr sz="2000" b="1" dirty="0">
-                <a:solidFill>
-                  <a:srgbClr val="008C95"/>
-                </a:solidFill>
-              </a:rPr>
-              <a:t>BRANCH + COMMITS</a:t>
-            </a:r>
-          </a:p>
-        </p:txBody>
-      </p:sp>
-      <p:sp>
-        <p:nvSpPr>
-          <p:cNvPr id="7" name="gb1">
-            <a:extLst>
-              <a:ext uri="{FF2B5EF4-FFF2-40B4-BE49-F238E27FC236}">
-                <a16:creationId xmlns:a16="http://schemas.microsoft.com/office/drawing/2014/main" id="{F385DECF-1B0F-4206-B9E0-AE1FBADAA088}"/>
-              </a:ext>
-            </a:extLst>
-          </p:cNvPr>
-          <p:cNvSpPr>
-            <a:spLocks noGrp="1"/>
-          </p:cNvSpPr>
-          <p:nvPr/>
-        </p:nvSpPr>
-        <p:spPr>
-          <a:xfrm>
-            <a:off x="3476625" y="3743325"/>
-            <a:ext cx="2381250" cy="647700"/>
-          </a:xfrm>
-          <a:prstGeom prst="rect">
-            <a:avLst/>
-          </a:prstGeom>
-          <a:noFill/>
-          <a:ln w="0">
-            <a:noFill/>
-            <a:prstDash val="solid"/>
-          </a:ln>
-        </p:spPr>
-        <p:txBody>
-          <a:bodyPr/>
-          <a:lstStyle/>
-          <a:p>
-            <a:pPr algn="ctr">
-              <a:defRPr sz="1500">
-                <a:solidFill>
-                  <a:srgbClr val="000000"/>
-                </a:solidFill>
-              </a:defRPr>
-            </a:pPr>
-            <a:r>
-              <a:rPr sz="2000" dirty="0">
-                <a:solidFill>
-                  <a:srgbClr val="000000"/>
-                </a:solidFill>
-              </a:rPr>
-              <a:t>Develop a focused</a:t>
-            </a:r>
-          </a:p>
-          <a:p>
-            <a:pPr algn="ctr">
-              <a:defRPr sz="1500">
-                <a:solidFill>
-                  <a:srgbClr val="000000"/>
-                </a:solidFill>
-              </a:defRPr>
-            </a:pPr>
-            <a:r>
-              <a:rPr sz="2000" dirty="0">
-                <a:solidFill>
-                  <a:srgbClr val="000000"/>
-                </a:solidFill>
-              </a:rPr>
-              <a:t>change</a:t>
-            </a:r>
-          </a:p>
-        </p:txBody>
-      </p:sp>
-      <p:sp>
-        <p:nvSpPr>
-          <p:cNvPr id="8" name="arrow1">
-            <a:extLst>
-              <a:ext uri="{FF2B5EF4-FFF2-40B4-BE49-F238E27FC236}">
-                <a16:creationId xmlns:a16="http://schemas.microsoft.com/office/drawing/2014/main" id="{48B0A54F-D6A8-4A90-9B99-19ABCBBEF5B7}"/>
-              </a:ext>
-            </a:extLst>
-          </p:cNvPr>
-          <p:cNvSpPr>
-            <a:spLocks noGrp="1"/>
-          </p:cNvSpPr>
-          <p:nvPr/>
-        </p:nvSpPr>
-        <p:spPr>
-          <a:xfrm>
-            <a:off x="5905500" y="2714625"/>
-            <a:ext cx="381000" cy="419100"/>
-          </a:xfrm>
-          <a:prstGeom prst="rect">
-            <a:avLst/>
-          </a:prstGeom>
-          <a:noFill/>
-          <a:ln w="0">
-            <a:noFill/>
-            <a:prstDash val="solid"/>
-          </a:ln>
-        </p:spPr>
-        <p:txBody>
-          <a:bodyPr/>
-          <a:lstStyle/>
-          <a:p>
-            <a:pPr algn="ctr">
-              <a:defRPr sz="2100" b="1">
-                <a:solidFill>
-                  <a:srgbClr val="D9E2E8"/>
-                </a:solidFill>
-              </a:defRPr>
-            </a:pPr>
-            <a:r>
-              <a:rPr sz="2100" b="1">
-                <a:solidFill>
-                  <a:srgbClr val="D9E2E8"/>
-                </a:solidFill>
-              </a:rPr>
-              <a:t>→</a:t>
-            </a:r>
-          </a:p>
-        </p:txBody>
-      </p:sp>
-      <p:sp>
-        <p:nvSpPr>
-          <p:cNvPr id="9" name="gh2">
-            <a:extLst>
-              <a:ext uri="{FF2B5EF4-FFF2-40B4-BE49-F238E27FC236}">
-                <a16:creationId xmlns:a16="http://schemas.microsoft.com/office/drawing/2014/main" id="{C8B1C6A3-59AB-4378-A85C-DA70AC887DE4}"/>
-              </a:ext>
-            </a:extLst>
-          </p:cNvPr>
-          <p:cNvSpPr>
-            <a:spLocks noGrp="1"/>
-          </p:cNvSpPr>
-          <p:nvPr/>
-        </p:nvSpPr>
-        <p:spPr>
-          <a:xfrm>
-            <a:off x="6191250" y="1666875"/>
-            <a:ext cx="2667000" cy="400050"/>
-          </a:xfrm>
-          <a:prstGeom prst="rect">
-            <a:avLst/>
-          </a:prstGeom>
-          <a:noFill/>
-          <a:ln w="0">
-            <a:noFill/>
-            <a:prstDash val="solid"/>
-          </a:ln>
-        </p:spPr>
-        <p:txBody>
-          <a:bodyPr/>
-          <a:lstStyle/>
-          <a:p>
-            <a:pPr algn="ctr">
-              <a:defRPr sz="1800" b="1">
-                <a:solidFill>
-                  <a:srgbClr val="1F4E79"/>
-                </a:solidFill>
-              </a:defRPr>
-            </a:pPr>
-            <a:r>
-              <a:rPr sz="2000" b="1" dirty="0">
-                <a:solidFill>
-                  <a:srgbClr val="1F4E79"/>
-                </a:solidFill>
-              </a:rPr>
-              <a:t>PULL REQUEST</a:t>
-            </a:r>
-          </a:p>
-        </p:txBody>
-      </p:sp>
-      <p:sp>
-        <p:nvSpPr>
-          <p:cNvPr id="10" name="gb2">
-            <a:extLst>
-              <a:ext uri="{FF2B5EF4-FFF2-40B4-BE49-F238E27FC236}">
-                <a16:creationId xmlns:a16="http://schemas.microsoft.com/office/drawing/2014/main" id="{978A1F63-0861-4A63-985E-154D95A56819}"/>
-              </a:ext>
-            </a:extLst>
-          </p:cNvPr>
-          <p:cNvSpPr>
-            <a:spLocks noGrp="1"/>
-          </p:cNvSpPr>
-          <p:nvPr/>
-        </p:nvSpPr>
-        <p:spPr>
-          <a:xfrm>
-            <a:off x="6334125" y="3743325"/>
-            <a:ext cx="2381250" cy="647700"/>
-          </a:xfrm>
-          <a:prstGeom prst="rect">
-            <a:avLst/>
-          </a:prstGeom>
-          <a:noFill/>
-          <a:ln w="0">
-            <a:noFill/>
-            <a:prstDash val="solid"/>
-          </a:ln>
-        </p:spPr>
-        <p:txBody>
-          <a:bodyPr/>
-          <a:lstStyle/>
-          <a:p>
-            <a:pPr algn="ctr">
-              <a:defRPr sz="1500">
-                <a:solidFill>
-                  <a:srgbClr val="000000"/>
-                </a:solidFill>
-              </a:defRPr>
-            </a:pPr>
-            <a:r>
-              <a:rPr sz="2000" dirty="0">
-                <a:solidFill>
-                  <a:srgbClr val="000000"/>
-                </a:solidFill>
-              </a:rPr>
-              <a:t>Explain the change</a:t>
-            </a:r>
-          </a:p>
-          <a:p>
-            <a:pPr algn="ctr">
-              <a:defRPr sz="1500">
-                <a:solidFill>
-                  <a:srgbClr val="000000"/>
-                </a:solidFill>
-              </a:defRPr>
-            </a:pPr>
-            <a:r>
-              <a:rPr sz="2000" dirty="0">
-                <a:solidFill>
-                  <a:srgbClr val="000000"/>
-                </a:solidFill>
-              </a:rPr>
-              <a:t>and request review</a:t>
-            </a:r>
-          </a:p>
-        </p:txBody>
-      </p:sp>
-      <p:sp>
-        <p:nvSpPr>
-          <p:cNvPr id="11" name="arrow2">
-            <a:extLst>
-              <a:ext uri="{FF2B5EF4-FFF2-40B4-BE49-F238E27FC236}">
-                <a16:creationId xmlns:a16="http://schemas.microsoft.com/office/drawing/2014/main" id="{9BB9FA6A-C079-47E5-BBB1-3160CE1AAC76}"/>
-              </a:ext>
-            </a:extLst>
-          </p:cNvPr>
-          <p:cNvSpPr>
-            <a:spLocks noGrp="1"/>
-          </p:cNvSpPr>
-          <p:nvPr/>
-        </p:nvSpPr>
-        <p:spPr>
-          <a:xfrm>
-            <a:off x="8763000" y="2714625"/>
-            <a:ext cx="381000" cy="419100"/>
-          </a:xfrm>
-          <a:prstGeom prst="rect">
-            <a:avLst/>
-          </a:prstGeom>
-          <a:noFill/>
-          <a:ln w="0">
-            <a:noFill/>
-            <a:prstDash val="solid"/>
-          </a:ln>
-        </p:spPr>
-        <p:txBody>
-          <a:bodyPr/>
-          <a:lstStyle/>
-          <a:p>
-            <a:pPr algn="ctr">
-              <a:defRPr sz="2100" b="1">
-                <a:solidFill>
-                  <a:srgbClr val="D9E2E8"/>
-                </a:solidFill>
-              </a:defRPr>
-            </a:pPr>
-            <a:r>
-              <a:rPr sz="2100" b="1">
-                <a:solidFill>
-                  <a:srgbClr val="D9E2E8"/>
-                </a:solidFill>
-              </a:rPr>
-              <a:t>→</a:t>
-            </a:r>
-          </a:p>
-        </p:txBody>
-      </p:sp>
-      <p:sp>
-        <p:nvSpPr>
-          <p:cNvPr id="12" name="gh3">
-            <a:extLst>
-              <a:ext uri="{FF2B5EF4-FFF2-40B4-BE49-F238E27FC236}">
-                <a16:creationId xmlns:a16="http://schemas.microsoft.com/office/drawing/2014/main" id="{64272012-AABD-46D0-9B42-2D9599BA1CD6}"/>
-              </a:ext>
-            </a:extLst>
-          </p:cNvPr>
-          <p:cNvSpPr>
-            <a:spLocks noGrp="1"/>
-          </p:cNvSpPr>
-          <p:nvPr/>
-        </p:nvSpPr>
-        <p:spPr>
-          <a:xfrm>
-            <a:off x="8953500" y="1666875"/>
-            <a:ext cx="2667000" cy="400050"/>
-          </a:xfrm>
-          <a:prstGeom prst="rect">
-            <a:avLst/>
-          </a:prstGeom>
-          <a:noFill/>
-          <a:ln w="0">
-            <a:noFill/>
-            <a:prstDash val="solid"/>
-          </a:ln>
-        </p:spPr>
-        <p:txBody>
-          <a:bodyPr/>
-          <a:lstStyle/>
-          <a:p>
-            <a:pPr algn="ctr">
-              <a:defRPr sz="1800" b="1">
-                <a:solidFill>
-                  <a:srgbClr val="008C95"/>
-                </a:solidFill>
-              </a:defRPr>
-            </a:pPr>
-            <a:r>
-              <a:rPr sz="2000" b="1" dirty="0">
-                <a:solidFill>
-                  <a:srgbClr val="008C95"/>
-                </a:solidFill>
-              </a:rPr>
-              <a:t>REVIEW + MERGE</a:t>
-            </a:r>
-          </a:p>
-        </p:txBody>
-      </p:sp>
-      <p:sp>
-        <p:nvSpPr>
-          <p:cNvPr id="13" name="gb3">
-            <a:extLst>
-              <a:ext uri="{FF2B5EF4-FFF2-40B4-BE49-F238E27FC236}">
-                <a16:creationId xmlns:a16="http://schemas.microsoft.com/office/drawing/2014/main" id="{5ED1EE1C-295E-448E-A714-841772606EB3}"/>
-              </a:ext>
-            </a:extLst>
-          </p:cNvPr>
-          <p:cNvSpPr>
-            <a:spLocks noGrp="1"/>
-          </p:cNvSpPr>
-          <p:nvPr/>
-        </p:nvSpPr>
-        <p:spPr>
-          <a:xfrm>
-            <a:off x="9096375" y="3743325"/>
-            <a:ext cx="2381250" cy="647700"/>
-          </a:xfrm>
-          <a:prstGeom prst="rect">
-            <a:avLst/>
-          </a:prstGeom>
-          <a:noFill/>
-          <a:ln w="0">
-            <a:noFill/>
-            <a:prstDash val="solid"/>
-          </a:ln>
-        </p:spPr>
-        <p:txBody>
-          <a:bodyPr/>
-          <a:lstStyle/>
-          <a:p>
-            <a:pPr algn="ctr">
-              <a:defRPr sz="1500">
-                <a:solidFill>
-                  <a:srgbClr val="000000"/>
-                </a:solidFill>
-              </a:defRPr>
-            </a:pPr>
-            <a:r>
-              <a:rPr sz="2000" dirty="0">
-                <a:solidFill>
-                  <a:srgbClr val="000000"/>
-                </a:solidFill>
-              </a:rPr>
-              <a:t>Improve it before</a:t>
-            </a:r>
-          </a:p>
-          <a:p>
-            <a:pPr algn="ctr">
-              <a:defRPr sz="1500">
-                <a:solidFill>
-                  <a:srgbClr val="000000"/>
-                </a:solidFill>
-              </a:defRPr>
-            </a:pPr>
-            <a:r>
-              <a:rPr sz="2000" dirty="0">
-                <a:solidFill>
-                  <a:srgbClr val="000000"/>
-                </a:solidFill>
-              </a:rPr>
-              <a:t>it reaches main</a:t>
-            </a:r>
-          </a:p>
-        </p:txBody>
-      </p:sp>
-      <p:pic>
-        <p:nvPicPr>
-          <p:cNvPr id="39" name="Picture 38"/>
-          <p:cNvPicPr>
-            <a:picLocks noChangeAspect="1"/>
-          </p:cNvPicPr>
-          <p:nvPr/>
-        </p:nvPicPr>
-        <p:blipFill>
-          <a:blip r:embed="rId3"/>
-          <a:stretch/>
-        </p:blipFill>
-        <p:spPr>
-          <a:xfrm>
-            <a:off x="1381125" y="2385810"/>
-            <a:ext cx="1143000" cy="705255"/>
-          </a:xfrm>
-          <a:prstGeom prst="rect">
-            <a:avLst/>
-          </a:prstGeom>
-        </p:spPr>
-      </p:pic>
-      <p:pic>
-        <p:nvPicPr>
-          <p:cNvPr id="40" name="Picture 39"/>
-          <p:cNvPicPr>
-            <a:picLocks noChangeAspect="1"/>
-          </p:cNvPicPr>
-          <p:nvPr/>
-        </p:nvPicPr>
-        <p:blipFill>
-          <a:blip r:embed="rId4"/>
-          <a:stretch/>
-        </p:blipFill>
-        <p:spPr>
-          <a:xfrm>
-            <a:off x="4183784" y="2190750"/>
-            <a:ext cx="1062182" cy="1095375"/>
-          </a:xfrm>
-          <a:prstGeom prst="rect">
-            <a:avLst/>
-          </a:prstGeom>
-        </p:spPr>
-      </p:pic>
-      <p:sp>
-        <p:nvSpPr>
-          <p:cNvPr id="16" name="commit-line">
-            <a:extLst>
-              <a:ext uri="{FF2B5EF4-FFF2-40B4-BE49-F238E27FC236}">
-                <a16:creationId xmlns:a16="http://schemas.microsoft.com/office/drawing/2014/main" id="{D0E352E8-FE3E-4179-9E73-CBA36EE64DAB}"/>
-              </a:ext>
-            </a:extLst>
-          </p:cNvPr>
-          <p:cNvSpPr>
-            <a:spLocks noGrp="1"/>
-          </p:cNvSpPr>
-          <p:nvPr/>
-        </p:nvSpPr>
-        <p:spPr>
-          <a:xfrm>
-            <a:off x="4362450" y="3381375"/>
-            <a:ext cx="714375" cy="0"/>
-          </a:xfrm>
-          <a:prstGeom prst="line">
-            <a:avLst/>
-          </a:prstGeom>
-          <a:noFill/>
-          <a:ln w="19050">
-            <a:solidFill>
-              <a:srgbClr val="000000"/>
-            </a:solidFill>
-            <a:prstDash val="solid"/>
-          </a:ln>
-        </p:spPr>
-        <p:txBody>
-          <a:bodyPr/>
-          <a:lstStyle/>
-          <a:p>
-            <a:endParaRPr lang="en-US"/>
-          </a:p>
-        </p:txBody>
-      </p:sp>
-      <p:sp>
-        <p:nvSpPr>
-          <p:cNvPr id="17" name="commit-dot-0">
-            <a:extLst>
-              <a:ext uri="{FF2B5EF4-FFF2-40B4-BE49-F238E27FC236}">
-                <a16:creationId xmlns:a16="http://schemas.microsoft.com/office/drawing/2014/main" id="{B89BCABF-8A3B-421E-807E-BF4201004D2F}"/>
-              </a:ext>
-            </a:extLst>
-          </p:cNvPr>
-          <p:cNvSpPr>
-            <a:spLocks noGrp="1"/>
-          </p:cNvSpPr>
-          <p:nvPr/>
-        </p:nvSpPr>
-        <p:spPr>
-          <a:xfrm>
-            <a:off x="4305300" y="3324225"/>
-            <a:ext cx="114300" cy="114300"/>
-          </a:xfrm>
-          <a:prstGeom prst="ellipse">
-            <a:avLst/>
-          </a:prstGeom>
-          <a:solidFill>
-            <a:srgbClr val="000000"/>
-          </a:solidFill>
-          <a:ln w="0">
-            <a:solidFill>
-              <a:srgbClr val="000000"/>
-            </a:solidFill>
-            <a:prstDash val="solid"/>
-          </a:ln>
-        </p:spPr>
-        <p:txBody>
-          <a:bodyPr/>
-          <a:lstStyle/>
-          <a:p>
-            <a:endParaRPr lang="en-US"/>
-          </a:p>
-        </p:txBody>
-      </p:sp>
-      <p:sp>
-        <p:nvSpPr>
-          <p:cNvPr id="18" name="commit-dot-1">
-            <a:extLst>
-              <a:ext uri="{FF2B5EF4-FFF2-40B4-BE49-F238E27FC236}">
-                <a16:creationId xmlns:a16="http://schemas.microsoft.com/office/drawing/2014/main" id="{D227963A-3749-4FC1-9E3A-FC9A7FB69A1E}"/>
-              </a:ext>
-            </a:extLst>
-          </p:cNvPr>
-          <p:cNvSpPr>
-            <a:spLocks noGrp="1"/>
-          </p:cNvSpPr>
-          <p:nvPr/>
-        </p:nvSpPr>
-        <p:spPr>
-          <a:xfrm>
-            <a:off x="4657725" y="3324225"/>
-            <a:ext cx="114300" cy="114300"/>
-          </a:xfrm>
-          <a:prstGeom prst="ellipse">
-            <a:avLst/>
-          </a:prstGeom>
-          <a:solidFill>
-            <a:srgbClr val="000000"/>
-          </a:solidFill>
-          <a:ln w="0">
-            <a:solidFill>
-              <a:srgbClr val="000000"/>
-            </a:solidFill>
-            <a:prstDash val="solid"/>
-          </a:ln>
-        </p:spPr>
-        <p:txBody>
-          <a:bodyPr/>
-          <a:lstStyle/>
-          <a:p>
-            <a:endParaRPr lang="en-US"/>
-          </a:p>
-        </p:txBody>
-      </p:sp>
-      <p:sp>
-        <p:nvSpPr>
-          <p:cNvPr id="19" name="commit-dot-2">
-            <a:extLst>
-              <a:ext uri="{FF2B5EF4-FFF2-40B4-BE49-F238E27FC236}">
-                <a16:creationId xmlns:a16="http://schemas.microsoft.com/office/drawing/2014/main" id="{26E097A4-E4F4-4956-A6E5-9CAB5BC027D5}"/>
-              </a:ext>
-            </a:extLst>
-          </p:cNvPr>
-          <p:cNvSpPr>
-            <a:spLocks noGrp="1"/>
-          </p:cNvSpPr>
-          <p:nvPr/>
-        </p:nvSpPr>
-        <p:spPr>
-          <a:xfrm>
-            <a:off x="5019675" y="3324225"/>
-            <a:ext cx="114300" cy="114300"/>
-          </a:xfrm>
-          <a:prstGeom prst="ellipse">
-            <a:avLst/>
-          </a:prstGeom>
-          <a:solidFill>
-            <a:srgbClr val="000000"/>
-          </a:solidFill>
-          <a:ln w="0">
-            <a:solidFill>
-              <a:srgbClr val="000000"/>
-            </a:solidFill>
-            <a:prstDash val="solid"/>
-          </a:ln>
-        </p:spPr>
-        <p:txBody>
-          <a:bodyPr/>
-          <a:lstStyle/>
-          <a:p>
-            <a:endParaRPr lang="en-US"/>
-          </a:p>
-        </p:txBody>
-      </p:sp>
-      <p:pic>
-        <p:nvPicPr>
-          <p:cNvPr id="45" name="Picture 44"/>
-          <p:cNvPicPr>
-            <a:picLocks noChangeAspect="1"/>
-          </p:cNvPicPr>
-          <p:nvPr/>
-        </p:nvPicPr>
-        <p:blipFill>
-          <a:blip r:embed="rId5"/>
-          <a:stretch/>
-        </p:blipFill>
-        <p:spPr>
-          <a:xfrm>
-            <a:off x="6929438" y="2190750"/>
-            <a:ext cx="1095375" cy="1095375"/>
-          </a:xfrm>
-          <a:prstGeom prst="rect">
-            <a:avLst/>
-          </a:prstGeom>
-        </p:spPr>
-      </p:pic>
-      <p:pic>
-        <p:nvPicPr>
-          <p:cNvPr id="46" name="Picture 45"/>
-          <p:cNvPicPr>
-            <a:picLocks noChangeAspect="1"/>
-          </p:cNvPicPr>
-          <p:nvPr/>
-        </p:nvPicPr>
-        <p:blipFill>
-          <a:blip r:embed="rId6"/>
-          <a:stretch/>
-        </p:blipFill>
-        <p:spPr>
-          <a:xfrm>
-            <a:off x="9382125" y="2238375"/>
-            <a:ext cx="876300" cy="876300"/>
-          </a:xfrm>
-          <a:prstGeom prst="rect">
-            <a:avLst/>
-          </a:prstGeom>
-        </p:spPr>
-      </p:pic>
-      <p:pic>
-        <p:nvPicPr>
-          <p:cNvPr id="47" name="Picture 46"/>
-          <p:cNvPicPr>
-            <a:picLocks noChangeAspect="1"/>
-          </p:cNvPicPr>
-          <p:nvPr/>
-        </p:nvPicPr>
-        <p:blipFill>
-          <a:blip r:embed="rId7"/>
-          <a:stretch/>
-        </p:blipFill>
-        <p:spPr>
-          <a:xfrm>
-            <a:off x="10334625" y="2238375"/>
-            <a:ext cx="876300" cy="876300"/>
-          </a:xfrm>
-          <a:prstGeom prst="rect">
-            <a:avLst/>
-          </a:prstGeom>
-        </p:spPr>
-      </p:pic>
-      <p:sp>
-        <p:nvSpPr>
-          <p:cNvPr id="23" name="gitband">
-            <a:extLst>
-              <a:ext uri="{FF2B5EF4-FFF2-40B4-BE49-F238E27FC236}">
-                <a16:creationId xmlns:a16="http://schemas.microsoft.com/office/drawing/2014/main" id="{08DFEE6B-A097-4ECE-8CB7-6D6ACA296464}"/>
-              </a:ext>
-            </a:extLst>
-          </p:cNvPr>
-          <p:cNvSpPr>
-            <a:spLocks noGrp="1"/>
-          </p:cNvSpPr>
-          <p:nvPr/>
-        </p:nvSpPr>
-        <p:spPr>
-          <a:xfrm>
-            <a:off x="1381125" y="5219700"/>
-            <a:ext cx="9429750" cy="914400"/>
-          </a:xfrm>
-          <a:prstGeom prst="roundRect">
-            <a:avLst>
-              <a:gd name="adj" fmla="val 8333"/>
-            </a:avLst>
-          </a:prstGeom>
-          <a:solidFill>
-            <a:srgbClr val="EAF2F8"/>
-          </a:solidFill>
-          <a:ln w="9525">
-            <a:solidFill>
-              <a:srgbClr val="C9DDEA"/>
-            </a:solidFill>
-            <a:prstDash val="solid"/>
-          </a:ln>
-        </p:spPr>
-        <p:txBody>
-          <a:bodyPr/>
-          <a:lstStyle/>
-          <a:p>
-            <a:endParaRPr lang="en-US"/>
-          </a:p>
-        </p:txBody>
-      </p:sp>
-      <p:sp>
-        <p:nvSpPr>
-          <p:cNvPr id="24" name="gitbandh">
-            <a:extLst>
-              <a:ext uri="{FF2B5EF4-FFF2-40B4-BE49-F238E27FC236}">
-                <a16:creationId xmlns:a16="http://schemas.microsoft.com/office/drawing/2014/main" id="{400B9181-067C-4FA0-ACC0-C2133B2128C1}"/>
-              </a:ext>
-            </a:extLst>
-          </p:cNvPr>
-          <p:cNvSpPr>
-            <a:spLocks noGrp="1"/>
-          </p:cNvSpPr>
-          <p:nvPr/>
-        </p:nvSpPr>
-        <p:spPr>
-          <a:xfrm>
-            <a:off x="1809750" y="5391150"/>
-            <a:ext cx="8572500" cy="323850"/>
-          </a:xfrm>
-          <a:prstGeom prst="rect">
-            <a:avLst/>
-          </a:prstGeom>
-          <a:noFill/>
-          <a:ln w="0">
-            <a:noFill/>
-            <a:prstDash val="solid"/>
-          </a:ln>
-        </p:spPr>
-        <p:txBody>
-          <a:bodyPr/>
-          <a:lstStyle/>
-          <a:p>
-            <a:pPr algn="ctr">
-              <a:defRPr sz="1800" b="1">
-                <a:solidFill>
-                  <a:srgbClr val="1F4E79"/>
-                </a:solidFill>
-              </a:defRPr>
-            </a:pPr>
-            <a:r>
-              <a:rPr sz="2400" b="1" dirty="0">
-                <a:solidFill>
-                  <a:srgbClr val="1F4E79"/>
-                </a:solidFill>
-              </a:rPr>
-              <a:t>The repository becomes the record of collaboration</a:t>
-            </a:r>
-          </a:p>
-        </p:txBody>
-      </p:sp>
-      <p:sp>
-        <p:nvSpPr>
-          <p:cNvPr id="25" name="gitbandb">
-            <a:extLst>
-              <a:ext uri="{FF2B5EF4-FFF2-40B4-BE49-F238E27FC236}">
-                <a16:creationId xmlns:a16="http://schemas.microsoft.com/office/drawing/2014/main" id="{FA0E5640-74BD-4800-8CE7-3122CC206B65}"/>
-              </a:ext>
-            </a:extLst>
-          </p:cNvPr>
-          <p:cNvSpPr>
-            <a:spLocks noGrp="1"/>
-          </p:cNvSpPr>
-          <p:nvPr/>
-        </p:nvSpPr>
-        <p:spPr>
-          <a:xfrm>
-            <a:off x="1809750" y="5781675"/>
-            <a:ext cx="8572500" cy="266700"/>
-          </a:xfrm>
-          <a:prstGeom prst="rect">
-            <a:avLst/>
-          </a:prstGeom>
-          <a:noFill/>
-          <a:ln w="0">
-            <a:noFill/>
-            <a:prstDash val="solid"/>
-          </a:ln>
-        </p:spPr>
-        <p:txBody>
-          <a:bodyPr/>
-          <a:lstStyle/>
-          <a:p>
-            <a:pPr algn="ctr">
-              <a:defRPr sz="1500">
-                <a:solidFill>
-                  <a:srgbClr val="000000"/>
-                </a:solidFill>
-              </a:defRPr>
-            </a:pPr>
-            <a:r>
-              <a:rPr sz="2000" dirty="0">
-                <a:solidFill>
-                  <a:srgbClr val="000000"/>
-                </a:solidFill>
-              </a:rPr>
-              <a:t>Issues, commits, PRs, reviews, and merges show how the team worked.</a:t>
-            </a:r>
-          </a:p>
-        </p:txBody>
-      </p:sp>
-    </p:spTree>
-    <p:extLst>
-      <p:ext uri="{BB962C8B-B14F-4D97-AF65-F5344CB8AC3E}">
-        <p14:creationId xmlns:p14="http://schemas.microsoft.com/office/powerpoint/2010/main" val="1612546867"/>
-      </p:ext>
-    </p:extLst>
-  </p:cSld>
-  <p:clrMapOvr>
-    <a:masterClrMapping/>
-  </p:clrMapOvr>
-</p:sld>
-</file>
-
 <file path=ppt/slides/slide16.xml><?xml version="1.0" encoding="utf-8"?>
 <p:sld xmlns:a="http://schemas.openxmlformats.org/drawingml/2006/main" xmlns:r="http://schemas.openxmlformats.org/officeDocument/2006/relationships" xmlns:p="http://schemas.openxmlformats.org/presentationml/2006/main">
   <p:cSld>
@@ -14634,10 +15728,10 @@
       </p:grpSpPr>
       <p:sp>
         <p:nvSpPr>
-          <p:cNvPr id="17" name="title">
-            <a:extLst>
-              <a:ext uri="{FF2B5EF4-FFF2-40B4-BE49-F238E27FC236}">
-                <a16:creationId xmlns:a16="http://schemas.microsoft.com/office/drawing/2014/main" id="{C45C5D28-FD4F-4306-A3A4-034F2DBE95A2}"/>
+          <p:cNvPr id="26" name="title">
+            <a:extLst>
+              <a:ext uri="{FF2B5EF4-FFF2-40B4-BE49-F238E27FC236}">
+                <a16:creationId xmlns:a16="http://schemas.microsoft.com/office/drawing/2014/main" id="{CAC8877D-8692-4B39-AF09-82B4AD9D3650}"/>
               </a:ext>
             </a:extLst>
           </p:cNvPr>
@@ -14677,7 +15771,7 @@
                   <a:srgbClr val="1F4E79"/>
                 </a:solidFill>
               </a:rPr>
-              <a:t>Testing and CI: Three Questions Before We Merge</a:t>
+              <a:t>Git and GitHub: A Shared Path from Task to Merge</a:t>
             </a:r>
           </a:p>
         </p:txBody>
@@ -14687,7 +15781,7 @@
           <p:cNvPr id="2" name="subtitle">
             <a:extLst>
               <a:ext uri="{FF2B5EF4-FFF2-40B4-BE49-F238E27FC236}">
-                <a16:creationId xmlns:a16="http://schemas.microsoft.com/office/drawing/2014/main" id="{76D65660-756B-4F06-A4BD-D692F8C6810D}"/>
+                <a16:creationId xmlns:a16="http://schemas.microsoft.com/office/drawing/2014/main" id="{5A00E2FB-A5AC-445C-AC53-7E56D3C8F46E}"/>
               </a:ext>
             </a:extLst>
           </p:cNvPr>
@@ -14727,29 +15821,29 @@
                   <a:srgbClr val="000000"/>
                 </a:solidFill>
               </a:rPr>
-              <a:t>Each practice provides a different kind of evidence.</a:t>
-            </a:r>
-          </a:p>
-        </p:txBody>
-      </p:sp>
-      <p:sp>
-        <p:nvSpPr>
-          <p:cNvPr id="3" name="rh0">
-            <a:extLst>
-              <a:ext uri="{FF2B5EF4-FFF2-40B4-BE49-F238E27FC236}">
-                <a16:creationId xmlns:a16="http://schemas.microsoft.com/office/drawing/2014/main" id="{F84C7E52-A68A-4A4F-81EE-25834AF003AD}"/>
-              </a:ext>
-            </a:extLst>
-          </p:cNvPr>
-          <p:cNvSpPr>
-            <a:spLocks noGrp="1"/>
-          </p:cNvSpPr>
-          <p:nvPr/>
-        </p:nvSpPr>
-        <p:spPr>
-          <a:xfrm>
-            <a:off x="2381250" y="1790700"/>
-            <a:ext cx="2857500" cy="381000"/>
+              <a:t>The workflow makes ownership, progress, and review visible.</a:t>
+            </a:r>
+          </a:p>
+        </p:txBody>
+      </p:sp>
+      <p:sp>
+        <p:nvSpPr>
+          <p:cNvPr id="3" name="gh0">
+            <a:extLst>
+              <a:ext uri="{FF2B5EF4-FFF2-40B4-BE49-F238E27FC236}">
+                <a16:creationId xmlns:a16="http://schemas.microsoft.com/office/drawing/2014/main" id="{6D1A8C43-639F-420C-98B3-51C18CF87D39}"/>
+              </a:ext>
+            </a:extLst>
+          </p:cNvPr>
+          <p:cNvSpPr>
+            <a:spLocks noGrp="1"/>
+          </p:cNvSpPr>
+          <p:nvPr/>
+        </p:nvSpPr>
+        <p:spPr>
+          <a:xfrm>
+            <a:off x="666750" y="1666875"/>
+            <a:ext cx="2667000" cy="400050"/>
           </a:xfrm>
           <a:prstGeom prst="rect">
             <a:avLst/>
@@ -14764,7 +15858,7 @@
           <a:bodyPr/>
           <a:lstStyle/>
           <a:p>
-            <a:pPr>
+            <a:pPr algn="ctr">
               <a:defRPr sz="1800" b="1">
                 <a:solidFill>
                   <a:srgbClr val="1F4E79"/>
@@ -14772,34 +15866,34 @@
               </a:defRPr>
             </a:pPr>
             <a:r>
-              <a:rPr sz="2200" b="1" dirty="0">
+              <a:rPr sz="2000" b="1" dirty="0">
                 <a:solidFill>
                   <a:srgbClr val="1F4E79"/>
                 </a:solidFill>
               </a:rPr>
-              <a:t>DOES IT WORK?</a:t>
-            </a:r>
-          </a:p>
-        </p:txBody>
-      </p:sp>
-      <p:sp>
-        <p:nvSpPr>
-          <p:cNvPr id="4" name="rb0">
-            <a:extLst>
-              <a:ext uri="{FF2B5EF4-FFF2-40B4-BE49-F238E27FC236}">
-                <a16:creationId xmlns:a16="http://schemas.microsoft.com/office/drawing/2014/main" id="{82EE8CA5-FD2F-4988-A10F-A6D9D1780C0F}"/>
-              </a:ext>
-            </a:extLst>
-          </p:cNvPr>
-          <p:cNvSpPr>
-            <a:spLocks noGrp="1"/>
-          </p:cNvSpPr>
-          <p:nvPr/>
-        </p:nvSpPr>
-        <p:spPr>
-          <a:xfrm>
-            <a:off x="5286375" y="1790700"/>
-            <a:ext cx="5619750" cy="552450"/>
+              <a:t>ISSUE</a:t>
+            </a:r>
+          </a:p>
+        </p:txBody>
+      </p:sp>
+      <p:sp>
+        <p:nvSpPr>
+          <p:cNvPr id="4" name="gb0">
+            <a:extLst>
+              <a:ext uri="{FF2B5EF4-FFF2-40B4-BE49-F238E27FC236}">
+                <a16:creationId xmlns:a16="http://schemas.microsoft.com/office/drawing/2014/main" id="{08D06220-FD81-4197-86CE-63040B656171}"/>
+              </a:ext>
+            </a:extLst>
+          </p:cNvPr>
+          <p:cNvSpPr>
+            <a:spLocks noGrp="1"/>
+          </p:cNvSpPr>
+          <p:nvPr/>
+        </p:nvSpPr>
+        <p:spPr>
+          <a:xfrm>
+            <a:off x="809625" y="3743325"/>
+            <a:ext cx="2381250" cy="647700"/>
           </a:xfrm>
           <a:prstGeom prst="rect">
             <a:avLst/>
@@ -14814,7 +15908,7 @@
           <a:bodyPr/>
           <a:lstStyle/>
           <a:p>
-            <a:pPr>
+            <a:pPr algn="ctr">
               <a:defRPr sz="1500">
                 <a:solidFill>
                   <a:srgbClr val="000000"/>
@@ -14827,69 +15921,46 @@
                   <a:srgbClr val="000000"/>
                 </a:solidFill>
               </a:rPr>
-              <a:t>Write tests for expected behavior and important edge cases.</a:t>
-            </a:r>
-          </a:p>
-        </p:txBody>
-      </p:sp>
-      <p:sp>
-        <p:nvSpPr>
-          <p:cNvPr id="5" name="sep0">
-            <a:extLst>
-              <a:ext uri="{FF2B5EF4-FFF2-40B4-BE49-F238E27FC236}">
-                <a16:creationId xmlns:a16="http://schemas.microsoft.com/office/drawing/2014/main" id="{100DED03-F279-4037-B936-289DD4D2CB4A}"/>
-              </a:ext>
-            </a:extLst>
-          </p:cNvPr>
-          <p:cNvSpPr>
-            <a:spLocks noGrp="1"/>
-          </p:cNvSpPr>
-          <p:nvPr/>
-        </p:nvSpPr>
-        <p:spPr>
-          <a:xfrm>
-            <a:off x="2381250" y="2581275"/>
-            <a:ext cx="8524875" cy="19050"/>
-          </a:xfrm>
-          <a:prstGeom prst="rect">
-            <a:avLst/>
-          </a:prstGeom>
-          <a:solidFill>
-            <a:srgbClr val="D9E2E8"/>
-          </a:solidFill>
-          <a:ln w="0">
-            <a:solidFill>
-              <a:srgbClr val="D9E2E8"/>
-            </a:solidFill>
-            <a:prstDash val="solid"/>
-          </a:ln>
-        </p:spPr>
-        <p:txBody>
-          <a:bodyPr/>
-          <a:lstStyle/>
-          <a:p>
-            <a:endParaRPr lang="en-US"/>
-          </a:p>
-        </p:txBody>
-      </p:sp>
-      <p:sp>
-        <p:nvSpPr>
-          <p:cNvPr id="6" name="rh1">
-            <a:extLst>
-              <a:ext uri="{FF2B5EF4-FFF2-40B4-BE49-F238E27FC236}">
-                <a16:creationId xmlns:a16="http://schemas.microsoft.com/office/drawing/2014/main" id="{79D07BAA-5E90-4FE0-A7DA-AB0E5A77DDEF}"/>
-              </a:ext>
-            </a:extLst>
-          </p:cNvPr>
-          <p:cNvSpPr>
-            <a:spLocks noGrp="1"/>
-          </p:cNvSpPr>
-          <p:nvPr/>
-        </p:nvSpPr>
-        <p:spPr>
-          <a:xfrm>
-            <a:off x="2381250" y="2933700"/>
-            <a:ext cx="2857500" cy="381000"/>
+              <a:t>Agree on the task</a:t>
+            </a:r>
+          </a:p>
+          <a:p>
+            <a:pPr algn="ctr">
+              <a:defRPr sz="1500">
+                <a:solidFill>
+                  <a:srgbClr val="000000"/>
+                </a:solidFill>
+              </a:defRPr>
+            </a:pPr>
+            <a:r>
+              <a:rPr sz="2000" dirty="0">
+                <a:solidFill>
+                  <a:srgbClr val="000000"/>
+                </a:solidFill>
+              </a:rPr>
+              <a:t>and ownership</a:t>
+            </a:r>
+          </a:p>
+        </p:txBody>
+      </p:sp>
+      <p:sp>
+        <p:nvSpPr>
+          <p:cNvPr id="5" name="arrow0">
+            <a:extLst>
+              <a:ext uri="{FF2B5EF4-FFF2-40B4-BE49-F238E27FC236}">
+                <a16:creationId xmlns:a16="http://schemas.microsoft.com/office/drawing/2014/main" id="{968E19D2-CB37-4E32-ADBA-23EBDF635F6A}"/>
+              </a:ext>
+            </a:extLst>
+          </p:cNvPr>
+          <p:cNvSpPr>
+            <a:spLocks noGrp="1"/>
+          </p:cNvSpPr>
+          <p:nvPr/>
+        </p:nvSpPr>
+        <p:spPr>
+          <a:xfrm>
+            <a:off x="3238500" y="2714625"/>
+            <a:ext cx="381000" cy="419100"/>
           </a:xfrm>
           <a:prstGeom prst="rect">
             <a:avLst/>
@@ -14904,42 +15975,42 @@
           <a:bodyPr/>
           <a:lstStyle/>
           <a:p>
-            <a:pPr>
-              <a:defRPr sz="1800" b="1">
-                <a:solidFill>
-                  <a:srgbClr val="008C95"/>
+            <a:pPr algn="ctr">
+              <a:defRPr sz="2100" b="1">
+                <a:solidFill>
+                  <a:srgbClr val="D9E2E8"/>
                 </a:solidFill>
               </a:defRPr>
             </a:pPr>
             <a:r>
-              <a:rPr sz="2200" b="1" dirty="0">
-                <a:solidFill>
-                  <a:srgbClr val="008C95"/>
+              <a:rPr sz="2100" b="1">
+                <a:solidFill>
+                  <a:srgbClr val="D9E2E8"/>
                 </a:solidFill>
               </a:rPr>
-              <a:t>WHAT IS UNTESTED?</a:t>
-            </a:r>
-          </a:p>
-        </p:txBody>
-      </p:sp>
-      <p:sp>
-        <p:nvSpPr>
-          <p:cNvPr id="7" name="rb1">
-            <a:extLst>
-              <a:ext uri="{FF2B5EF4-FFF2-40B4-BE49-F238E27FC236}">
-                <a16:creationId xmlns:a16="http://schemas.microsoft.com/office/drawing/2014/main" id="{D4C56E0B-733E-488C-8F87-FD7C136D7B90}"/>
-              </a:ext>
-            </a:extLst>
-          </p:cNvPr>
-          <p:cNvSpPr>
-            <a:spLocks noGrp="1"/>
-          </p:cNvSpPr>
-          <p:nvPr/>
-        </p:nvSpPr>
-        <p:spPr>
-          <a:xfrm>
-            <a:off x="5286375" y="2933700"/>
-            <a:ext cx="5619750" cy="552450"/>
+              <a:t>→</a:t>
+            </a:r>
+          </a:p>
+        </p:txBody>
+      </p:sp>
+      <p:sp>
+        <p:nvSpPr>
+          <p:cNvPr id="6" name="gh1">
+            <a:extLst>
+              <a:ext uri="{FF2B5EF4-FFF2-40B4-BE49-F238E27FC236}">
+                <a16:creationId xmlns:a16="http://schemas.microsoft.com/office/drawing/2014/main" id="{AC024BB6-9893-4A38-AC6F-D403CC79963F}"/>
+              </a:ext>
+            </a:extLst>
+          </p:cNvPr>
+          <p:cNvSpPr>
+            <a:spLocks noGrp="1"/>
+          </p:cNvSpPr>
+          <p:nvPr/>
+        </p:nvSpPr>
+        <p:spPr>
+          <a:xfrm>
+            <a:off x="3333750" y="1666875"/>
+            <a:ext cx="2667000" cy="400050"/>
           </a:xfrm>
           <a:prstGeom prst="rect">
             <a:avLst/>
@@ -14954,82 +16025,42 @@
           <a:bodyPr/>
           <a:lstStyle/>
           <a:p>
-            <a:pPr>
-              <a:defRPr sz="1500">
-                <a:solidFill>
-                  <a:srgbClr val="000000"/>
+            <a:pPr algn="ctr">
+              <a:defRPr sz="1800" b="1">
+                <a:solidFill>
+                  <a:srgbClr val="008C95"/>
                 </a:solidFill>
               </a:defRPr>
             </a:pPr>
             <a:r>
-              <a:rPr sz="2000" dirty="0">
-                <a:solidFill>
-                  <a:srgbClr val="000000"/>
+              <a:rPr sz="2000" b="1" dirty="0">
+                <a:solidFill>
+                  <a:srgbClr val="008C95"/>
                 </a:solidFill>
               </a:rPr>
-              <a:t>Use coverage to find important code the tests do not exercise.</a:t>
-            </a:r>
-          </a:p>
-        </p:txBody>
-      </p:sp>
-      <p:sp>
-        <p:nvSpPr>
-          <p:cNvPr id="8" name="sep1">
-            <a:extLst>
-              <a:ext uri="{FF2B5EF4-FFF2-40B4-BE49-F238E27FC236}">
-                <a16:creationId xmlns:a16="http://schemas.microsoft.com/office/drawing/2014/main" id="{9970290D-2C2B-47EE-8378-A01CCEF3ABA0}"/>
-              </a:ext>
-            </a:extLst>
-          </p:cNvPr>
-          <p:cNvSpPr>
-            <a:spLocks noGrp="1"/>
-          </p:cNvSpPr>
-          <p:nvPr/>
-        </p:nvSpPr>
-        <p:spPr>
-          <a:xfrm>
-            <a:off x="2381250" y="3724275"/>
-            <a:ext cx="8524875" cy="19050"/>
-          </a:xfrm>
-          <a:prstGeom prst="rect">
-            <a:avLst/>
-          </a:prstGeom>
-          <a:solidFill>
-            <a:srgbClr val="D9E2E8"/>
-          </a:solidFill>
-          <a:ln w="0">
-            <a:solidFill>
-              <a:srgbClr val="D9E2E8"/>
-            </a:solidFill>
-            <a:prstDash val="solid"/>
-          </a:ln>
-        </p:spPr>
-        <p:txBody>
-          <a:bodyPr/>
-          <a:lstStyle/>
-          <a:p>
-            <a:endParaRPr lang="en-US"/>
-          </a:p>
-        </p:txBody>
-      </p:sp>
-      <p:sp>
-        <p:nvSpPr>
-          <p:cNvPr id="9" name="rh2">
-            <a:extLst>
-              <a:ext uri="{FF2B5EF4-FFF2-40B4-BE49-F238E27FC236}">
-                <a16:creationId xmlns:a16="http://schemas.microsoft.com/office/drawing/2014/main" id="{7739F007-52B9-4D4B-B495-98FE21331850}"/>
-              </a:ext>
-            </a:extLst>
-          </p:cNvPr>
-          <p:cNvSpPr>
-            <a:spLocks noGrp="1"/>
-          </p:cNvSpPr>
-          <p:nvPr/>
-        </p:nvSpPr>
-        <p:spPr>
-          <a:xfrm>
-            <a:off x="2381250" y="4076700"/>
-            <a:ext cx="2857500" cy="381000"/>
+              <a:t>BRANCH + COMMITS</a:t>
+            </a:r>
+          </a:p>
+        </p:txBody>
+      </p:sp>
+      <p:sp>
+        <p:nvSpPr>
+          <p:cNvPr id="7" name="gb1">
+            <a:extLst>
+              <a:ext uri="{FF2B5EF4-FFF2-40B4-BE49-F238E27FC236}">
+                <a16:creationId xmlns:a16="http://schemas.microsoft.com/office/drawing/2014/main" id="{F385DECF-1B0F-4206-B9E0-AE1FBADAA088}"/>
+              </a:ext>
+            </a:extLst>
+          </p:cNvPr>
+          <p:cNvSpPr>
+            <a:spLocks noGrp="1"/>
+          </p:cNvSpPr>
+          <p:nvPr/>
+        </p:nvSpPr>
+        <p:spPr>
+          <a:xfrm>
+            <a:off x="3476625" y="3743325"/>
+            <a:ext cx="2381250" cy="647700"/>
           </a:xfrm>
           <a:prstGeom prst="rect">
             <a:avLst/>
@@ -15044,42 +16075,59 @@
           <a:bodyPr/>
           <a:lstStyle/>
           <a:p>
-            <a:pPr>
-              <a:defRPr sz="1800" b="1">
-                <a:solidFill>
-                  <a:srgbClr val="1F4E79"/>
+            <a:pPr algn="ctr">
+              <a:defRPr sz="1500">
+                <a:solidFill>
+                  <a:srgbClr val="000000"/>
                 </a:solidFill>
               </a:defRPr>
             </a:pPr>
             <a:r>
-              <a:rPr sz="2200" b="1" dirty="0">
-                <a:solidFill>
-                  <a:srgbClr val="1F4E79"/>
+              <a:rPr sz="2000" dirty="0">
+                <a:solidFill>
+                  <a:srgbClr val="000000"/>
                 </a:solidFill>
               </a:rPr>
-              <a:t>WILL IT STAY CHECKED?</a:t>
-            </a:r>
-          </a:p>
-        </p:txBody>
-      </p:sp>
-      <p:sp>
-        <p:nvSpPr>
-          <p:cNvPr id="10" name="rb2">
-            <a:extLst>
-              <a:ext uri="{FF2B5EF4-FFF2-40B4-BE49-F238E27FC236}">
-                <a16:creationId xmlns:a16="http://schemas.microsoft.com/office/drawing/2014/main" id="{2598A10D-4012-4808-8BBF-ED3DDF4AAA35}"/>
-              </a:ext>
-            </a:extLst>
-          </p:cNvPr>
-          <p:cNvSpPr>
-            <a:spLocks noGrp="1"/>
-          </p:cNvSpPr>
-          <p:nvPr/>
-        </p:nvSpPr>
-        <p:spPr>
-          <a:xfrm>
-            <a:off x="5286375" y="4076700"/>
-            <a:ext cx="5619750" cy="552450"/>
+              <a:t>Develop a focused</a:t>
+            </a:r>
+          </a:p>
+          <a:p>
+            <a:pPr algn="ctr">
+              <a:defRPr sz="1500">
+                <a:solidFill>
+                  <a:srgbClr val="000000"/>
+                </a:solidFill>
+              </a:defRPr>
+            </a:pPr>
+            <a:r>
+              <a:rPr sz="2000" dirty="0">
+                <a:solidFill>
+                  <a:srgbClr val="000000"/>
+                </a:solidFill>
+              </a:rPr>
+              <a:t>change</a:t>
+            </a:r>
+          </a:p>
+        </p:txBody>
+      </p:sp>
+      <p:sp>
+        <p:nvSpPr>
+          <p:cNvPr id="8" name="arrow1">
+            <a:extLst>
+              <a:ext uri="{FF2B5EF4-FFF2-40B4-BE49-F238E27FC236}">
+                <a16:creationId xmlns:a16="http://schemas.microsoft.com/office/drawing/2014/main" id="{48B0A54F-D6A8-4A90-9B99-19ABCBBEF5B7}"/>
+              </a:ext>
+            </a:extLst>
+          </p:cNvPr>
+          <p:cNvSpPr>
+            <a:spLocks noGrp="1"/>
+          </p:cNvSpPr>
+          <p:nvPr/>
+        </p:nvSpPr>
+        <p:spPr>
+          <a:xfrm>
+            <a:off x="5905500" y="2714625"/>
+            <a:ext cx="381000" cy="419100"/>
           </a:xfrm>
           <a:prstGeom prst="rect">
             <a:avLst/>
@@ -15094,27 +16142,311 @@
           <a:bodyPr/>
           <a:lstStyle/>
           <a:p>
-            <a:pPr>
-              <a:defRPr sz="1500">
-                <a:solidFill>
-                  <a:srgbClr val="000000"/>
+            <a:pPr algn="ctr">
+              <a:defRPr sz="2100" b="1">
+                <a:solidFill>
+                  <a:srgbClr val="D9E2E8"/>
                 </a:solidFill>
               </a:defRPr>
             </a:pPr>
             <a:r>
+              <a:rPr sz="2100" b="1">
+                <a:solidFill>
+                  <a:srgbClr val="D9E2E8"/>
+                </a:solidFill>
+              </a:rPr>
+              <a:t>→</a:t>
+            </a:r>
+          </a:p>
+        </p:txBody>
+      </p:sp>
+      <p:sp>
+        <p:nvSpPr>
+          <p:cNvPr id="9" name="gh2">
+            <a:extLst>
+              <a:ext uri="{FF2B5EF4-FFF2-40B4-BE49-F238E27FC236}">
+                <a16:creationId xmlns:a16="http://schemas.microsoft.com/office/drawing/2014/main" id="{C8B1C6A3-59AB-4378-A85C-DA70AC887DE4}"/>
+              </a:ext>
+            </a:extLst>
+          </p:cNvPr>
+          <p:cNvSpPr>
+            <a:spLocks noGrp="1"/>
+          </p:cNvSpPr>
+          <p:nvPr/>
+        </p:nvSpPr>
+        <p:spPr>
+          <a:xfrm>
+            <a:off x="6191250" y="1666875"/>
+            <a:ext cx="2667000" cy="400050"/>
+          </a:xfrm>
+          <a:prstGeom prst="rect">
+            <a:avLst/>
+          </a:prstGeom>
+          <a:noFill/>
+          <a:ln w="0">
+            <a:noFill/>
+            <a:prstDash val="solid"/>
+          </a:ln>
+        </p:spPr>
+        <p:txBody>
+          <a:bodyPr/>
+          <a:lstStyle/>
+          <a:p>
+            <a:pPr algn="ctr">
+              <a:defRPr sz="1800" b="1">
+                <a:solidFill>
+                  <a:srgbClr val="1F4E79"/>
+                </a:solidFill>
+              </a:defRPr>
+            </a:pPr>
+            <a:r>
+              <a:rPr sz="2000" b="1" dirty="0">
+                <a:solidFill>
+                  <a:srgbClr val="1F4E79"/>
+                </a:solidFill>
+              </a:rPr>
+              <a:t>PULL REQUEST</a:t>
+            </a:r>
+          </a:p>
+        </p:txBody>
+      </p:sp>
+      <p:sp>
+        <p:nvSpPr>
+          <p:cNvPr id="10" name="gb2">
+            <a:extLst>
+              <a:ext uri="{FF2B5EF4-FFF2-40B4-BE49-F238E27FC236}">
+                <a16:creationId xmlns:a16="http://schemas.microsoft.com/office/drawing/2014/main" id="{978A1F63-0861-4A63-985E-154D95A56819}"/>
+              </a:ext>
+            </a:extLst>
+          </p:cNvPr>
+          <p:cNvSpPr>
+            <a:spLocks noGrp="1"/>
+          </p:cNvSpPr>
+          <p:nvPr/>
+        </p:nvSpPr>
+        <p:spPr>
+          <a:xfrm>
+            <a:off x="6334125" y="3743325"/>
+            <a:ext cx="2381250" cy="647700"/>
+          </a:xfrm>
+          <a:prstGeom prst="rect">
+            <a:avLst/>
+          </a:prstGeom>
+          <a:noFill/>
+          <a:ln w="0">
+            <a:noFill/>
+            <a:prstDash val="solid"/>
+          </a:ln>
+        </p:spPr>
+        <p:txBody>
+          <a:bodyPr/>
+          <a:lstStyle/>
+          <a:p>
+            <a:pPr algn="ctr">
+              <a:defRPr sz="1500">
+                <a:solidFill>
+                  <a:srgbClr val="000000"/>
+                </a:solidFill>
+              </a:defRPr>
+            </a:pPr>
+            <a:r>
               <a:rPr sz="2000" dirty="0">
                 <a:solidFill>
                   <a:srgbClr val="000000"/>
                 </a:solidFill>
               </a:rPr>
-              <a:t>Use CI to run tests and quality checks on every pull request.</a:t>
+              <a:t>Explain the change</a:t>
+            </a:r>
+          </a:p>
+          <a:p>
+            <a:pPr algn="ctr">
+              <a:defRPr sz="1500">
+                <a:solidFill>
+                  <a:srgbClr val="000000"/>
+                </a:solidFill>
+              </a:defRPr>
+            </a:pPr>
+            <a:r>
+              <a:rPr sz="2000" dirty="0">
+                <a:solidFill>
+                  <a:srgbClr val="000000"/>
+                </a:solidFill>
+              </a:rPr>
+              <a:t>and request review</a:t>
+            </a:r>
+          </a:p>
+        </p:txBody>
+      </p:sp>
+      <p:sp>
+        <p:nvSpPr>
+          <p:cNvPr id="11" name="arrow2">
+            <a:extLst>
+              <a:ext uri="{FF2B5EF4-FFF2-40B4-BE49-F238E27FC236}">
+                <a16:creationId xmlns:a16="http://schemas.microsoft.com/office/drawing/2014/main" id="{9BB9FA6A-C079-47E5-BBB1-3160CE1AAC76}"/>
+              </a:ext>
+            </a:extLst>
+          </p:cNvPr>
+          <p:cNvSpPr>
+            <a:spLocks noGrp="1"/>
+          </p:cNvSpPr>
+          <p:nvPr/>
+        </p:nvSpPr>
+        <p:spPr>
+          <a:xfrm>
+            <a:off x="8763000" y="2714625"/>
+            <a:ext cx="381000" cy="419100"/>
+          </a:xfrm>
+          <a:prstGeom prst="rect">
+            <a:avLst/>
+          </a:prstGeom>
+          <a:noFill/>
+          <a:ln w="0">
+            <a:noFill/>
+            <a:prstDash val="solid"/>
+          </a:ln>
+        </p:spPr>
+        <p:txBody>
+          <a:bodyPr/>
+          <a:lstStyle/>
+          <a:p>
+            <a:pPr algn="ctr">
+              <a:defRPr sz="2100" b="1">
+                <a:solidFill>
+                  <a:srgbClr val="D9E2E8"/>
+                </a:solidFill>
+              </a:defRPr>
+            </a:pPr>
+            <a:r>
+              <a:rPr sz="2100" b="1">
+                <a:solidFill>
+                  <a:srgbClr val="D9E2E8"/>
+                </a:solidFill>
+              </a:rPr>
+              <a:t>→</a:t>
+            </a:r>
+          </a:p>
+        </p:txBody>
+      </p:sp>
+      <p:sp>
+        <p:nvSpPr>
+          <p:cNvPr id="12" name="gh3">
+            <a:extLst>
+              <a:ext uri="{FF2B5EF4-FFF2-40B4-BE49-F238E27FC236}">
+                <a16:creationId xmlns:a16="http://schemas.microsoft.com/office/drawing/2014/main" id="{64272012-AABD-46D0-9B42-2D9599BA1CD6}"/>
+              </a:ext>
+            </a:extLst>
+          </p:cNvPr>
+          <p:cNvSpPr>
+            <a:spLocks noGrp="1"/>
+          </p:cNvSpPr>
+          <p:nvPr/>
+        </p:nvSpPr>
+        <p:spPr>
+          <a:xfrm>
+            <a:off x="8953500" y="1666875"/>
+            <a:ext cx="2667000" cy="400050"/>
+          </a:xfrm>
+          <a:prstGeom prst="rect">
+            <a:avLst/>
+          </a:prstGeom>
+          <a:noFill/>
+          <a:ln w="0">
+            <a:noFill/>
+            <a:prstDash val="solid"/>
+          </a:ln>
+        </p:spPr>
+        <p:txBody>
+          <a:bodyPr/>
+          <a:lstStyle/>
+          <a:p>
+            <a:pPr algn="ctr">
+              <a:defRPr sz="1800" b="1">
+                <a:solidFill>
+                  <a:srgbClr val="008C95"/>
+                </a:solidFill>
+              </a:defRPr>
+            </a:pPr>
+            <a:r>
+              <a:rPr sz="2000" b="1" dirty="0">
+                <a:solidFill>
+                  <a:srgbClr val="008C95"/>
+                </a:solidFill>
+              </a:rPr>
+              <a:t>REVIEW + MERGE</a:t>
+            </a:r>
+          </a:p>
+        </p:txBody>
+      </p:sp>
+      <p:sp>
+        <p:nvSpPr>
+          <p:cNvPr id="13" name="gb3">
+            <a:extLst>
+              <a:ext uri="{FF2B5EF4-FFF2-40B4-BE49-F238E27FC236}">
+                <a16:creationId xmlns:a16="http://schemas.microsoft.com/office/drawing/2014/main" id="{5ED1EE1C-295E-448E-A714-841772606EB3}"/>
+              </a:ext>
+            </a:extLst>
+          </p:cNvPr>
+          <p:cNvSpPr>
+            <a:spLocks noGrp="1"/>
+          </p:cNvSpPr>
+          <p:nvPr/>
+        </p:nvSpPr>
+        <p:spPr>
+          <a:xfrm>
+            <a:off x="9096375" y="3743325"/>
+            <a:ext cx="2381250" cy="647700"/>
+          </a:xfrm>
+          <a:prstGeom prst="rect">
+            <a:avLst/>
+          </a:prstGeom>
+          <a:noFill/>
+          <a:ln w="0">
+            <a:noFill/>
+            <a:prstDash val="solid"/>
+          </a:ln>
+        </p:spPr>
+        <p:txBody>
+          <a:bodyPr/>
+          <a:lstStyle/>
+          <a:p>
+            <a:pPr algn="ctr">
+              <a:defRPr sz="1500">
+                <a:solidFill>
+                  <a:srgbClr val="000000"/>
+                </a:solidFill>
+              </a:defRPr>
+            </a:pPr>
+            <a:r>
+              <a:rPr sz="2000" dirty="0">
+                <a:solidFill>
+                  <a:srgbClr val="000000"/>
+                </a:solidFill>
+              </a:rPr>
+              <a:t>Improve it before</a:t>
+            </a:r>
+          </a:p>
+          <a:p>
+            <a:pPr algn="ctr">
+              <a:defRPr sz="1500">
+                <a:solidFill>
+                  <a:srgbClr val="000000"/>
+                </a:solidFill>
+              </a:defRPr>
+            </a:pPr>
+            <a:r>
+              <a:rPr sz="2000" dirty="0">
+                <a:solidFill>
+                  <a:srgbClr val="000000"/>
+                </a:solidFill>
+              </a:rPr>
+              <a:t>it reaches main</a:t>
             </a:r>
           </a:p>
         </p:txBody>
       </p:sp>
       <p:pic>
         <p:nvPicPr>
-          <p:cNvPr id="27" name="Picture 26"/>
+          <p:cNvPr id="39" name="Picture 38"/>
           <p:cNvPicPr>
             <a:picLocks noChangeAspect="1"/>
           </p:cNvPicPr>
@@ -15126,8 +16458,8 @@
         </p:blipFill>
         <p:spPr>
           <a:xfrm>
-            <a:off x="1095375" y="1736217"/>
-            <a:ext cx="876300" cy="718566"/>
+            <a:off x="1381125" y="2385810"/>
+            <a:ext cx="1143000" cy="705255"/>
           </a:xfrm>
           <a:prstGeom prst="rect">
             <a:avLst/>
@@ -15136,7 +16468,7 @@
       </p:pic>
       <p:pic>
         <p:nvPicPr>
-          <p:cNvPr id="28" name="Picture 27"/>
+          <p:cNvPr id="40" name="Picture 39"/>
           <p:cNvPicPr>
             <a:picLocks noChangeAspect="1"/>
           </p:cNvPicPr>
@@ -15148,17 +16480,175 @@
         </p:blipFill>
         <p:spPr>
           <a:xfrm>
-            <a:off x="1104900" y="2828925"/>
-            <a:ext cx="857250" cy="857250"/>
+            <a:off x="4183784" y="2190750"/>
+            <a:ext cx="1062182" cy="1095375"/>
           </a:xfrm>
           <a:prstGeom prst="rect">
             <a:avLst/>
           </a:prstGeom>
         </p:spPr>
       </p:pic>
+      <p:sp>
+        <p:nvSpPr>
+          <p:cNvPr id="16" name="commit-line">
+            <a:extLst>
+              <a:ext uri="{FF2B5EF4-FFF2-40B4-BE49-F238E27FC236}">
+                <a16:creationId xmlns:a16="http://schemas.microsoft.com/office/drawing/2014/main" id="{D0E352E8-FE3E-4179-9E73-CBA36EE64DAB}"/>
+              </a:ext>
+            </a:extLst>
+          </p:cNvPr>
+          <p:cNvSpPr>
+            <a:spLocks noGrp="1"/>
+          </p:cNvSpPr>
+          <p:nvPr/>
+        </p:nvSpPr>
+        <p:spPr>
+          <a:xfrm>
+            <a:off x="4362450" y="3381375"/>
+            <a:ext cx="714375" cy="0"/>
+          </a:xfrm>
+          <a:prstGeom prst="line">
+            <a:avLst/>
+          </a:prstGeom>
+          <a:noFill/>
+          <a:ln w="19050">
+            <a:solidFill>
+              <a:srgbClr val="000000"/>
+            </a:solidFill>
+            <a:prstDash val="solid"/>
+          </a:ln>
+        </p:spPr>
+        <p:txBody>
+          <a:bodyPr/>
+          <a:lstStyle/>
+          <a:p>
+            <a:endParaRPr lang="en-US"/>
+          </a:p>
+        </p:txBody>
+      </p:sp>
+      <p:sp>
+        <p:nvSpPr>
+          <p:cNvPr id="17" name="commit-dot-0">
+            <a:extLst>
+              <a:ext uri="{FF2B5EF4-FFF2-40B4-BE49-F238E27FC236}">
+                <a16:creationId xmlns:a16="http://schemas.microsoft.com/office/drawing/2014/main" id="{B89BCABF-8A3B-421E-807E-BF4201004D2F}"/>
+              </a:ext>
+            </a:extLst>
+          </p:cNvPr>
+          <p:cNvSpPr>
+            <a:spLocks noGrp="1"/>
+          </p:cNvSpPr>
+          <p:nvPr/>
+        </p:nvSpPr>
+        <p:spPr>
+          <a:xfrm>
+            <a:off x="4305300" y="3324225"/>
+            <a:ext cx="114300" cy="114300"/>
+          </a:xfrm>
+          <a:prstGeom prst="ellipse">
+            <a:avLst/>
+          </a:prstGeom>
+          <a:solidFill>
+            <a:srgbClr val="000000"/>
+          </a:solidFill>
+          <a:ln w="0">
+            <a:solidFill>
+              <a:srgbClr val="000000"/>
+            </a:solidFill>
+            <a:prstDash val="solid"/>
+          </a:ln>
+        </p:spPr>
+        <p:txBody>
+          <a:bodyPr/>
+          <a:lstStyle/>
+          <a:p>
+            <a:endParaRPr lang="en-US"/>
+          </a:p>
+        </p:txBody>
+      </p:sp>
+      <p:sp>
+        <p:nvSpPr>
+          <p:cNvPr id="18" name="commit-dot-1">
+            <a:extLst>
+              <a:ext uri="{FF2B5EF4-FFF2-40B4-BE49-F238E27FC236}">
+                <a16:creationId xmlns:a16="http://schemas.microsoft.com/office/drawing/2014/main" id="{D227963A-3749-4FC1-9E3A-FC9A7FB69A1E}"/>
+              </a:ext>
+            </a:extLst>
+          </p:cNvPr>
+          <p:cNvSpPr>
+            <a:spLocks noGrp="1"/>
+          </p:cNvSpPr>
+          <p:nvPr/>
+        </p:nvSpPr>
+        <p:spPr>
+          <a:xfrm>
+            <a:off x="4657725" y="3324225"/>
+            <a:ext cx="114300" cy="114300"/>
+          </a:xfrm>
+          <a:prstGeom prst="ellipse">
+            <a:avLst/>
+          </a:prstGeom>
+          <a:solidFill>
+            <a:srgbClr val="000000"/>
+          </a:solidFill>
+          <a:ln w="0">
+            <a:solidFill>
+              <a:srgbClr val="000000"/>
+            </a:solidFill>
+            <a:prstDash val="solid"/>
+          </a:ln>
+        </p:spPr>
+        <p:txBody>
+          <a:bodyPr/>
+          <a:lstStyle/>
+          <a:p>
+            <a:endParaRPr lang="en-US"/>
+          </a:p>
+        </p:txBody>
+      </p:sp>
+      <p:sp>
+        <p:nvSpPr>
+          <p:cNvPr id="19" name="commit-dot-2">
+            <a:extLst>
+              <a:ext uri="{FF2B5EF4-FFF2-40B4-BE49-F238E27FC236}">
+                <a16:creationId xmlns:a16="http://schemas.microsoft.com/office/drawing/2014/main" id="{26E097A4-E4F4-4956-A6E5-9CAB5BC027D5}"/>
+              </a:ext>
+            </a:extLst>
+          </p:cNvPr>
+          <p:cNvSpPr>
+            <a:spLocks noGrp="1"/>
+          </p:cNvSpPr>
+          <p:nvPr/>
+        </p:nvSpPr>
+        <p:spPr>
+          <a:xfrm>
+            <a:off x="5019675" y="3324225"/>
+            <a:ext cx="114300" cy="114300"/>
+          </a:xfrm>
+          <a:prstGeom prst="ellipse">
+            <a:avLst/>
+          </a:prstGeom>
+          <a:solidFill>
+            <a:srgbClr val="000000"/>
+          </a:solidFill>
+          <a:ln w="0">
+            <a:solidFill>
+              <a:srgbClr val="000000"/>
+            </a:solidFill>
+            <a:prstDash val="solid"/>
+          </a:ln>
+        </p:spPr>
+        <p:txBody>
+          <a:bodyPr/>
+          <a:lstStyle/>
+          <a:p>
+            <a:endParaRPr lang="en-US"/>
+          </a:p>
+        </p:txBody>
+      </p:sp>
       <p:pic>
         <p:nvPicPr>
-          <p:cNvPr id="29" name="Picture 28"/>
+          <p:cNvPr id="45" name="Picture 44"/>
           <p:cNvPicPr>
             <a:picLocks noChangeAspect="1"/>
           </p:cNvPicPr>
@@ -15170,20 +16660,64 @@
         </p:blipFill>
         <p:spPr>
           <a:xfrm>
-            <a:off x="1000125" y="3970564"/>
-            <a:ext cx="1066800" cy="783771"/>
+            <a:off x="6929438" y="2190750"/>
+            <a:ext cx="1095375" cy="1095375"/>
           </a:xfrm>
           <a:prstGeom prst="rect">
             <a:avLst/>
           </a:prstGeom>
         </p:spPr>
       </p:pic>
-      <p:sp>
-        <p:nvSpPr>
-          <p:cNvPr id="14" name="testband">
-            <a:extLst>
-              <a:ext uri="{FF2B5EF4-FFF2-40B4-BE49-F238E27FC236}">
-                <a16:creationId xmlns:a16="http://schemas.microsoft.com/office/drawing/2014/main" id="{6A799A53-366A-4704-A933-BAC9317D4BC8}"/>
+      <p:pic>
+        <p:nvPicPr>
+          <p:cNvPr id="46" name="Picture 45"/>
+          <p:cNvPicPr>
+            <a:picLocks noChangeAspect="1"/>
+          </p:cNvPicPr>
+          <p:nvPr/>
+        </p:nvPicPr>
+        <p:blipFill>
+          <a:blip r:embed="rId6"/>
+          <a:stretch/>
+        </p:blipFill>
+        <p:spPr>
+          <a:xfrm>
+            <a:off x="9382125" y="2238375"/>
+            <a:ext cx="876300" cy="876300"/>
+          </a:xfrm>
+          <a:prstGeom prst="rect">
+            <a:avLst/>
+          </a:prstGeom>
+        </p:spPr>
+      </p:pic>
+      <p:pic>
+        <p:nvPicPr>
+          <p:cNvPr id="47" name="Picture 46"/>
+          <p:cNvPicPr>
+            <a:picLocks noChangeAspect="1"/>
+          </p:cNvPicPr>
+          <p:nvPr/>
+        </p:nvPicPr>
+        <p:blipFill>
+          <a:blip r:embed="rId7"/>
+          <a:stretch/>
+        </p:blipFill>
+        <p:spPr>
+          <a:xfrm>
+            <a:off x="10334625" y="2238375"/>
+            <a:ext cx="876300" cy="876300"/>
+          </a:xfrm>
+          <a:prstGeom prst="rect">
+            <a:avLst/>
+          </a:prstGeom>
+        </p:spPr>
+      </p:pic>
+      <p:sp>
+        <p:nvSpPr>
+          <p:cNvPr id="23" name="gitband">
+            <a:extLst>
+              <a:ext uri="{FF2B5EF4-FFF2-40B4-BE49-F238E27FC236}">
+                <a16:creationId xmlns:a16="http://schemas.microsoft.com/office/drawing/2014/main" id="{08DFEE6B-A097-4ECE-8CB7-6D6ACA296464}"/>
               </a:ext>
             </a:extLst>
           </p:cNvPr>
@@ -15203,11 +16737,11 @@
             </a:avLst>
           </a:prstGeom>
           <a:solidFill>
-            <a:srgbClr val="FFF2E8"/>
+            <a:srgbClr val="EAF2F8"/>
           </a:solidFill>
           <a:ln w="9525">
             <a:solidFill>
-              <a:srgbClr val="F0C7A7"/>
+              <a:srgbClr val="C9DDEA"/>
             </a:solidFill>
             <a:prstDash val="solid"/>
           </a:ln>
@@ -15222,10 +16756,10 @@
       </p:sp>
       <p:sp>
         <p:nvSpPr>
-          <p:cNvPr id="15" name="testbandh">
-            <a:extLst>
-              <a:ext uri="{FF2B5EF4-FFF2-40B4-BE49-F238E27FC236}">
-                <a16:creationId xmlns:a16="http://schemas.microsoft.com/office/drawing/2014/main" id="{F6E1AA77-15B4-4A86-86C4-DB56EDC73B9F}"/>
+          <p:cNvPr id="24" name="gitbandh">
+            <a:extLst>
+              <a:ext uri="{FF2B5EF4-FFF2-40B4-BE49-F238E27FC236}">
+                <a16:creationId xmlns:a16="http://schemas.microsoft.com/office/drawing/2014/main" id="{400B9181-067C-4FA0-ACC0-C2133B2128C1}"/>
               </a:ext>
             </a:extLst>
           </p:cNvPr>
@@ -15255,27 +16789,27 @@
             <a:pPr algn="ctr">
               <a:defRPr sz="1800" b="1">
                 <a:solidFill>
-                  <a:srgbClr val="C55A11"/>
+                  <a:srgbClr val="1F4E79"/>
                 </a:solidFill>
               </a:defRPr>
             </a:pPr>
             <a:r>
-              <a:rPr sz="1800" b="1">
-                <a:solidFill>
-                  <a:srgbClr val="C55A11"/>
+              <a:rPr sz="2400" b="1" dirty="0">
+                <a:solidFill>
+                  <a:srgbClr val="1F4E79"/>
                 </a:solidFill>
               </a:rPr>
-              <a:t>A green pipeline supports review</a:t>
-            </a:r>
-          </a:p>
-        </p:txBody>
-      </p:sp>
-      <p:sp>
-        <p:nvSpPr>
-          <p:cNvPr id="16" name="testbandb">
-            <a:extLst>
-              <a:ext uri="{FF2B5EF4-FFF2-40B4-BE49-F238E27FC236}">
-                <a16:creationId xmlns:a16="http://schemas.microsoft.com/office/drawing/2014/main" id="{28774AE0-E7FF-455E-BA9B-08EE5C5D706F}"/>
+              <a:t>The repository becomes the record of collaboration</a:t>
+            </a:r>
+          </a:p>
+        </p:txBody>
+      </p:sp>
+      <p:sp>
+        <p:nvSpPr>
+          <p:cNvPr id="25" name="gitbandb">
+            <a:extLst>
+              <a:ext uri="{FF2B5EF4-FFF2-40B4-BE49-F238E27FC236}">
+                <a16:creationId xmlns:a16="http://schemas.microsoft.com/office/drawing/2014/main" id="{FA0E5640-74BD-4800-8CE7-3122CC206B65}"/>
               </a:ext>
             </a:extLst>
           </p:cNvPr>
@@ -15310,12 +16844,12 @@
               </a:defRPr>
             </a:pPr>
             <a:r>
-              <a:rPr sz="1500">
+              <a:rPr sz="2000" dirty="0">
                 <a:solidFill>
                   <a:srgbClr val="000000"/>
                 </a:solidFill>
               </a:rPr>
-              <a:t>It provides fast feedback, but it does not replace thoughtful review.</a:t>
+              <a:t>Issues, commits, PRs, reviews, and merges show how the team worked.</a:t>
             </a:r>
           </a:p>
         </p:txBody>
@@ -15323,13 +16857,802 @@
     </p:spTree>
     <p:extLst>
       <p:ext uri="{BB962C8B-B14F-4D97-AF65-F5344CB8AC3E}">
-        <p14:creationId xmlns:p14="http://schemas.microsoft.com/office/powerpoint/2010/main" val="1231033312"/>
+        <p14:creationId xmlns:p14="http://schemas.microsoft.com/office/powerpoint/2010/main" val="1612546867"/>
       </p:ext>
     </p:extLst>
   </p:cSld>
   <p:clrMapOvr>
     <a:masterClrMapping/>
   </p:clrMapOvr>
+  <p:timing>
+    <p:tnLst>
+      <p:par>
+        <p:cTn id="1" dur="indefinite" restart="never" nodeType="tmRoot">
+          <p:childTnLst>
+            <p:seq concurrent="1" nextAc="seek">
+              <p:cTn id="2" dur="indefinite" nodeType="mainSeq">
+                <p:childTnLst>
+                  <p:par>
+                    <p:cTn id="3" fill="hold">
+                      <p:stCondLst>
+                        <p:cond delay="indefinite"/>
+                      </p:stCondLst>
+                      <p:childTnLst>
+                        <p:par>
+                          <p:cTn id="4" fill="hold">
+                            <p:stCondLst>
+                              <p:cond delay="0"/>
+                            </p:stCondLst>
+                            <p:childTnLst>
+                              <p:par>
+                                <p:cTn id="5" presetID="1" presetClass="entr" presetSubtype="0" fill="hold" grpId="0" nodeType="clickEffect">
+                                  <p:stCondLst>
+                                    <p:cond delay="0"/>
+                                  </p:stCondLst>
+                                  <p:childTnLst>
+                                    <p:set>
+                                      <p:cBhvr>
+                                        <p:cTn id="6" dur="1" fill="hold">
+                                          <p:stCondLst>
+                                            <p:cond delay="0"/>
+                                          </p:stCondLst>
+                                        </p:cTn>
+                                        <p:tgtEl>
+                                          <p:spTgt spid="3"/>
+                                        </p:tgtEl>
+                                        <p:attrNameLst>
+                                          <p:attrName>style.visibility</p:attrName>
+                                        </p:attrNameLst>
+                                      </p:cBhvr>
+                                      <p:to>
+                                        <p:strVal val="visible"/>
+                                      </p:to>
+                                    </p:set>
+                                  </p:childTnLst>
+                                </p:cTn>
+                              </p:par>
+                              <p:par>
+                                <p:cTn id="7" presetID="1" presetClass="entr" presetSubtype="0" fill="hold" grpId="0" nodeType="withEffect">
+                                  <p:stCondLst>
+                                    <p:cond delay="0"/>
+                                  </p:stCondLst>
+                                  <p:childTnLst>
+                                    <p:set>
+                                      <p:cBhvr>
+                                        <p:cTn id="8" dur="1" fill="hold">
+                                          <p:stCondLst>
+                                            <p:cond delay="0"/>
+                                          </p:stCondLst>
+                                        </p:cTn>
+                                        <p:tgtEl>
+                                          <p:spTgt spid="4"/>
+                                        </p:tgtEl>
+                                        <p:attrNameLst>
+                                          <p:attrName>style.visibility</p:attrName>
+                                        </p:attrNameLst>
+                                      </p:cBhvr>
+                                      <p:to>
+                                        <p:strVal val="visible"/>
+                                      </p:to>
+                                    </p:set>
+                                  </p:childTnLst>
+                                </p:cTn>
+                              </p:par>
+                              <p:par>
+                                <p:cTn id="9" presetID="1" presetClass="entr" presetSubtype="0" fill="hold" nodeType="withEffect">
+                                  <p:stCondLst>
+                                    <p:cond delay="0"/>
+                                  </p:stCondLst>
+                                  <p:childTnLst>
+                                    <p:set>
+                                      <p:cBhvr>
+                                        <p:cTn id="10" dur="1" fill="hold">
+                                          <p:stCondLst>
+                                            <p:cond delay="0"/>
+                                          </p:stCondLst>
+                                        </p:cTn>
+                                        <p:tgtEl>
+                                          <p:spTgt spid="39"/>
+                                        </p:tgtEl>
+                                        <p:attrNameLst>
+                                          <p:attrName>style.visibility</p:attrName>
+                                        </p:attrNameLst>
+                                      </p:cBhvr>
+                                      <p:to>
+                                        <p:strVal val="visible"/>
+                                      </p:to>
+                                    </p:set>
+                                  </p:childTnLst>
+                                </p:cTn>
+                              </p:par>
+                            </p:childTnLst>
+                          </p:cTn>
+                        </p:par>
+                      </p:childTnLst>
+                    </p:cTn>
+                  </p:par>
+                  <p:par>
+                    <p:cTn id="11" fill="hold">
+                      <p:stCondLst>
+                        <p:cond delay="indefinite"/>
+                      </p:stCondLst>
+                      <p:childTnLst>
+                        <p:par>
+                          <p:cTn id="12" fill="hold">
+                            <p:stCondLst>
+                              <p:cond delay="0"/>
+                            </p:stCondLst>
+                            <p:childTnLst>
+                              <p:par>
+                                <p:cTn id="13" presetID="1" presetClass="entr" presetSubtype="0" fill="hold" grpId="0" nodeType="clickEffect">
+                                  <p:stCondLst>
+                                    <p:cond delay="0"/>
+                                  </p:stCondLst>
+                                  <p:childTnLst>
+                                    <p:set>
+                                      <p:cBhvr>
+                                        <p:cTn id="14" dur="1" fill="hold">
+                                          <p:stCondLst>
+                                            <p:cond delay="0"/>
+                                          </p:stCondLst>
+                                        </p:cTn>
+                                        <p:tgtEl>
+                                          <p:spTgt spid="5"/>
+                                        </p:tgtEl>
+                                        <p:attrNameLst>
+                                          <p:attrName>style.visibility</p:attrName>
+                                        </p:attrNameLst>
+                                      </p:cBhvr>
+                                      <p:to>
+                                        <p:strVal val="visible"/>
+                                      </p:to>
+                                    </p:set>
+                                  </p:childTnLst>
+                                </p:cTn>
+                              </p:par>
+                              <p:par>
+                                <p:cTn id="15" presetID="1" presetClass="entr" presetSubtype="0" fill="hold" grpId="0" nodeType="withEffect">
+                                  <p:stCondLst>
+                                    <p:cond delay="0"/>
+                                  </p:stCondLst>
+                                  <p:childTnLst>
+                                    <p:set>
+                                      <p:cBhvr>
+                                        <p:cTn id="16" dur="1" fill="hold">
+                                          <p:stCondLst>
+                                            <p:cond delay="0"/>
+                                          </p:stCondLst>
+                                        </p:cTn>
+                                        <p:tgtEl>
+                                          <p:spTgt spid="6"/>
+                                        </p:tgtEl>
+                                        <p:attrNameLst>
+                                          <p:attrName>style.visibility</p:attrName>
+                                        </p:attrNameLst>
+                                      </p:cBhvr>
+                                      <p:to>
+                                        <p:strVal val="visible"/>
+                                      </p:to>
+                                    </p:set>
+                                  </p:childTnLst>
+                                </p:cTn>
+                              </p:par>
+                              <p:par>
+                                <p:cTn id="17" presetID="1" presetClass="entr" presetSubtype="0" fill="hold" grpId="0" nodeType="withEffect">
+                                  <p:stCondLst>
+                                    <p:cond delay="0"/>
+                                  </p:stCondLst>
+                                  <p:childTnLst>
+                                    <p:set>
+                                      <p:cBhvr>
+                                        <p:cTn id="18" dur="1" fill="hold">
+                                          <p:stCondLst>
+                                            <p:cond delay="0"/>
+                                          </p:stCondLst>
+                                        </p:cTn>
+                                        <p:tgtEl>
+                                          <p:spTgt spid="7"/>
+                                        </p:tgtEl>
+                                        <p:attrNameLst>
+                                          <p:attrName>style.visibility</p:attrName>
+                                        </p:attrNameLst>
+                                      </p:cBhvr>
+                                      <p:to>
+                                        <p:strVal val="visible"/>
+                                      </p:to>
+                                    </p:set>
+                                  </p:childTnLst>
+                                </p:cTn>
+                              </p:par>
+                              <p:par>
+                                <p:cTn id="19" presetID="1" presetClass="entr" presetSubtype="0" fill="hold" grpId="0" nodeType="withEffect">
+                                  <p:stCondLst>
+                                    <p:cond delay="0"/>
+                                  </p:stCondLst>
+                                  <p:childTnLst>
+                                    <p:set>
+                                      <p:cBhvr>
+                                        <p:cTn id="20" dur="1" fill="hold">
+                                          <p:stCondLst>
+                                            <p:cond delay="0"/>
+                                          </p:stCondLst>
+                                        </p:cTn>
+                                        <p:tgtEl>
+                                          <p:spTgt spid="8"/>
+                                        </p:tgtEl>
+                                        <p:attrNameLst>
+                                          <p:attrName>style.visibility</p:attrName>
+                                        </p:attrNameLst>
+                                      </p:cBhvr>
+                                      <p:to>
+                                        <p:strVal val="visible"/>
+                                      </p:to>
+                                    </p:set>
+                                  </p:childTnLst>
+                                </p:cTn>
+                              </p:par>
+                              <p:par>
+                                <p:cTn id="21" presetID="1" presetClass="entr" presetSubtype="0" fill="hold" nodeType="withEffect">
+                                  <p:stCondLst>
+                                    <p:cond delay="0"/>
+                                  </p:stCondLst>
+                                  <p:childTnLst>
+                                    <p:set>
+                                      <p:cBhvr>
+                                        <p:cTn id="22" dur="1" fill="hold">
+                                          <p:stCondLst>
+                                            <p:cond delay="0"/>
+                                          </p:stCondLst>
+                                        </p:cTn>
+                                        <p:tgtEl>
+                                          <p:spTgt spid="40"/>
+                                        </p:tgtEl>
+                                        <p:attrNameLst>
+                                          <p:attrName>style.visibility</p:attrName>
+                                        </p:attrNameLst>
+                                      </p:cBhvr>
+                                      <p:to>
+                                        <p:strVal val="visible"/>
+                                      </p:to>
+                                    </p:set>
+                                  </p:childTnLst>
+                                </p:cTn>
+                              </p:par>
+                              <p:par>
+                                <p:cTn id="23" presetID="1" presetClass="entr" presetSubtype="0" fill="hold" grpId="0" nodeType="withEffect">
+                                  <p:stCondLst>
+                                    <p:cond delay="0"/>
+                                  </p:stCondLst>
+                                  <p:childTnLst>
+                                    <p:set>
+                                      <p:cBhvr>
+                                        <p:cTn id="24" dur="1" fill="hold">
+                                          <p:stCondLst>
+                                            <p:cond delay="0"/>
+                                          </p:stCondLst>
+                                        </p:cTn>
+                                        <p:tgtEl>
+                                          <p:spTgt spid="16"/>
+                                        </p:tgtEl>
+                                        <p:attrNameLst>
+                                          <p:attrName>style.visibility</p:attrName>
+                                        </p:attrNameLst>
+                                      </p:cBhvr>
+                                      <p:to>
+                                        <p:strVal val="visible"/>
+                                      </p:to>
+                                    </p:set>
+                                  </p:childTnLst>
+                                </p:cTn>
+                              </p:par>
+                              <p:par>
+                                <p:cTn id="25" presetID="1" presetClass="entr" presetSubtype="0" fill="hold" grpId="0" nodeType="withEffect">
+                                  <p:stCondLst>
+                                    <p:cond delay="0"/>
+                                  </p:stCondLst>
+                                  <p:childTnLst>
+                                    <p:set>
+                                      <p:cBhvr>
+                                        <p:cTn id="26" dur="1" fill="hold">
+                                          <p:stCondLst>
+                                            <p:cond delay="0"/>
+                                          </p:stCondLst>
+                                        </p:cTn>
+                                        <p:tgtEl>
+                                          <p:spTgt spid="17"/>
+                                        </p:tgtEl>
+                                        <p:attrNameLst>
+                                          <p:attrName>style.visibility</p:attrName>
+                                        </p:attrNameLst>
+                                      </p:cBhvr>
+                                      <p:to>
+                                        <p:strVal val="visible"/>
+                                      </p:to>
+                                    </p:set>
+                                  </p:childTnLst>
+                                </p:cTn>
+                              </p:par>
+                              <p:par>
+                                <p:cTn id="27" presetID="1" presetClass="entr" presetSubtype="0" fill="hold" grpId="0" nodeType="withEffect">
+                                  <p:stCondLst>
+                                    <p:cond delay="0"/>
+                                  </p:stCondLst>
+                                  <p:childTnLst>
+                                    <p:set>
+                                      <p:cBhvr>
+                                        <p:cTn id="28" dur="1" fill="hold">
+                                          <p:stCondLst>
+                                            <p:cond delay="0"/>
+                                          </p:stCondLst>
+                                        </p:cTn>
+                                        <p:tgtEl>
+                                          <p:spTgt spid="18"/>
+                                        </p:tgtEl>
+                                        <p:attrNameLst>
+                                          <p:attrName>style.visibility</p:attrName>
+                                        </p:attrNameLst>
+                                      </p:cBhvr>
+                                      <p:to>
+                                        <p:strVal val="visible"/>
+                                      </p:to>
+                                    </p:set>
+                                  </p:childTnLst>
+                                </p:cTn>
+                              </p:par>
+                              <p:par>
+                                <p:cTn id="29" presetID="1" presetClass="entr" presetSubtype="0" fill="hold" grpId="0" nodeType="withEffect">
+                                  <p:stCondLst>
+                                    <p:cond delay="0"/>
+                                  </p:stCondLst>
+                                  <p:childTnLst>
+                                    <p:set>
+                                      <p:cBhvr>
+                                        <p:cTn id="30" dur="1" fill="hold">
+                                          <p:stCondLst>
+                                            <p:cond delay="0"/>
+                                          </p:stCondLst>
+                                        </p:cTn>
+                                        <p:tgtEl>
+                                          <p:spTgt spid="19"/>
+                                        </p:tgtEl>
+                                        <p:attrNameLst>
+                                          <p:attrName>style.visibility</p:attrName>
+                                        </p:attrNameLst>
+                                      </p:cBhvr>
+                                      <p:to>
+                                        <p:strVal val="visible"/>
+                                      </p:to>
+                                    </p:set>
+                                  </p:childTnLst>
+                                </p:cTn>
+                              </p:par>
+                            </p:childTnLst>
+                          </p:cTn>
+                        </p:par>
+                      </p:childTnLst>
+                    </p:cTn>
+                  </p:par>
+                  <p:par>
+                    <p:cTn id="31" fill="hold">
+                      <p:stCondLst>
+                        <p:cond delay="indefinite"/>
+                      </p:stCondLst>
+                      <p:childTnLst>
+                        <p:par>
+                          <p:cTn id="32" fill="hold">
+                            <p:stCondLst>
+                              <p:cond delay="0"/>
+                            </p:stCondLst>
+                            <p:childTnLst>
+                              <p:par>
+                                <p:cTn id="33" presetID="1" presetClass="entr" presetSubtype="0" fill="hold" grpId="0" nodeType="clickEffect">
+                                  <p:stCondLst>
+                                    <p:cond delay="0"/>
+                                  </p:stCondLst>
+                                  <p:childTnLst>
+                                    <p:set>
+                                      <p:cBhvr>
+                                        <p:cTn id="34" dur="1" fill="hold">
+                                          <p:stCondLst>
+                                            <p:cond delay="0"/>
+                                          </p:stCondLst>
+                                        </p:cTn>
+                                        <p:tgtEl>
+                                          <p:spTgt spid="9"/>
+                                        </p:tgtEl>
+                                        <p:attrNameLst>
+                                          <p:attrName>style.visibility</p:attrName>
+                                        </p:attrNameLst>
+                                      </p:cBhvr>
+                                      <p:to>
+                                        <p:strVal val="visible"/>
+                                      </p:to>
+                                    </p:set>
+                                  </p:childTnLst>
+                                </p:cTn>
+                              </p:par>
+                              <p:par>
+                                <p:cTn id="35" presetID="1" presetClass="entr" presetSubtype="0" fill="hold" grpId="0" nodeType="withEffect">
+                                  <p:stCondLst>
+                                    <p:cond delay="0"/>
+                                  </p:stCondLst>
+                                  <p:childTnLst>
+                                    <p:set>
+                                      <p:cBhvr>
+                                        <p:cTn id="36" dur="1" fill="hold">
+                                          <p:stCondLst>
+                                            <p:cond delay="0"/>
+                                          </p:stCondLst>
+                                        </p:cTn>
+                                        <p:tgtEl>
+                                          <p:spTgt spid="10"/>
+                                        </p:tgtEl>
+                                        <p:attrNameLst>
+                                          <p:attrName>style.visibility</p:attrName>
+                                        </p:attrNameLst>
+                                      </p:cBhvr>
+                                      <p:to>
+                                        <p:strVal val="visible"/>
+                                      </p:to>
+                                    </p:set>
+                                  </p:childTnLst>
+                                </p:cTn>
+                              </p:par>
+                              <p:par>
+                                <p:cTn id="37" presetID="1" presetClass="entr" presetSubtype="0" fill="hold" grpId="0" nodeType="withEffect">
+                                  <p:stCondLst>
+                                    <p:cond delay="0"/>
+                                  </p:stCondLst>
+                                  <p:childTnLst>
+                                    <p:set>
+                                      <p:cBhvr>
+                                        <p:cTn id="38" dur="1" fill="hold">
+                                          <p:stCondLst>
+                                            <p:cond delay="0"/>
+                                          </p:stCondLst>
+                                        </p:cTn>
+                                        <p:tgtEl>
+                                          <p:spTgt spid="11"/>
+                                        </p:tgtEl>
+                                        <p:attrNameLst>
+                                          <p:attrName>style.visibility</p:attrName>
+                                        </p:attrNameLst>
+                                      </p:cBhvr>
+                                      <p:to>
+                                        <p:strVal val="visible"/>
+                                      </p:to>
+                                    </p:set>
+                                  </p:childTnLst>
+                                </p:cTn>
+                              </p:par>
+                              <p:par>
+                                <p:cTn id="39" presetID="1" presetClass="entr" presetSubtype="0" fill="hold" nodeType="withEffect">
+                                  <p:stCondLst>
+                                    <p:cond delay="0"/>
+                                  </p:stCondLst>
+                                  <p:childTnLst>
+                                    <p:set>
+                                      <p:cBhvr>
+                                        <p:cTn id="40" dur="1" fill="hold">
+                                          <p:stCondLst>
+                                            <p:cond delay="0"/>
+                                          </p:stCondLst>
+                                        </p:cTn>
+                                        <p:tgtEl>
+                                          <p:spTgt spid="45"/>
+                                        </p:tgtEl>
+                                        <p:attrNameLst>
+                                          <p:attrName>style.visibility</p:attrName>
+                                        </p:attrNameLst>
+                                      </p:cBhvr>
+                                      <p:to>
+                                        <p:strVal val="visible"/>
+                                      </p:to>
+                                    </p:set>
+                                  </p:childTnLst>
+                                </p:cTn>
+                              </p:par>
+                            </p:childTnLst>
+                          </p:cTn>
+                        </p:par>
+                      </p:childTnLst>
+                    </p:cTn>
+                  </p:par>
+                  <p:par>
+                    <p:cTn id="41" fill="hold">
+                      <p:stCondLst>
+                        <p:cond delay="indefinite"/>
+                      </p:stCondLst>
+                      <p:childTnLst>
+                        <p:par>
+                          <p:cTn id="42" fill="hold">
+                            <p:stCondLst>
+                              <p:cond delay="0"/>
+                            </p:stCondLst>
+                            <p:childTnLst>
+                              <p:par>
+                                <p:cTn id="43" presetID="1" presetClass="entr" presetSubtype="0" fill="hold" grpId="1" nodeType="clickEffect">
+                                  <p:stCondLst>
+                                    <p:cond delay="0"/>
+                                  </p:stCondLst>
+                                  <p:childTnLst>
+                                    <p:set>
+                                      <p:cBhvr>
+                                        <p:cTn id="44" dur="1" fill="hold">
+                                          <p:stCondLst>
+                                            <p:cond delay="0"/>
+                                          </p:stCondLst>
+                                        </p:cTn>
+                                        <p:tgtEl>
+                                          <p:spTgt spid="11"/>
+                                        </p:tgtEl>
+                                        <p:attrNameLst>
+                                          <p:attrName>style.visibility</p:attrName>
+                                        </p:attrNameLst>
+                                      </p:cBhvr>
+                                      <p:to>
+                                        <p:strVal val="visible"/>
+                                      </p:to>
+                                    </p:set>
+                                  </p:childTnLst>
+                                </p:cTn>
+                              </p:par>
+                              <p:par>
+                                <p:cTn id="45" presetID="1" presetClass="entr" presetSubtype="0" fill="hold" grpId="0" nodeType="withEffect">
+                                  <p:stCondLst>
+                                    <p:cond delay="0"/>
+                                  </p:stCondLst>
+                                  <p:childTnLst>
+                                    <p:set>
+                                      <p:cBhvr>
+                                        <p:cTn id="46" dur="1" fill="hold">
+                                          <p:stCondLst>
+                                            <p:cond delay="0"/>
+                                          </p:stCondLst>
+                                        </p:cTn>
+                                        <p:tgtEl>
+                                          <p:spTgt spid="12"/>
+                                        </p:tgtEl>
+                                        <p:attrNameLst>
+                                          <p:attrName>style.visibility</p:attrName>
+                                        </p:attrNameLst>
+                                      </p:cBhvr>
+                                      <p:to>
+                                        <p:strVal val="visible"/>
+                                      </p:to>
+                                    </p:set>
+                                  </p:childTnLst>
+                                </p:cTn>
+                              </p:par>
+                              <p:par>
+                                <p:cTn id="47" presetID="1" presetClass="entr" presetSubtype="0" fill="hold" grpId="0" nodeType="withEffect">
+                                  <p:stCondLst>
+                                    <p:cond delay="0"/>
+                                  </p:stCondLst>
+                                  <p:childTnLst>
+                                    <p:set>
+                                      <p:cBhvr>
+                                        <p:cTn id="48" dur="1" fill="hold">
+                                          <p:stCondLst>
+                                            <p:cond delay="0"/>
+                                          </p:stCondLst>
+                                        </p:cTn>
+                                        <p:tgtEl>
+                                          <p:spTgt spid="13"/>
+                                        </p:tgtEl>
+                                        <p:attrNameLst>
+                                          <p:attrName>style.visibility</p:attrName>
+                                        </p:attrNameLst>
+                                      </p:cBhvr>
+                                      <p:to>
+                                        <p:strVal val="visible"/>
+                                      </p:to>
+                                    </p:set>
+                                  </p:childTnLst>
+                                </p:cTn>
+                              </p:par>
+                              <p:par>
+                                <p:cTn id="49" presetID="1" presetClass="entr" presetSubtype="0" fill="hold" nodeType="withEffect">
+                                  <p:stCondLst>
+                                    <p:cond delay="0"/>
+                                  </p:stCondLst>
+                                  <p:childTnLst>
+                                    <p:set>
+                                      <p:cBhvr>
+                                        <p:cTn id="50" dur="1" fill="hold">
+                                          <p:stCondLst>
+                                            <p:cond delay="0"/>
+                                          </p:stCondLst>
+                                        </p:cTn>
+                                        <p:tgtEl>
+                                          <p:spTgt spid="46"/>
+                                        </p:tgtEl>
+                                        <p:attrNameLst>
+                                          <p:attrName>style.visibility</p:attrName>
+                                        </p:attrNameLst>
+                                      </p:cBhvr>
+                                      <p:to>
+                                        <p:strVal val="visible"/>
+                                      </p:to>
+                                    </p:set>
+                                  </p:childTnLst>
+                                </p:cTn>
+                              </p:par>
+                              <p:par>
+                                <p:cTn id="51" presetID="1" presetClass="entr" presetSubtype="0" fill="hold" nodeType="withEffect">
+                                  <p:stCondLst>
+                                    <p:cond delay="0"/>
+                                  </p:stCondLst>
+                                  <p:childTnLst>
+                                    <p:set>
+                                      <p:cBhvr>
+                                        <p:cTn id="52" dur="1" fill="hold">
+                                          <p:stCondLst>
+                                            <p:cond delay="0"/>
+                                          </p:stCondLst>
+                                        </p:cTn>
+                                        <p:tgtEl>
+                                          <p:spTgt spid="47"/>
+                                        </p:tgtEl>
+                                        <p:attrNameLst>
+                                          <p:attrName>style.visibility</p:attrName>
+                                        </p:attrNameLst>
+                                      </p:cBhvr>
+                                      <p:to>
+                                        <p:strVal val="visible"/>
+                                      </p:to>
+                                    </p:set>
+                                  </p:childTnLst>
+                                </p:cTn>
+                              </p:par>
+                            </p:childTnLst>
+                          </p:cTn>
+                        </p:par>
+                      </p:childTnLst>
+                    </p:cTn>
+                  </p:par>
+                  <p:par>
+                    <p:cTn id="53" fill="hold">
+                      <p:stCondLst>
+                        <p:cond delay="indefinite"/>
+                      </p:stCondLst>
+                      <p:childTnLst>
+                        <p:par>
+                          <p:cTn id="54" fill="hold">
+                            <p:stCondLst>
+                              <p:cond delay="0"/>
+                            </p:stCondLst>
+                            <p:childTnLst>
+                              <p:par>
+                                <p:cTn id="55" presetID="1" presetClass="entr" presetSubtype="0" fill="hold" grpId="0" nodeType="clickEffect">
+                                  <p:stCondLst>
+                                    <p:cond delay="0"/>
+                                  </p:stCondLst>
+                                  <p:childTnLst>
+                                    <p:set>
+                                      <p:cBhvr>
+                                        <p:cTn id="56" dur="1" fill="hold">
+                                          <p:stCondLst>
+                                            <p:cond delay="0"/>
+                                          </p:stCondLst>
+                                        </p:cTn>
+                                        <p:tgtEl>
+                                          <p:spTgt spid="23"/>
+                                        </p:tgtEl>
+                                        <p:attrNameLst>
+                                          <p:attrName>style.visibility</p:attrName>
+                                        </p:attrNameLst>
+                                      </p:cBhvr>
+                                      <p:to>
+                                        <p:strVal val="visible"/>
+                                      </p:to>
+                                    </p:set>
+                                  </p:childTnLst>
+                                </p:cTn>
+                              </p:par>
+                              <p:par>
+                                <p:cTn id="57" presetID="1" presetClass="entr" presetSubtype="0" fill="hold" grpId="0" nodeType="withEffect">
+                                  <p:stCondLst>
+                                    <p:cond delay="0"/>
+                                  </p:stCondLst>
+                                  <p:childTnLst>
+                                    <p:set>
+                                      <p:cBhvr>
+                                        <p:cTn id="58" dur="1" fill="hold">
+                                          <p:stCondLst>
+                                            <p:cond delay="0"/>
+                                          </p:stCondLst>
+                                        </p:cTn>
+                                        <p:tgtEl>
+                                          <p:spTgt spid="24"/>
+                                        </p:tgtEl>
+                                        <p:attrNameLst>
+                                          <p:attrName>style.visibility</p:attrName>
+                                        </p:attrNameLst>
+                                      </p:cBhvr>
+                                      <p:to>
+                                        <p:strVal val="visible"/>
+                                      </p:to>
+                                    </p:set>
+                                  </p:childTnLst>
+                                </p:cTn>
+                              </p:par>
+                              <p:par>
+                                <p:cTn id="59" presetID="1" presetClass="entr" presetSubtype="0" fill="hold" grpId="0" nodeType="withEffect">
+                                  <p:stCondLst>
+                                    <p:cond delay="0"/>
+                                  </p:stCondLst>
+                                  <p:childTnLst>
+                                    <p:set>
+                                      <p:cBhvr>
+                                        <p:cTn id="60" dur="1" fill="hold">
+                                          <p:stCondLst>
+                                            <p:cond delay="0"/>
+                                          </p:stCondLst>
+                                        </p:cTn>
+                                        <p:tgtEl>
+                                          <p:spTgt spid="25"/>
+                                        </p:tgtEl>
+                                        <p:attrNameLst>
+                                          <p:attrName>style.visibility</p:attrName>
+                                        </p:attrNameLst>
+                                      </p:cBhvr>
+                                      <p:to>
+                                        <p:strVal val="visible"/>
+                                      </p:to>
+                                    </p:set>
+                                  </p:childTnLst>
+                                </p:cTn>
+                              </p:par>
+                            </p:childTnLst>
+                          </p:cTn>
+                        </p:par>
+                      </p:childTnLst>
+                    </p:cTn>
+                  </p:par>
+                </p:childTnLst>
+              </p:cTn>
+              <p:prevCondLst>
+                <p:cond evt="onPrev" delay="0">
+                  <p:tgtEl>
+                    <p:sldTgt/>
+                  </p:tgtEl>
+                </p:cond>
+              </p:prevCondLst>
+              <p:nextCondLst>
+                <p:cond evt="onNext" delay="0">
+                  <p:tgtEl>
+                    <p:sldTgt/>
+                  </p:tgtEl>
+                </p:cond>
+              </p:nextCondLst>
+            </p:seq>
+          </p:childTnLst>
+        </p:cTn>
+      </p:par>
+    </p:tnLst>
+    <p:bldLst>
+      <p:bldP spid="3" grpId="0"/>
+      <p:bldP spid="4" grpId="0"/>
+      <p:bldP spid="5" grpId="0"/>
+      <p:bldP spid="6" grpId="0"/>
+      <p:bldP spid="7" grpId="0"/>
+      <p:bldP spid="8" grpId="0"/>
+      <p:bldP spid="9" grpId="0"/>
+      <p:bldP spid="10" grpId="0"/>
+      <p:bldP spid="11" grpId="0"/>
+      <p:bldP spid="11" grpId="1"/>
+      <p:bldP spid="12" grpId="0"/>
+      <p:bldP spid="13" grpId="0"/>
+      <p:bldP spid="16" grpId="0" animBg="1"/>
+      <p:bldP spid="17" grpId="0" animBg="1"/>
+      <p:bldP spid="18" grpId="0" animBg="1"/>
+      <p:bldP spid="19" grpId="0" animBg="1"/>
+      <p:bldP spid="23" grpId="0" animBg="1"/>
+      <p:bldP spid="24" grpId="0"/>
+      <p:bldP spid="25" grpId="0"/>
+    </p:bldLst>
+  </p:timing>
 </p:sld>
 </file>
 
@@ -15352,10 +17675,10 @@
       </p:grpSpPr>
       <p:sp>
         <p:nvSpPr>
-          <p:cNvPr id="15" name="title">
-            <a:extLst>
-              <a:ext uri="{FF2B5EF4-FFF2-40B4-BE49-F238E27FC236}">
-                <a16:creationId xmlns:a16="http://schemas.microsoft.com/office/drawing/2014/main" id="{50FDE64E-E997-417E-B04B-442D56FDF48C}"/>
+          <p:cNvPr id="17" name="title">
+            <a:extLst>
+              <a:ext uri="{FF2B5EF4-FFF2-40B4-BE49-F238E27FC236}">
+                <a16:creationId xmlns:a16="http://schemas.microsoft.com/office/drawing/2014/main" id="{C45C5D28-FD4F-4306-A3A4-034F2DBE95A2}"/>
               </a:ext>
             </a:extLst>
           </p:cNvPr>
@@ -15395,7 +17718,7 @@
                   <a:srgbClr val="1F4E79"/>
                 </a:solidFill>
               </a:rPr>
-              <a:t>Collaborative Design: Decide What the Change Affects</a:t>
+              <a:t>Testing and CI: Three Questions Before We Merge</a:t>
             </a:r>
           </a:p>
         </p:txBody>
@@ -15405,7 +17728,7 @@
           <p:cNvPr id="2" name="subtitle">
             <a:extLst>
               <a:ext uri="{FF2B5EF4-FFF2-40B4-BE49-F238E27FC236}">
-                <a16:creationId xmlns:a16="http://schemas.microsoft.com/office/drawing/2014/main" id="{68AE4DE7-9788-4FCF-AA5B-2C6F8B4A63BC}"/>
+                <a16:creationId xmlns:a16="http://schemas.microsoft.com/office/drawing/2014/main" id="{76D65660-756B-4F06-A4BD-D692F8C6810D}"/>
               </a:ext>
             </a:extLst>
           </p:cNvPr>
@@ -15445,29 +17768,129 @@
                   <a:srgbClr val="000000"/>
                 </a:solidFill>
               </a:rPr>
-              <a:t>Use only the design evidence needed to explain the contribution.</a:t>
-            </a:r>
-          </a:p>
-        </p:txBody>
-      </p:sp>
-      <p:sp>
-        <p:nvSpPr>
-          <p:cNvPr id="3" name="divider">
-            <a:extLst>
-              <a:ext uri="{FF2B5EF4-FFF2-40B4-BE49-F238E27FC236}">
-                <a16:creationId xmlns:a16="http://schemas.microsoft.com/office/drawing/2014/main" id="{8D22EDBC-57FF-446F-86F4-C035B009CF07}"/>
-              </a:ext>
-            </a:extLst>
-          </p:cNvPr>
-          <p:cNvSpPr>
-            <a:spLocks noGrp="1"/>
-          </p:cNvSpPr>
-          <p:nvPr/>
-        </p:nvSpPr>
-        <p:spPr>
-          <a:xfrm>
-            <a:off x="6096000" y="1666875"/>
-            <a:ext cx="19050" cy="3238500"/>
+              <a:t>Each practice provides a different kind of evidence.</a:t>
+            </a:r>
+          </a:p>
+        </p:txBody>
+      </p:sp>
+      <p:sp>
+        <p:nvSpPr>
+          <p:cNvPr id="3" name="rh0">
+            <a:extLst>
+              <a:ext uri="{FF2B5EF4-FFF2-40B4-BE49-F238E27FC236}">
+                <a16:creationId xmlns:a16="http://schemas.microsoft.com/office/drawing/2014/main" id="{F84C7E52-A68A-4A4F-81EE-25834AF003AD}"/>
+              </a:ext>
+            </a:extLst>
+          </p:cNvPr>
+          <p:cNvSpPr>
+            <a:spLocks noGrp="1"/>
+          </p:cNvSpPr>
+          <p:nvPr/>
+        </p:nvSpPr>
+        <p:spPr>
+          <a:xfrm>
+            <a:off x="2381250" y="1790700"/>
+            <a:ext cx="2857500" cy="381000"/>
+          </a:xfrm>
+          <a:prstGeom prst="rect">
+            <a:avLst/>
+          </a:prstGeom>
+          <a:noFill/>
+          <a:ln w="0">
+            <a:noFill/>
+            <a:prstDash val="solid"/>
+          </a:ln>
+        </p:spPr>
+        <p:txBody>
+          <a:bodyPr/>
+          <a:lstStyle/>
+          <a:p>
+            <a:pPr>
+              <a:defRPr sz="1800" b="1">
+                <a:solidFill>
+                  <a:srgbClr val="1F4E79"/>
+                </a:solidFill>
+              </a:defRPr>
+            </a:pPr>
+            <a:r>
+              <a:rPr sz="2200" b="1" dirty="0">
+                <a:solidFill>
+                  <a:srgbClr val="1F4E79"/>
+                </a:solidFill>
+              </a:rPr>
+              <a:t>DOES IT WORK?</a:t>
+            </a:r>
+          </a:p>
+        </p:txBody>
+      </p:sp>
+      <p:sp>
+        <p:nvSpPr>
+          <p:cNvPr id="4" name="rb0">
+            <a:extLst>
+              <a:ext uri="{FF2B5EF4-FFF2-40B4-BE49-F238E27FC236}">
+                <a16:creationId xmlns:a16="http://schemas.microsoft.com/office/drawing/2014/main" id="{82EE8CA5-FD2F-4988-A10F-A6D9D1780C0F}"/>
+              </a:ext>
+            </a:extLst>
+          </p:cNvPr>
+          <p:cNvSpPr>
+            <a:spLocks noGrp="1"/>
+          </p:cNvSpPr>
+          <p:nvPr/>
+        </p:nvSpPr>
+        <p:spPr>
+          <a:xfrm>
+            <a:off x="5286375" y="1790700"/>
+            <a:ext cx="5619750" cy="552450"/>
+          </a:xfrm>
+          <a:prstGeom prst="rect">
+            <a:avLst/>
+          </a:prstGeom>
+          <a:noFill/>
+          <a:ln w="0">
+            <a:noFill/>
+            <a:prstDash val="solid"/>
+          </a:ln>
+        </p:spPr>
+        <p:txBody>
+          <a:bodyPr/>
+          <a:lstStyle/>
+          <a:p>
+            <a:pPr>
+              <a:defRPr sz="1500">
+                <a:solidFill>
+                  <a:srgbClr val="000000"/>
+                </a:solidFill>
+              </a:defRPr>
+            </a:pPr>
+            <a:r>
+              <a:rPr sz="2000" dirty="0">
+                <a:solidFill>
+                  <a:srgbClr val="000000"/>
+                </a:solidFill>
+              </a:rPr>
+              <a:t>Write tests for expected behavior and important edge cases.</a:t>
+            </a:r>
+          </a:p>
+        </p:txBody>
+      </p:sp>
+      <p:sp>
+        <p:nvSpPr>
+          <p:cNvPr id="5" name="sep0">
+            <a:extLst>
+              <a:ext uri="{FF2B5EF4-FFF2-40B4-BE49-F238E27FC236}">
+                <a16:creationId xmlns:a16="http://schemas.microsoft.com/office/drawing/2014/main" id="{100DED03-F279-4037-B936-289DD4D2CB4A}"/>
+              </a:ext>
+            </a:extLst>
+          </p:cNvPr>
+          <p:cNvSpPr>
+            <a:spLocks noGrp="1"/>
+          </p:cNvSpPr>
+          <p:nvPr/>
+        </p:nvSpPr>
+        <p:spPr>
+          <a:xfrm>
+            <a:off x="2381250" y="2581275"/>
+            <a:ext cx="8524875" cy="19050"/>
           </a:xfrm>
           <a:prstGeom prst="rect">
             <a:avLst/>
@@ -15490,9 +17913,249 @@
           </a:p>
         </p:txBody>
       </p:sp>
+      <p:sp>
+        <p:nvSpPr>
+          <p:cNvPr id="6" name="rh1">
+            <a:extLst>
+              <a:ext uri="{FF2B5EF4-FFF2-40B4-BE49-F238E27FC236}">
+                <a16:creationId xmlns:a16="http://schemas.microsoft.com/office/drawing/2014/main" id="{79D07BAA-5E90-4FE0-A7DA-AB0E5A77DDEF}"/>
+              </a:ext>
+            </a:extLst>
+          </p:cNvPr>
+          <p:cNvSpPr>
+            <a:spLocks noGrp="1"/>
+          </p:cNvSpPr>
+          <p:nvPr/>
+        </p:nvSpPr>
+        <p:spPr>
+          <a:xfrm>
+            <a:off x="2381250" y="2933700"/>
+            <a:ext cx="2857500" cy="381000"/>
+          </a:xfrm>
+          <a:prstGeom prst="rect">
+            <a:avLst/>
+          </a:prstGeom>
+          <a:noFill/>
+          <a:ln w="0">
+            <a:noFill/>
+            <a:prstDash val="solid"/>
+          </a:ln>
+        </p:spPr>
+        <p:txBody>
+          <a:bodyPr/>
+          <a:lstStyle/>
+          <a:p>
+            <a:pPr>
+              <a:defRPr sz="1800" b="1">
+                <a:solidFill>
+                  <a:srgbClr val="008C95"/>
+                </a:solidFill>
+              </a:defRPr>
+            </a:pPr>
+            <a:r>
+              <a:rPr sz="2200" b="1" dirty="0">
+                <a:solidFill>
+                  <a:srgbClr val="008C95"/>
+                </a:solidFill>
+              </a:rPr>
+              <a:t>WHAT IS UNTESTED?</a:t>
+            </a:r>
+          </a:p>
+        </p:txBody>
+      </p:sp>
+      <p:sp>
+        <p:nvSpPr>
+          <p:cNvPr id="7" name="rb1">
+            <a:extLst>
+              <a:ext uri="{FF2B5EF4-FFF2-40B4-BE49-F238E27FC236}">
+                <a16:creationId xmlns:a16="http://schemas.microsoft.com/office/drawing/2014/main" id="{D4C56E0B-733E-488C-8F87-FD7C136D7B90}"/>
+              </a:ext>
+            </a:extLst>
+          </p:cNvPr>
+          <p:cNvSpPr>
+            <a:spLocks noGrp="1"/>
+          </p:cNvSpPr>
+          <p:nvPr/>
+        </p:nvSpPr>
+        <p:spPr>
+          <a:xfrm>
+            <a:off x="5286375" y="2933700"/>
+            <a:ext cx="5619750" cy="552450"/>
+          </a:xfrm>
+          <a:prstGeom prst="rect">
+            <a:avLst/>
+          </a:prstGeom>
+          <a:noFill/>
+          <a:ln w="0">
+            <a:noFill/>
+            <a:prstDash val="solid"/>
+          </a:ln>
+        </p:spPr>
+        <p:txBody>
+          <a:bodyPr/>
+          <a:lstStyle/>
+          <a:p>
+            <a:pPr>
+              <a:defRPr sz="1500">
+                <a:solidFill>
+                  <a:srgbClr val="000000"/>
+                </a:solidFill>
+              </a:defRPr>
+            </a:pPr>
+            <a:r>
+              <a:rPr sz="2000" dirty="0">
+                <a:solidFill>
+                  <a:srgbClr val="000000"/>
+                </a:solidFill>
+              </a:rPr>
+              <a:t>Use coverage to find important code the tests do not exercise.</a:t>
+            </a:r>
+          </a:p>
+        </p:txBody>
+      </p:sp>
+      <p:sp>
+        <p:nvSpPr>
+          <p:cNvPr id="8" name="sep1">
+            <a:extLst>
+              <a:ext uri="{FF2B5EF4-FFF2-40B4-BE49-F238E27FC236}">
+                <a16:creationId xmlns:a16="http://schemas.microsoft.com/office/drawing/2014/main" id="{9970290D-2C2B-47EE-8378-A01CCEF3ABA0}"/>
+              </a:ext>
+            </a:extLst>
+          </p:cNvPr>
+          <p:cNvSpPr>
+            <a:spLocks noGrp="1"/>
+          </p:cNvSpPr>
+          <p:nvPr/>
+        </p:nvSpPr>
+        <p:spPr>
+          <a:xfrm>
+            <a:off x="2381250" y="3724275"/>
+            <a:ext cx="8524875" cy="19050"/>
+          </a:xfrm>
+          <a:prstGeom prst="rect">
+            <a:avLst/>
+          </a:prstGeom>
+          <a:solidFill>
+            <a:srgbClr val="D9E2E8"/>
+          </a:solidFill>
+          <a:ln w="0">
+            <a:solidFill>
+              <a:srgbClr val="D9E2E8"/>
+            </a:solidFill>
+            <a:prstDash val="solid"/>
+          </a:ln>
+        </p:spPr>
+        <p:txBody>
+          <a:bodyPr/>
+          <a:lstStyle/>
+          <a:p>
+            <a:endParaRPr lang="en-US"/>
+          </a:p>
+        </p:txBody>
+      </p:sp>
+      <p:sp>
+        <p:nvSpPr>
+          <p:cNvPr id="9" name="rh2">
+            <a:extLst>
+              <a:ext uri="{FF2B5EF4-FFF2-40B4-BE49-F238E27FC236}">
+                <a16:creationId xmlns:a16="http://schemas.microsoft.com/office/drawing/2014/main" id="{7739F007-52B9-4D4B-B495-98FE21331850}"/>
+              </a:ext>
+            </a:extLst>
+          </p:cNvPr>
+          <p:cNvSpPr>
+            <a:spLocks noGrp="1"/>
+          </p:cNvSpPr>
+          <p:nvPr/>
+        </p:nvSpPr>
+        <p:spPr>
+          <a:xfrm>
+            <a:off x="2381250" y="4076700"/>
+            <a:ext cx="2857500" cy="381000"/>
+          </a:xfrm>
+          <a:prstGeom prst="rect">
+            <a:avLst/>
+          </a:prstGeom>
+          <a:noFill/>
+          <a:ln w="0">
+            <a:noFill/>
+            <a:prstDash val="solid"/>
+          </a:ln>
+        </p:spPr>
+        <p:txBody>
+          <a:bodyPr/>
+          <a:lstStyle/>
+          <a:p>
+            <a:pPr>
+              <a:defRPr sz="1800" b="1">
+                <a:solidFill>
+                  <a:srgbClr val="1F4E79"/>
+                </a:solidFill>
+              </a:defRPr>
+            </a:pPr>
+            <a:r>
+              <a:rPr sz="2200" b="1" dirty="0">
+                <a:solidFill>
+                  <a:srgbClr val="1F4E79"/>
+                </a:solidFill>
+              </a:rPr>
+              <a:t>WILL IT STAY CHECKED?</a:t>
+            </a:r>
+          </a:p>
+        </p:txBody>
+      </p:sp>
+      <p:sp>
+        <p:nvSpPr>
+          <p:cNvPr id="10" name="rb2">
+            <a:extLst>
+              <a:ext uri="{FF2B5EF4-FFF2-40B4-BE49-F238E27FC236}">
+                <a16:creationId xmlns:a16="http://schemas.microsoft.com/office/drawing/2014/main" id="{2598A10D-4012-4808-8BBF-ED3DDF4AAA35}"/>
+              </a:ext>
+            </a:extLst>
+          </p:cNvPr>
+          <p:cNvSpPr>
+            <a:spLocks noGrp="1"/>
+          </p:cNvSpPr>
+          <p:nvPr/>
+        </p:nvSpPr>
+        <p:spPr>
+          <a:xfrm>
+            <a:off x="5286375" y="4076700"/>
+            <a:ext cx="5619750" cy="552450"/>
+          </a:xfrm>
+          <a:prstGeom prst="rect">
+            <a:avLst/>
+          </a:prstGeom>
+          <a:noFill/>
+          <a:ln w="0">
+            <a:noFill/>
+            <a:prstDash val="solid"/>
+          </a:ln>
+        </p:spPr>
+        <p:txBody>
+          <a:bodyPr/>
+          <a:lstStyle/>
+          <a:p>
+            <a:pPr>
+              <a:defRPr sz="1500">
+                <a:solidFill>
+                  <a:srgbClr val="000000"/>
+                </a:solidFill>
+              </a:defRPr>
+            </a:pPr>
+            <a:r>
+              <a:rPr sz="2000" dirty="0">
+                <a:solidFill>
+                  <a:srgbClr val="000000"/>
+                </a:solidFill>
+              </a:rPr>
+              <a:t>Use CI to run tests and quality checks on every pull request.</a:t>
+            </a:r>
+          </a:p>
+        </p:txBody>
+      </p:sp>
       <p:pic>
         <p:nvPicPr>
-          <p:cNvPr id="18" name="Picture 17"/>
+          <p:cNvPr id="27" name="Picture 26"/>
           <p:cNvPicPr>
             <a:picLocks noChangeAspect="1"/>
           </p:cNvPicPr>
@@ -15504,8 +18167,8 @@
         </p:blipFill>
         <p:spPr>
           <a:xfrm>
-            <a:off x="2361079" y="1456204"/>
-            <a:ext cx="1564341" cy="1564341"/>
+            <a:off x="1095375" y="1736217"/>
+            <a:ext cx="876300" cy="718566"/>
           </a:xfrm>
           <a:prstGeom prst="rect">
             <a:avLst/>
@@ -15514,7 +18177,7 @@
       </p:pic>
       <p:pic>
         <p:nvPicPr>
-          <p:cNvPr id="19" name="Picture 18"/>
+          <p:cNvPr id="28" name="Picture 27"/>
           <p:cNvPicPr>
             <a:picLocks noChangeAspect="1"/>
           </p:cNvPicPr>
@@ -15526,32 +18189,96 @@
         </p:blipFill>
         <p:spPr>
           <a:xfrm>
-            <a:off x="8131688" y="1211776"/>
-            <a:ext cx="2074629" cy="2074629"/>
+            <a:off x="1104900" y="2828925"/>
+            <a:ext cx="857250" cy="857250"/>
           </a:xfrm>
           <a:prstGeom prst="rect">
             <a:avLst/>
           </a:prstGeom>
         </p:spPr>
       </p:pic>
-      <p:sp>
-        <p:nvSpPr>
-          <p:cNvPr id="6" name="sh">
-            <a:extLst>
-              <a:ext uri="{FF2B5EF4-FFF2-40B4-BE49-F238E27FC236}">
-                <a16:creationId xmlns:a16="http://schemas.microsoft.com/office/drawing/2014/main" id="{E34AF905-703F-49B9-8954-0837C74AC161}"/>
-              </a:ext>
-            </a:extLst>
-          </p:cNvPr>
-          <p:cNvSpPr>
-            <a:spLocks noGrp="1"/>
-          </p:cNvSpPr>
-          <p:nvPr/>
-        </p:nvSpPr>
-        <p:spPr>
-          <a:xfrm>
-            <a:off x="1000125" y="2952750"/>
-            <a:ext cx="4286250" cy="400050"/>
+      <p:pic>
+        <p:nvPicPr>
+          <p:cNvPr id="29" name="Picture 28"/>
+          <p:cNvPicPr>
+            <a:picLocks noChangeAspect="1"/>
+          </p:cNvPicPr>
+          <p:nvPr/>
+        </p:nvPicPr>
+        <p:blipFill>
+          <a:blip r:embed="rId5"/>
+          <a:stretch/>
+        </p:blipFill>
+        <p:spPr>
+          <a:xfrm>
+            <a:off x="1000125" y="3970564"/>
+            <a:ext cx="1066800" cy="783771"/>
+          </a:xfrm>
+          <a:prstGeom prst="rect">
+            <a:avLst/>
+          </a:prstGeom>
+        </p:spPr>
+      </p:pic>
+      <p:sp>
+        <p:nvSpPr>
+          <p:cNvPr id="14" name="testband">
+            <a:extLst>
+              <a:ext uri="{FF2B5EF4-FFF2-40B4-BE49-F238E27FC236}">
+                <a16:creationId xmlns:a16="http://schemas.microsoft.com/office/drawing/2014/main" id="{6A799A53-366A-4704-A933-BAC9317D4BC8}"/>
+              </a:ext>
+            </a:extLst>
+          </p:cNvPr>
+          <p:cNvSpPr>
+            <a:spLocks noGrp="1"/>
+          </p:cNvSpPr>
+          <p:nvPr/>
+        </p:nvSpPr>
+        <p:spPr>
+          <a:xfrm>
+            <a:off x="1381125" y="5219700"/>
+            <a:ext cx="9429750" cy="914400"/>
+          </a:xfrm>
+          <a:prstGeom prst="roundRect">
+            <a:avLst>
+              <a:gd name="adj" fmla="val 8333"/>
+            </a:avLst>
+          </a:prstGeom>
+          <a:solidFill>
+            <a:srgbClr val="FFF2E8"/>
+          </a:solidFill>
+          <a:ln w="9525">
+            <a:solidFill>
+              <a:srgbClr val="F0C7A7"/>
+            </a:solidFill>
+            <a:prstDash val="solid"/>
+          </a:ln>
+        </p:spPr>
+        <p:txBody>
+          <a:bodyPr/>
+          <a:lstStyle/>
+          <a:p>
+            <a:endParaRPr lang="en-US"/>
+          </a:p>
+        </p:txBody>
+      </p:sp>
+      <p:sp>
+        <p:nvSpPr>
+          <p:cNvPr id="15" name="testbandh">
+            <a:extLst>
+              <a:ext uri="{FF2B5EF4-FFF2-40B4-BE49-F238E27FC236}">
+                <a16:creationId xmlns:a16="http://schemas.microsoft.com/office/drawing/2014/main" id="{F6E1AA77-15B4-4A86-86C4-DB56EDC73B9F}"/>
+              </a:ext>
+            </a:extLst>
+          </p:cNvPr>
+          <p:cNvSpPr>
+            <a:spLocks noGrp="1"/>
+          </p:cNvSpPr>
+          <p:nvPr/>
+        </p:nvSpPr>
+        <p:spPr>
+          <a:xfrm>
+            <a:off x="1809750" y="5391150"/>
+            <a:ext cx="8572500" cy="323850"/>
           </a:xfrm>
           <a:prstGeom prst="rect">
             <a:avLst/>
@@ -15569,39 +18296,39 @@
             <a:pPr algn="ctr">
               <a:defRPr sz="1800" b="1">
                 <a:solidFill>
-                  <a:srgbClr val="6B5B95"/>
+                  <a:srgbClr val="C55A11"/>
                 </a:solidFill>
               </a:defRPr>
             </a:pPr>
             <a:r>
               <a:rPr sz="1800" b="1">
                 <a:solidFill>
-                  <a:srgbClr val="6B5B95"/>
+                  <a:srgbClr val="C55A11"/>
                 </a:solidFill>
               </a:rPr>
-              <a:t>STRUCTURE</a:t>
-            </a:r>
-          </a:p>
-        </p:txBody>
-      </p:sp>
-      <p:sp>
-        <p:nvSpPr>
-          <p:cNvPr id="7" name="sq">
-            <a:extLst>
-              <a:ext uri="{FF2B5EF4-FFF2-40B4-BE49-F238E27FC236}">
-                <a16:creationId xmlns:a16="http://schemas.microsoft.com/office/drawing/2014/main" id="{6DB3518E-1D1D-4D1F-8367-3ACDC071777B}"/>
-              </a:ext>
-            </a:extLst>
-          </p:cNvPr>
-          <p:cNvSpPr>
-            <a:spLocks noGrp="1"/>
-          </p:cNvSpPr>
-          <p:nvPr/>
-        </p:nvSpPr>
-        <p:spPr>
-          <a:xfrm>
-            <a:off x="1095375" y="3486150"/>
-            <a:ext cx="4095750" cy="647700"/>
+              <a:t>A green pipeline supports review</a:t>
+            </a:r>
+          </a:p>
+        </p:txBody>
+      </p:sp>
+      <p:sp>
+        <p:nvSpPr>
+          <p:cNvPr id="16" name="testbandb">
+            <a:extLst>
+              <a:ext uri="{FF2B5EF4-FFF2-40B4-BE49-F238E27FC236}">
+                <a16:creationId xmlns:a16="http://schemas.microsoft.com/office/drawing/2014/main" id="{28774AE0-E7FF-455E-BA9B-08EE5C5D706F}"/>
+              </a:ext>
+            </a:extLst>
+          </p:cNvPr>
+          <p:cNvSpPr>
+            <a:spLocks noGrp="1"/>
+          </p:cNvSpPr>
+          <p:nvPr/>
+        </p:nvSpPr>
+        <p:spPr>
+          <a:xfrm>
+            <a:off x="1809750" y="5781675"/>
+            <a:ext cx="8572500" cy="266700"/>
           </a:xfrm>
           <a:prstGeom prst="rect">
             <a:avLst/>
@@ -15617,361 +18344,19 @@
           <a:lstStyle/>
           <a:p>
             <a:pPr algn="ctr">
-              <a:defRPr sz="1800" b="1">
+              <a:defRPr sz="1500">
                 <a:solidFill>
                   <a:srgbClr val="000000"/>
                 </a:solidFill>
               </a:defRPr>
             </a:pPr>
             <a:r>
-              <a:rPr sz="1800" b="1">
+              <a:rPr sz="1500">
                 <a:solidFill>
                   <a:srgbClr val="000000"/>
                 </a:solidFill>
               </a:rPr>
-              <a:t>Are classes, responsibilities, or relationships changing?</a:t>
-            </a:r>
-          </a:p>
-        </p:txBody>
-      </p:sp>
-      <p:sp>
-        <p:nvSpPr>
-          <p:cNvPr id="8" name="sa">
-            <a:extLst>
-              <a:ext uri="{FF2B5EF4-FFF2-40B4-BE49-F238E27FC236}">
-                <a16:creationId xmlns:a16="http://schemas.microsoft.com/office/drawing/2014/main" id="{858C2FA6-311D-4950-BCA9-67CBA9375D88}"/>
-              </a:ext>
-            </a:extLst>
-          </p:cNvPr>
-          <p:cNvSpPr>
-            <a:spLocks noGrp="1"/>
-          </p:cNvSpPr>
-          <p:nvPr/>
-        </p:nvSpPr>
-        <p:spPr>
-          <a:xfrm>
-            <a:off x="1238250" y="4429125"/>
-            <a:ext cx="3810000" cy="381000"/>
-          </a:xfrm>
-          <a:prstGeom prst="rect">
-            <a:avLst/>
-          </a:prstGeom>
-          <a:noFill/>
-          <a:ln w="0">
-            <a:noFill/>
-            <a:prstDash val="solid"/>
-          </a:ln>
-        </p:spPr>
-        <p:txBody>
-          <a:bodyPr/>
-          <a:lstStyle/>
-          <a:p>
-            <a:pPr algn="ctr">
-              <a:defRPr sz="1500">
-                <a:solidFill>
-                  <a:srgbClr val="000000"/>
-                </a:solidFill>
-              </a:defRPr>
-            </a:pPr>
-            <a:r>
-              <a:rPr sz="1500" dirty="0">
-                <a:solidFill>
-                  <a:srgbClr val="000000"/>
-                </a:solidFill>
-              </a:rPr>
-              <a:t>Update the relevant class diagram.</a:t>
-            </a:r>
-          </a:p>
-        </p:txBody>
-      </p:sp>
-      <p:sp>
-        <p:nvSpPr>
-          <p:cNvPr id="9" name="bh">
-            <a:extLst>
-              <a:ext uri="{FF2B5EF4-FFF2-40B4-BE49-F238E27FC236}">
-                <a16:creationId xmlns:a16="http://schemas.microsoft.com/office/drawing/2014/main" id="{5EF5B811-439E-4E50-A517-39D0E70B137E}"/>
-              </a:ext>
-            </a:extLst>
-          </p:cNvPr>
-          <p:cNvSpPr>
-            <a:spLocks noGrp="1"/>
-          </p:cNvSpPr>
-          <p:nvPr/>
-        </p:nvSpPr>
-        <p:spPr>
-          <a:xfrm>
-            <a:off x="6905625" y="3075734"/>
-            <a:ext cx="4286250" cy="400050"/>
-          </a:xfrm>
-          <a:prstGeom prst="rect">
-            <a:avLst/>
-          </a:prstGeom>
-          <a:noFill/>
-          <a:ln w="0">
-            <a:noFill/>
-            <a:prstDash val="solid"/>
-          </a:ln>
-        </p:spPr>
-        <p:txBody>
-          <a:bodyPr/>
-          <a:lstStyle/>
-          <a:p>
-            <a:pPr algn="ctr">
-              <a:defRPr sz="1800" b="1">
-                <a:solidFill>
-                  <a:srgbClr val="008C95"/>
-                </a:solidFill>
-              </a:defRPr>
-            </a:pPr>
-            <a:r>
-              <a:rPr sz="1800" b="1" dirty="0">
-                <a:solidFill>
-                  <a:srgbClr val="008C95"/>
-                </a:solidFill>
-              </a:rPr>
-              <a:t>BEHAVIOR</a:t>
-            </a:r>
-          </a:p>
-        </p:txBody>
-      </p:sp>
-      <p:sp>
-        <p:nvSpPr>
-          <p:cNvPr id="10" name="bq">
-            <a:extLst>
-              <a:ext uri="{FF2B5EF4-FFF2-40B4-BE49-F238E27FC236}">
-                <a16:creationId xmlns:a16="http://schemas.microsoft.com/office/drawing/2014/main" id="{232EB6CB-80B6-4012-9058-A0F57EE354B8}"/>
-              </a:ext>
-            </a:extLst>
-          </p:cNvPr>
-          <p:cNvSpPr>
-            <a:spLocks noGrp="1"/>
-          </p:cNvSpPr>
-          <p:nvPr/>
-        </p:nvSpPr>
-        <p:spPr>
-          <a:xfrm>
-            <a:off x="7000875" y="3486150"/>
-            <a:ext cx="4095750" cy="647700"/>
-          </a:xfrm>
-          <a:prstGeom prst="rect">
-            <a:avLst/>
-          </a:prstGeom>
-          <a:noFill/>
-          <a:ln w="0">
-            <a:noFill/>
-            <a:prstDash val="solid"/>
-          </a:ln>
-        </p:spPr>
-        <p:txBody>
-          <a:bodyPr/>
-          <a:lstStyle/>
-          <a:p>
-            <a:pPr algn="ctr">
-              <a:defRPr sz="1800" b="1">
-                <a:solidFill>
-                  <a:srgbClr val="000000"/>
-                </a:solidFill>
-              </a:defRPr>
-            </a:pPr>
-            <a:r>
-              <a:rPr sz="1800" b="1">
-                <a:solidFill>
-                  <a:srgbClr val="000000"/>
-                </a:solidFill>
-              </a:rPr>
-              <a:t>Are interactions between objects changing?</a:t>
-            </a:r>
-          </a:p>
-        </p:txBody>
-      </p:sp>
-      <p:sp>
-        <p:nvSpPr>
-          <p:cNvPr id="11" name="ba">
-            <a:extLst>
-              <a:ext uri="{FF2B5EF4-FFF2-40B4-BE49-F238E27FC236}">
-                <a16:creationId xmlns:a16="http://schemas.microsoft.com/office/drawing/2014/main" id="{68CC013A-6AC6-42FE-8AB8-7B5BE1A93B76}"/>
-              </a:ext>
-            </a:extLst>
-          </p:cNvPr>
-          <p:cNvSpPr>
-            <a:spLocks noGrp="1"/>
-          </p:cNvSpPr>
-          <p:nvPr/>
-        </p:nvSpPr>
-        <p:spPr>
-          <a:xfrm>
-            <a:off x="7143750" y="4429125"/>
-            <a:ext cx="3810000" cy="381000"/>
-          </a:xfrm>
-          <a:prstGeom prst="rect">
-            <a:avLst/>
-          </a:prstGeom>
-          <a:noFill/>
-          <a:ln w="0">
-            <a:noFill/>
-            <a:prstDash val="solid"/>
-          </a:ln>
-        </p:spPr>
-        <p:txBody>
-          <a:bodyPr/>
-          <a:lstStyle/>
-          <a:p>
-            <a:pPr algn="ctr">
-              <a:defRPr sz="1500">
-                <a:solidFill>
-                  <a:srgbClr val="000000"/>
-                </a:solidFill>
-              </a:defRPr>
-            </a:pPr>
-            <a:r>
-              <a:rPr sz="1500" dirty="0">
-                <a:solidFill>
-                  <a:srgbClr val="000000"/>
-                </a:solidFill>
-              </a:rPr>
-              <a:t>Update the relevant sequence diagram.</a:t>
-            </a:r>
-          </a:p>
-        </p:txBody>
-      </p:sp>
-      <p:sp>
-        <p:nvSpPr>
-          <p:cNvPr id="12" name="designband">
-            <a:extLst>
-              <a:ext uri="{FF2B5EF4-FFF2-40B4-BE49-F238E27FC236}">
-                <a16:creationId xmlns:a16="http://schemas.microsoft.com/office/drawing/2014/main" id="{452D306C-F63E-456C-AE1B-82D11DEC786B}"/>
-              </a:ext>
-            </a:extLst>
-          </p:cNvPr>
-          <p:cNvSpPr>
-            <a:spLocks noGrp="1"/>
-          </p:cNvSpPr>
-          <p:nvPr/>
-        </p:nvSpPr>
-        <p:spPr>
-          <a:xfrm>
-            <a:off x="1381125" y="5219700"/>
-            <a:ext cx="9429750" cy="914400"/>
-          </a:xfrm>
-          <a:prstGeom prst="roundRect">
-            <a:avLst>
-              <a:gd name="adj" fmla="val 8333"/>
-            </a:avLst>
-          </a:prstGeom>
-          <a:solidFill>
-            <a:srgbClr val="EAF2F8"/>
-          </a:solidFill>
-          <a:ln w="9525">
-            <a:solidFill>
-              <a:srgbClr val="C9DDEA"/>
-            </a:solidFill>
-            <a:prstDash val="solid"/>
-          </a:ln>
-        </p:spPr>
-        <p:txBody>
-          <a:bodyPr/>
-          <a:lstStyle/>
-          <a:p>
-            <a:endParaRPr lang="en-US"/>
-          </a:p>
-        </p:txBody>
-      </p:sp>
-      <p:sp>
-        <p:nvSpPr>
-          <p:cNvPr id="13" name="designbandh">
-            <a:extLst>
-              <a:ext uri="{FF2B5EF4-FFF2-40B4-BE49-F238E27FC236}">
-                <a16:creationId xmlns:a16="http://schemas.microsoft.com/office/drawing/2014/main" id="{43D28F96-9BE9-476D-B150-852E5206EC78}"/>
-              </a:ext>
-            </a:extLst>
-          </p:cNvPr>
-          <p:cNvSpPr>
-            <a:spLocks noGrp="1"/>
-          </p:cNvSpPr>
-          <p:nvPr/>
-        </p:nvSpPr>
-        <p:spPr>
-          <a:xfrm>
-            <a:off x="1809750" y="5391150"/>
-            <a:ext cx="8572500" cy="323850"/>
-          </a:xfrm>
-          <a:prstGeom prst="rect">
-            <a:avLst/>
-          </a:prstGeom>
-          <a:noFill/>
-          <a:ln w="0">
-            <a:noFill/>
-            <a:prstDash val="solid"/>
-          </a:ln>
-        </p:spPr>
-        <p:txBody>
-          <a:bodyPr/>
-          <a:lstStyle/>
-          <a:p>
-            <a:pPr algn="ctr">
-              <a:defRPr sz="1800" b="1">
-                <a:solidFill>
-                  <a:srgbClr val="1F4E79"/>
-                </a:solidFill>
-              </a:defRPr>
-            </a:pPr>
-            <a:r>
-              <a:rPr sz="1800" b="1">
-                <a:solidFill>
-                  <a:srgbClr val="1F4E79"/>
-                </a:solidFill>
-              </a:rPr>
-              <a:t>The PR connects design to implementation</a:t>
-            </a:r>
-          </a:p>
-        </p:txBody>
-      </p:sp>
-      <p:sp>
-        <p:nvSpPr>
-          <p:cNvPr id="14" name="designbandb">
-            <a:extLst>
-              <a:ext uri="{FF2B5EF4-FFF2-40B4-BE49-F238E27FC236}">
-                <a16:creationId xmlns:a16="http://schemas.microsoft.com/office/drawing/2014/main" id="{48E63A64-515E-422F-9747-13CD2D4E7916}"/>
-              </a:ext>
-            </a:extLst>
-          </p:cNvPr>
-          <p:cNvSpPr>
-            <a:spLocks noGrp="1"/>
-          </p:cNvSpPr>
-          <p:nvPr/>
-        </p:nvSpPr>
-        <p:spPr>
-          <a:xfrm>
-            <a:off x="1809750" y="5781675"/>
-            <a:ext cx="8572500" cy="266700"/>
-          </a:xfrm>
-          <a:prstGeom prst="rect">
-            <a:avLst/>
-          </a:prstGeom>
-          <a:noFill/>
-          <a:ln w="0">
-            <a:noFill/>
-            <a:prstDash val="solid"/>
-          </a:ln>
-        </p:spPr>
-        <p:txBody>
-          <a:bodyPr/>
-          <a:lstStyle/>
-          <a:p>
-            <a:pPr algn="ctr">
-              <a:defRPr sz="1500">
-                <a:solidFill>
-                  <a:srgbClr val="000000"/>
-                </a:solidFill>
-              </a:defRPr>
-            </a:pPr>
-            <a:r>
-              <a:rPr sz="1500">
-                <a:solidFill>
-                  <a:srgbClr val="000000"/>
-                </a:solidFill>
-              </a:rPr>
-              <a:t>Show the affected part of the system—not the entire system.</a:t>
+              <a:t>It provides fast feedback, but it does not replace thoughtful review.</a:t>
             </a:r>
           </a:p>
         </p:txBody>
@@ -15979,7 +18364,7 @@
     </p:spTree>
     <p:extLst>
       <p:ext uri="{BB962C8B-B14F-4D97-AF65-F5344CB8AC3E}">
-        <p14:creationId xmlns:p14="http://schemas.microsoft.com/office/powerpoint/2010/main" val="1874078860"/>
+        <p14:creationId xmlns:p14="http://schemas.microsoft.com/office/powerpoint/2010/main" val="1231033312"/>
       </p:ext>
     </p:extLst>
   </p:cSld>
@@ -16008,90 +18393,634 @@
       </p:grpSpPr>
       <p:sp>
         <p:nvSpPr>
-          <p:cNvPr id="2" name="Title 1">
-            <a:extLst>
-              <a:ext uri="{FF2B5EF4-FFF2-40B4-BE49-F238E27FC236}">
-                <a16:creationId xmlns:a16="http://schemas.microsoft.com/office/drawing/2014/main" id="{0B9FFB77-4E0B-D410-3C2C-BD30AC625364}"/>
-              </a:ext>
-            </a:extLst>
-          </p:cNvPr>
-          <p:cNvSpPr>
-            <a:spLocks noGrp="1"/>
-          </p:cNvSpPr>
-          <p:nvPr>
-            <p:ph type="title"/>
-          </p:nvPr>
-        </p:nvSpPr>
-        <p:spPr>
-          <a:xfrm>
-            <a:off x="838200" y="115792"/>
-            <a:ext cx="10515600" cy="538258"/>
-          </a:xfrm>
-        </p:spPr>
-        <p:txBody>
-          <a:bodyPr>
-            <a:normAutofit fontScale="90000"/>
-          </a:bodyPr>
-          <a:lstStyle/>
-          <a:p>
-            <a:r>
-              <a:rPr lang="en-BE" dirty="0"/>
-              <a:t>Assessment</a:t>
-            </a:r>
+          <p:cNvPr id="15" name="title">
+            <a:extLst>
+              <a:ext uri="{FF2B5EF4-FFF2-40B4-BE49-F238E27FC236}">
+                <a16:creationId xmlns:a16="http://schemas.microsoft.com/office/drawing/2014/main" id="{50FDE64E-E997-417E-B04B-442D56FDF48C}"/>
+              </a:ext>
+            </a:extLst>
+          </p:cNvPr>
+          <p:cNvSpPr>
+            <a:spLocks noGrp="1"/>
+          </p:cNvSpPr>
+          <p:nvPr/>
+        </p:nvSpPr>
+        <p:spPr>
+          <a:xfrm>
+            <a:off x="685800" y="361950"/>
+            <a:ext cx="10820400" cy="571500"/>
+          </a:xfrm>
+          <a:prstGeom prst="rect">
+            <a:avLst/>
+          </a:prstGeom>
+          <a:noFill/>
+          <a:ln w="0">
+            <a:noFill/>
+            <a:prstDash val="solid"/>
+          </a:ln>
+        </p:spPr>
+        <p:txBody>
+          <a:bodyPr/>
+          <a:lstStyle/>
+          <a:p>
+            <a:pPr>
+              <a:defRPr sz="2400" b="1">
+                <a:solidFill>
+                  <a:srgbClr val="1F4E79"/>
+                </a:solidFill>
+              </a:defRPr>
+            </a:pPr>
+            <a:r>
+              <a:rPr sz="3200" b="1" dirty="0">
+                <a:solidFill>
+                  <a:srgbClr val="1F4E79"/>
+                </a:solidFill>
+              </a:rPr>
+              <a:t>Collaborative Design: Decide What the Change Affects</a:t>
+            </a:r>
+          </a:p>
+        </p:txBody>
+      </p:sp>
+      <p:sp>
+        <p:nvSpPr>
+          <p:cNvPr id="2" name="subtitle">
+            <a:extLst>
+              <a:ext uri="{FF2B5EF4-FFF2-40B4-BE49-F238E27FC236}">
+                <a16:creationId xmlns:a16="http://schemas.microsoft.com/office/drawing/2014/main" id="{68AE4DE7-9788-4FCF-AA5B-2C6F8B4A63BC}"/>
+              </a:ext>
+            </a:extLst>
+          </p:cNvPr>
+          <p:cNvSpPr>
+            <a:spLocks noGrp="1"/>
+          </p:cNvSpPr>
+          <p:nvPr/>
+        </p:nvSpPr>
+        <p:spPr>
+          <a:xfrm>
+            <a:off x="685800" y="981075"/>
+            <a:ext cx="10668000" cy="323850"/>
+          </a:xfrm>
+          <a:prstGeom prst="rect">
+            <a:avLst/>
+          </a:prstGeom>
+          <a:noFill/>
+          <a:ln w="0">
+            <a:noFill/>
+            <a:prstDash val="solid"/>
+          </a:ln>
+        </p:spPr>
+        <p:txBody>
+          <a:bodyPr/>
+          <a:lstStyle/>
+          <a:p>
+            <a:pPr>
+              <a:defRPr sz="1500" b="1">
+                <a:solidFill>
+                  <a:srgbClr val="000000"/>
+                </a:solidFill>
+              </a:defRPr>
+            </a:pPr>
+            <a:r>
+              <a:rPr sz="2000" b="1" dirty="0">
+                <a:solidFill>
+                  <a:srgbClr val="000000"/>
+                </a:solidFill>
+              </a:rPr>
+              <a:t>Use only the design evidence needed to explain the contribution.</a:t>
+            </a:r>
+          </a:p>
+        </p:txBody>
+      </p:sp>
+      <p:sp>
+        <p:nvSpPr>
+          <p:cNvPr id="3" name="divider">
+            <a:extLst>
+              <a:ext uri="{FF2B5EF4-FFF2-40B4-BE49-F238E27FC236}">
+                <a16:creationId xmlns:a16="http://schemas.microsoft.com/office/drawing/2014/main" id="{8D22EDBC-57FF-446F-86F4-C035B009CF07}"/>
+              </a:ext>
+            </a:extLst>
+          </p:cNvPr>
+          <p:cNvSpPr>
+            <a:spLocks noGrp="1"/>
+          </p:cNvSpPr>
+          <p:nvPr/>
+        </p:nvSpPr>
+        <p:spPr>
+          <a:xfrm>
+            <a:off x="6096000" y="1666875"/>
+            <a:ext cx="19050" cy="3238500"/>
+          </a:xfrm>
+          <a:prstGeom prst="rect">
+            <a:avLst/>
+          </a:prstGeom>
+          <a:solidFill>
+            <a:srgbClr val="D9E2E8"/>
+          </a:solidFill>
+          <a:ln w="0">
+            <a:solidFill>
+              <a:srgbClr val="D9E2E8"/>
+            </a:solidFill>
+            <a:prstDash val="solid"/>
+          </a:ln>
+        </p:spPr>
+        <p:txBody>
+          <a:bodyPr/>
+          <a:lstStyle/>
+          <a:p>
+            <a:endParaRPr lang="en-US"/>
           </a:p>
         </p:txBody>
       </p:sp>
       <p:pic>
         <p:nvPicPr>
-          <p:cNvPr id="11266" name="Picture 2">
-            <a:extLst>
-              <a:ext uri="{FF2B5EF4-FFF2-40B4-BE49-F238E27FC236}">
-                <a16:creationId xmlns:a16="http://schemas.microsoft.com/office/drawing/2014/main" id="{9BA72932-EF1F-8D1E-2208-B862B281B067}"/>
-              </a:ext>
-            </a:extLst>
-          </p:cNvPr>
+          <p:cNvPr id="18" name="Picture 17"/>
           <p:cNvPicPr>
-            <a:picLocks noChangeAspect="1" noChangeArrowheads="1"/>
+            <a:picLocks noChangeAspect="1"/>
           </p:cNvPicPr>
           <p:nvPr/>
         </p:nvPicPr>
         <p:blipFill>
-          <a:blip r:embed="rId3">
-            <a:extLst>
-              <a:ext uri="{28A0092B-C50C-407E-A947-70E740481C1C}">
-                <a14:useLocalDpi xmlns:a14="http://schemas.microsoft.com/office/drawing/2010/main" val="0"/>
-              </a:ext>
-            </a:extLst>
-          </a:blip>
-          <a:srcRect/>
-          <a:stretch>
-            <a:fillRect/>
-          </a:stretch>
+          <a:blip r:embed="rId3"/>
+          <a:stretch/>
         </p:blipFill>
-        <p:spPr bwMode="auto">
-          <a:xfrm>
-            <a:off x="2196182" y="830320"/>
-            <a:ext cx="7645400" cy="5549900"/>
+        <p:spPr>
+          <a:xfrm>
+            <a:off x="2361079" y="1456204"/>
+            <a:ext cx="1564341" cy="1564341"/>
           </a:xfrm>
           <a:prstGeom prst="rect">
             <a:avLst/>
           </a:prstGeom>
+        </p:spPr>
+      </p:pic>
+      <p:pic>
+        <p:nvPicPr>
+          <p:cNvPr id="19" name="Picture 18"/>
+          <p:cNvPicPr>
+            <a:picLocks noChangeAspect="1"/>
+          </p:cNvPicPr>
+          <p:nvPr/>
+        </p:nvPicPr>
+        <p:blipFill>
+          <a:blip r:embed="rId4"/>
+          <a:stretch/>
+        </p:blipFill>
+        <p:spPr>
+          <a:xfrm>
+            <a:off x="8131688" y="1211776"/>
+            <a:ext cx="2074629" cy="2074629"/>
+          </a:xfrm>
+          <a:prstGeom prst="rect">
+            <a:avLst/>
+          </a:prstGeom>
+        </p:spPr>
+      </p:pic>
+      <p:sp>
+        <p:nvSpPr>
+          <p:cNvPr id="6" name="sh">
+            <a:extLst>
+              <a:ext uri="{FF2B5EF4-FFF2-40B4-BE49-F238E27FC236}">
+                <a16:creationId xmlns:a16="http://schemas.microsoft.com/office/drawing/2014/main" id="{E34AF905-703F-49B9-8954-0837C74AC161}"/>
+              </a:ext>
+            </a:extLst>
+          </p:cNvPr>
+          <p:cNvSpPr>
+            <a:spLocks noGrp="1"/>
+          </p:cNvSpPr>
+          <p:nvPr/>
+        </p:nvSpPr>
+        <p:spPr>
+          <a:xfrm>
+            <a:off x="1000125" y="2952750"/>
+            <a:ext cx="4286250" cy="400050"/>
+          </a:xfrm>
+          <a:prstGeom prst="rect">
+            <a:avLst/>
+          </a:prstGeom>
           <a:noFill/>
-          <a:extLst>
-            <a:ext uri="{909E8E84-426E-40DD-AFC4-6F175D3DCCD1}">
-              <a14:hiddenFill xmlns:a14="http://schemas.microsoft.com/office/drawing/2010/main">
-                <a:solidFill>
-                  <a:srgbClr val="FFFFFF"/>
-                </a:solidFill>
-              </a14:hiddenFill>
-            </a:ext>
-          </a:extLst>
-        </p:spPr>
-      </p:pic>
+          <a:ln w="0">
+            <a:noFill/>
+            <a:prstDash val="solid"/>
+          </a:ln>
+        </p:spPr>
+        <p:txBody>
+          <a:bodyPr/>
+          <a:lstStyle/>
+          <a:p>
+            <a:pPr algn="ctr">
+              <a:defRPr sz="1800" b="1">
+                <a:solidFill>
+                  <a:srgbClr val="6B5B95"/>
+                </a:solidFill>
+              </a:defRPr>
+            </a:pPr>
+            <a:r>
+              <a:rPr sz="1800" b="1">
+                <a:solidFill>
+                  <a:srgbClr val="6B5B95"/>
+                </a:solidFill>
+              </a:rPr>
+              <a:t>STRUCTURE</a:t>
+            </a:r>
+          </a:p>
+        </p:txBody>
+      </p:sp>
+      <p:sp>
+        <p:nvSpPr>
+          <p:cNvPr id="7" name="sq">
+            <a:extLst>
+              <a:ext uri="{FF2B5EF4-FFF2-40B4-BE49-F238E27FC236}">
+                <a16:creationId xmlns:a16="http://schemas.microsoft.com/office/drawing/2014/main" id="{6DB3518E-1D1D-4D1F-8367-3ACDC071777B}"/>
+              </a:ext>
+            </a:extLst>
+          </p:cNvPr>
+          <p:cNvSpPr>
+            <a:spLocks noGrp="1"/>
+          </p:cNvSpPr>
+          <p:nvPr/>
+        </p:nvSpPr>
+        <p:spPr>
+          <a:xfrm>
+            <a:off x="1095375" y="3486150"/>
+            <a:ext cx="4095750" cy="647700"/>
+          </a:xfrm>
+          <a:prstGeom prst="rect">
+            <a:avLst/>
+          </a:prstGeom>
+          <a:noFill/>
+          <a:ln w="0">
+            <a:noFill/>
+            <a:prstDash val="solid"/>
+          </a:ln>
+        </p:spPr>
+        <p:txBody>
+          <a:bodyPr/>
+          <a:lstStyle/>
+          <a:p>
+            <a:pPr algn="ctr">
+              <a:defRPr sz="1800" b="1">
+                <a:solidFill>
+                  <a:srgbClr val="000000"/>
+                </a:solidFill>
+              </a:defRPr>
+            </a:pPr>
+            <a:r>
+              <a:rPr sz="1800" b="1">
+                <a:solidFill>
+                  <a:srgbClr val="000000"/>
+                </a:solidFill>
+              </a:rPr>
+              <a:t>Are classes, responsibilities, or relationships changing?</a:t>
+            </a:r>
+          </a:p>
+        </p:txBody>
+      </p:sp>
+      <p:sp>
+        <p:nvSpPr>
+          <p:cNvPr id="8" name="sa">
+            <a:extLst>
+              <a:ext uri="{FF2B5EF4-FFF2-40B4-BE49-F238E27FC236}">
+                <a16:creationId xmlns:a16="http://schemas.microsoft.com/office/drawing/2014/main" id="{858C2FA6-311D-4950-BCA9-67CBA9375D88}"/>
+              </a:ext>
+            </a:extLst>
+          </p:cNvPr>
+          <p:cNvSpPr>
+            <a:spLocks noGrp="1"/>
+          </p:cNvSpPr>
+          <p:nvPr/>
+        </p:nvSpPr>
+        <p:spPr>
+          <a:xfrm>
+            <a:off x="1238250" y="4429125"/>
+            <a:ext cx="3810000" cy="381000"/>
+          </a:xfrm>
+          <a:prstGeom prst="rect">
+            <a:avLst/>
+          </a:prstGeom>
+          <a:noFill/>
+          <a:ln w="0">
+            <a:noFill/>
+            <a:prstDash val="solid"/>
+          </a:ln>
+        </p:spPr>
+        <p:txBody>
+          <a:bodyPr/>
+          <a:lstStyle/>
+          <a:p>
+            <a:pPr algn="ctr">
+              <a:defRPr sz="1500">
+                <a:solidFill>
+                  <a:srgbClr val="000000"/>
+                </a:solidFill>
+              </a:defRPr>
+            </a:pPr>
+            <a:r>
+              <a:rPr sz="1500" dirty="0">
+                <a:solidFill>
+                  <a:srgbClr val="000000"/>
+                </a:solidFill>
+              </a:rPr>
+              <a:t>Update the relevant class diagram.</a:t>
+            </a:r>
+          </a:p>
+        </p:txBody>
+      </p:sp>
+      <p:sp>
+        <p:nvSpPr>
+          <p:cNvPr id="9" name="bh">
+            <a:extLst>
+              <a:ext uri="{FF2B5EF4-FFF2-40B4-BE49-F238E27FC236}">
+                <a16:creationId xmlns:a16="http://schemas.microsoft.com/office/drawing/2014/main" id="{5EF5B811-439E-4E50-A517-39D0E70B137E}"/>
+              </a:ext>
+            </a:extLst>
+          </p:cNvPr>
+          <p:cNvSpPr>
+            <a:spLocks noGrp="1"/>
+          </p:cNvSpPr>
+          <p:nvPr/>
+        </p:nvSpPr>
+        <p:spPr>
+          <a:xfrm>
+            <a:off x="6905625" y="3075734"/>
+            <a:ext cx="4286250" cy="400050"/>
+          </a:xfrm>
+          <a:prstGeom prst="rect">
+            <a:avLst/>
+          </a:prstGeom>
+          <a:noFill/>
+          <a:ln w="0">
+            <a:noFill/>
+            <a:prstDash val="solid"/>
+          </a:ln>
+        </p:spPr>
+        <p:txBody>
+          <a:bodyPr/>
+          <a:lstStyle/>
+          <a:p>
+            <a:pPr algn="ctr">
+              <a:defRPr sz="1800" b="1">
+                <a:solidFill>
+                  <a:srgbClr val="008C95"/>
+                </a:solidFill>
+              </a:defRPr>
+            </a:pPr>
+            <a:r>
+              <a:rPr sz="1800" b="1" dirty="0">
+                <a:solidFill>
+                  <a:srgbClr val="008C95"/>
+                </a:solidFill>
+              </a:rPr>
+              <a:t>BEHAVIOR</a:t>
+            </a:r>
+          </a:p>
+        </p:txBody>
+      </p:sp>
+      <p:sp>
+        <p:nvSpPr>
+          <p:cNvPr id="10" name="bq">
+            <a:extLst>
+              <a:ext uri="{FF2B5EF4-FFF2-40B4-BE49-F238E27FC236}">
+                <a16:creationId xmlns:a16="http://schemas.microsoft.com/office/drawing/2014/main" id="{232EB6CB-80B6-4012-9058-A0F57EE354B8}"/>
+              </a:ext>
+            </a:extLst>
+          </p:cNvPr>
+          <p:cNvSpPr>
+            <a:spLocks noGrp="1"/>
+          </p:cNvSpPr>
+          <p:nvPr/>
+        </p:nvSpPr>
+        <p:spPr>
+          <a:xfrm>
+            <a:off x="7000875" y="3486150"/>
+            <a:ext cx="4095750" cy="647700"/>
+          </a:xfrm>
+          <a:prstGeom prst="rect">
+            <a:avLst/>
+          </a:prstGeom>
+          <a:noFill/>
+          <a:ln w="0">
+            <a:noFill/>
+            <a:prstDash val="solid"/>
+          </a:ln>
+        </p:spPr>
+        <p:txBody>
+          <a:bodyPr/>
+          <a:lstStyle/>
+          <a:p>
+            <a:pPr algn="ctr">
+              <a:defRPr sz="1800" b="1">
+                <a:solidFill>
+                  <a:srgbClr val="000000"/>
+                </a:solidFill>
+              </a:defRPr>
+            </a:pPr>
+            <a:r>
+              <a:rPr sz="1800" b="1">
+                <a:solidFill>
+                  <a:srgbClr val="000000"/>
+                </a:solidFill>
+              </a:rPr>
+              <a:t>Are interactions between objects changing?</a:t>
+            </a:r>
+          </a:p>
+        </p:txBody>
+      </p:sp>
+      <p:sp>
+        <p:nvSpPr>
+          <p:cNvPr id="11" name="ba">
+            <a:extLst>
+              <a:ext uri="{FF2B5EF4-FFF2-40B4-BE49-F238E27FC236}">
+                <a16:creationId xmlns:a16="http://schemas.microsoft.com/office/drawing/2014/main" id="{68CC013A-6AC6-42FE-8AB8-7B5BE1A93B76}"/>
+              </a:ext>
+            </a:extLst>
+          </p:cNvPr>
+          <p:cNvSpPr>
+            <a:spLocks noGrp="1"/>
+          </p:cNvSpPr>
+          <p:nvPr/>
+        </p:nvSpPr>
+        <p:spPr>
+          <a:xfrm>
+            <a:off x="7143750" y="4429125"/>
+            <a:ext cx="3810000" cy="381000"/>
+          </a:xfrm>
+          <a:prstGeom prst="rect">
+            <a:avLst/>
+          </a:prstGeom>
+          <a:noFill/>
+          <a:ln w="0">
+            <a:noFill/>
+            <a:prstDash val="solid"/>
+          </a:ln>
+        </p:spPr>
+        <p:txBody>
+          <a:bodyPr/>
+          <a:lstStyle/>
+          <a:p>
+            <a:pPr algn="ctr">
+              <a:defRPr sz="1500">
+                <a:solidFill>
+                  <a:srgbClr val="000000"/>
+                </a:solidFill>
+              </a:defRPr>
+            </a:pPr>
+            <a:r>
+              <a:rPr sz="1500" dirty="0">
+                <a:solidFill>
+                  <a:srgbClr val="000000"/>
+                </a:solidFill>
+              </a:rPr>
+              <a:t>Update the relevant sequence diagram.</a:t>
+            </a:r>
+          </a:p>
+        </p:txBody>
+      </p:sp>
+      <p:sp>
+        <p:nvSpPr>
+          <p:cNvPr id="12" name="designband">
+            <a:extLst>
+              <a:ext uri="{FF2B5EF4-FFF2-40B4-BE49-F238E27FC236}">
+                <a16:creationId xmlns:a16="http://schemas.microsoft.com/office/drawing/2014/main" id="{452D306C-F63E-456C-AE1B-82D11DEC786B}"/>
+              </a:ext>
+            </a:extLst>
+          </p:cNvPr>
+          <p:cNvSpPr>
+            <a:spLocks noGrp="1"/>
+          </p:cNvSpPr>
+          <p:nvPr/>
+        </p:nvSpPr>
+        <p:spPr>
+          <a:xfrm>
+            <a:off x="1381125" y="5219700"/>
+            <a:ext cx="9429750" cy="914400"/>
+          </a:xfrm>
+          <a:prstGeom prst="roundRect">
+            <a:avLst>
+              <a:gd name="adj" fmla="val 8333"/>
+            </a:avLst>
+          </a:prstGeom>
+          <a:solidFill>
+            <a:srgbClr val="EAF2F8"/>
+          </a:solidFill>
+          <a:ln w="9525">
+            <a:solidFill>
+              <a:srgbClr val="C9DDEA"/>
+            </a:solidFill>
+            <a:prstDash val="solid"/>
+          </a:ln>
+        </p:spPr>
+        <p:txBody>
+          <a:bodyPr/>
+          <a:lstStyle/>
+          <a:p>
+            <a:endParaRPr lang="en-US"/>
+          </a:p>
+        </p:txBody>
+      </p:sp>
+      <p:sp>
+        <p:nvSpPr>
+          <p:cNvPr id="13" name="designbandh">
+            <a:extLst>
+              <a:ext uri="{FF2B5EF4-FFF2-40B4-BE49-F238E27FC236}">
+                <a16:creationId xmlns:a16="http://schemas.microsoft.com/office/drawing/2014/main" id="{43D28F96-9BE9-476D-B150-852E5206EC78}"/>
+              </a:ext>
+            </a:extLst>
+          </p:cNvPr>
+          <p:cNvSpPr>
+            <a:spLocks noGrp="1"/>
+          </p:cNvSpPr>
+          <p:nvPr/>
+        </p:nvSpPr>
+        <p:spPr>
+          <a:xfrm>
+            <a:off x="1809750" y="5391150"/>
+            <a:ext cx="8572500" cy="323850"/>
+          </a:xfrm>
+          <a:prstGeom prst="rect">
+            <a:avLst/>
+          </a:prstGeom>
+          <a:noFill/>
+          <a:ln w="0">
+            <a:noFill/>
+            <a:prstDash val="solid"/>
+          </a:ln>
+        </p:spPr>
+        <p:txBody>
+          <a:bodyPr/>
+          <a:lstStyle/>
+          <a:p>
+            <a:pPr algn="ctr">
+              <a:defRPr sz="1800" b="1">
+                <a:solidFill>
+                  <a:srgbClr val="1F4E79"/>
+                </a:solidFill>
+              </a:defRPr>
+            </a:pPr>
+            <a:r>
+              <a:rPr sz="1800" b="1">
+                <a:solidFill>
+                  <a:srgbClr val="1F4E79"/>
+                </a:solidFill>
+              </a:rPr>
+              <a:t>The PR connects design to implementation</a:t>
+            </a:r>
+          </a:p>
+        </p:txBody>
+      </p:sp>
+      <p:sp>
+        <p:nvSpPr>
+          <p:cNvPr id="14" name="designbandb">
+            <a:extLst>
+              <a:ext uri="{FF2B5EF4-FFF2-40B4-BE49-F238E27FC236}">
+                <a16:creationId xmlns:a16="http://schemas.microsoft.com/office/drawing/2014/main" id="{48E63A64-515E-422F-9747-13CD2D4E7916}"/>
+              </a:ext>
+            </a:extLst>
+          </p:cNvPr>
+          <p:cNvSpPr>
+            <a:spLocks noGrp="1"/>
+          </p:cNvSpPr>
+          <p:nvPr/>
+        </p:nvSpPr>
+        <p:spPr>
+          <a:xfrm>
+            <a:off x="1809750" y="5781675"/>
+            <a:ext cx="8572500" cy="266700"/>
+          </a:xfrm>
+          <a:prstGeom prst="rect">
+            <a:avLst/>
+          </a:prstGeom>
+          <a:noFill/>
+          <a:ln w="0">
+            <a:noFill/>
+            <a:prstDash val="solid"/>
+          </a:ln>
+        </p:spPr>
+        <p:txBody>
+          <a:bodyPr/>
+          <a:lstStyle/>
+          <a:p>
+            <a:pPr algn="ctr">
+              <a:defRPr sz="1500">
+                <a:solidFill>
+                  <a:srgbClr val="000000"/>
+                </a:solidFill>
+              </a:defRPr>
+            </a:pPr>
+            <a:r>
+              <a:rPr sz="1500">
+                <a:solidFill>
+                  <a:srgbClr val="000000"/>
+                </a:solidFill>
+              </a:rPr>
+              <a:t>Show the affected part of the system—not the entire system.</a:t>
+            </a:r>
+          </a:p>
+        </p:txBody>
+      </p:sp>
     </p:spTree>
     <p:extLst>
       <p:ext uri="{BB962C8B-B14F-4D97-AF65-F5344CB8AC3E}">
-        <p14:creationId xmlns:p14="http://schemas.microsoft.com/office/powerpoint/2010/main" val="3835379694"/>
+        <p14:creationId xmlns:p14="http://schemas.microsoft.com/office/powerpoint/2010/main" val="1874078860"/>
       </p:ext>
     </p:extLst>
   </p:cSld>
@@ -16123,7 +19052,7 @@
           <p:cNvPr id="2" name="Title 1">
             <a:extLst>
               <a:ext uri="{FF2B5EF4-FFF2-40B4-BE49-F238E27FC236}">
-                <a16:creationId xmlns:a16="http://schemas.microsoft.com/office/drawing/2014/main" id="{B08DE891-5030-49D9-8CEB-2E70D87DD31B}"/>
+                <a16:creationId xmlns:a16="http://schemas.microsoft.com/office/drawing/2014/main" id="{0B9FFB77-4E0B-D410-3C2C-BD30AC625364}"/>
               </a:ext>
             </a:extLst>
           </p:cNvPr>
@@ -16134,63 +19063,76 @@
             <p:ph type="title"/>
           </p:nvPr>
         </p:nvSpPr>
-        <p:spPr/>
-        <p:txBody>
-          <a:bodyPr/>
-          <a:lstStyle/>
-          <a:p>
-            <a:r>
-              <a:rPr lang="en-US" dirty="0"/>
-              <a:t>A list of previous projects by students</a:t>
-            </a:r>
-          </a:p>
-        </p:txBody>
-      </p:sp>
-      <p:sp>
-        <p:nvSpPr>
-          <p:cNvPr id="5" name="TextBox 4">
-            <a:extLst>
-              <a:ext uri="{FF2B5EF4-FFF2-40B4-BE49-F238E27FC236}">
-                <a16:creationId xmlns:a16="http://schemas.microsoft.com/office/drawing/2014/main" id="{251CBEFF-1C56-B803-C345-BD8B196284D3}"/>
-              </a:ext>
-            </a:extLst>
-          </p:cNvPr>
-          <p:cNvSpPr txBox="1"/>
-          <p:nvPr/>
-        </p:nvSpPr>
-        <p:spPr>
-          <a:xfrm>
-            <a:off x="1022888" y="3109709"/>
-            <a:ext cx="9159498" cy="830997"/>
+        <p:spPr>
+          <a:xfrm>
+            <a:off x="838200" y="115792"/>
+            <a:ext cx="10515600" cy="538258"/>
+          </a:xfrm>
+        </p:spPr>
+        <p:txBody>
+          <a:bodyPr>
+            <a:normAutofit fontScale="90000"/>
+          </a:bodyPr>
+          <a:lstStyle/>
+          <a:p>
+            <a:r>
+              <a:rPr lang="en-BE" dirty="0"/>
+              <a:t>Assessment</a:t>
+            </a:r>
+          </a:p>
+        </p:txBody>
+      </p:sp>
+      <p:pic>
+        <p:nvPicPr>
+          <p:cNvPr id="11266" name="Picture 2">
+            <a:extLst>
+              <a:ext uri="{FF2B5EF4-FFF2-40B4-BE49-F238E27FC236}">
+                <a16:creationId xmlns:a16="http://schemas.microsoft.com/office/drawing/2014/main" id="{9BA72932-EF1F-8D1E-2208-B862B281B067}"/>
+              </a:ext>
+            </a:extLst>
+          </p:cNvPr>
+          <p:cNvPicPr>
+            <a:picLocks noChangeAspect="1" noChangeArrowheads="1"/>
+          </p:cNvPicPr>
+          <p:nvPr/>
+        </p:nvPicPr>
+        <p:blipFill>
+          <a:blip r:embed="rId3">
+            <a:extLst>
+              <a:ext uri="{28A0092B-C50C-407E-A947-70E740481C1C}">
+                <a14:useLocalDpi xmlns:a14="http://schemas.microsoft.com/office/drawing/2010/main" val="0"/>
+              </a:ext>
+            </a:extLst>
+          </a:blip>
+          <a:srcRect/>
+          <a:stretch>
+            <a:fillRect/>
+          </a:stretch>
+        </p:blipFill>
+        <p:spPr bwMode="auto">
+          <a:xfrm>
+            <a:off x="2196182" y="830320"/>
+            <a:ext cx="7645400" cy="5549900"/>
           </a:xfrm>
           <a:prstGeom prst="rect">
             <a:avLst/>
           </a:prstGeom>
           <a:noFill/>
-        </p:spPr>
-        <p:txBody>
-          <a:bodyPr wrap="square">
-            <a:spAutoFit/>
-          </a:bodyPr>
-          <a:lstStyle/>
-          <a:p>
-            <a:r>
-              <a:rPr lang="en-US" sz="2400" dirty="0">
-                <a:hlinkClick r:id="rId2"/>
-              </a:rPr>
-              <a:t>https://github.com/orgs/UNLV-CS472-672/repositories?type=all</a:t>
-            </a:r>
-            <a:endParaRPr lang="en-US" sz="2400" dirty="0"/>
-          </a:p>
-          <a:p>
-            <a:endParaRPr lang="en-US" sz="2400" dirty="0"/>
-          </a:p>
-        </p:txBody>
-      </p:sp>
+          <a:extLst>
+            <a:ext uri="{909E8E84-426E-40DD-AFC4-6F175D3DCCD1}">
+              <a14:hiddenFill xmlns:a14="http://schemas.microsoft.com/office/drawing/2010/main">
+                <a:solidFill>
+                  <a:srgbClr val="FFFFFF"/>
+                </a:solidFill>
+              </a14:hiddenFill>
+            </a:ext>
+          </a:extLst>
+        </p:spPr>
+      </p:pic>
     </p:spTree>
     <p:extLst>
       <p:ext uri="{BB962C8B-B14F-4D97-AF65-F5344CB8AC3E}">
-        <p14:creationId xmlns:p14="http://schemas.microsoft.com/office/powerpoint/2010/main" val="3319831364"/>
+        <p14:creationId xmlns:p14="http://schemas.microsoft.com/office/powerpoint/2010/main" val="3835379694"/>
       </p:ext>
     </p:extLst>
   </p:cSld>
@@ -16296,6 +19238,105 @@
 </file>
 
 <file path=ppt/slides/slide20.xml><?xml version="1.0" encoding="utf-8"?>
+<p:sld xmlns:a="http://schemas.openxmlformats.org/drawingml/2006/main" xmlns:r="http://schemas.openxmlformats.org/officeDocument/2006/relationships" xmlns:p="http://schemas.openxmlformats.org/presentationml/2006/main">
+  <p:cSld>
+    <p:spTree>
+      <p:nvGrpSpPr>
+        <p:cNvPr id="1" name=""/>
+        <p:cNvGrpSpPr/>
+        <p:nvPr/>
+      </p:nvGrpSpPr>
+      <p:grpSpPr>
+        <a:xfrm>
+          <a:off x="0" y="0"/>
+          <a:ext cx="0" cy="0"/>
+          <a:chOff x="0" y="0"/>
+          <a:chExt cx="0" cy="0"/>
+        </a:xfrm>
+      </p:grpSpPr>
+      <p:sp>
+        <p:nvSpPr>
+          <p:cNvPr id="2" name="Title 1">
+            <a:extLst>
+              <a:ext uri="{FF2B5EF4-FFF2-40B4-BE49-F238E27FC236}">
+                <a16:creationId xmlns:a16="http://schemas.microsoft.com/office/drawing/2014/main" id="{B08DE891-5030-49D9-8CEB-2E70D87DD31B}"/>
+              </a:ext>
+            </a:extLst>
+          </p:cNvPr>
+          <p:cNvSpPr>
+            <a:spLocks noGrp="1"/>
+          </p:cNvSpPr>
+          <p:nvPr>
+            <p:ph type="title"/>
+          </p:nvPr>
+        </p:nvSpPr>
+        <p:spPr/>
+        <p:txBody>
+          <a:bodyPr/>
+          <a:lstStyle/>
+          <a:p>
+            <a:r>
+              <a:rPr lang="en-US" dirty="0"/>
+              <a:t>A list of previous projects by students</a:t>
+            </a:r>
+          </a:p>
+        </p:txBody>
+      </p:sp>
+      <p:sp>
+        <p:nvSpPr>
+          <p:cNvPr id="5" name="TextBox 4">
+            <a:extLst>
+              <a:ext uri="{FF2B5EF4-FFF2-40B4-BE49-F238E27FC236}">
+                <a16:creationId xmlns:a16="http://schemas.microsoft.com/office/drawing/2014/main" id="{251CBEFF-1C56-B803-C345-BD8B196284D3}"/>
+              </a:ext>
+            </a:extLst>
+          </p:cNvPr>
+          <p:cNvSpPr txBox="1"/>
+          <p:nvPr/>
+        </p:nvSpPr>
+        <p:spPr>
+          <a:xfrm>
+            <a:off x="1022888" y="3109709"/>
+            <a:ext cx="9159498" cy="830997"/>
+          </a:xfrm>
+          <a:prstGeom prst="rect">
+            <a:avLst/>
+          </a:prstGeom>
+          <a:noFill/>
+        </p:spPr>
+        <p:txBody>
+          <a:bodyPr wrap="square">
+            <a:spAutoFit/>
+          </a:bodyPr>
+          <a:lstStyle/>
+          <a:p>
+            <a:r>
+              <a:rPr lang="en-US" sz="2400" dirty="0">
+                <a:hlinkClick r:id="rId2"/>
+              </a:rPr>
+              <a:t>https://github.com/orgs/UNLV-CS472-672/repositories?type=all</a:t>
+            </a:r>
+            <a:endParaRPr lang="en-US" sz="2400" dirty="0"/>
+          </a:p>
+          <a:p>
+            <a:endParaRPr lang="en-US" sz="2400" dirty="0"/>
+          </a:p>
+        </p:txBody>
+      </p:sp>
+    </p:spTree>
+    <p:extLst>
+      <p:ext uri="{BB962C8B-B14F-4D97-AF65-F5344CB8AC3E}">
+        <p14:creationId xmlns:p14="http://schemas.microsoft.com/office/powerpoint/2010/main" val="3319831364"/>
+      </p:ext>
+    </p:extLst>
+  </p:cSld>
+  <p:clrMapOvr>
+    <a:masterClrMapping/>
+  </p:clrMapOvr>
+</p:sld>
+</file>
+
+<file path=ppt/slides/slide21.xml><?xml version="1.0" encoding="utf-8"?>
 <p:sld xmlns:a="http://schemas.openxmlformats.org/drawingml/2006/main" xmlns:r="http://schemas.openxmlformats.org/officeDocument/2006/relationships" xmlns:p="http://schemas.openxmlformats.org/presentationml/2006/main">
   <p:cSld>
     <p:spTree>
@@ -22726,6 +25767,428 @@
   <p:clrMapOvr>
     <a:masterClrMapping/>
   </p:clrMapOvr>
+  <p:timing>
+    <p:tnLst>
+      <p:par>
+        <p:cTn id="1" dur="indefinite" restart="never" nodeType="tmRoot">
+          <p:childTnLst>
+            <p:seq concurrent="1" nextAc="seek">
+              <p:cTn id="2" dur="indefinite" nodeType="mainSeq">
+                <p:childTnLst>
+                  <p:par>
+                    <p:cTn id="3" fill="hold">
+                      <p:stCondLst>
+                        <p:cond delay="indefinite"/>
+                      </p:stCondLst>
+                      <p:childTnLst>
+                        <p:par>
+                          <p:cTn id="4" fill="hold">
+                            <p:stCondLst>
+                              <p:cond delay="0"/>
+                            </p:stCondLst>
+                            <p:childTnLst>
+                              <p:par>
+                                <p:cTn id="5" presetID="1" presetClass="entr" presetSubtype="0" fill="hold" grpId="0" nodeType="clickEffect">
+                                  <p:stCondLst>
+                                    <p:cond delay="0"/>
+                                  </p:stCondLst>
+                                  <p:childTnLst>
+                                    <p:set>
+                                      <p:cBhvr>
+                                        <p:cTn id="6" dur="1" fill="hold">
+                                          <p:stCondLst>
+                                            <p:cond delay="0"/>
+                                          </p:stCondLst>
+                                        </p:cTn>
+                                        <p:tgtEl>
+                                          <p:spTgt spid="4"/>
+                                        </p:tgtEl>
+                                        <p:attrNameLst>
+                                          <p:attrName>style.visibility</p:attrName>
+                                        </p:attrNameLst>
+                                      </p:cBhvr>
+                                      <p:to>
+                                        <p:strVal val="visible"/>
+                                      </p:to>
+                                    </p:set>
+                                  </p:childTnLst>
+                                </p:cTn>
+                              </p:par>
+                              <p:par>
+                                <p:cTn id="7" presetID="1" presetClass="entr" presetSubtype="0" fill="hold" grpId="0" nodeType="withEffect">
+                                  <p:stCondLst>
+                                    <p:cond delay="0"/>
+                                  </p:stCondLst>
+                                  <p:childTnLst>
+                                    <p:set>
+                                      <p:cBhvr>
+                                        <p:cTn id="8" dur="1" fill="hold">
+                                          <p:stCondLst>
+                                            <p:cond delay="0"/>
+                                          </p:stCondLst>
+                                        </p:cTn>
+                                        <p:tgtEl>
+                                          <p:spTgt spid="5"/>
+                                        </p:tgtEl>
+                                        <p:attrNameLst>
+                                          <p:attrName>style.visibility</p:attrName>
+                                        </p:attrNameLst>
+                                      </p:cBhvr>
+                                      <p:to>
+                                        <p:strVal val="visible"/>
+                                      </p:to>
+                                    </p:set>
+                                  </p:childTnLst>
+                                </p:cTn>
+                              </p:par>
+                              <p:par>
+                                <p:cTn id="9" presetID="1" presetClass="entr" presetSubtype="0" fill="hold" grpId="0" nodeType="withEffect">
+                                  <p:stCondLst>
+                                    <p:cond delay="0"/>
+                                  </p:stCondLst>
+                                  <p:childTnLst>
+                                    <p:set>
+                                      <p:cBhvr>
+                                        <p:cTn id="10" dur="1" fill="hold">
+                                          <p:stCondLst>
+                                            <p:cond delay="0"/>
+                                          </p:stCondLst>
+                                        </p:cTn>
+                                        <p:tgtEl>
+                                          <p:spTgt spid="3"/>
+                                        </p:tgtEl>
+                                        <p:attrNameLst>
+                                          <p:attrName>style.visibility</p:attrName>
+                                        </p:attrNameLst>
+                                      </p:cBhvr>
+                                      <p:to>
+                                        <p:strVal val="visible"/>
+                                      </p:to>
+                                    </p:set>
+                                  </p:childTnLst>
+                                </p:cTn>
+                              </p:par>
+                              <p:par>
+                                <p:cTn id="11" presetID="1" presetClass="entr" presetSubtype="0" fill="hold" grpId="0" nodeType="withEffect">
+                                  <p:stCondLst>
+                                    <p:cond delay="0"/>
+                                  </p:stCondLst>
+                                  <p:childTnLst>
+                                    <p:set>
+                                      <p:cBhvr>
+                                        <p:cTn id="12" dur="1" fill="hold">
+                                          <p:stCondLst>
+                                            <p:cond delay="0"/>
+                                          </p:stCondLst>
+                                        </p:cTn>
+                                        <p:tgtEl>
+                                          <p:spTgt spid="10"/>
+                                        </p:tgtEl>
+                                        <p:attrNameLst>
+                                          <p:attrName>style.visibility</p:attrName>
+                                        </p:attrNameLst>
+                                      </p:cBhvr>
+                                      <p:to>
+                                        <p:strVal val="visible"/>
+                                      </p:to>
+                                    </p:set>
+                                  </p:childTnLst>
+                                </p:cTn>
+                              </p:par>
+                              <p:par>
+                                <p:cTn id="13" presetID="1" presetClass="entr" presetSubtype="0" fill="hold" grpId="0" nodeType="withEffect">
+                                  <p:stCondLst>
+                                    <p:cond delay="0"/>
+                                  </p:stCondLst>
+                                  <p:childTnLst>
+                                    <p:set>
+                                      <p:cBhvr>
+                                        <p:cTn id="14" dur="1" fill="hold">
+                                          <p:stCondLst>
+                                            <p:cond delay="0"/>
+                                          </p:stCondLst>
+                                        </p:cTn>
+                                        <p:tgtEl>
+                                          <p:spTgt spid="12"/>
+                                        </p:tgtEl>
+                                        <p:attrNameLst>
+                                          <p:attrName>style.visibility</p:attrName>
+                                        </p:attrNameLst>
+                                      </p:cBhvr>
+                                      <p:to>
+                                        <p:strVal val="visible"/>
+                                      </p:to>
+                                    </p:set>
+                                  </p:childTnLst>
+                                </p:cTn>
+                              </p:par>
+                              <p:par>
+                                <p:cTn id="15" presetID="1" presetClass="entr" presetSubtype="0" fill="hold" grpId="0" nodeType="withEffect">
+                                  <p:stCondLst>
+                                    <p:cond delay="0"/>
+                                  </p:stCondLst>
+                                  <p:childTnLst>
+                                    <p:set>
+                                      <p:cBhvr>
+                                        <p:cTn id="16" dur="1" fill="hold">
+                                          <p:stCondLst>
+                                            <p:cond delay="0"/>
+                                          </p:stCondLst>
+                                        </p:cTn>
+                                        <p:tgtEl>
+                                          <p:spTgt spid="13"/>
+                                        </p:tgtEl>
+                                        <p:attrNameLst>
+                                          <p:attrName>style.visibility</p:attrName>
+                                        </p:attrNameLst>
+                                      </p:cBhvr>
+                                      <p:to>
+                                        <p:strVal val="visible"/>
+                                      </p:to>
+                                    </p:set>
+                                  </p:childTnLst>
+                                </p:cTn>
+                              </p:par>
+                            </p:childTnLst>
+                          </p:cTn>
+                        </p:par>
+                      </p:childTnLst>
+                    </p:cTn>
+                  </p:par>
+                  <p:par>
+                    <p:cTn id="17" fill="hold">
+                      <p:stCondLst>
+                        <p:cond delay="indefinite"/>
+                      </p:stCondLst>
+                      <p:childTnLst>
+                        <p:par>
+                          <p:cTn id="18" fill="hold">
+                            <p:stCondLst>
+                              <p:cond delay="0"/>
+                            </p:stCondLst>
+                            <p:childTnLst>
+                              <p:par>
+                                <p:cTn id="19" presetID="1" presetClass="entr" presetSubtype="0" fill="hold" grpId="0" nodeType="clickEffect">
+                                  <p:stCondLst>
+                                    <p:cond delay="0"/>
+                                  </p:stCondLst>
+                                  <p:childTnLst>
+                                    <p:set>
+                                      <p:cBhvr>
+                                        <p:cTn id="20" dur="1" fill="hold">
+                                          <p:stCondLst>
+                                            <p:cond delay="0"/>
+                                          </p:stCondLst>
+                                        </p:cTn>
+                                        <p:tgtEl>
+                                          <p:spTgt spid="14"/>
+                                        </p:tgtEl>
+                                        <p:attrNameLst>
+                                          <p:attrName>style.visibility</p:attrName>
+                                        </p:attrNameLst>
+                                      </p:cBhvr>
+                                      <p:to>
+                                        <p:strVal val="visible"/>
+                                      </p:to>
+                                    </p:set>
+                                  </p:childTnLst>
+                                </p:cTn>
+                              </p:par>
+                              <p:par>
+                                <p:cTn id="21" presetID="1" presetClass="entr" presetSubtype="0" fill="hold" grpId="0" nodeType="withEffect">
+                                  <p:stCondLst>
+                                    <p:cond delay="0"/>
+                                  </p:stCondLst>
+                                  <p:childTnLst>
+                                    <p:set>
+                                      <p:cBhvr>
+                                        <p:cTn id="22" dur="1" fill="hold">
+                                          <p:stCondLst>
+                                            <p:cond delay="0"/>
+                                          </p:stCondLst>
+                                        </p:cTn>
+                                        <p:tgtEl>
+                                          <p:spTgt spid="16"/>
+                                        </p:tgtEl>
+                                        <p:attrNameLst>
+                                          <p:attrName>style.visibility</p:attrName>
+                                        </p:attrNameLst>
+                                      </p:cBhvr>
+                                      <p:to>
+                                        <p:strVal val="visible"/>
+                                      </p:to>
+                                    </p:set>
+                                  </p:childTnLst>
+                                </p:cTn>
+                              </p:par>
+                              <p:par>
+                                <p:cTn id="23" presetID="1" presetClass="entr" presetSubtype="0" fill="hold" grpId="0" nodeType="withEffect">
+                                  <p:stCondLst>
+                                    <p:cond delay="0"/>
+                                  </p:stCondLst>
+                                  <p:childTnLst>
+                                    <p:set>
+                                      <p:cBhvr>
+                                        <p:cTn id="24" dur="1" fill="hold">
+                                          <p:stCondLst>
+                                            <p:cond delay="0"/>
+                                          </p:stCondLst>
+                                        </p:cTn>
+                                        <p:tgtEl>
+                                          <p:spTgt spid="17"/>
+                                        </p:tgtEl>
+                                        <p:attrNameLst>
+                                          <p:attrName>style.visibility</p:attrName>
+                                        </p:attrNameLst>
+                                      </p:cBhvr>
+                                      <p:to>
+                                        <p:strVal val="visible"/>
+                                      </p:to>
+                                    </p:set>
+                                  </p:childTnLst>
+                                </p:cTn>
+                              </p:par>
+                            </p:childTnLst>
+                          </p:cTn>
+                        </p:par>
+                      </p:childTnLst>
+                    </p:cTn>
+                  </p:par>
+                  <p:par>
+                    <p:cTn id="25" fill="hold">
+                      <p:stCondLst>
+                        <p:cond delay="indefinite"/>
+                      </p:stCondLst>
+                      <p:childTnLst>
+                        <p:par>
+                          <p:cTn id="26" fill="hold">
+                            <p:stCondLst>
+                              <p:cond delay="0"/>
+                            </p:stCondLst>
+                            <p:childTnLst>
+                              <p:par>
+                                <p:cTn id="27" presetID="1" presetClass="entr" presetSubtype="0" fill="hold" grpId="0" nodeType="clickEffect">
+                                  <p:stCondLst>
+                                    <p:cond delay="0"/>
+                                  </p:stCondLst>
+                                  <p:childTnLst>
+                                    <p:set>
+                                      <p:cBhvr>
+                                        <p:cTn id="28" dur="1" fill="hold">
+                                          <p:stCondLst>
+                                            <p:cond delay="0"/>
+                                          </p:stCondLst>
+                                        </p:cTn>
+                                        <p:tgtEl>
+                                          <p:spTgt spid="18"/>
+                                        </p:tgtEl>
+                                        <p:attrNameLst>
+                                          <p:attrName>style.visibility</p:attrName>
+                                        </p:attrNameLst>
+                                      </p:cBhvr>
+                                      <p:to>
+                                        <p:strVal val="visible"/>
+                                      </p:to>
+                                    </p:set>
+                                  </p:childTnLst>
+                                </p:cTn>
+                              </p:par>
+                              <p:par>
+                                <p:cTn id="29" presetID="1" presetClass="entr" presetSubtype="0" fill="hold" grpId="0" nodeType="withEffect">
+                                  <p:stCondLst>
+                                    <p:cond delay="0"/>
+                                  </p:stCondLst>
+                                  <p:childTnLst>
+                                    <p:set>
+                                      <p:cBhvr>
+                                        <p:cTn id="30" dur="1" fill="hold">
+                                          <p:stCondLst>
+                                            <p:cond delay="0"/>
+                                          </p:stCondLst>
+                                        </p:cTn>
+                                        <p:tgtEl>
+                                          <p:spTgt spid="19"/>
+                                        </p:tgtEl>
+                                        <p:attrNameLst>
+                                          <p:attrName>style.visibility</p:attrName>
+                                        </p:attrNameLst>
+                                      </p:cBhvr>
+                                      <p:to>
+                                        <p:strVal val="visible"/>
+                                      </p:to>
+                                    </p:set>
+                                  </p:childTnLst>
+                                </p:cTn>
+                              </p:par>
+                              <p:par>
+                                <p:cTn id="31" presetID="1" presetClass="entr" presetSubtype="0" fill="hold" grpId="0" nodeType="withEffect">
+                                  <p:stCondLst>
+                                    <p:cond delay="0"/>
+                                  </p:stCondLst>
+                                  <p:childTnLst>
+                                    <p:set>
+                                      <p:cBhvr>
+                                        <p:cTn id="32" dur="1" fill="hold">
+                                          <p:stCondLst>
+                                            <p:cond delay="0"/>
+                                          </p:stCondLst>
+                                        </p:cTn>
+                                        <p:tgtEl>
+                                          <p:spTgt spid="20"/>
+                                        </p:tgtEl>
+                                        <p:attrNameLst>
+                                          <p:attrName>style.visibility</p:attrName>
+                                        </p:attrNameLst>
+                                      </p:cBhvr>
+                                      <p:to>
+                                        <p:strVal val="visible"/>
+                                      </p:to>
+                                    </p:set>
+                                  </p:childTnLst>
+                                </p:cTn>
+                              </p:par>
+                            </p:childTnLst>
+                          </p:cTn>
+                        </p:par>
+                      </p:childTnLst>
+                    </p:cTn>
+                  </p:par>
+                </p:childTnLst>
+              </p:cTn>
+              <p:prevCondLst>
+                <p:cond evt="onPrev" delay="0">
+                  <p:tgtEl>
+                    <p:sldTgt/>
+                  </p:tgtEl>
+                </p:cond>
+              </p:prevCondLst>
+              <p:nextCondLst>
+                <p:cond evt="onNext" delay="0">
+                  <p:tgtEl>
+                    <p:sldTgt/>
+                  </p:tgtEl>
+                </p:cond>
+              </p:nextCondLst>
+            </p:seq>
+          </p:childTnLst>
+        </p:cTn>
+      </p:par>
+    </p:tnLst>
+    <p:bldLst>
+      <p:bldP spid="3" grpId="0" animBg="1"/>
+      <p:bldP spid="4" grpId="0"/>
+      <p:bldP spid="5" grpId="0"/>
+      <p:bldP spid="10" grpId="0" animBg="1"/>
+      <p:bldP spid="12" grpId="0"/>
+      <p:bldP spid="13" grpId="0"/>
+      <p:bldP spid="14" grpId="0" animBg="1"/>
+      <p:bldP spid="16" grpId="0"/>
+      <p:bldP spid="17" grpId="0"/>
+      <p:bldP spid="18" grpId="0" animBg="1"/>
+      <p:bldP spid="19" grpId="0"/>
+      <p:bldP spid="20" grpId="0"/>
+    </p:bldLst>
+  </p:timing>
 </p:sld>
 </file>
 
@@ -22944,8 +26407,8 @@
         </p:blipFill>
         <p:spPr>
           <a:xfrm>
-            <a:off x="1800225" y="2865859"/>
-            <a:ext cx="781050" cy="573833"/>
+            <a:off x="1800225" y="2849530"/>
+            <a:ext cx="781050" cy="629816"/>
           </a:xfrm>
           <a:prstGeom prst="rect">
             <a:avLst/>
@@ -23468,6 +26931,41 @@
                 </a:solidFill>
               </a:rPr>
               <a:t>Minimum scope—not minimum quality.</a:t>
+            </a:r>
+          </a:p>
+        </p:txBody>
+      </p:sp>
+      <p:sp>
+        <p:nvSpPr>
+          <p:cNvPr id="9" name="TextBox 8">
+            <a:extLst>
+              <a:ext uri="{FF2B5EF4-FFF2-40B4-BE49-F238E27FC236}">
+                <a16:creationId xmlns:a16="http://schemas.microsoft.com/office/drawing/2014/main" id="{47920B1B-D51E-8A9C-684C-DF4E9BE6CF31}"/>
+              </a:ext>
+            </a:extLst>
+          </p:cNvPr>
+          <p:cNvSpPr txBox="1"/>
+          <p:nvPr/>
+        </p:nvSpPr>
+        <p:spPr>
+          <a:xfrm>
+            <a:off x="685799" y="2207372"/>
+            <a:ext cx="7743825" cy="369332"/>
+          </a:xfrm>
+          <a:prstGeom prst="rect">
+            <a:avLst/>
+          </a:prstGeom>
+          <a:noFill/>
+        </p:spPr>
+        <p:txBody>
+          <a:bodyPr wrap="square">
+            <a:spAutoFit/>
+          </a:bodyPr>
+          <a:lstStyle/>
+          <a:p>
+            <a:r>
+              <a:rPr lang="en-BE" b="1" dirty="0"/>
+              <a:t>For this course, an MVP must satisfy three conditions:</a:t>
             </a:r>
           </a:p>
         </p:txBody>

--- a/teaching/CS472/Timetable/ClassOverview-V2.pptx
+++ b/teaching/CS472/Timetable/ClassOverview-V2.pptx
@@ -19506,6 +19506,28 @@
             <a:endParaRPr lang="en-GB" dirty="0"/>
           </a:p>
           <a:p>
+            <a:r>
+              <a:rPr lang="en-BE" dirty="0"/>
+              <a:t>My Lab - </a:t>
+            </a:r>
+            <a:r>
+              <a:rPr lang="en-GB" dirty="0">
+                <a:hlinkClick r:id="rId4"/>
+              </a:rPr>
+              <a:t>https://unlv-evol.github.io</a:t>
+            </a:r>
+            <a:r>
+              <a:rPr lang="en-GB">
+                <a:hlinkClick r:id="rId4"/>
+              </a:rPr>
+              <a:t>/</a:t>
+            </a:r>
+            <a:endParaRPr lang="en-GB"/>
+          </a:p>
+          <a:p>
+            <a:pPr marL="0" indent="0">
+              <a:buNone/>
+            </a:pPr>
             <a:endParaRPr lang="en-BE" dirty="0"/>
           </a:p>
         </p:txBody>

--- a/teaching/CS472/Timetable/ClassOverview-V2.pptx
+++ b/teaching/CS472/Timetable/ClassOverview-V2.pptx
@@ -19514,15 +19514,9 @@
               <a:rPr lang="en-GB" dirty="0">
                 <a:hlinkClick r:id="rId4"/>
               </a:rPr>
-              <a:t>https://unlv-evol.github.io</a:t>
-            </a:r>
-            <a:r>
-              <a:rPr lang="en-GB">
-                <a:hlinkClick r:id="rId4"/>
-              </a:rPr>
-              <a:t>/</a:t>
-            </a:r>
-            <a:endParaRPr lang="en-GB"/>
+              <a:t>https://unlv-evol.github.io/</a:t>
+            </a:r>
+            <a:endParaRPr lang="en-GB" dirty="0"/>
           </a:p>
           <a:p>
             <a:pPr marL="0" indent="0">
@@ -22360,15 +22354,7 @@
                   <a:srgbClr val="000000"/>
                 </a:solidFill>
               </a:rPr>
-              <a:t>the </a:t>
-            </a:r>
-            <a:r>
-              <a:rPr lang="en-US" sz="2000" b="1" dirty="0" err="1">
-                <a:solidFill>
-                  <a:srgbClr val="000000"/>
-                </a:solidFill>
-              </a:rPr>
-              <a:t>follwing</a:t>
+              <a:t>the following</a:t>
             </a:r>
             <a:r>
               <a:rPr sz="2000" b="1" dirty="0">

--- a/teaching/CS472/Timetable/ClassOverview-V2.pptx
+++ b/teaching/CS472/Timetable/ClassOverview-V2.pptx
@@ -941,38 +941,43 @@
           <a:lstStyle/>
           <a:p>
             <a:r>
+              <a:rPr dirty="0"/>
               <a:t>Client projects provide external needs and constraints. Student-designed projects offer a different but equally valuable experience: the team becomes both the product owner and the engineering team.</a:t>
             </a:r>
           </a:p>
           <a:p>
-            <a:endParaRPr/>
-          </a:p>
-          <a:p>
-            <a:r>
+            <a:endParaRPr dirty="0"/>
+          </a:p>
+          <a:p>
+            <a:r>
+              <a:rPr dirty="0"/>
               <a:t>[Click 1] First, the team owns the problem. Choose something meaningful—not simply an application that is easy to build.</a:t>
             </a:r>
           </a:p>
           <a:p>
-            <a:endParaRPr/>
-          </a:p>
-          <a:p>
-            <a:r>
+            <a:endParaRPr dirty="0"/>
+          </a:p>
+          <a:p>
+            <a:r>
+              <a:rPr dirty="0"/>
               <a:t>[Click 2] Next, shape the product. Identify real users, prepare the precondition report, define the requirements, and agree on an achievable MVP.</a:t>
             </a:r>
           </a:p>
           <a:p>
-            <a:endParaRPr/>
-          </a:p>
-          <a:p>
-            <a:r>
+            <a:endParaRPr dirty="0"/>
+          </a:p>
+          <a:p>
+            <a:r>
+              <a:rPr dirty="0"/>
               <a:t>[Click 3] Finally, lead the engineering. The team must make and justify the design, implementation, testing, and integration decisions.</a:t>
             </a:r>
           </a:p>
           <a:p>
-            <a:endParaRPr/>
-          </a:p>
-          <a:p>
-            <a:r>
+            <a:endParaRPr dirty="0"/>
+          </a:p>
+          <a:p>
+            <a:r>
+              <a:rPr dirty="0"/>
               <a:t>[Click 4] Both project types are judged by the same standard: a valuable, usable, tested product supported by evidence from real users. The difference is where the initial problem and constraints come from.</a:t>
             </a:r>
           </a:p>
@@ -1490,31 +1495,53 @@
           <a:lstStyle/>
           <a:p>
             <a:r>
+              <a:rPr dirty="0"/>
               <a:t>Tests check behavior; coverage identifies unexercised code; CI automates agreed checks.</a:t>
             </a:r>
           </a:p>
           <a:p>
             <a:r>
+              <a:rPr dirty="0"/>
               <a:t>Coverage is evidence, not a guarantee of test quality.</a:t>
             </a:r>
           </a:p>
           <a:p>
             <a:r>
+              <a:rPr dirty="0"/>
               <a:t>[Sources]</a:t>
             </a:r>
           </a:p>
           <a:p>
             <a:r>
-              <a:t>- User-provided CS472 - Software Testing.pdf.</a:t>
-            </a:r>
-          </a:p>
-          <a:p>
-            <a:r>
-              <a:t>- User-provided CS472 - CI - Using GitHub Actions - Setting up workflow.pdf.</a:t>
-            </a:r>
-          </a:p>
-          <a:p>
-            <a:r>
+              <a:rPr dirty="0"/>
+              <a:t>- User-provided CS472 - Software </a:t>
+            </a:r>
+            <a:r>
+              <a:rPr dirty="0" err="1"/>
+              <a:t>Testing.pdf</a:t>
+            </a:r>
+            <a:r>
+              <a:rPr dirty="0"/>
+              <a:t>.</a:t>
+            </a:r>
+          </a:p>
+          <a:p>
+            <a:r>
+              <a:rPr dirty="0"/>
+              <a:t>- User-provided CS472 - CI - Using GitHub Actions - Setting up </a:t>
+            </a:r>
+            <a:r>
+              <a:rPr dirty="0" err="1"/>
+              <a:t>workflow.pdf</a:t>
+            </a:r>
+            <a:r>
+              <a:rPr dirty="0"/>
+              <a:t>.</a:t>
+            </a:r>
+          </a:p>
+          <a:p>
+            <a:r>
+              <a:rPr dirty="0"/>
               <a:t>- User-provided software testing icon examples.</a:t>
             </a:r>
           </a:p>
@@ -1592,26 +1619,31 @@
           <a:lstStyle/>
           <a:p>
             <a:r>
+              <a:rPr dirty="0"/>
               <a:t>Structural changes normally need class-diagram evidence; behavioral changes normally need sequence-diagram evidence.</a:t>
             </a:r>
           </a:p>
           <a:p>
             <a:r>
+              <a:rPr dirty="0"/>
               <a:t>Students should show only the part of the system affected by the PR.</a:t>
             </a:r>
           </a:p>
           <a:p>
             <a:r>
+              <a:rPr dirty="0"/>
               <a:t>[Sources]</a:t>
             </a:r>
           </a:p>
           <a:p>
             <a:r>
+              <a:rPr dirty="0"/>
               <a:t>- User-provided OOD-V2.pptx.</a:t>
             </a:r>
           </a:p>
           <a:p>
             <a:r>
+              <a:rPr dirty="0"/>
               <a:t>- User-provided class and sequence diagram icon examples.</a:t>
             </a:r>
           </a:p>
